--- a/lectures/w04-tableau-dashboard.pptx
+++ b/lectures/w04-tableau-dashboard.pptx
@@ -2,16 +2,16 @@
 <file path=ppt/presentation.xml><?xml version="1.0" encoding="utf-8"?>
 <p:presentation xmlns:p="http://schemas.openxmlformats.org/presentationml/2006/main">
   <p:sldMasterIdLst>
-    <p:sldMasterId xmlns:r="http://schemas.openxmlformats.org/officeDocument/2006/relationships" id="2147483648" r:id="R4b0184e94f324011"/>
+    <p:sldMasterId xmlns:r="http://schemas.openxmlformats.org/officeDocument/2006/relationships" id="2147483648" r:id="R6e3b32ca123645cd"/>
   </p:sldMasterIdLst>
   <p:notesMasterIdLst>
-    <p:notesMasterId xmlns:r="http://schemas.openxmlformats.org/officeDocument/2006/relationships" r:id="Rc4e4350a77c3407e"/>
+    <p:notesMasterId xmlns:r="http://schemas.openxmlformats.org/officeDocument/2006/relationships" r:id="R2a11d20dd7744291"/>
   </p:notesMasterIdLst>
   <p:sldIdLst>
-    <p:sldId xmlns:r="http://schemas.openxmlformats.org/officeDocument/2006/relationships" id="256" r:id="R158890375c884ef4"/>
-    <p:sldId xmlns:r="http://schemas.openxmlformats.org/officeDocument/2006/relationships" id="257" r:id="Rfb32906872a44a32"/>
-    <p:sldId xmlns:r="http://schemas.openxmlformats.org/officeDocument/2006/relationships" id="258" r:id="R058d2eec493d436e"/>
-    <p:sldId xmlns:r="http://schemas.openxmlformats.org/officeDocument/2006/relationships" id="259" r:id="R1d7e1d581fdc470e"/>
+    <p:sldId xmlns:r="http://schemas.openxmlformats.org/officeDocument/2006/relationships" id="256" r:id="R7049a6baae104e65"/>
+    <p:sldId xmlns:r="http://schemas.openxmlformats.org/officeDocument/2006/relationships" id="257" r:id="Rad52fc1a432d40a7"/>
+    <p:sldId xmlns:r="http://schemas.openxmlformats.org/officeDocument/2006/relationships" id="258" r:id="R1b9dabf18dca41d7"/>
+    <p:sldId xmlns:r="http://schemas.openxmlformats.org/officeDocument/2006/relationships" id="259" r:id="R96785741bf8a4882"/>
   </p:sldIdLst>
   <p:sldSz cx="12192000" cy="6858000"/>
   <p:notesSz cx="6858000" cy="9144000"/>
@@ -802,7 +802,7 @@
           <p:cNvPr id="3" name="Title">
             <a:extLst xmlns:a="http://schemas.openxmlformats.org/drawingml/2006/main">
               <a:ext uri="{FF2B5EF4-FFF2-40B4-BE49-F238E27FC236}">
-                <a16:creationId xmlns:a16="http://schemas.microsoft.com/office/drawing/2014/main" id="{B2AF767D-9BB6-4D03-AE82-C2B690041D2B}"/>
+                <a16:creationId xmlns:a16="http://schemas.microsoft.com/office/drawing/2014/main" id="{1CF5F5AC-764A-4392-BECA-101AE7B3FBC3}"/>
               </a:ext>
             </a:extLst>
           </p:cNvPr>
@@ -959,7 +959,7 @@
           <p:cNvPr id="2" name="Subtitle">
             <a:extLst xmlns:a="http://schemas.openxmlformats.org/drawingml/2006/main">
               <a:ext uri="{FF2B5EF4-FFF2-40B4-BE49-F238E27FC236}">
-                <a16:creationId xmlns:a16="http://schemas.microsoft.com/office/drawing/2014/main" id="{30ED7F75-2110-485C-B8C1-2845EB0EEC7C}"/>
+                <a16:creationId xmlns:a16="http://schemas.microsoft.com/office/drawing/2014/main" id="{41E64E59-5C0A-47DE-BC6C-CDFEBDA27491}"/>
               </a:ext>
             </a:extLst>
           </p:cNvPr>
@@ -1133,7 +1133,7 @@
           <p:cNvPr id="2" name="Section title">
             <a:extLst xmlns:a="http://schemas.openxmlformats.org/drawingml/2006/main">
               <a:ext uri="{FF2B5EF4-FFF2-40B4-BE49-F238E27FC236}">
-                <a16:creationId xmlns:a16="http://schemas.microsoft.com/office/drawing/2014/main" id="{B11001B9-EE78-4490-BB0C-EBBEE7A6CBEB}"/>
+                <a16:creationId xmlns:a16="http://schemas.microsoft.com/office/drawing/2014/main" id="{644B5AC7-0EEB-4D6F-AAAF-935B273D3387}"/>
               </a:ext>
             </a:extLst>
           </p:cNvPr>
@@ -1307,7 +1307,7 @@
           <p:cNvPr id="3" name="Title">
             <a:extLst xmlns:a="http://schemas.openxmlformats.org/drawingml/2006/main">
               <a:ext uri="{FF2B5EF4-FFF2-40B4-BE49-F238E27FC236}">
-                <a16:creationId xmlns:a16="http://schemas.microsoft.com/office/drawing/2014/main" id="{150FC259-A504-48D9-819E-DA4BC3A51247}"/>
+                <a16:creationId xmlns:a16="http://schemas.microsoft.com/office/drawing/2014/main" id="{E0EC3C54-5CCE-4F01-A88E-498DA5CA970A}"/>
               </a:ext>
             </a:extLst>
           </p:cNvPr>
@@ -1464,7 +1464,7 @@
           <p:cNvPr id="2" name="Body">
             <a:extLst xmlns:a="http://schemas.openxmlformats.org/drawingml/2006/main">
               <a:ext uri="{FF2B5EF4-FFF2-40B4-BE49-F238E27FC236}">
-                <a16:creationId xmlns:a16="http://schemas.microsoft.com/office/drawing/2014/main" id="{1A3014FB-89FD-4FA4-A9A8-15E1065CC6F8}"/>
+                <a16:creationId xmlns:a16="http://schemas.microsoft.com/office/drawing/2014/main" id="{04D73584-A452-4DC1-8BFF-4F43E2C69FB0}"/>
               </a:ext>
             </a:extLst>
           </p:cNvPr>
@@ -1638,7 +1638,7 @@
           <p:cNvPr id="4" name="Title">
             <a:extLst xmlns:a="http://schemas.openxmlformats.org/drawingml/2006/main">
               <a:ext uri="{FF2B5EF4-FFF2-40B4-BE49-F238E27FC236}">
-                <a16:creationId xmlns:a16="http://schemas.microsoft.com/office/drawing/2014/main" id="{7D59A4F0-9955-48C0-9E82-2BB38538B8B4}"/>
+                <a16:creationId xmlns:a16="http://schemas.microsoft.com/office/drawing/2014/main" id="{C039708C-E1D2-4477-829F-FCE97D19C191}"/>
               </a:ext>
             </a:extLst>
           </p:cNvPr>
@@ -1795,7 +1795,7 @@
           <p:cNvPr id="2" name="Left column">
             <a:extLst xmlns:a="http://schemas.openxmlformats.org/drawingml/2006/main">
               <a:ext uri="{FF2B5EF4-FFF2-40B4-BE49-F238E27FC236}">
-                <a16:creationId xmlns:a16="http://schemas.microsoft.com/office/drawing/2014/main" id="{AA63E234-C3CE-4149-B051-A7769CA018E1}"/>
+                <a16:creationId xmlns:a16="http://schemas.microsoft.com/office/drawing/2014/main" id="{46EA208E-8722-4ECA-B65A-101A2935BC3E}"/>
               </a:ext>
             </a:extLst>
           </p:cNvPr>
@@ -1952,7 +1952,7 @@
           <p:cNvPr id="3" name="Right column">
             <a:extLst xmlns:a="http://schemas.openxmlformats.org/drawingml/2006/main">
               <a:ext uri="{FF2B5EF4-FFF2-40B4-BE49-F238E27FC236}">
-                <a16:creationId xmlns:a16="http://schemas.microsoft.com/office/drawing/2014/main" id="{80010E00-CE36-4851-920D-771BBE365FCD}"/>
+                <a16:creationId xmlns:a16="http://schemas.microsoft.com/office/drawing/2014/main" id="{5157A5E0-B74E-4453-8D6A-AAA7155041EA}"/>
               </a:ext>
             </a:extLst>
           </p:cNvPr>
@@ -2126,7 +2126,7 @@
           <p:cNvPr id="3" name="Title">
             <a:extLst xmlns:a="http://schemas.openxmlformats.org/drawingml/2006/main">
               <a:ext uri="{FF2B5EF4-FFF2-40B4-BE49-F238E27FC236}">
-                <a16:creationId xmlns:a16="http://schemas.microsoft.com/office/drawing/2014/main" id="{C967C61A-65A6-46F2-9F8E-6ADF9BE699DC}"/>
+                <a16:creationId xmlns:a16="http://schemas.microsoft.com/office/drawing/2014/main" id="{59CCB261-B295-47B2-828D-19AA18CC6B8B}"/>
               </a:ext>
             </a:extLst>
           </p:cNvPr>
@@ -2283,7 +2283,7 @@
           <p:cNvPr id="2" name="Left column">
             <a:extLst xmlns:a="http://schemas.openxmlformats.org/drawingml/2006/main">
               <a:ext uri="{FF2B5EF4-FFF2-40B4-BE49-F238E27FC236}">
-                <a16:creationId xmlns:a16="http://schemas.microsoft.com/office/drawing/2014/main" id="{7D9F7BBC-D049-4722-8B27-A8F844E41477}"/>
+                <a16:creationId xmlns:a16="http://schemas.microsoft.com/office/drawing/2014/main" id="{DAF86459-D788-4A59-8A0A-7CC3A708A474}"/>
               </a:ext>
             </a:extLst>
           </p:cNvPr>
@@ -2478,12 +2478,12 @@
   </p:cSld>
   <p:clrMap bg1="lt1" tx1="dk1" bg2="lt2" tx2="dk2" accent1="accent1" accent2="accent2" accent3="accent3" accent4="accent4" accent5="accent5" accent6="accent6" hlink="hlink" folHlink="folHlink"/>
   <p:sldLayoutIdLst>
-    <p:sldLayoutId xmlns:r="http://schemas.openxmlformats.org/officeDocument/2006/relationships" id="2147483649" r:id="R0f052d90c4ab46a3"/>
-    <p:sldLayoutId xmlns:r="http://schemas.openxmlformats.org/officeDocument/2006/relationships" id="2147483650" r:id="R7f4f552436be49b7"/>
-    <p:sldLayoutId xmlns:r="http://schemas.openxmlformats.org/officeDocument/2006/relationships" id="2147483651" r:id="Rc6c700e4fe944c29"/>
-    <p:sldLayoutId xmlns:r="http://schemas.openxmlformats.org/officeDocument/2006/relationships" id="2147483652" r:id="Re14965f511a94501"/>
-    <p:sldLayoutId xmlns:r="http://schemas.openxmlformats.org/officeDocument/2006/relationships" id="2147483653" r:id="R5738930fe2d0493b"/>
-    <p:sldLayoutId xmlns:r="http://schemas.openxmlformats.org/officeDocument/2006/relationships" id="2147483654" r:id="R7728253e1ed54542"/>
+    <p:sldLayoutId xmlns:r="http://schemas.openxmlformats.org/officeDocument/2006/relationships" id="2147483649" r:id="R05a5e81b0f1c4e54"/>
+    <p:sldLayoutId xmlns:r="http://schemas.openxmlformats.org/officeDocument/2006/relationships" id="2147483650" r:id="Rf4c0cc9282cc4730"/>
+    <p:sldLayoutId xmlns:r="http://schemas.openxmlformats.org/officeDocument/2006/relationships" id="2147483651" r:id="R1327359c55e84e30"/>
+    <p:sldLayoutId xmlns:r="http://schemas.openxmlformats.org/officeDocument/2006/relationships" id="2147483652" r:id="R325f4c5ea32d43b9"/>
+    <p:sldLayoutId xmlns:r="http://schemas.openxmlformats.org/officeDocument/2006/relationships" id="2147483653" r:id="Rb887e83b1d1f447d"/>
+    <p:sldLayoutId xmlns:r="http://schemas.openxmlformats.org/officeDocument/2006/relationships" id="2147483654" r:id="Re10b7ce6fd3744f0"/>
   </p:sldLayoutIdLst>
   <p:txStyles>
     <p:titleStyle>
@@ -8112,7 +8112,7 @@
           <p:cNvPr id="15" name="">
             <a:extLst xmlns:a="http://schemas.openxmlformats.org/drawingml/2006/main">
               <a:ext uri="{FF2B5EF4-FFF2-40B4-BE49-F238E27FC236}">
-                <a16:creationId xmlns:a16="http://schemas.microsoft.com/office/drawing/2014/main" id="{1FDA8087-1F72-4747-9E84-21A11EA9750C}"/>
+                <a16:creationId xmlns:a16="http://schemas.microsoft.com/office/drawing/2014/main" id="{6B05B811-969B-4EF9-9262-C8FBFD2F1DEF}"/>
               </a:ext>
             </a:extLst>
           </p:cNvPr>
@@ -8178,7 +8178,7 @@
           <p:cNvPr id="2" name="">
             <a:extLst xmlns:a="http://schemas.openxmlformats.org/drawingml/2006/main">
               <a:ext uri="{FF2B5EF4-FFF2-40B4-BE49-F238E27FC236}">
-                <a16:creationId xmlns:a16="http://schemas.microsoft.com/office/drawing/2014/main" id="{205A500F-33B4-42AE-BB59-6FB1A836E9D8}"/>
+                <a16:creationId xmlns:a16="http://schemas.microsoft.com/office/drawing/2014/main" id="{BAD384BB-3C2D-4603-A40F-E2849FDDDB08}"/>
               </a:ext>
             </a:extLst>
           </p:cNvPr>
@@ -8244,7 +8244,7 @@
           <p:cNvPr id="3" name="">
             <a:extLst xmlns:a="http://schemas.openxmlformats.org/drawingml/2006/main">
               <a:ext uri="{FF2B5EF4-FFF2-40B4-BE49-F238E27FC236}">
-                <a16:creationId xmlns:a16="http://schemas.microsoft.com/office/drawing/2014/main" id="{2D6BD526-D9FB-4BDD-BAB4-3FE2C5549D8D}"/>
+                <a16:creationId xmlns:a16="http://schemas.microsoft.com/office/drawing/2014/main" id="{D528BA4E-302F-4881-8717-B4D36AC1C5D0}"/>
               </a:ext>
             </a:extLst>
           </p:cNvPr>
@@ -8310,7 +8310,7 @@
           <p:cNvPr id="4" name="">
             <a:extLst xmlns:a="http://schemas.openxmlformats.org/drawingml/2006/main">
               <a:ext uri="{FF2B5EF4-FFF2-40B4-BE49-F238E27FC236}">
-                <a16:creationId xmlns:a16="http://schemas.microsoft.com/office/drawing/2014/main" id="{0D2CE3C9-24C7-4A5F-B02F-01AE26CE5FA2}"/>
+                <a16:creationId xmlns:a16="http://schemas.microsoft.com/office/drawing/2014/main" id="{AA295F46-C954-42A3-8E82-6894CE5F8BB9}"/>
               </a:ext>
             </a:extLst>
           </p:cNvPr>
@@ -8376,7 +8376,7 @@
           <p:cNvPr id="5" name="Chart">
             <a:extLst xmlns:a="http://schemas.openxmlformats.org/drawingml/2006/main">
               <a:ext uri="{FF2B5EF4-FFF2-40B4-BE49-F238E27FC236}">
-                <a16:creationId xmlns:a16="http://schemas.microsoft.com/office/drawing/2014/main" id="{CFBFD72C-CEFD-46B8-A9AE-521BB563B8F8}"/>
+                <a16:creationId xmlns:a16="http://schemas.microsoft.com/office/drawing/2014/main" id="{6BA46EE9-6BB0-4624-9B34-CD9EABE69EBA}"/>
               </a:ext>
             </a:extLst>
           </p:cNvPr>
@@ -8389,7 +8389,7 @@
         </p:xfrm>
         <a:graphic xmlns:a="http://schemas.openxmlformats.org/drawingml/2006/main">
           <a:graphicData uri="http://schemas.openxmlformats.org/drawingml/2006/chart">
-            <c:chart xmlns:r="http://schemas.openxmlformats.org/officeDocument/2006/relationships" xmlns:c="http://schemas.openxmlformats.org/drawingml/2006/chart" r:id="R8d0ef4f480934bfc"/>
+            <c:chart xmlns:r="http://schemas.openxmlformats.org/officeDocument/2006/relationships" xmlns:c="http://schemas.openxmlformats.org/drawingml/2006/chart" r:id="Rb85d58441dd441fa"/>
           </a:graphicData>
         </a:graphic>
       </p:graphicFrame>
@@ -8398,7 +8398,7 @@
           <p:cNvPr id="6" name="">
             <a:extLst xmlns:a="http://schemas.openxmlformats.org/drawingml/2006/main">
               <a:ext uri="{FF2B5EF4-FFF2-40B4-BE49-F238E27FC236}">
-                <a16:creationId xmlns:a16="http://schemas.microsoft.com/office/drawing/2014/main" id="{53E38CF6-3A0E-4BED-AE65-984D44764B53}"/>
+                <a16:creationId xmlns:a16="http://schemas.microsoft.com/office/drawing/2014/main" id="{B5932DDD-C02F-4FB0-B8C2-679F73DB1784}"/>
               </a:ext>
             </a:extLst>
           </p:cNvPr>
@@ -8464,7 +8464,7 @@
           <p:cNvPr id="7" name="Chart">
             <a:extLst xmlns:a="http://schemas.openxmlformats.org/drawingml/2006/main">
               <a:ext uri="{FF2B5EF4-FFF2-40B4-BE49-F238E27FC236}">
-                <a16:creationId xmlns:a16="http://schemas.microsoft.com/office/drawing/2014/main" id="{6699D23F-41D0-4AA6-BF73-01CD5D25336B}"/>
+                <a16:creationId xmlns:a16="http://schemas.microsoft.com/office/drawing/2014/main" id="{08828088-D8B9-4438-9908-65E2D696974D}"/>
               </a:ext>
             </a:extLst>
           </p:cNvPr>
@@ -8477,7 +8477,7 @@
         </p:xfrm>
         <a:graphic xmlns:a="http://schemas.openxmlformats.org/drawingml/2006/main">
           <a:graphicData uri="http://schemas.openxmlformats.org/drawingml/2006/chart">
-            <c:chart xmlns:r="http://schemas.openxmlformats.org/officeDocument/2006/relationships" xmlns:c="http://schemas.openxmlformats.org/drawingml/2006/chart" r:id="Rcf519ea84c634409"/>
+            <c:chart xmlns:r="http://schemas.openxmlformats.org/officeDocument/2006/relationships" xmlns:c="http://schemas.openxmlformats.org/drawingml/2006/chart" r:id="R66a44d169bd9437b"/>
           </a:graphicData>
         </a:graphic>
       </p:graphicFrame>
@@ -8486,7 +8486,7 @@
           <p:cNvPr id="8" name="">
             <a:extLst xmlns:a="http://schemas.openxmlformats.org/drawingml/2006/main">
               <a:ext uri="{FF2B5EF4-FFF2-40B4-BE49-F238E27FC236}">
-                <a16:creationId xmlns:a16="http://schemas.microsoft.com/office/drawing/2014/main" id="{FBCBCEBD-4206-4D67-B080-D0115E0527C0}"/>
+                <a16:creationId xmlns:a16="http://schemas.microsoft.com/office/drawing/2014/main" id="{488C6AAD-191E-459E-82F9-ABA64C8C6317}"/>
               </a:ext>
             </a:extLst>
           </p:cNvPr>
@@ -8552,7 +8552,7 @@
           <p:cNvPr id="9" name="Chart">
             <a:extLst xmlns:a="http://schemas.openxmlformats.org/drawingml/2006/main">
               <a:ext uri="{FF2B5EF4-FFF2-40B4-BE49-F238E27FC236}">
-                <a16:creationId xmlns:a16="http://schemas.microsoft.com/office/drawing/2014/main" id="{48E0AD93-82F4-4EE1-9E6F-8CA4CC4F688D}"/>
+                <a16:creationId xmlns:a16="http://schemas.microsoft.com/office/drawing/2014/main" id="{37DC4C80-CE28-4A00-97EF-FD993FC22B71}"/>
               </a:ext>
             </a:extLst>
           </p:cNvPr>
@@ -8565,7 +8565,7 @@
         </p:xfrm>
         <a:graphic xmlns:a="http://schemas.openxmlformats.org/drawingml/2006/main">
           <a:graphicData uri="http://schemas.openxmlformats.org/drawingml/2006/chart">
-            <c:chart xmlns:r="http://schemas.openxmlformats.org/officeDocument/2006/relationships" xmlns:c="http://schemas.openxmlformats.org/drawingml/2006/chart" r:id="R527920a1e8e449d9"/>
+            <c:chart xmlns:r="http://schemas.openxmlformats.org/officeDocument/2006/relationships" xmlns:c="http://schemas.openxmlformats.org/drawingml/2006/chart" r:id="R98e8792e94fc4cc5"/>
           </a:graphicData>
         </a:graphic>
       </p:graphicFrame>
@@ -8574,7 +8574,7 @@
           <p:cNvPr id="10" name="">
             <a:extLst xmlns:a="http://schemas.openxmlformats.org/drawingml/2006/main">
               <a:ext uri="{FF2B5EF4-FFF2-40B4-BE49-F238E27FC236}">
-                <a16:creationId xmlns:a16="http://schemas.microsoft.com/office/drawing/2014/main" id="{8453B4ED-2B6F-48CD-B9E0-4023199376CD}"/>
+                <a16:creationId xmlns:a16="http://schemas.microsoft.com/office/drawing/2014/main" id="{97E74729-BB99-43A5-B4DA-4B3B76396573}"/>
               </a:ext>
             </a:extLst>
           </p:cNvPr>
@@ -8640,7 +8640,7 @@
           <p:cNvPr id="11" name="">
             <a:extLst xmlns:a="http://schemas.openxmlformats.org/drawingml/2006/main">
               <a:ext uri="{FF2B5EF4-FFF2-40B4-BE49-F238E27FC236}">
-                <a16:creationId xmlns:a16="http://schemas.microsoft.com/office/drawing/2014/main" id="{243354A6-EC9A-41CF-90E5-C778919ABBD3}"/>
+                <a16:creationId xmlns:a16="http://schemas.microsoft.com/office/drawing/2014/main" id="{2EB58EF7-037C-4C82-A7C9-5667C261FF0F}"/>
               </a:ext>
             </a:extLst>
           </p:cNvPr>
@@ -8706,7 +8706,7 @@
           <p:cNvPr id="12" name="">
             <a:extLst xmlns:a="http://schemas.openxmlformats.org/drawingml/2006/main">
               <a:ext uri="{FF2B5EF4-FFF2-40B4-BE49-F238E27FC236}">
-                <a16:creationId xmlns:a16="http://schemas.microsoft.com/office/drawing/2014/main" id="{49F4A139-31D1-455B-83C5-873C3534B7EA}"/>
+                <a16:creationId xmlns:a16="http://schemas.microsoft.com/office/drawing/2014/main" id="{F3FB38AD-9F6C-48F7-A4C2-62331181D2DD}"/>
               </a:ext>
             </a:extLst>
           </p:cNvPr>
@@ -8772,7 +8772,7 @@
           <p:cNvPr id="13" name="">
             <a:extLst xmlns:a="http://schemas.openxmlformats.org/drawingml/2006/main">
               <a:ext uri="{FF2B5EF4-FFF2-40B4-BE49-F238E27FC236}">
-                <a16:creationId xmlns:a16="http://schemas.microsoft.com/office/drawing/2014/main" id="{4EFA9DC9-7E8B-466E-8FF3-59B9333ED78B}"/>
+                <a16:creationId xmlns:a16="http://schemas.microsoft.com/office/drawing/2014/main" id="{D31F7BB7-B4D4-4D69-8E46-1D93AAB62A9E}"/>
               </a:ext>
             </a:extLst>
           </p:cNvPr>
@@ -8838,7 +8838,7 @@
           <p:cNvPr id="14" name="">
             <a:extLst xmlns:a="http://schemas.openxmlformats.org/drawingml/2006/main">
               <a:ext uri="{FF2B5EF4-FFF2-40B4-BE49-F238E27FC236}">
-                <a16:creationId xmlns:a16="http://schemas.microsoft.com/office/drawing/2014/main" id="{B017C0CC-8328-4190-AD1B-948B7556DD8B}"/>
+                <a16:creationId xmlns:a16="http://schemas.microsoft.com/office/drawing/2014/main" id="{4E705F02-1C8E-419B-A65E-ADD46B7734BB}"/>
               </a:ext>
             </a:extLst>
           </p:cNvPr>
@@ -8902,7 +8902,7 @@
     </p:spTree>
     <p:extLst>
       <p:ext uri="{BB962C8B-B14F-4D97-AF65-F5344CB8AC3E}">
-        <p14:creationId xmlns:p14="http://schemas.microsoft.com/office/powerpoint/2010/main" val="2017848666"/>
+        <p14:creationId xmlns:p14="http://schemas.microsoft.com/office/powerpoint/2010/main" val="968740309"/>
       </p:ext>
     </p:extLst>
   </p:cSld>
@@ -8933,7 +8933,7 @@
           <p:cNvPr id="17" name="">
             <a:extLst xmlns:a="http://schemas.openxmlformats.org/drawingml/2006/main">
               <a:ext uri="{FF2B5EF4-FFF2-40B4-BE49-F238E27FC236}">
-                <a16:creationId xmlns:a16="http://schemas.microsoft.com/office/drawing/2014/main" id="{59594651-2A8C-483C-AB49-BFB8A1D89E15}"/>
+                <a16:creationId xmlns:a16="http://schemas.microsoft.com/office/drawing/2014/main" id="{2E5B220F-6CA2-4E2A-84A4-3255AF0342C0}"/>
               </a:ext>
             </a:extLst>
           </p:cNvPr>
@@ -8999,7 +8999,7 @@
           <p:cNvPr id="2" name="">
             <a:extLst xmlns:a="http://schemas.openxmlformats.org/drawingml/2006/main">
               <a:ext uri="{FF2B5EF4-FFF2-40B4-BE49-F238E27FC236}">
-                <a16:creationId xmlns:a16="http://schemas.microsoft.com/office/drawing/2014/main" id="{4A554FE3-D740-4AFD-B368-FAB50069354E}"/>
+                <a16:creationId xmlns:a16="http://schemas.microsoft.com/office/drawing/2014/main" id="{A26FF63A-5550-4CCD-829B-57A35F33C350}"/>
               </a:ext>
             </a:extLst>
           </p:cNvPr>
@@ -9065,7 +9065,7 @@
           <p:cNvPr id="3" name="">
             <a:extLst xmlns:a="http://schemas.openxmlformats.org/drawingml/2006/main">
               <a:ext uri="{FF2B5EF4-FFF2-40B4-BE49-F238E27FC236}">
-                <a16:creationId xmlns:a16="http://schemas.microsoft.com/office/drawing/2014/main" id="{96D507E7-4F18-4694-9715-EF6F3F0ECC3C}"/>
+                <a16:creationId xmlns:a16="http://schemas.microsoft.com/office/drawing/2014/main" id="{A110EF4B-4682-4A82-B8AB-54EA05C09B52}"/>
               </a:ext>
             </a:extLst>
           </p:cNvPr>
@@ -9131,7 +9131,7 @@
           <p:cNvPr id="4" name="Chart">
             <a:extLst xmlns:a="http://schemas.openxmlformats.org/drawingml/2006/main">
               <a:ext uri="{FF2B5EF4-FFF2-40B4-BE49-F238E27FC236}">
-                <a16:creationId xmlns:a16="http://schemas.microsoft.com/office/drawing/2014/main" id="{3C66BC94-9208-48F8-B31F-CE186C4AFB76}"/>
+                <a16:creationId xmlns:a16="http://schemas.microsoft.com/office/drawing/2014/main" id="{E4341F7C-9146-4DF8-9B8C-B9A430FF0E3A}"/>
               </a:ext>
             </a:extLst>
           </p:cNvPr>
@@ -9144,7 +9144,7 @@
         </p:xfrm>
         <a:graphic xmlns:a="http://schemas.openxmlformats.org/drawingml/2006/main">
           <a:graphicData uri="http://schemas.openxmlformats.org/drawingml/2006/chart">
-            <c:chart xmlns:r="http://schemas.openxmlformats.org/officeDocument/2006/relationships" xmlns:c="http://schemas.openxmlformats.org/drawingml/2006/chart" r:id="R12061bf2d7ad493a"/>
+            <c:chart xmlns:r="http://schemas.openxmlformats.org/officeDocument/2006/relationships" xmlns:c="http://schemas.openxmlformats.org/drawingml/2006/chart" r:id="R7b4a44303dbe4ad0"/>
           </a:graphicData>
         </a:graphic>
       </p:graphicFrame>
@@ -9153,7 +9153,7 @@
           <p:cNvPr id="5" name="">
             <a:extLst xmlns:a="http://schemas.openxmlformats.org/drawingml/2006/main">
               <a:ext uri="{FF2B5EF4-FFF2-40B4-BE49-F238E27FC236}">
-                <a16:creationId xmlns:a16="http://schemas.microsoft.com/office/drawing/2014/main" id="{54F350FA-0D2B-4676-8DC6-985855D3F93F}"/>
+                <a16:creationId xmlns:a16="http://schemas.microsoft.com/office/drawing/2014/main" id="{9CF6AEEA-D6CF-459E-AC12-860B7D379A10}"/>
               </a:ext>
             </a:extLst>
           </p:cNvPr>
@@ -9219,7 +9219,7 @@
           <p:cNvPr id="6" name="">
             <a:extLst xmlns:a="http://schemas.openxmlformats.org/drawingml/2006/main">
               <a:ext uri="{FF2B5EF4-FFF2-40B4-BE49-F238E27FC236}">
-                <a16:creationId xmlns:a16="http://schemas.microsoft.com/office/drawing/2014/main" id="{7ABD9F30-E17A-4314-96C9-B02EC01C9C2B}"/>
+                <a16:creationId xmlns:a16="http://schemas.microsoft.com/office/drawing/2014/main" id="{3B430D7F-B9D1-4EE4-80B2-167EE79469BF}"/>
               </a:ext>
             </a:extLst>
           </p:cNvPr>
@@ -9285,7 +9285,7 @@
           <p:cNvPr id="7" name="">
             <a:extLst xmlns:a="http://schemas.openxmlformats.org/drawingml/2006/main">
               <a:ext uri="{FF2B5EF4-FFF2-40B4-BE49-F238E27FC236}">
-                <a16:creationId xmlns:a16="http://schemas.microsoft.com/office/drawing/2014/main" id="{C47DD440-FE73-44CF-AF2A-DB68C1B16CB3}"/>
+                <a16:creationId xmlns:a16="http://schemas.microsoft.com/office/drawing/2014/main" id="{AC1C9FF7-CA7F-4981-9F4D-5AC77FDD20C5}"/>
               </a:ext>
             </a:extLst>
           </p:cNvPr>
@@ -9351,7 +9351,7 @@
           <p:cNvPr id="8" name="">
             <a:extLst xmlns:a="http://schemas.openxmlformats.org/drawingml/2006/main">
               <a:ext uri="{FF2B5EF4-FFF2-40B4-BE49-F238E27FC236}">
-                <a16:creationId xmlns:a16="http://schemas.microsoft.com/office/drawing/2014/main" id="{08A7EE99-C00A-4009-A315-00BAC3F73B07}"/>
+                <a16:creationId xmlns:a16="http://schemas.microsoft.com/office/drawing/2014/main" id="{58831E75-A1F3-48ED-9DFF-B9BDB648FC6D}"/>
               </a:ext>
             </a:extLst>
           </p:cNvPr>
@@ -9417,7 +9417,7 @@
           <p:cNvPr id="9" name="Chart">
             <a:extLst xmlns:a="http://schemas.openxmlformats.org/drawingml/2006/main">
               <a:ext uri="{FF2B5EF4-FFF2-40B4-BE49-F238E27FC236}">
-                <a16:creationId xmlns:a16="http://schemas.microsoft.com/office/drawing/2014/main" id="{6C518BFA-25BF-431F-9EB8-776186859FF1}"/>
+                <a16:creationId xmlns:a16="http://schemas.microsoft.com/office/drawing/2014/main" id="{F3AD4CB4-F843-4026-8EE3-8634DAEF42C8}"/>
               </a:ext>
             </a:extLst>
           </p:cNvPr>
@@ -9430,7 +9430,7 @@
         </p:xfrm>
         <a:graphic xmlns:a="http://schemas.openxmlformats.org/drawingml/2006/main">
           <a:graphicData uri="http://schemas.openxmlformats.org/drawingml/2006/chart">
-            <c:chart xmlns:r="http://schemas.openxmlformats.org/officeDocument/2006/relationships" xmlns:c="http://schemas.openxmlformats.org/drawingml/2006/chart" r:id="R0aa163b2ff1c418d"/>
+            <c:chart xmlns:r="http://schemas.openxmlformats.org/officeDocument/2006/relationships" xmlns:c="http://schemas.openxmlformats.org/drawingml/2006/chart" r:id="R038ec14d4b0c4a25"/>
           </a:graphicData>
         </a:graphic>
       </p:graphicFrame>
@@ -9439,7 +9439,7 @@
           <p:cNvPr id="10" name="">
             <a:extLst xmlns:a="http://schemas.openxmlformats.org/drawingml/2006/main">
               <a:ext uri="{FF2B5EF4-FFF2-40B4-BE49-F238E27FC236}">
-                <a16:creationId xmlns:a16="http://schemas.microsoft.com/office/drawing/2014/main" id="{68DE5FDA-259E-485D-AC83-DC4CA2510EC6}"/>
+                <a16:creationId xmlns:a16="http://schemas.microsoft.com/office/drawing/2014/main" id="{D4B51E8D-8EA9-4394-9EBB-71053661D811}"/>
               </a:ext>
             </a:extLst>
           </p:cNvPr>
@@ -9505,7 +9505,7 @@
           <p:cNvPr id="11" name="">
             <a:extLst xmlns:a="http://schemas.openxmlformats.org/drawingml/2006/main">
               <a:ext uri="{FF2B5EF4-FFF2-40B4-BE49-F238E27FC236}">
-                <a16:creationId xmlns:a16="http://schemas.microsoft.com/office/drawing/2014/main" id="{1A1305AD-672F-433F-9A12-846DD67F8F87}"/>
+                <a16:creationId xmlns:a16="http://schemas.microsoft.com/office/drawing/2014/main" id="{918FCF26-EE4D-4E4D-9691-1681761104FB}"/>
               </a:ext>
             </a:extLst>
           </p:cNvPr>
@@ -9571,7 +9571,7 @@
           <p:cNvPr id="12" name="">
             <a:extLst xmlns:a="http://schemas.openxmlformats.org/drawingml/2006/main">
               <a:ext uri="{FF2B5EF4-FFF2-40B4-BE49-F238E27FC236}">
-                <a16:creationId xmlns:a16="http://schemas.microsoft.com/office/drawing/2014/main" id="{3DB405B1-3F6C-4D76-A75E-226AB03096B1}"/>
+                <a16:creationId xmlns:a16="http://schemas.microsoft.com/office/drawing/2014/main" id="{70973EF0-0E83-4843-B69B-21E181654D18}"/>
               </a:ext>
             </a:extLst>
           </p:cNvPr>
@@ -9627,7 +9627,7 @@
                 <a:ea typeface="Ubuntu Condensed"/>
                 <a:cs typeface="Ubuntu Condensed"/>
               </a:rPr>
-              <a:t>Use the full time range. Give each country its own line.</a:t>
+              <a:t>Convert Year to Dimension, then Continuous. Keep 1960–2020.</a:t>
             </a:r>
           </a:p>
         </p:txBody>
@@ -9637,7 +9637,7 @@
           <p:cNvPr id="13" name="">
             <a:extLst xmlns:a="http://schemas.openxmlformats.org/drawingml/2006/main">
               <a:ext uri="{FF2B5EF4-FFF2-40B4-BE49-F238E27FC236}">
-                <a16:creationId xmlns:a16="http://schemas.microsoft.com/office/drawing/2014/main" id="{B853674B-A250-4D0B-9522-20E1F026F76E}"/>
+                <a16:creationId xmlns:a16="http://schemas.microsoft.com/office/drawing/2014/main" id="{0DA2F988-774D-4D51-B269-640309C71C5D}"/>
               </a:ext>
             </a:extLst>
           </p:cNvPr>
@@ -9703,7 +9703,7 @@
           <p:cNvPr id="14" name="Chart">
             <a:extLst xmlns:a="http://schemas.openxmlformats.org/drawingml/2006/main">
               <a:ext uri="{FF2B5EF4-FFF2-40B4-BE49-F238E27FC236}">
-                <a16:creationId xmlns:a16="http://schemas.microsoft.com/office/drawing/2014/main" id="{BC32F1BD-CB21-4B79-8E72-35EFFBE0785D}"/>
+                <a16:creationId xmlns:a16="http://schemas.microsoft.com/office/drawing/2014/main" id="{E758541A-21B5-4149-8217-8A1E37220929}"/>
               </a:ext>
             </a:extLst>
           </p:cNvPr>
@@ -9716,7 +9716,7 @@
         </p:xfrm>
         <a:graphic xmlns:a="http://schemas.openxmlformats.org/drawingml/2006/main">
           <a:graphicData uri="http://schemas.openxmlformats.org/drawingml/2006/chart">
-            <c:chart xmlns:r="http://schemas.openxmlformats.org/officeDocument/2006/relationships" xmlns:c="http://schemas.openxmlformats.org/drawingml/2006/chart" r:id="R242b903f4950437f"/>
+            <c:chart xmlns:r="http://schemas.openxmlformats.org/officeDocument/2006/relationships" xmlns:c="http://schemas.openxmlformats.org/drawingml/2006/chart" r:id="R720b1dd974be432a"/>
           </a:graphicData>
         </a:graphic>
       </p:graphicFrame>
@@ -9725,7 +9725,7 @@
           <p:cNvPr id="15" name="">
             <a:extLst xmlns:a="http://schemas.openxmlformats.org/drawingml/2006/main">
               <a:ext uri="{FF2B5EF4-FFF2-40B4-BE49-F238E27FC236}">
-                <a16:creationId xmlns:a16="http://schemas.microsoft.com/office/drawing/2014/main" id="{8497ECD0-FC7C-4002-B1ED-027119791695}"/>
+                <a16:creationId xmlns:a16="http://schemas.microsoft.com/office/drawing/2014/main" id="{D1D50D82-517E-46D5-A642-C5381A9B6724}"/>
               </a:ext>
             </a:extLst>
           </p:cNvPr>
@@ -9814,7 +9814,7 @@
           <p:cNvPr id="16" name="">
             <a:extLst xmlns:a="http://schemas.openxmlformats.org/drawingml/2006/main">
               <a:ext uri="{FF2B5EF4-FFF2-40B4-BE49-F238E27FC236}">
-                <a16:creationId xmlns:a16="http://schemas.microsoft.com/office/drawing/2014/main" id="{153C7A84-7237-498F-A24E-FF11F70FECB0}"/>
+                <a16:creationId xmlns:a16="http://schemas.microsoft.com/office/drawing/2014/main" id="{EF1F00FA-D8C6-4BCA-96BB-DCCE82B659B1}"/>
               </a:ext>
             </a:extLst>
           </p:cNvPr>
@@ -9878,7 +9878,7 @@
     </p:spTree>
     <p:extLst>
       <p:ext uri="{BB962C8B-B14F-4D97-AF65-F5344CB8AC3E}">
-        <p14:creationId xmlns:p14="http://schemas.microsoft.com/office/powerpoint/2010/main" val="1197318325"/>
+        <p14:creationId xmlns:p14="http://schemas.microsoft.com/office/powerpoint/2010/main" val="304946477"/>
       </p:ext>
     </p:extLst>
   </p:cSld>
@@ -9909,7 +9909,7 @@
           <p:cNvPr id="18" name="">
             <a:extLst xmlns:a="http://schemas.openxmlformats.org/drawingml/2006/main">
               <a:ext uri="{FF2B5EF4-FFF2-40B4-BE49-F238E27FC236}">
-                <a16:creationId xmlns:a16="http://schemas.microsoft.com/office/drawing/2014/main" id="{8D94B76D-E85D-47F8-887D-DFECF5E728BC}"/>
+                <a16:creationId xmlns:a16="http://schemas.microsoft.com/office/drawing/2014/main" id="{488509F0-7D1B-49B8-8CC5-7B514A164B4B}"/>
               </a:ext>
             </a:extLst>
           </p:cNvPr>
@@ -9975,7 +9975,7 @@
           <p:cNvPr id="2" name="">
             <a:extLst xmlns:a="http://schemas.openxmlformats.org/drawingml/2006/main">
               <a:ext uri="{FF2B5EF4-FFF2-40B4-BE49-F238E27FC236}">
-                <a16:creationId xmlns:a16="http://schemas.microsoft.com/office/drawing/2014/main" id="{FCF95313-01D4-4D70-97F8-31481AC0CCCA}"/>
+                <a16:creationId xmlns:a16="http://schemas.microsoft.com/office/drawing/2014/main" id="{AF1417FB-B26D-4745-82B0-3C50E7F52F36}"/>
               </a:ext>
             </a:extLst>
           </p:cNvPr>
@@ -10041,7 +10041,7 @@
           <p:cNvPr id="3" name="">
             <a:extLst xmlns:a="http://schemas.openxmlformats.org/drawingml/2006/main">
               <a:ext uri="{FF2B5EF4-FFF2-40B4-BE49-F238E27FC236}">
-                <a16:creationId xmlns:a16="http://schemas.microsoft.com/office/drawing/2014/main" id="{1CDC89BB-D14C-47FF-9D10-2BC956409117}"/>
+                <a16:creationId xmlns:a16="http://schemas.microsoft.com/office/drawing/2014/main" id="{12AF815A-B4E0-4BD1-92CF-A57BC5800A6E}"/>
               </a:ext>
             </a:extLst>
           </p:cNvPr>
@@ -10107,7 +10107,7 @@
           <p:cNvPr id="4" name="">
             <a:extLst xmlns:a="http://schemas.openxmlformats.org/drawingml/2006/main">
               <a:ext uri="{FF2B5EF4-FFF2-40B4-BE49-F238E27FC236}">
-                <a16:creationId xmlns:a16="http://schemas.microsoft.com/office/drawing/2014/main" id="{30164046-E821-413B-9579-6DD76043C455}"/>
+                <a16:creationId xmlns:a16="http://schemas.microsoft.com/office/drawing/2014/main" id="{4FC470B6-CD6C-4773-8DEC-E6F317544CAD}"/>
               </a:ext>
             </a:extLst>
           </p:cNvPr>
@@ -10137,7 +10137,7 @@
           <p:cNvPr id="5" name="">
             <a:extLst xmlns:a="http://schemas.openxmlformats.org/drawingml/2006/main">
               <a:ext uri="{FF2B5EF4-FFF2-40B4-BE49-F238E27FC236}">
-                <a16:creationId xmlns:a16="http://schemas.microsoft.com/office/drawing/2014/main" id="{E4B8482F-27AE-4FE5-AA71-D6BBF49948D5}"/>
+                <a16:creationId xmlns:a16="http://schemas.microsoft.com/office/drawing/2014/main" id="{AA735E11-80D4-4157-AD89-EA8238458C05}"/>
               </a:ext>
             </a:extLst>
           </p:cNvPr>
@@ -10167,7 +10167,7 @@
           <p:cNvPr id="6" name="">
             <a:extLst xmlns:a="http://schemas.openxmlformats.org/drawingml/2006/main">
               <a:ext uri="{FF2B5EF4-FFF2-40B4-BE49-F238E27FC236}">
-                <a16:creationId xmlns:a16="http://schemas.microsoft.com/office/drawing/2014/main" id="{25944DAA-89D4-4A8C-9E03-545CAD0817E5}"/>
+                <a16:creationId xmlns:a16="http://schemas.microsoft.com/office/drawing/2014/main" id="{3A4AC909-05FB-41C3-AB6F-9B55D83ED93A}"/>
               </a:ext>
             </a:extLst>
           </p:cNvPr>
@@ -10197,7 +10197,7 @@
           <p:cNvPr id="7" name="">
             <a:extLst xmlns:a="http://schemas.openxmlformats.org/drawingml/2006/main">
               <a:ext uri="{FF2B5EF4-FFF2-40B4-BE49-F238E27FC236}">
-                <a16:creationId xmlns:a16="http://schemas.microsoft.com/office/drawing/2014/main" id="{E820FFB8-5723-43B7-B803-5B30D32F61F8}"/>
+                <a16:creationId xmlns:a16="http://schemas.microsoft.com/office/drawing/2014/main" id="{607CA69B-95F6-431E-9A46-179F06602421}"/>
               </a:ext>
             </a:extLst>
           </p:cNvPr>
@@ -10263,7 +10263,7 @@
           <p:cNvPr id="8" name="">
             <a:extLst xmlns:a="http://schemas.openxmlformats.org/drawingml/2006/main">
               <a:ext uri="{FF2B5EF4-FFF2-40B4-BE49-F238E27FC236}">
-                <a16:creationId xmlns:a16="http://schemas.microsoft.com/office/drawing/2014/main" id="{91EFA370-CF26-4C0C-AA67-B0D1A0D7ECD9}"/>
+                <a16:creationId xmlns:a16="http://schemas.microsoft.com/office/drawing/2014/main" id="{C41AB026-BA1D-4614-8E5B-A1FD3F3882D0}"/>
               </a:ext>
             </a:extLst>
           </p:cNvPr>
@@ -10352,7 +10352,7 @@
           <p:cNvPr id="9" name="">
             <a:extLst xmlns:a="http://schemas.openxmlformats.org/drawingml/2006/main">
               <a:ext uri="{FF2B5EF4-FFF2-40B4-BE49-F238E27FC236}">
-                <a16:creationId xmlns:a16="http://schemas.microsoft.com/office/drawing/2014/main" id="{E0F27C12-EBBC-4054-8808-72DD65D58746}"/>
+                <a16:creationId xmlns:a16="http://schemas.microsoft.com/office/drawing/2014/main" id="{28BF0B2F-DA31-469A-9D23-E768FE83D079}"/>
               </a:ext>
             </a:extLst>
           </p:cNvPr>
@@ -10441,7 +10441,7 @@
           <p:cNvPr id="10" name="">
             <a:extLst xmlns:a="http://schemas.openxmlformats.org/drawingml/2006/main">
               <a:ext uri="{FF2B5EF4-FFF2-40B4-BE49-F238E27FC236}">
-                <a16:creationId xmlns:a16="http://schemas.microsoft.com/office/drawing/2014/main" id="{20992DA9-53FF-43F4-A66E-18E252928FA5}"/>
+                <a16:creationId xmlns:a16="http://schemas.microsoft.com/office/drawing/2014/main" id="{1C64B343-D758-4BBE-9819-C2781A046956}"/>
               </a:ext>
             </a:extLst>
           </p:cNvPr>
@@ -10507,7 +10507,7 @@
           <p:cNvPr id="11" name="">
             <a:extLst xmlns:a="http://schemas.openxmlformats.org/drawingml/2006/main">
               <a:ext uri="{FF2B5EF4-FFF2-40B4-BE49-F238E27FC236}">
-                <a16:creationId xmlns:a16="http://schemas.microsoft.com/office/drawing/2014/main" id="{341F83CB-E1A5-4401-A567-9538320B0622}"/>
+                <a16:creationId xmlns:a16="http://schemas.microsoft.com/office/drawing/2014/main" id="{E3B9A716-7418-4C3E-A263-B66F2361DCBB}"/>
               </a:ext>
             </a:extLst>
           </p:cNvPr>
@@ -10573,7 +10573,7 @@
           <p:cNvPr id="12" name="">
             <a:extLst xmlns:a="http://schemas.openxmlformats.org/drawingml/2006/main">
               <a:ext uri="{FF2B5EF4-FFF2-40B4-BE49-F238E27FC236}">
-                <a16:creationId xmlns:a16="http://schemas.microsoft.com/office/drawing/2014/main" id="{C9D1D8FA-0635-4464-BD91-E0DED0821CCE}"/>
+                <a16:creationId xmlns:a16="http://schemas.microsoft.com/office/drawing/2014/main" id="{D1CF3A7F-77D9-4F98-A4A1-07EEA5371C26}"/>
               </a:ext>
             </a:extLst>
           </p:cNvPr>
@@ -10639,7 +10639,7 @@
           <p:cNvPr id="13" name="">
             <a:extLst xmlns:a="http://schemas.openxmlformats.org/drawingml/2006/main">
               <a:ext uri="{FF2B5EF4-FFF2-40B4-BE49-F238E27FC236}">
-                <a16:creationId xmlns:a16="http://schemas.microsoft.com/office/drawing/2014/main" id="{DCD92C31-AEDA-4CD5-BFA3-1C57DE2076F6}"/>
+                <a16:creationId xmlns:a16="http://schemas.microsoft.com/office/drawing/2014/main" id="{E7EBD61D-7030-472E-9714-176381BFE5FC}"/>
               </a:ext>
             </a:extLst>
           </p:cNvPr>
@@ -10705,7 +10705,7 @@
           <p:cNvPr id="14" name="">
             <a:extLst xmlns:a="http://schemas.openxmlformats.org/drawingml/2006/main">
               <a:ext uri="{FF2B5EF4-FFF2-40B4-BE49-F238E27FC236}">
-                <a16:creationId xmlns:a16="http://schemas.microsoft.com/office/drawing/2014/main" id="{0580B236-25D6-45DF-8F18-4A154B745764}"/>
+                <a16:creationId xmlns:a16="http://schemas.microsoft.com/office/drawing/2014/main" id="{5CBB6A05-D082-45B2-8F7D-9FD9E923B445}"/>
               </a:ext>
             </a:extLst>
           </p:cNvPr>
@@ -10771,7 +10771,7 @@
           <p:cNvPr id="15" name="">
             <a:extLst xmlns:a="http://schemas.openxmlformats.org/drawingml/2006/main">
               <a:ext uri="{FF2B5EF4-FFF2-40B4-BE49-F238E27FC236}">
-                <a16:creationId xmlns:a16="http://schemas.microsoft.com/office/drawing/2014/main" id="{5C63E1E0-E8E8-4C55-B11C-BF84DF5853D2}"/>
+                <a16:creationId xmlns:a16="http://schemas.microsoft.com/office/drawing/2014/main" id="{992CE7AB-A4CF-451C-A3F7-8A0D537C20F4}"/>
               </a:ext>
             </a:extLst>
           </p:cNvPr>
@@ -10837,7 +10837,7 @@
           <p:cNvPr id="16" name="">
             <a:extLst xmlns:a="http://schemas.openxmlformats.org/drawingml/2006/main">
               <a:ext uri="{FF2B5EF4-FFF2-40B4-BE49-F238E27FC236}">
-                <a16:creationId xmlns:a16="http://schemas.microsoft.com/office/drawing/2014/main" id="{4E652368-E363-474E-8297-88370357C989}"/>
+                <a16:creationId xmlns:a16="http://schemas.microsoft.com/office/drawing/2014/main" id="{91F8C492-CB5C-4A30-BB6B-5230824BB6AB}"/>
               </a:ext>
             </a:extLst>
           </p:cNvPr>
@@ -10949,7 +10949,7 @@
           <p:cNvPr id="17" name="">
             <a:extLst xmlns:a="http://schemas.openxmlformats.org/drawingml/2006/main">
               <a:ext uri="{FF2B5EF4-FFF2-40B4-BE49-F238E27FC236}">
-                <a16:creationId xmlns:a16="http://schemas.microsoft.com/office/drawing/2014/main" id="{803A9D5A-4245-4213-BAE4-E6978DD51A83}"/>
+                <a16:creationId xmlns:a16="http://schemas.microsoft.com/office/drawing/2014/main" id="{883C52DE-7CA1-45FE-AFF4-C64B82A3BD47}"/>
               </a:ext>
             </a:extLst>
           </p:cNvPr>
@@ -11013,7 +11013,7 @@
     </p:spTree>
     <p:extLst>
       <p:ext uri="{BB962C8B-B14F-4D97-AF65-F5344CB8AC3E}">
-        <p14:creationId xmlns:p14="http://schemas.microsoft.com/office/powerpoint/2010/main" val="2037351819"/>
+        <p14:creationId xmlns:p14="http://schemas.microsoft.com/office/powerpoint/2010/main" val="1998203320"/>
       </p:ext>
     </p:extLst>
   </p:cSld>
@@ -11044,7 +11044,7 @@
           <p:cNvPr id="23" name="">
             <a:extLst xmlns:a="http://schemas.openxmlformats.org/drawingml/2006/main">
               <a:ext uri="{FF2B5EF4-FFF2-40B4-BE49-F238E27FC236}">
-                <a16:creationId xmlns:a16="http://schemas.microsoft.com/office/drawing/2014/main" id="{A60B2A94-F2E0-4ED8-9392-A0F8CFAFC912}"/>
+                <a16:creationId xmlns:a16="http://schemas.microsoft.com/office/drawing/2014/main" id="{8BE7A930-C0B7-4D6B-A05D-A8CD3CD38DF7}"/>
               </a:ext>
             </a:extLst>
           </p:cNvPr>
@@ -11110,7 +11110,7 @@
           <p:cNvPr id="2" name="">
             <a:extLst xmlns:a="http://schemas.openxmlformats.org/drawingml/2006/main">
               <a:ext uri="{FF2B5EF4-FFF2-40B4-BE49-F238E27FC236}">
-                <a16:creationId xmlns:a16="http://schemas.microsoft.com/office/drawing/2014/main" id="{3BE0AF23-8CA5-4F0A-8A57-AFEC855480BE}"/>
+                <a16:creationId xmlns:a16="http://schemas.microsoft.com/office/drawing/2014/main" id="{D9BB4FCA-3C20-4939-8F74-AD66F6AEFE9A}"/>
               </a:ext>
             </a:extLst>
           </p:cNvPr>
@@ -11176,7 +11176,7 @@
           <p:cNvPr id="3" name="">
             <a:extLst xmlns:a="http://schemas.openxmlformats.org/drawingml/2006/main">
               <a:ext uri="{FF2B5EF4-FFF2-40B4-BE49-F238E27FC236}">
-                <a16:creationId xmlns:a16="http://schemas.microsoft.com/office/drawing/2014/main" id="{7AE2EB04-ED36-4750-9C67-E66F2ADF516A}"/>
+                <a16:creationId xmlns:a16="http://schemas.microsoft.com/office/drawing/2014/main" id="{1BCA4824-74A5-480D-B5DA-009FA3D3DC7F}"/>
               </a:ext>
             </a:extLst>
           </p:cNvPr>
@@ -11242,7 +11242,7 @@
           <p:cNvPr id="4" name="">
             <a:extLst xmlns:a="http://schemas.openxmlformats.org/drawingml/2006/main">
               <a:ext uri="{FF2B5EF4-FFF2-40B4-BE49-F238E27FC236}">
-                <a16:creationId xmlns:a16="http://schemas.microsoft.com/office/drawing/2014/main" id="{D5EB3951-2DA2-478A-96D4-283AE00F5EC5}"/>
+                <a16:creationId xmlns:a16="http://schemas.microsoft.com/office/drawing/2014/main" id="{C048C99A-B386-49E5-BA85-101CB99687B4}"/>
               </a:ext>
             </a:extLst>
           </p:cNvPr>
@@ -11308,7 +11308,7 @@
           <p:cNvPr id="5" name="">
             <a:extLst xmlns:a="http://schemas.openxmlformats.org/drawingml/2006/main">
               <a:ext uri="{FF2B5EF4-FFF2-40B4-BE49-F238E27FC236}">
-                <a16:creationId xmlns:a16="http://schemas.microsoft.com/office/drawing/2014/main" id="{9BFFD1CF-5CEC-467F-9AE8-6CD1EF04FA04}"/>
+                <a16:creationId xmlns:a16="http://schemas.microsoft.com/office/drawing/2014/main" id="{4C621B15-BC7B-4816-B6E5-BA3E8DDA6A20}"/>
               </a:ext>
             </a:extLst>
           </p:cNvPr>
@@ -11374,7 +11374,7 @@
           <p:cNvPr id="6" name="">
             <a:extLst xmlns:a="http://schemas.openxmlformats.org/drawingml/2006/main">
               <a:ext uri="{FF2B5EF4-FFF2-40B4-BE49-F238E27FC236}">
-                <a16:creationId xmlns:a16="http://schemas.microsoft.com/office/drawing/2014/main" id="{F2E9DBD0-190E-4C7A-998A-3267693C63A6}"/>
+                <a16:creationId xmlns:a16="http://schemas.microsoft.com/office/drawing/2014/main" id="{B00DC95E-DEEA-4DF2-B1AE-03660E1D243A}"/>
               </a:ext>
             </a:extLst>
           </p:cNvPr>
@@ -11440,7 +11440,7 @@
           <p:cNvPr id="7" name="">
             <a:extLst xmlns:a="http://schemas.openxmlformats.org/drawingml/2006/main">
               <a:ext uri="{FF2B5EF4-FFF2-40B4-BE49-F238E27FC236}">
-                <a16:creationId xmlns:a16="http://schemas.microsoft.com/office/drawing/2014/main" id="{8F477678-2513-4788-8A6E-47655329FED6}"/>
+                <a16:creationId xmlns:a16="http://schemas.microsoft.com/office/drawing/2014/main" id="{38C5A71E-4FE9-4C5A-B229-E7206209EBA1}"/>
               </a:ext>
             </a:extLst>
           </p:cNvPr>
@@ -11506,7 +11506,7 @@
           <p:cNvPr id="8" name="">
             <a:extLst xmlns:a="http://schemas.openxmlformats.org/drawingml/2006/main">
               <a:ext uri="{FF2B5EF4-FFF2-40B4-BE49-F238E27FC236}">
-                <a16:creationId xmlns:a16="http://schemas.microsoft.com/office/drawing/2014/main" id="{34669D22-3D6D-4F35-A36D-9DAECCB6CD67}"/>
+                <a16:creationId xmlns:a16="http://schemas.microsoft.com/office/drawing/2014/main" id="{A6ABB27D-E035-4E78-92F2-A2572095C866}"/>
               </a:ext>
             </a:extLst>
           </p:cNvPr>
@@ -11572,7 +11572,7 @@
           <p:cNvPr id="9" name="">
             <a:extLst xmlns:a="http://schemas.openxmlformats.org/drawingml/2006/main">
               <a:ext uri="{FF2B5EF4-FFF2-40B4-BE49-F238E27FC236}">
-                <a16:creationId xmlns:a16="http://schemas.microsoft.com/office/drawing/2014/main" id="{2255E084-E60C-4BFF-B328-55F27A520530}"/>
+                <a16:creationId xmlns:a16="http://schemas.microsoft.com/office/drawing/2014/main" id="{7BF7AEBD-4B11-4554-A022-EC0EC1A2F2B5}"/>
               </a:ext>
             </a:extLst>
           </p:cNvPr>
@@ -11638,7 +11638,7 @@
           <p:cNvPr id="10" name="">
             <a:extLst xmlns:a="http://schemas.openxmlformats.org/drawingml/2006/main">
               <a:ext uri="{FF2B5EF4-FFF2-40B4-BE49-F238E27FC236}">
-                <a16:creationId xmlns:a16="http://schemas.microsoft.com/office/drawing/2014/main" id="{72FF776A-8AC7-45E4-825E-A24CE0F06F59}"/>
+                <a16:creationId xmlns:a16="http://schemas.microsoft.com/office/drawing/2014/main" id="{0B5EB834-DEA0-42A7-A894-B52440F755B9}"/>
               </a:ext>
             </a:extLst>
           </p:cNvPr>
@@ -11704,7 +11704,7 @@
           <p:cNvPr id="11" name="">
             <a:extLst xmlns:a="http://schemas.openxmlformats.org/drawingml/2006/main">
               <a:ext uri="{FF2B5EF4-FFF2-40B4-BE49-F238E27FC236}">
-                <a16:creationId xmlns:a16="http://schemas.microsoft.com/office/drawing/2014/main" id="{EB2C7CF4-A82A-49AB-9086-55F6DE9E931F}"/>
+                <a16:creationId xmlns:a16="http://schemas.microsoft.com/office/drawing/2014/main" id="{5E069921-CF45-49F1-91C1-D5B342833F99}"/>
               </a:ext>
             </a:extLst>
           </p:cNvPr>
@@ -11770,7 +11770,7 @@
           <p:cNvPr id="12" name="">
             <a:extLst xmlns:a="http://schemas.openxmlformats.org/drawingml/2006/main">
               <a:ext uri="{FF2B5EF4-FFF2-40B4-BE49-F238E27FC236}">
-                <a16:creationId xmlns:a16="http://schemas.microsoft.com/office/drawing/2014/main" id="{84A7B001-1926-4302-A985-B27B79E4FC46}"/>
+                <a16:creationId xmlns:a16="http://schemas.microsoft.com/office/drawing/2014/main" id="{DF58BFC8-360F-44BD-9D0F-4D456143B484}"/>
               </a:ext>
             </a:extLst>
           </p:cNvPr>
@@ -11836,7 +11836,7 @@
           <p:cNvPr id="13" name="">
             <a:extLst xmlns:a="http://schemas.openxmlformats.org/drawingml/2006/main">
               <a:ext uri="{FF2B5EF4-FFF2-40B4-BE49-F238E27FC236}">
-                <a16:creationId xmlns:a16="http://schemas.microsoft.com/office/drawing/2014/main" id="{44A3269F-59B4-4634-810C-F2DB2A1B2684}"/>
+                <a16:creationId xmlns:a16="http://schemas.microsoft.com/office/drawing/2014/main" id="{0BDCA6FB-4535-4AB2-9A2B-4B71E7F9E003}"/>
               </a:ext>
             </a:extLst>
           </p:cNvPr>
@@ -11902,7 +11902,7 @@
           <p:cNvPr id="14" name="">
             <a:extLst xmlns:a="http://schemas.openxmlformats.org/drawingml/2006/main">
               <a:ext uri="{FF2B5EF4-FFF2-40B4-BE49-F238E27FC236}">
-                <a16:creationId xmlns:a16="http://schemas.microsoft.com/office/drawing/2014/main" id="{9B6EF654-79BA-4BA9-B63A-C51EB9FA5397}"/>
+                <a16:creationId xmlns:a16="http://schemas.microsoft.com/office/drawing/2014/main" id="{73C25F9E-3E97-4097-B503-5116E844879A}"/>
               </a:ext>
             </a:extLst>
           </p:cNvPr>
@@ -11968,7 +11968,7 @@
           <p:cNvPr id="15" name="Chart">
             <a:extLst xmlns:a="http://schemas.openxmlformats.org/drawingml/2006/main">
               <a:ext uri="{FF2B5EF4-FFF2-40B4-BE49-F238E27FC236}">
-                <a16:creationId xmlns:a16="http://schemas.microsoft.com/office/drawing/2014/main" id="{02973ED1-6D1F-4568-94D6-BC98DB3024A8}"/>
+                <a16:creationId xmlns:a16="http://schemas.microsoft.com/office/drawing/2014/main" id="{068A4C5C-D339-48F5-BE27-B3827EBDC466}"/>
               </a:ext>
             </a:extLst>
           </p:cNvPr>
@@ -11981,7 +11981,7 @@
         </p:xfrm>
         <a:graphic xmlns:a="http://schemas.openxmlformats.org/drawingml/2006/main">
           <a:graphicData uri="http://schemas.openxmlformats.org/drawingml/2006/chart">
-            <c:chart xmlns:r="http://schemas.openxmlformats.org/officeDocument/2006/relationships" xmlns:c="http://schemas.openxmlformats.org/drawingml/2006/chart" r:id="R323e3086683649fc"/>
+            <c:chart xmlns:r="http://schemas.openxmlformats.org/officeDocument/2006/relationships" xmlns:c="http://schemas.openxmlformats.org/drawingml/2006/chart" r:id="R6c5a540893d74c2b"/>
           </a:graphicData>
         </a:graphic>
       </p:graphicFrame>
@@ -11990,7 +11990,7 @@
           <p:cNvPr id="16" name="">
             <a:extLst xmlns:a="http://schemas.openxmlformats.org/drawingml/2006/main">
               <a:ext uri="{FF2B5EF4-FFF2-40B4-BE49-F238E27FC236}">
-                <a16:creationId xmlns:a16="http://schemas.microsoft.com/office/drawing/2014/main" id="{C6C69265-1950-4439-884F-279150163BDD}"/>
+                <a16:creationId xmlns:a16="http://schemas.microsoft.com/office/drawing/2014/main" id="{AE85CCC6-D6F1-441A-9B80-07239529B3FB}"/>
               </a:ext>
             </a:extLst>
           </p:cNvPr>
@@ -12056,7 +12056,7 @@
           <p:cNvPr id="17" name="">
             <a:extLst xmlns:a="http://schemas.openxmlformats.org/drawingml/2006/main">
               <a:ext uri="{FF2B5EF4-FFF2-40B4-BE49-F238E27FC236}">
-                <a16:creationId xmlns:a16="http://schemas.microsoft.com/office/drawing/2014/main" id="{582DB053-3C2F-4156-A25C-322D3CA82C76}"/>
+                <a16:creationId xmlns:a16="http://schemas.microsoft.com/office/drawing/2014/main" id="{06A8DAF9-F50A-46F9-A579-E7915572B97F}"/>
               </a:ext>
             </a:extLst>
           </p:cNvPr>
@@ -12122,7 +12122,7 @@
           <p:cNvPr id="18" name="">
             <a:extLst xmlns:a="http://schemas.openxmlformats.org/drawingml/2006/main">
               <a:ext uri="{FF2B5EF4-FFF2-40B4-BE49-F238E27FC236}">
-                <a16:creationId xmlns:a16="http://schemas.microsoft.com/office/drawing/2014/main" id="{19810F85-C5CB-4D27-B376-72B478429551}"/>
+                <a16:creationId xmlns:a16="http://schemas.microsoft.com/office/drawing/2014/main" id="{D2E54830-5A08-4AD5-89E7-3FE688CD33CE}"/>
               </a:ext>
             </a:extLst>
           </p:cNvPr>
@@ -12188,7 +12188,7 @@
           <p:cNvPr id="19" name="Chart">
             <a:extLst xmlns:a="http://schemas.openxmlformats.org/drawingml/2006/main">
               <a:ext uri="{FF2B5EF4-FFF2-40B4-BE49-F238E27FC236}">
-                <a16:creationId xmlns:a16="http://schemas.microsoft.com/office/drawing/2014/main" id="{7DB2FE0A-22F9-46D3-85A3-08A6C3866998}"/>
+                <a16:creationId xmlns:a16="http://schemas.microsoft.com/office/drawing/2014/main" id="{9526678A-570E-4006-BA34-0313F6C5D59C}"/>
               </a:ext>
             </a:extLst>
           </p:cNvPr>
@@ -12201,7 +12201,7 @@
         </p:xfrm>
         <a:graphic xmlns:a="http://schemas.openxmlformats.org/drawingml/2006/main">
           <a:graphicData uri="http://schemas.openxmlformats.org/drawingml/2006/chart">
-            <c:chart xmlns:r="http://schemas.openxmlformats.org/officeDocument/2006/relationships" xmlns:c="http://schemas.openxmlformats.org/drawingml/2006/chart" r:id="R2d21bf95a465423e"/>
+            <c:chart xmlns:r="http://schemas.openxmlformats.org/officeDocument/2006/relationships" xmlns:c="http://schemas.openxmlformats.org/drawingml/2006/chart" r:id="Rb21e99281b9349b9"/>
           </a:graphicData>
         </a:graphic>
       </p:graphicFrame>
@@ -12210,7 +12210,7 @@
           <p:cNvPr id="20" name="">
             <a:extLst xmlns:a="http://schemas.openxmlformats.org/drawingml/2006/main">
               <a:ext uri="{FF2B5EF4-FFF2-40B4-BE49-F238E27FC236}">
-                <a16:creationId xmlns:a16="http://schemas.microsoft.com/office/drawing/2014/main" id="{954A6D2C-A7A0-48A8-AACB-0F4D71C39B87}"/>
+                <a16:creationId xmlns:a16="http://schemas.microsoft.com/office/drawing/2014/main" id="{D66570C9-90FB-4DAB-988D-5E2B5F1E1B76}"/>
               </a:ext>
             </a:extLst>
           </p:cNvPr>
@@ -12276,7 +12276,7 @@
           <p:cNvPr id="21" name="">
             <a:extLst xmlns:a="http://schemas.openxmlformats.org/drawingml/2006/main">
               <a:ext uri="{FF2B5EF4-FFF2-40B4-BE49-F238E27FC236}">
-                <a16:creationId xmlns:a16="http://schemas.microsoft.com/office/drawing/2014/main" id="{CE2B6FDD-CD1B-4885-9AB0-F0A417A59D50}"/>
+                <a16:creationId xmlns:a16="http://schemas.microsoft.com/office/drawing/2014/main" id="{63EBB13E-A61E-4EAC-B4B6-6FA462BA0AFF}"/>
               </a:ext>
             </a:extLst>
           </p:cNvPr>
@@ -12342,7 +12342,7 @@
           <p:cNvPr id="22" name="">
             <a:extLst xmlns:a="http://schemas.openxmlformats.org/drawingml/2006/main">
               <a:ext uri="{FF2B5EF4-FFF2-40B4-BE49-F238E27FC236}">
-                <a16:creationId xmlns:a16="http://schemas.microsoft.com/office/drawing/2014/main" id="{A54AFC8A-031E-449A-89B9-B53DEC00B64B}"/>
+                <a16:creationId xmlns:a16="http://schemas.microsoft.com/office/drawing/2014/main" id="{BCCF1C3A-A79C-4E6A-92D2-D89D85164CDC}"/>
               </a:ext>
             </a:extLst>
           </p:cNvPr>
@@ -12406,7 +12406,7 @@
     </p:spTree>
     <p:extLst>
       <p:ext uri="{BB962C8B-B14F-4D97-AF65-F5344CB8AC3E}">
-        <p14:creationId xmlns:p14="http://schemas.microsoft.com/office/powerpoint/2010/main" val="1947480979"/>
+        <p14:creationId xmlns:p14="http://schemas.microsoft.com/office/powerpoint/2010/main" val="1913916461"/>
       </p:ext>
     </p:extLst>
   </p:cSld>

--- a/lectures/w04-tableau-dashboard.pptx
+++ b/lectures/w04-tableau-dashboard.pptx
@@ -2,16 +2,17 @@
 <file path=ppt/presentation.xml><?xml version="1.0" encoding="utf-8"?>
 <p:presentation xmlns:p="http://schemas.openxmlformats.org/presentationml/2006/main">
   <p:sldMasterIdLst>
-    <p:sldMasterId xmlns:r="http://schemas.openxmlformats.org/officeDocument/2006/relationships" id="2147483648" r:id="R6e3b32ca123645cd"/>
+    <p:sldMasterId xmlns:r="http://schemas.openxmlformats.org/officeDocument/2006/relationships" id="2147483648" r:id="R6b5ce873ac5f412b"/>
   </p:sldMasterIdLst>
   <p:notesMasterIdLst>
-    <p:notesMasterId xmlns:r="http://schemas.openxmlformats.org/officeDocument/2006/relationships" r:id="R2a11d20dd7744291"/>
+    <p:notesMasterId xmlns:r="http://schemas.openxmlformats.org/officeDocument/2006/relationships" r:id="R55020a8003d94f46"/>
   </p:notesMasterIdLst>
   <p:sldIdLst>
-    <p:sldId xmlns:r="http://schemas.openxmlformats.org/officeDocument/2006/relationships" id="256" r:id="R7049a6baae104e65"/>
-    <p:sldId xmlns:r="http://schemas.openxmlformats.org/officeDocument/2006/relationships" id="257" r:id="Rad52fc1a432d40a7"/>
-    <p:sldId xmlns:r="http://schemas.openxmlformats.org/officeDocument/2006/relationships" id="258" r:id="R1b9dabf18dca41d7"/>
-    <p:sldId xmlns:r="http://schemas.openxmlformats.org/officeDocument/2006/relationships" id="259" r:id="R96785741bf8a4882"/>
+    <p:sldId xmlns:r="http://schemas.openxmlformats.org/officeDocument/2006/relationships" id="256" r:id="R0ad41581167f4baa"/>
+    <p:sldId xmlns:r="http://schemas.openxmlformats.org/officeDocument/2006/relationships" id="257" r:id="Rce1e9a9194164481"/>
+    <p:sldId xmlns:r="http://schemas.openxmlformats.org/officeDocument/2006/relationships" id="258" r:id="R7a608076e21e4fff"/>
+    <p:sldId xmlns:r="http://schemas.openxmlformats.org/officeDocument/2006/relationships" id="259" r:id="R3131e20005cc4ea9"/>
+    <p:sldId xmlns:r="http://schemas.openxmlformats.org/officeDocument/2006/relationships" id="260" r:id="R06b32826c5d748a4"/>
   </p:sldIdLst>
   <p:sldSz cx="12192000" cy="6858000"/>
   <p:notesSz cx="6858000" cy="9144000"/>
@@ -663,6 +664,16 @@
               <a:t>https://help.tableau.com/current/pro/desktop/en-us/actions_filter.htm</a:t>
             </a:r>
           </a:p>
+          <a:p xmlns:a="http://schemas.openxmlformats.org/drawingml/2006/main">
+            <a:r>
+              <a:t>Sizing: build in Default, with Device Preview off. In Dashboard pane expand Size, choose Fixed size and Custom 1200x800. Desktop device preview does not itself enlarge the canvas. White area is the dashboard canvas; gray is outside it. Automatic is an optional alternative for filling the available window, preferably with Tiled layout.</a:t>
+            </a:r>
+          </a:p>
+          <a:p xmlns:a="http://schemas.openxmlformats.org/drawingml/2006/main">
+            <a:r>
+              <a:t>https://help.tableau.com/current/pro/desktop/en-us/dashboards_organize_floatingandtiled.htm</a:t>
+            </a:r>
+          </a:p>
         </p:txBody>
       </p:sp>
       <p:sp>
@@ -785,6 +796,106 @@
 </p:notes>
 </file>
 
+<file path=ppt/notesSlides/notesSlide5.xml><?xml version="1.0" encoding="utf-8"?>
+<p:notes xmlns:p="http://schemas.openxmlformats.org/presentationml/2006/main">
+  <p:cSld>
+    <p:spTree>
+      <p:nvGrpSpPr>
+        <p:cNvPr id="1" name=""/>
+        <p:cNvGrpSpPr/>
+        <p:nvPr/>
+      </p:nvGrpSpPr>
+      <p:grpSpPr>
+        <a:xfrm xmlns:a="http://schemas.openxmlformats.org/drawingml/2006/main"/>
+      </p:grpSpPr>
+      <p:sp>
+        <p:nvSpPr>
+          <p:cNvPr id="2" name="Slide Image Placeholder 1"/>
+          <p:cNvSpPr>
+            <a:spLocks xmlns:a="http://schemas.openxmlformats.org/drawingml/2006/main" noGrp="1"/>
+          </p:cNvSpPr>
+          <p:nvPr>
+            <p:ph type="sldImg" idx="0"/>
+          </p:nvPr>
+        </p:nvSpPr>
+        <p:spPr/>
+      </p:sp>
+      <p:sp>
+        <p:nvSpPr>
+          <p:cNvPr id="3" name="Notes Placeholder 2"/>
+          <p:cNvSpPr>
+            <a:spLocks xmlns:a="http://schemas.openxmlformats.org/drawingml/2006/main" noGrp="1"/>
+          </p:cNvSpPr>
+          <p:nvPr>
+            <p:ph type="body" idx="1"/>
+          </p:nvPr>
+        </p:nvSpPr>
+        <p:spPr/>
+        <p:txBody>
+          <a:bodyPr xmlns:a="http://schemas.openxmlformats.org/drawingml/2006/main"/>
+          <a:lstStyle xmlns:a="http://schemas.openxmlformats.org/drawingml/2006/main"/>
+          <a:p xmlns:a="http://schemas.openxmlformats.org/drawingml/2006/main">
+            <a:r>
+              <a:t>Create a Highlight action named Highlight country. Source sheet World, Run action on Select. Target sheet World for a scatterplot highlight. Under Target Highlighting choose Selected Fields and check Country only. Country must be part of each target view. If you want to keep all history lines visible but dim the other countries, add Life History and GDP History as targets and disable the separate Filter action on those sheets. If you want only the selected country history, keep the Country filter action from the previous slide and highlight only World. Click Japan, then India. Click empty space to clear. Highlight actions preserve context by dimming other marks; filter actions remove other countries from targets.</a:t>
+            </a:r>
+          </a:p>
+          <a:p xmlns:a="http://schemas.openxmlformats.org/drawingml/2006/main">
+            <a:r>
+              <a:t>https://help.tableau.com/current/pro/desktop/en-us/actions_highlight_advanced.htm</a:t>
+            </a:r>
+          </a:p>
+          <a:p xmlns:a="http://schemas.openxmlformats.org/drawingml/2006/main">
+            <a:r>
+              <a:t/>
+            </a:r>
+          </a:p>
+          <a:p xmlns:a="http://schemas.openxmlformats.org/drawingml/2006/main">
+            <a:r>
+              <a:t>Sources: local teaching dataset data/gapminder/hans.csv. Snapshot examples use 2020, histories 1960-2020. The file includes future projections through 2100; do not present these examples as current data. GDP is the field name; its currency/per-capita definition is not established by the supplied CSV. Do not relabel as total GDP or per-capita dollars without verifying metadata. Some Population and region values are missing, so these examples use equal-sized circles and retain unknown regions. Filter out nonpositive GDP and Life Expectancy for the world sheet. Native scatter example uses a linear GDP axis; optionally switch the axis to logarithmic in Tableau.</a:t>
+            </a:r>
+          </a:p>
+          <a:p xmlns:a="http://schemas.openxmlformats.org/drawingml/2006/main">
+            <a:r>
+              <a:t>https://help.tableau.com/current/pro/desktop/en-us/dashboards_create.htm</a:t>
+            </a:r>
+          </a:p>
+          <a:p xmlns:a="http://schemas.openxmlformats.org/drawingml/2006/main">
+            <a:r>
+              <a:t>https://help.tableau.com/current/pro/desktop/en-us/filtering_global.htm</a:t>
+            </a:r>
+          </a:p>
+          <a:p xmlns:a="http://schemas.openxmlformats.org/drawingml/2006/main">
+            <a:r>
+              <a:t>https://help.tableau.com/current/pro/desktop/en-us/actions_filter.htm</a:t>
+            </a:r>
+          </a:p>
+        </p:txBody>
+      </p:sp>
+      <p:sp>
+        <p:nvSpPr>
+          <p:cNvPr id="4" name="Slide Number Placeholder 3"/>
+          <p:cNvSpPr>
+            <a:spLocks xmlns:a="http://schemas.openxmlformats.org/drawingml/2006/main" noGrp="1"/>
+          </p:cNvSpPr>
+          <p:nvPr>
+            <p:ph type="sldNum" idx="5"/>
+          </p:nvPr>
+        </p:nvSpPr>
+        <p:spPr/>
+        <p:txBody>
+          <a:bodyPr xmlns:a="http://schemas.openxmlformats.org/drawingml/2006/main"/>
+          <a:lstStyle xmlns:a="http://schemas.openxmlformats.org/drawingml/2006/main"/>
+          <a:p xmlns:a="http://schemas.openxmlformats.org/drawingml/2006/main"/>
+        </p:txBody>
+      </p:sp>
+    </p:spTree>
+  </p:cSld>
+  <p:clrMapOvr>
+    <a:masterClrMapping xmlns:a="http://schemas.openxmlformats.org/drawingml/2006/main"/>
+  </p:clrMapOvr>
+</p:notes>
+</file>
+
 <file path=ppt/slideLayouts/slideLayout1.xml><?xml version="1.0" encoding="utf-8"?>
 <p:sldLayout xmlns:p="http://schemas.openxmlformats.org/presentationml/2006/main" type="title">
   <p:cSld name="Title Slide">
@@ -802,7 +913,7 @@
           <p:cNvPr id="3" name="Title">
             <a:extLst xmlns:a="http://schemas.openxmlformats.org/drawingml/2006/main">
               <a:ext uri="{FF2B5EF4-FFF2-40B4-BE49-F238E27FC236}">
-                <a16:creationId xmlns:a16="http://schemas.microsoft.com/office/drawing/2014/main" id="{1CF5F5AC-764A-4392-BECA-101AE7B3FBC3}"/>
+                <a16:creationId xmlns:a16="http://schemas.microsoft.com/office/drawing/2014/main" id="{0D8DF9FD-38A9-419E-A485-79B495A98DD1}"/>
               </a:ext>
             </a:extLst>
           </p:cNvPr>
@@ -959,7 +1070,7 @@
           <p:cNvPr id="2" name="Subtitle">
             <a:extLst xmlns:a="http://schemas.openxmlformats.org/drawingml/2006/main">
               <a:ext uri="{FF2B5EF4-FFF2-40B4-BE49-F238E27FC236}">
-                <a16:creationId xmlns:a16="http://schemas.microsoft.com/office/drawing/2014/main" id="{41E64E59-5C0A-47DE-BC6C-CDFEBDA27491}"/>
+                <a16:creationId xmlns:a16="http://schemas.microsoft.com/office/drawing/2014/main" id="{AB1D4785-0599-463B-BDBA-EAA0B52A417A}"/>
               </a:ext>
             </a:extLst>
           </p:cNvPr>
@@ -1133,7 +1244,7 @@
           <p:cNvPr id="2" name="Section title">
             <a:extLst xmlns:a="http://schemas.openxmlformats.org/drawingml/2006/main">
               <a:ext uri="{FF2B5EF4-FFF2-40B4-BE49-F238E27FC236}">
-                <a16:creationId xmlns:a16="http://schemas.microsoft.com/office/drawing/2014/main" id="{644B5AC7-0EEB-4D6F-AAAF-935B273D3387}"/>
+                <a16:creationId xmlns:a16="http://schemas.microsoft.com/office/drawing/2014/main" id="{57928535-44E9-446A-B536-1ABEA75D0069}"/>
               </a:ext>
             </a:extLst>
           </p:cNvPr>
@@ -1307,7 +1418,7 @@
           <p:cNvPr id="3" name="Title">
             <a:extLst xmlns:a="http://schemas.openxmlformats.org/drawingml/2006/main">
               <a:ext uri="{FF2B5EF4-FFF2-40B4-BE49-F238E27FC236}">
-                <a16:creationId xmlns:a16="http://schemas.microsoft.com/office/drawing/2014/main" id="{E0EC3C54-5CCE-4F01-A88E-498DA5CA970A}"/>
+                <a16:creationId xmlns:a16="http://schemas.microsoft.com/office/drawing/2014/main" id="{D179F0E9-41C4-421E-B6E0-7C315AD9C4DE}"/>
               </a:ext>
             </a:extLst>
           </p:cNvPr>
@@ -1464,7 +1575,7 @@
           <p:cNvPr id="2" name="Body">
             <a:extLst xmlns:a="http://schemas.openxmlformats.org/drawingml/2006/main">
               <a:ext uri="{FF2B5EF4-FFF2-40B4-BE49-F238E27FC236}">
-                <a16:creationId xmlns:a16="http://schemas.microsoft.com/office/drawing/2014/main" id="{04D73584-A452-4DC1-8BFF-4F43E2C69FB0}"/>
+                <a16:creationId xmlns:a16="http://schemas.microsoft.com/office/drawing/2014/main" id="{828D7E05-F928-49CC-A5B5-C8716B73A46B}"/>
               </a:ext>
             </a:extLst>
           </p:cNvPr>
@@ -1638,7 +1749,7 @@
           <p:cNvPr id="4" name="Title">
             <a:extLst xmlns:a="http://schemas.openxmlformats.org/drawingml/2006/main">
               <a:ext uri="{FF2B5EF4-FFF2-40B4-BE49-F238E27FC236}">
-                <a16:creationId xmlns:a16="http://schemas.microsoft.com/office/drawing/2014/main" id="{C039708C-E1D2-4477-829F-FCE97D19C191}"/>
+                <a16:creationId xmlns:a16="http://schemas.microsoft.com/office/drawing/2014/main" id="{94BA8C28-6BB3-471C-8695-C43A9B08C391}"/>
               </a:ext>
             </a:extLst>
           </p:cNvPr>
@@ -1795,7 +1906,7 @@
           <p:cNvPr id="2" name="Left column">
             <a:extLst xmlns:a="http://schemas.openxmlformats.org/drawingml/2006/main">
               <a:ext uri="{FF2B5EF4-FFF2-40B4-BE49-F238E27FC236}">
-                <a16:creationId xmlns:a16="http://schemas.microsoft.com/office/drawing/2014/main" id="{46EA208E-8722-4ECA-B65A-101A2935BC3E}"/>
+                <a16:creationId xmlns:a16="http://schemas.microsoft.com/office/drawing/2014/main" id="{91CAF296-28DD-4C23-B776-6386CDEF06E1}"/>
               </a:ext>
             </a:extLst>
           </p:cNvPr>
@@ -1952,7 +2063,7 @@
           <p:cNvPr id="3" name="Right column">
             <a:extLst xmlns:a="http://schemas.openxmlformats.org/drawingml/2006/main">
               <a:ext uri="{FF2B5EF4-FFF2-40B4-BE49-F238E27FC236}">
-                <a16:creationId xmlns:a16="http://schemas.microsoft.com/office/drawing/2014/main" id="{5157A5E0-B74E-4453-8D6A-AAA7155041EA}"/>
+                <a16:creationId xmlns:a16="http://schemas.microsoft.com/office/drawing/2014/main" id="{45718407-0B03-4D4E-90B1-5A6C0B8CCAB6}"/>
               </a:ext>
             </a:extLst>
           </p:cNvPr>
@@ -2126,7 +2237,7 @@
           <p:cNvPr id="3" name="Title">
             <a:extLst xmlns:a="http://schemas.openxmlformats.org/drawingml/2006/main">
               <a:ext uri="{FF2B5EF4-FFF2-40B4-BE49-F238E27FC236}">
-                <a16:creationId xmlns:a16="http://schemas.microsoft.com/office/drawing/2014/main" id="{59CCB261-B295-47B2-828D-19AA18CC6B8B}"/>
+                <a16:creationId xmlns:a16="http://schemas.microsoft.com/office/drawing/2014/main" id="{2874E402-9DB7-4255-89A9-D7190266403D}"/>
               </a:ext>
             </a:extLst>
           </p:cNvPr>
@@ -2283,7 +2394,7 @@
           <p:cNvPr id="2" name="Left column">
             <a:extLst xmlns:a="http://schemas.openxmlformats.org/drawingml/2006/main">
               <a:ext uri="{FF2B5EF4-FFF2-40B4-BE49-F238E27FC236}">
-                <a16:creationId xmlns:a16="http://schemas.microsoft.com/office/drawing/2014/main" id="{DAF86459-D788-4A59-8A0A-7CC3A708A474}"/>
+                <a16:creationId xmlns:a16="http://schemas.microsoft.com/office/drawing/2014/main" id="{E1B8B523-5A9E-4B75-ABC4-A50D488071CA}"/>
               </a:ext>
             </a:extLst>
           </p:cNvPr>
@@ -2478,12 +2589,12 @@
   </p:cSld>
   <p:clrMap bg1="lt1" tx1="dk1" bg2="lt2" tx2="dk2" accent1="accent1" accent2="accent2" accent3="accent3" accent4="accent4" accent5="accent5" accent6="accent6" hlink="hlink" folHlink="folHlink"/>
   <p:sldLayoutIdLst>
-    <p:sldLayoutId xmlns:r="http://schemas.openxmlformats.org/officeDocument/2006/relationships" id="2147483649" r:id="R05a5e81b0f1c4e54"/>
-    <p:sldLayoutId xmlns:r="http://schemas.openxmlformats.org/officeDocument/2006/relationships" id="2147483650" r:id="Rf4c0cc9282cc4730"/>
-    <p:sldLayoutId xmlns:r="http://schemas.openxmlformats.org/officeDocument/2006/relationships" id="2147483651" r:id="R1327359c55e84e30"/>
-    <p:sldLayoutId xmlns:r="http://schemas.openxmlformats.org/officeDocument/2006/relationships" id="2147483652" r:id="R325f4c5ea32d43b9"/>
-    <p:sldLayoutId xmlns:r="http://schemas.openxmlformats.org/officeDocument/2006/relationships" id="2147483653" r:id="Rb887e83b1d1f447d"/>
-    <p:sldLayoutId xmlns:r="http://schemas.openxmlformats.org/officeDocument/2006/relationships" id="2147483654" r:id="Re10b7ce6fd3744f0"/>
+    <p:sldLayoutId xmlns:r="http://schemas.openxmlformats.org/officeDocument/2006/relationships" id="2147483649" r:id="R7e49addc1ec940b9"/>
+    <p:sldLayoutId xmlns:r="http://schemas.openxmlformats.org/officeDocument/2006/relationships" id="2147483650" r:id="R9032ab64745f4b9f"/>
+    <p:sldLayoutId xmlns:r="http://schemas.openxmlformats.org/officeDocument/2006/relationships" id="2147483651" r:id="Re97901e19e00493b"/>
+    <p:sldLayoutId xmlns:r="http://schemas.openxmlformats.org/officeDocument/2006/relationships" id="2147483652" r:id="Rfa105abbde9a4700"/>
+    <p:sldLayoutId xmlns:r="http://schemas.openxmlformats.org/officeDocument/2006/relationships" id="2147483653" r:id="Rc9a4834d9dc243e9"/>
+    <p:sldLayoutId xmlns:r="http://schemas.openxmlformats.org/officeDocument/2006/relationships" id="2147483654" r:id="R1dfc1a2cedfb4ae1"/>
   </p:sldLayoutIdLst>
   <p:txStyles>
     <p:titleStyle>
@@ -5272,2263 +5383,6 @@
   <c:lang val="en-US"/>
   <c:chart>
     <c:plotArea>
-      <c:scatterChart>
-        <c:scatterStyle val="marker"/>
-        <c:varyColors val="0"/>
-        <c:ser>
-          <c:idx val="0"/>
-          <c:order val="0"/>
-          <c:tx>
-            <c:v>Africa</c:v>
-          </c:tx>
-          <c:spPr>
-            <a:ln xmlns:a="http://schemas.openxmlformats.org/drawingml/2006/main" w="0">
-              <a:noFill/>
-            </a:ln>
-          </c:spPr>
-          <c:marker>
-            <c:symbol val="circle"/>
-            <c:size val="4"/>
-            <c:spPr>
-              <a:solidFill xmlns:a="http://schemas.openxmlformats.org/drawingml/2006/main">
-                <a:srgbClr val="94A480"/>
-              </a:solidFill>
-            </c:spPr>
-          </c:marker>
-          <c:xVal>
-            <c:numRef>
-              <c:f>'Chart Data'!$A$2:$A$53</c:f>
-              <c:numCache>
-                <c:formatCode>General</c:formatCode>
-                <c:ptCount val="52"/>
-                <c:pt idx="0">
-                  <c:v>10800</c:v>
-                </c:pt>
-                <c:pt idx="1">
-                  <c:v>6030</c:v>
-                </c:pt>
-                <c:pt idx="2">
-                  <c:v>3190</c:v>
-                </c:pt>
-                <c:pt idx="3">
-                  <c:v>13500</c:v>
-                </c:pt>
-                <c:pt idx="4">
-                  <c:v>2090</c:v>
-                </c:pt>
-                <c:pt idx="5">
-                  <c:v>711</c:v>
-                </c:pt>
-                <c:pt idx="6">
-                  <c:v>3680</c:v>
-                </c:pt>
-                <c:pt idx="7">
-                  <c:v>847</c:v>
-                </c:pt>
-                <c:pt idx="8">
-                  <c:v>1490</c:v>
-                </c:pt>
-                <c:pt idx="9">
-                  <c:v>3220</c:v>
-                </c:pt>
-                <c:pt idx="10">
-                  <c:v>1040</c:v>
-                </c:pt>
-                <c:pt idx="11">
-                  <c:v>5090</c:v>
-                </c:pt>
-                <c:pt idx="12">
-                  <c:v>4770</c:v>
-                </c:pt>
-                <c:pt idx="13">
-                  <c:v>12000</c:v>
-                </c:pt>
-                <c:pt idx="14">
-                  <c:v>14900</c:v>
-                </c:pt>
-                <c:pt idx="15">
-                  <c:v>1820</c:v>
-                </c:pt>
-                <c:pt idx="16">
-                  <c:v>8080</c:v>
-                </c:pt>
-                <c:pt idx="17">
-                  <c:v>2250</c:v>
-                </c:pt>
-                <c:pt idx="18">
-                  <c:v>13900</c:v>
-                </c:pt>
-                <c:pt idx="19">
-                  <c:v>2020</c:v>
-                </c:pt>
-                <c:pt idx="20">
-                  <c:v>5280</c:v>
-                </c:pt>
-                <c:pt idx="21">
-                  <c:v>2600</c:v>
-                </c:pt>
-                <c:pt idx="22">
-                  <c:v>1760</c:v>
-                </c:pt>
-                <c:pt idx="23">
-                  <c:v>4500</c:v>
-                </c:pt>
-                <c:pt idx="24">
-                  <c:v>2280</c:v>
-                </c:pt>
-                <c:pt idx="25">
-                  <c:v>1380</c:v>
-                </c:pt>
-                <c:pt idx="26">
-                  <c:v>15600</c:v>
-                </c:pt>
-                <c:pt idx="27">
-                  <c:v>1440</c:v>
-                </c:pt>
-                <c:pt idx="28">
-                  <c:v>1490</c:v>
-                </c:pt>
-                <c:pt idx="29">
-                  <c:v>2120</c:v>
-                </c:pt>
-                <c:pt idx="30">
-                  <c:v>5400</c:v>
-                </c:pt>
-                <c:pt idx="31">
-                  <c:v>20200</c:v>
-                </c:pt>
-                <c:pt idx="32">
-                  <c:v>7540</c:v>
-                </c:pt>
-                <c:pt idx="33">
-                  <c:v>1230</c:v>
-                </c:pt>
-                <c:pt idx="34">
-                  <c:v>9030</c:v>
-                </c:pt>
-                <c:pt idx="35">
-                  <c:v>1210</c:v>
-                </c:pt>
-                <c:pt idx="36">
-                  <c:v>4870</c:v>
-                </c:pt>
-                <c:pt idx="37">
-                  <c:v>2070</c:v>
-                </c:pt>
-                <c:pt idx="38">
-                  <c:v>4060</c:v>
-                </c:pt>
-                <c:pt idx="39">
-                  <c:v>3380</c:v>
-                </c:pt>
-                <c:pt idx="40">
-                  <c:v>27700</c:v>
-                </c:pt>
-                <c:pt idx="41">
-                  <c:v>1590</c:v>
-                </c:pt>
-                <c:pt idx="42">
-                  <c:v>1140</c:v>
-                </c:pt>
-                <c:pt idx="43">
-                  <c:v>12800</c:v>
-                </c:pt>
-                <c:pt idx="44">
-                  <c:v>387</c:v>
-                </c:pt>
-                <c:pt idx="45">
-                  <c:v>3870</c:v>
-                </c:pt>
-                <c:pt idx="46">
-                  <c:v>2550</c:v>
-                </c:pt>
-                <c:pt idx="47">
-                  <c:v>2060</c:v>
-                </c:pt>
-                <c:pt idx="48">
-                  <c:v>10000</c:v>
-                </c:pt>
-                <c:pt idx="49">
-                  <c:v>2240</c:v>
-                </c:pt>
-                <c:pt idx="50">
-                  <c:v>3130</c:v>
-                </c:pt>
-                <c:pt idx="51">
-                  <c:v>1990</c:v>
-                </c:pt>
-              </c:numCache>
-            </c:numRef>
-          </c:xVal>
-          <c:yVal>
-            <c:numRef>
-              <c:f>'Chart Data'!$B$2:$B$53</c:f>
-              <c:numCache>
-                <c:formatCode>General</c:formatCode>
-                <c:ptCount val="52"/>
-                <c:pt idx="0">
-                  <c:v>74</c:v>
-                </c:pt>
-                <c:pt idx="1">
-                  <c:v>64</c:v>
-                </c:pt>
-                <c:pt idx="2">
-                  <c:v>64</c:v>
-                </c:pt>
-                <c:pt idx="3">
-                  <c:v>62</c:v>
-                </c:pt>
-                <c:pt idx="4">
-                  <c:v>61</c:v>
-                </c:pt>
-                <c:pt idx="5">
-                  <c:v>63</c:v>
-                </c:pt>
-                <c:pt idx="6">
-                  <c:v>62</c:v>
-                </c:pt>
-                <c:pt idx="7">
-                  <c:v>52</c:v>
-                </c:pt>
-                <c:pt idx="8">
-                  <c:v>59</c:v>
-                </c:pt>
-                <c:pt idx="9">
-                  <c:v>68</c:v>
-                </c:pt>
-                <c:pt idx="10">
-                  <c:v>64</c:v>
-                </c:pt>
-                <c:pt idx="11">
-                  <c:v>63</c:v>
-                </c:pt>
-                <c:pt idx="12">
-                  <c:v>66</c:v>
-                </c:pt>
-                <c:pt idx="13">
-                  <c:v>70</c:v>
-                </c:pt>
-                <c:pt idx="14">
-                  <c:v>65</c:v>
-                </c:pt>
-                <c:pt idx="15">
-                  <c:v>63</c:v>
-                </c:pt>
-                <c:pt idx="16">
-                  <c:v>57</c:v>
-                </c:pt>
-                <c:pt idx="17">
-                  <c:v>68</c:v>
-                </c:pt>
-                <c:pt idx="18">
-                  <c:v>67</c:v>
-                </c:pt>
-                <c:pt idx="19">
-                  <c:v>65</c:v>
-                </c:pt>
-                <c:pt idx="20">
-                  <c:v>65</c:v>
-                </c:pt>
-                <c:pt idx="21">
-                  <c:v>60</c:v>
-                </c:pt>
-                <c:pt idx="22">
-                  <c:v>60</c:v>
-                </c:pt>
-                <c:pt idx="23">
-                  <c:v>66</c:v>
-                </c:pt>
-                <c:pt idx="24">
-                  <c:v>52</c:v>
-                </c:pt>
-                <c:pt idx="25">
-                  <c:v>65</c:v>
-                </c:pt>
-                <c:pt idx="26">
-                  <c:v>75</c:v>
-                </c:pt>
-                <c:pt idx="27">
-                  <c:v>64</c:v>
-                </c:pt>
-                <c:pt idx="28">
-                  <c:v>64</c:v>
-                </c:pt>
-                <c:pt idx="29">
-                  <c:v>60</c:v>
-                </c:pt>
-                <c:pt idx="30">
-                  <c:v>69</c:v>
-                </c:pt>
-                <c:pt idx="31">
-                  <c:v>74</c:v>
-                </c:pt>
-                <c:pt idx="32">
-                  <c:v>73</c:v>
-                </c:pt>
-                <c:pt idx="33">
-                  <c:v>58</c:v>
-                </c:pt>
-                <c:pt idx="34">
-                  <c:v>65</c:v>
-                </c:pt>
-                <c:pt idx="35">
-                  <c:v>61</c:v>
-                </c:pt>
-                <c:pt idx="36">
-                  <c:v>64</c:v>
-                </c:pt>
-                <c:pt idx="37">
-                  <c:v>69</c:v>
-                </c:pt>
-                <c:pt idx="38">
-                  <c:v>70</c:v>
-                </c:pt>
-                <c:pt idx="39">
-                  <c:v>68</c:v>
-                </c:pt>
-                <c:pt idx="40">
-                  <c:v>72</c:v>
-                </c:pt>
-                <c:pt idx="41">
-                  <c:v>61</c:v>
-                </c:pt>
-                <c:pt idx="42">
-                  <c:v>57</c:v>
-                </c:pt>
-                <c:pt idx="43">
-                  <c:v>64</c:v>
-                </c:pt>
-                <c:pt idx="44">
-                  <c:v>63</c:v>
-                </c:pt>
-                <c:pt idx="45">
-                  <c:v>70</c:v>
-                </c:pt>
-                <c:pt idx="46">
-                  <c:v>66</c:v>
-                </c:pt>
-                <c:pt idx="47">
-                  <c:v>65</c:v>
-                </c:pt>
-                <c:pt idx="48">
-                  <c:v>77</c:v>
-                </c:pt>
-                <c:pt idx="49">
-                  <c:v>66</c:v>
-                </c:pt>
-                <c:pt idx="50">
-                  <c:v>62</c:v>
-                </c:pt>
-                <c:pt idx="51">
-                  <c:v>60</c:v>
-                </c:pt>
-              </c:numCache>
-            </c:numRef>
-          </c:yVal>
-        </c:ser>
-        <c:ser>
-          <c:idx val="1"/>
-          <c:order val="1"/>
-          <c:tx>
-            <c:v>Americas</c:v>
-          </c:tx>
-          <c:spPr>
-            <a:ln xmlns:a="http://schemas.openxmlformats.org/drawingml/2006/main" w="0">
-              <a:noFill/>
-            </a:ln>
-          </c:spPr>
-          <c:marker>
-            <c:symbol val="circle"/>
-            <c:size val="4"/>
-            <c:spPr>
-              <a:solidFill xmlns:a="http://schemas.openxmlformats.org/drawingml/2006/main">
-                <a:srgbClr val="B59A72"/>
-              </a:solidFill>
-            </c:spPr>
-          </c:marker>
-          <c:xVal>
-            <c:numRef>
-              <c:f>'Chart Data'!$C$2:$C$33</c:f>
-              <c:numCache>
-                <c:formatCode>General</c:formatCode>
-                <c:ptCount val="32"/>
-                <c:pt idx="0">
-                  <c:v>18500</c:v>
-                </c:pt>
-                <c:pt idx="1">
-                  <c:v>19600</c:v>
-                </c:pt>
-                <c:pt idx="2">
-                  <c:v>26100</c:v>
-                </c:pt>
-                <c:pt idx="3">
-                  <c:v>13900</c:v>
-                </c:pt>
-                <c:pt idx="4">
-                  <c:v>7530</c:v>
-                </c:pt>
-                <c:pt idx="5">
-                  <c:v>14100</c:v>
-                </c:pt>
-                <c:pt idx="6">
-                  <c:v>46100</c:v>
-                </c:pt>
-                <c:pt idx="7">
-                  <c:v>23100</c:v>
-                </c:pt>
-                <c:pt idx="8">
-                  <c:v>13400</c:v>
-                </c:pt>
-                <c:pt idx="9">
-                  <c:v>19700</c:v>
-                </c:pt>
-                <c:pt idx="10">
-                  <c:v>8430</c:v>
-                </c:pt>
-                <c:pt idx="11">
-                  <c:v>10300</c:v>
-                </c:pt>
-                <c:pt idx="12">
-                  <c:v>16800</c:v>
-                </c:pt>
-                <c:pt idx="13">
-                  <c:v>9830</c:v>
-                </c:pt>
-                <c:pt idx="14">
-                  <c:v>8240</c:v>
-                </c:pt>
-                <c:pt idx="15">
-                  <c:v>13200</c:v>
-                </c:pt>
-                <c:pt idx="16">
-                  <c:v>8390</c:v>
-                </c:pt>
-                <c:pt idx="17">
-                  <c:v>18400</c:v>
-                </c:pt>
-                <c:pt idx="18">
-                  <c:v>2970</c:v>
-                </c:pt>
-                <c:pt idx="19">
-                  <c:v>5030</c:v>
-                </c:pt>
-                <c:pt idx="20">
-                  <c:v>9210</c:v>
-                </c:pt>
-                <c:pt idx="21">
-                  <c:v>18200</c:v>
-                </c:pt>
-                <c:pt idx="22">
-                  <c:v>5230</c:v>
-                </c:pt>
-                <c:pt idx="23">
-                  <c:v>26600</c:v>
-                </c:pt>
-                <c:pt idx="24">
-                  <c:v>13300</c:v>
-                </c:pt>
-                <c:pt idx="25">
-                  <c:v>11200</c:v>
-                </c:pt>
-                <c:pt idx="26">
-                  <c:v>11700</c:v>
-                </c:pt>
-                <c:pt idx="27">
-                  <c:v>13700</c:v>
-                </c:pt>
-                <c:pt idx="28">
-                  <c:v>15300</c:v>
-                </c:pt>
-                <c:pt idx="29">
-                  <c:v>23400</c:v>
-                </c:pt>
-                <c:pt idx="30">
-                  <c:v>22000</c:v>
-                </c:pt>
-                <c:pt idx="31">
-                  <c:v>5440</c:v>
-                </c:pt>
-              </c:numCache>
-            </c:numRef>
-          </c:xVal>
-          <c:yVal>
-            <c:numRef>
-              <c:f>'Chart Data'!$D$2:$D$33</c:f>
-              <c:numCache>
-                <c:formatCode>General</c:formatCode>
-                <c:ptCount val="32"/>
-                <c:pt idx="0">
-                  <c:v>76</c:v>
-                </c:pt>
-                <c:pt idx="1">
-                  <c:v>75</c:v>
-                </c:pt>
-                <c:pt idx="2">
-                  <c:v>74</c:v>
-                </c:pt>
-                <c:pt idx="3">
-                  <c:v>76</c:v>
-                </c:pt>
-                <c:pt idx="4">
-                  <c:v>73</c:v>
-                </c:pt>
-                <c:pt idx="5">
-                  <c:v>74</c:v>
-                </c:pt>
-                <c:pt idx="6">
-                  <c:v>81</c:v>
-                </c:pt>
-                <c:pt idx="7">
-                  <c:v>79</c:v>
-                </c:pt>
-                <c:pt idx="8">
-                  <c:v>78</c:v>
-                </c:pt>
-                <c:pt idx="9">
-                  <c:v>79</c:v>
-                </c:pt>
-                <c:pt idx="10">
-                  <c:v>78</c:v>
-                </c:pt>
-                <c:pt idx="11">
-                  <c:v>72</c:v>
-                </c:pt>
-                <c:pt idx="12">
-                  <c:v>72</c:v>
-                </c:pt>
-                <c:pt idx="13">
-                  <c:v>71</c:v>
-                </c:pt>
-                <c:pt idx="14">
-                  <c:v>74</c:v>
-                </c:pt>
-                <c:pt idx="15">
-                  <c:v>73</c:v>
-                </c:pt>
-                <c:pt idx="16">
-                  <c:v>71</c:v>
-                </c:pt>
-                <c:pt idx="17">
-                  <c:v>66</c:v>
-                </c:pt>
-                <c:pt idx="18">
-                  <c:v>63</c:v>
-                </c:pt>
-                <c:pt idx="19">
-                  <c:v>70</c:v>
-                </c:pt>
-                <c:pt idx="20">
-                  <c:v>76</c:v>
-                </c:pt>
-                <c:pt idx="21">
-                  <c:v>71</c:v>
-                </c:pt>
-                <c:pt idx="22">
-                  <c:v>73</c:v>
-                </c:pt>
-                <c:pt idx="23">
-                  <c:v>78</c:v>
-                </c:pt>
-                <c:pt idx="24">
-                  <c:v>76</c:v>
-                </c:pt>
-                <c:pt idx="25">
-                  <c:v>77</c:v>
-                </c:pt>
-                <c:pt idx="26">
-                  <c:v>75</c:v>
-                </c:pt>
-                <c:pt idx="27">
-                  <c:v>72</c:v>
-                </c:pt>
-                <c:pt idx="28">
-                  <c:v>73</c:v>
-                </c:pt>
-                <c:pt idx="29">
-                  <c:v>75</c:v>
-                </c:pt>
-                <c:pt idx="30">
-                  <c:v>78</c:v>
-                </c:pt>
-                <c:pt idx="31">
-                  <c:v>73</c:v>
-                </c:pt>
-              </c:numCache>
-            </c:numRef>
-          </c:yVal>
-        </c:ser>
-        <c:ser>
-          <c:idx val="2"/>
-          <c:order val="2"/>
-          <c:tx>
-            <c:v>Asia</c:v>
-          </c:tx>
-          <c:spPr>
-            <a:ln xmlns:a="http://schemas.openxmlformats.org/drawingml/2006/main" w="0">
-              <a:noFill/>
-            </a:ln>
-          </c:spPr>
-          <c:marker>
-            <c:symbol val="circle"/>
-            <c:size val="4"/>
-            <c:spPr>
-              <a:solidFill xmlns:a="http://schemas.openxmlformats.org/drawingml/2006/main">
-                <a:srgbClr val="9CAEB0"/>
-              </a:solidFill>
-            </c:spPr>
-          </c:marker>
-          <c:xVal>
-            <c:numRef>
-              <c:f>'Chart Data'!$E$2:$E$41</c:f>
-              <c:numCache>
-                <c:formatCode>General</c:formatCode>
-                <c:ptCount val="40"/>
-                <c:pt idx="0">
-                  <c:v>1970</c:v>
-                </c:pt>
-                <c:pt idx="1">
-                  <c:v>13300</c:v>
-                </c:pt>
-                <c:pt idx="2">
-                  <c:v>13700</c:v>
-                </c:pt>
-                <c:pt idx="3">
-                  <c:v>48000</c:v>
-                </c:pt>
-                <c:pt idx="4">
-                  <c:v>5590</c:v>
-                </c:pt>
-                <c:pt idx="5">
-                  <c:v>10500</c:v>
-                </c:pt>
-                <c:pt idx="6">
-                  <c:v>4280</c:v>
-                </c:pt>
-                <c:pt idx="7">
-                  <c:v>16300</c:v>
-                </c:pt>
-                <c:pt idx="8">
-                  <c:v>38300</c:v>
-                </c:pt>
-                <c:pt idx="9">
-                  <c:v>13900</c:v>
-                </c:pt>
-                <c:pt idx="10">
-                  <c:v>6140</c:v>
-                </c:pt>
-                <c:pt idx="11">
-                  <c:v>11500</c:v>
-                </c:pt>
-                <c:pt idx="12">
-                  <c:v>8860</c:v>
-                </c:pt>
-                <c:pt idx="13">
-                  <c:v>39700</c:v>
-                </c:pt>
-                <c:pt idx="14">
-                  <c:v>9060</c:v>
-                </c:pt>
-                <c:pt idx="15">
-                  <c:v>43800</c:v>
-                </c:pt>
-                <c:pt idx="16">
-                  <c:v>4810</c:v>
-                </c:pt>
-                <c:pt idx="17">
-                  <c:v>13800</c:v>
-                </c:pt>
-                <c:pt idx="18">
-                  <c:v>25800</c:v>
-                </c:pt>
-                <c:pt idx="19">
-                  <c:v>13800</c:v>
-                </c:pt>
-                <c:pt idx="20">
-                  <c:v>11700</c:v>
-                </c:pt>
-                <c:pt idx="21">
-                  <c:v>4620</c:v>
-                </c:pt>
-                <c:pt idx="22">
-                  <c:v>3760</c:v>
-                </c:pt>
-                <c:pt idx="23">
-                  <c:v>1810</c:v>
-                </c:pt>
-                <c:pt idx="24">
-                  <c:v>33100</c:v>
-                </c:pt>
-                <c:pt idx="25">
-                  <c:v>5000</c:v>
-                </c:pt>
-                <c:pt idx="26">
-                  <c:v>5400</c:v>
-                </c:pt>
-                <c:pt idx="27">
-                  <c:v>7770</c:v>
-                </c:pt>
-                <c:pt idx="28">
-                  <c:v>89000</c:v>
-                </c:pt>
-                <c:pt idx="29">
-                  <c:v>44300</c:v>
-                </c:pt>
-                <c:pt idx="30">
-                  <c:v>94200</c:v>
-                </c:pt>
-                <c:pt idx="31">
-                  <c:v>42400</c:v>
-                </c:pt>
-                <c:pt idx="32">
-                  <c:v>12900</c:v>
-                </c:pt>
-                <c:pt idx="33">
-                  <c:v>3520</c:v>
-                </c:pt>
-                <c:pt idx="34">
-                  <c:v>3650</c:v>
-                </c:pt>
-                <c:pt idx="35">
-                  <c:v>16900</c:v>
-                </c:pt>
-                <c:pt idx="36">
-                  <c:v>4860</c:v>
-                </c:pt>
-                <c:pt idx="37">
-                  <c:v>28500</c:v>
-                </c:pt>
-                <c:pt idx="38">
-                  <c:v>7410</c:v>
-                </c:pt>
-                <c:pt idx="39">
-                  <c:v>1780</c:v>
-                </c:pt>
-              </c:numCache>
-            </c:numRef>
-          </c:xVal>
-          <c:yVal>
-            <c:numRef>
-              <c:f>'Chart Data'!$F$2:$F$41</c:f>
-              <c:numCache>
-                <c:formatCode>General</c:formatCode>
-                <c:ptCount val="40"/>
-                <c:pt idx="0">
-                  <c:v>62</c:v>
-                </c:pt>
-                <c:pt idx="1">
-                  <c:v>72</c:v>
-                </c:pt>
-                <c:pt idx="2">
-                  <c:v>64</c:v>
-                </c:pt>
-                <c:pt idx="3">
-                  <c:v>76</c:v>
-                </c:pt>
-                <c:pt idx="4">
-                  <c:v>73</c:v>
-                </c:pt>
-                <c:pt idx="5">
-                  <c:v>73</c:v>
-                </c:pt>
-                <c:pt idx="6">
-                  <c:v>69</c:v>
-                </c:pt>
-                <c:pt idx="7">
-                  <c:v>77</c:v>
-                </c:pt>
-                <c:pt idx="8">
-                  <c:v>80</c:v>
-                </c:pt>
-                <c:pt idx="9">
-                  <c:v>72</c:v>
-                </c:pt>
-                <c:pt idx="10">
-                  <c:v>70</c:v>
-                </c:pt>
-                <c:pt idx="11">
-                  <c:v>69</c:v>
-                </c:pt>
-                <c:pt idx="12">
-                  <c:v>70</c:v>
-                </c:pt>
-                <c:pt idx="13">
-                  <c:v>82</c:v>
-                </c:pt>
-                <c:pt idx="14">
-                  <c:v>77</c:v>
-                </c:pt>
-                <c:pt idx="15">
-                  <c:v>78</c:v>
-                </c:pt>
-                <c:pt idx="16">
-                  <c:v>71</c:v>
-                </c:pt>
-                <c:pt idx="17">
-                  <c:v>75</c:v>
-                </c:pt>
-                <c:pt idx="18">
-                  <c:v>75</c:v>
-                </c:pt>
-                <c:pt idx="19">
-                  <c:v>78</c:v>
-                </c:pt>
-                <c:pt idx="20">
-                  <c:v>68</c:v>
-                </c:pt>
-                <c:pt idx="21">
-                  <c:v>69</c:v>
-                </c:pt>
-                <c:pt idx="22">
-                  <c:v>70</c:v>
-                </c:pt>
-                <c:pt idx="23">
-                  <c:v>73</c:v>
-                </c:pt>
-                <c:pt idx="24">
-                  <c:v>70</c:v>
-                </c:pt>
-                <c:pt idx="25">
-                  <c:v>65</c:v>
-                </c:pt>
-                <c:pt idx="26">
-                  <c:v>74</c:v>
-                </c:pt>
-                <c:pt idx="27">
-                  <c:v>72</c:v>
-                </c:pt>
-                <c:pt idx="28">
-                  <c:v>74</c:v>
-                </c:pt>
-                <c:pt idx="29">
-                  <c:v>73</c:v>
-                </c:pt>
-                <c:pt idx="30">
-                  <c:v>83</c:v>
-                </c:pt>
-                <c:pt idx="31">
-                  <c:v>82</c:v>
-                </c:pt>
-                <c:pt idx="32">
-                  <c:v>77</c:v>
-                </c:pt>
-                <c:pt idx="33">
-                  <c:v>74</c:v>
-                </c:pt>
-                <c:pt idx="34">
-                  <c:v>66</c:v>
-                </c:pt>
-                <c:pt idx="35">
-                  <c:v>78</c:v>
-                </c:pt>
-                <c:pt idx="36">
-                  <c:v>70</c:v>
-                </c:pt>
-                <c:pt idx="37">
-                  <c:v>76</c:v>
-                </c:pt>
-                <c:pt idx="38">
-                  <c:v>67</c:v>
-                </c:pt>
-                <c:pt idx="39">
-                  <c:v>67</c:v>
-                </c:pt>
-              </c:numCache>
-            </c:numRef>
-          </c:yVal>
-        </c:ser>
-        <c:ser>
-          <c:idx val="3"/>
-          <c:order val="3"/>
-          <c:tx>
-            <c:v>Europe</c:v>
-          </c:tx>
-          <c:spPr>
-            <a:ln xmlns:a="http://schemas.openxmlformats.org/drawingml/2006/main" w="0">
-              <a:noFill/>
-            </a:ln>
-          </c:spPr>
-          <c:marker>
-            <c:symbol val="circle"/>
-            <c:size val="4"/>
-            <c:spPr>
-              <a:solidFill xmlns:a="http://schemas.openxmlformats.org/drawingml/2006/main">
-                <a:srgbClr val="AE9EB0"/>
-              </a:solidFill>
-            </c:spPr>
-          </c:marker>
-          <c:xVal>
-            <c:numRef>
-              <c:f>'Chart Data'!$G$2:$G$40</c:f>
-              <c:numCache>
-                <c:formatCode>General</c:formatCode>
-                <c:ptCount val="39"/>
-                <c:pt idx="0">
-                  <c:v>13300</c:v>
-                </c:pt>
-                <c:pt idx="1">
-                  <c:v>49700</c:v>
-                </c:pt>
-                <c:pt idx="2">
-                  <c:v>52100</c:v>
-                </c:pt>
-                <c:pt idx="3">
-                  <c:v>19200</c:v>
-                </c:pt>
-                <c:pt idx="4">
-                  <c:v>48700</c:v>
-                </c:pt>
-                <c:pt idx="5">
-                  <c:v>14600</c:v>
-                </c:pt>
-                <c:pt idx="6">
-                  <c:v>22500</c:v>
-                </c:pt>
-                <c:pt idx="7">
-                  <c:v>27000</c:v>
-                </c:pt>
-                <c:pt idx="8">
-                  <c:v>38600</c:v>
-                </c:pt>
-                <c:pt idx="9">
-                  <c:v>54500</c:v>
-                </c:pt>
-                <c:pt idx="10">
-                  <c:v>36100</c:v>
-                </c:pt>
-                <c:pt idx="11">
-                  <c:v>47500</c:v>
-                </c:pt>
-                <c:pt idx="12">
-                  <c:v>42400</c:v>
-                </c:pt>
-                <c:pt idx="13">
-                  <c:v>51600</c:v>
-                </c:pt>
-                <c:pt idx="14">
-                  <c:v>26900</c:v>
-                </c:pt>
-                <c:pt idx="15">
-                  <c:v>31300</c:v>
-                </c:pt>
-                <c:pt idx="16">
-                  <c:v>51200</c:v>
-                </c:pt>
-                <c:pt idx="17">
-                  <c:v>90100</c:v>
-                </c:pt>
-                <c:pt idx="18">
-                  <c:v>38600</c:v>
-                </c:pt>
-                <c:pt idx="19">
-                  <c:v>29800</c:v>
-                </c:pt>
-                <c:pt idx="20">
-                  <c:v>37100</c:v>
-                </c:pt>
-                <c:pt idx="21">
-                  <c:v>110000</c:v>
-                </c:pt>
-                <c:pt idx="22">
-                  <c:v>40800</c:v>
-                </c:pt>
-                <c:pt idx="23">
-                  <c:v>208000</c:v>
-                </c:pt>
-                <c:pt idx="24">
-                  <c:v>18300</c:v>
-                </c:pt>
-                <c:pt idx="25">
-                  <c:v>53600</c:v>
-                </c:pt>
-                <c:pt idx="26">
-                  <c:v>63800</c:v>
-                </c:pt>
-                <c:pt idx="27">
-                  <c:v>32500</c:v>
-                </c:pt>
-                <c:pt idx="28">
-                  <c:v>32100</c:v>
-                </c:pt>
-                <c:pt idx="29">
-                  <c:v>29100</c:v>
-                </c:pt>
-                <c:pt idx="30">
-                  <c:v>26600</c:v>
-                </c:pt>
-                <c:pt idx="31">
-                  <c:v>56400</c:v>
-                </c:pt>
-                <c:pt idx="32">
-                  <c:v>18200</c:v>
-                </c:pt>
-                <c:pt idx="33">
-                  <c:v>31000</c:v>
-                </c:pt>
-                <c:pt idx="34">
-                  <c:v>37100</c:v>
-                </c:pt>
-                <c:pt idx="35">
-                  <c:v>35700</c:v>
-                </c:pt>
-                <c:pt idx="36">
-                  <c:v>51000</c:v>
-                </c:pt>
-                <c:pt idx="37">
-                  <c:v>67000</c:v>
-                </c:pt>
-                <c:pt idx="38">
-                  <c:v>12400</c:v>
-                </c:pt>
-              </c:numCache>
-            </c:numRef>
-          </c:xVal>
-          <c:yVal>
-            <c:numRef>
-              <c:f>'Chart Data'!$H$2:$H$40</c:f>
-              <c:numCache>
-                <c:formatCode>General</c:formatCode>
-                <c:ptCount val="39"/>
-                <c:pt idx="0">
-                  <c:v>76</c:v>
-                </c:pt>
-                <c:pt idx="1">
-                  <c:v>78</c:v>
-                </c:pt>
-                <c:pt idx="2">
-                  <c:v>81</c:v>
-                </c:pt>
-                <c:pt idx="3">
-                  <c:v>72</c:v>
-                </c:pt>
-                <c:pt idx="4">
-                  <c:v>80</c:v>
-                </c:pt>
-                <c:pt idx="5">
-                  <c:v>76</c:v>
-                </c:pt>
-                <c:pt idx="6">
-                  <c:v>72</c:v>
-                </c:pt>
-                <c:pt idx="7">
-                  <c:v>77</c:v>
-                </c:pt>
-                <c:pt idx="8">
-                  <c:v>78</c:v>
-                </c:pt>
-                <c:pt idx="9">
-                  <c:v>81</c:v>
-                </c:pt>
-                <c:pt idx="10">
-                  <c:v>77</c:v>
-                </c:pt>
-                <c:pt idx="11">
-                  <c:v>81</c:v>
-                </c:pt>
-                <c:pt idx="12">
-                  <c:v>82</c:v>
-                </c:pt>
-                <c:pt idx="13">
-                  <c:v>80</c:v>
-                </c:pt>
-                <c:pt idx="14">
-                  <c:v>80</c:v>
-                </c:pt>
-                <c:pt idx="15">
-                  <c:v>75</c:v>
-                </c:pt>
-                <c:pt idx="16">
-                  <c:v>84</c:v>
-                </c:pt>
-                <c:pt idx="17">
-                  <c:v>82</c:v>
-                </c:pt>
-                <c:pt idx="18">
-                  <c:v>82</c:v>
-                </c:pt>
-                <c:pt idx="19">
-                  <c:v>75</c:v>
-                </c:pt>
-                <c:pt idx="20">
-                  <c:v>75</c:v>
-                </c:pt>
-                <c:pt idx="21">
-                  <c:v>82</c:v>
-                </c:pt>
-                <c:pt idx="22">
-                  <c:v>82</c:v>
-                </c:pt>
-                <c:pt idx="23">
-                  <c:v>80</c:v>
-                </c:pt>
-                <c:pt idx="24">
-                  <c:v>75</c:v>
-                </c:pt>
-                <c:pt idx="25">
-                  <c:v>81</c:v>
-                </c:pt>
-                <c:pt idx="26">
-                  <c:v>83</c:v>
-                </c:pt>
-                <c:pt idx="27">
-                  <c:v>77</c:v>
-                </c:pt>
-                <c:pt idx="28">
-                  <c:v>81</c:v>
-                </c:pt>
-                <c:pt idx="29">
-                  <c:v>74</c:v>
-                </c:pt>
-                <c:pt idx="30">
-                  <c:v>70</c:v>
-                </c:pt>
-                <c:pt idx="31">
-                  <c:v>78</c:v>
-                </c:pt>
-                <c:pt idx="32">
-                  <c:v>74</c:v>
-                </c:pt>
-                <c:pt idx="33">
-                  <c:v>76</c:v>
-                </c:pt>
-                <c:pt idx="34">
-                  <c:v>80</c:v>
-                </c:pt>
-                <c:pt idx="35">
-                  <c:v>81</c:v>
-                </c:pt>
-                <c:pt idx="36">
-                  <c:v>82</c:v>
-                </c:pt>
-                <c:pt idx="37">
-                  <c:v>83</c:v>
-                </c:pt>
-                <c:pt idx="38">
-                  <c:v>71</c:v>
-                </c:pt>
-              </c:numCache>
-            </c:numRef>
-          </c:yVal>
-        </c:ser>
-        <c:ser>
-          <c:idx val="4"/>
-          <c:order val="4"/>
-          <c:tx>
-            <c:v>Oceania</c:v>
-          </c:tx>
-          <c:spPr>
-            <a:ln xmlns:a="http://schemas.openxmlformats.org/drawingml/2006/main" w="0">
-              <a:noFill/>
-            </a:ln>
-          </c:spPr>
-          <c:marker>
-            <c:symbol val="circle"/>
-            <c:size val="4"/>
-            <c:spPr>
-              <a:solidFill xmlns:a="http://schemas.openxmlformats.org/drawingml/2006/main">
-                <a:srgbClr val="B1AC83"/>
-              </a:solidFill>
-            </c:spPr>
-          </c:marker>
-          <c:xVal>
-            <c:numRef>
-              <c:f>'Chart Data'!$I$2:$I$14</c:f>
-              <c:numCache>
-                <c:formatCode>General</c:formatCode>
-                <c:ptCount val="13"/>
-                <c:pt idx="0">
-                  <c:v>48800</c:v>
-                </c:pt>
-                <c:pt idx="1">
-                  <c:v>10900</c:v>
-                </c:pt>
-                <c:pt idx="2">
-                  <c:v>1880</c:v>
-                </c:pt>
-                <c:pt idx="3">
-                  <c:v>5710</c:v>
-                </c:pt>
-                <c:pt idx="4">
-                  <c:v>10400</c:v>
-                </c:pt>
-                <c:pt idx="5">
-                  <c:v>42300</c:v>
-                </c:pt>
-                <c:pt idx="6">
-                  <c:v>16100</c:v>
-                </c:pt>
-                <c:pt idx="7">
-                  <c:v>3770</c:v>
-                </c:pt>
-                <c:pt idx="8">
-                  <c:v>6060</c:v>
-                </c:pt>
-                <c:pt idx="9">
-                  <c:v>2390</c:v>
-                </c:pt>
-                <c:pt idx="10">
-                  <c:v>6360</c:v>
-                </c:pt>
-                <c:pt idx="11">
-                  <c:v>4580</c:v>
-                </c:pt>
-                <c:pt idx="12">
-                  <c:v>2910</c:v>
-                </c:pt>
-              </c:numCache>
-            </c:numRef>
-          </c:xVal>
-          <c:yVal>
-            <c:numRef>
-              <c:f>'Chart Data'!$J$2:$J$14</c:f>
-              <c:numCache>
-                <c:formatCode>General</c:formatCode>
-                <c:ptCount val="13"/>
-                <c:pt idx="0">
-                  <c:v>84</c:v>
-                </c:pt>
-                <c:pt idx="1">
-                  <c:v>68</c:v>
-                </c:pt>
-                <c:pt idx="2">
-                  <c:v>60</c:v>
-                </c:pt>
-                <c:pt idx="3">
-                  <c:v>65</c:v>
-                </c:pt>
-                <c:pt idx="4">
-                  <c:v>63</c:v>
-                </c:pt>
-                <c:pt idx="5">
-                  <c:v>82</c:v>
-                </c:pt>
-                <c:pt idx="6">
-                  <c:v>68</c:v>
-                </c:pt>
-                <c:pt idx="7">
-                  <c:v>65</c:v>
-                </c:pt>
-                <c:pt idx="8">
-                  <c:v>71</c:v>
-                </c:pt>
-                <c:pt idx="9">
-                  <c:v>59</c:v>
-                </c:pt>
-                <c:pt idx="10">
-                  <c:v>73</c:v>
-                </c:pt>
-                <c:pt idx="11">
-                  <c:v>68</c:v>
-                </c:pt>
-                <c:pt idx="12">
-                  <c:v>65</c:v>
-                </c:pt>
-              </c:numCache>
-            </c:numRef>
-          </c:yVal>
-        </c:ser>
-        <c:ser>
-          <c:idx val="5"/>
-          <c:order val="5"/>
-          <c:tx>
-            <c:v>Unknown</c:v>
-          </c:tx>
-          <c:spPr>
-            <a:ln xmlns:a="http://schemas.openxmlformats.org/drawingml/2006/main" w="0">
-              <a:noFill/>
-            </a:ln>
-          </c:spPr>
-          <c:marker>
-            <c:symbol val="circle"/>
-            <c:size val="4"/>
-            <c:spPr>
-              <a:solidFill xmlns:a="http://schemas.openxmlformats.org/drawingml/2006/main">
-                <a:srgbClr val="D3CFCA"/>
-              </a:solidFill>
-            </c:spPr>
-          </c:marker>
-          <c:xVal>
-            <c:numRef>
-              <c:f>'Chart Data'!$K$2:$K$18</c:f>
-              <c:numCache>
-                <c:formatCode>General</c:formatCode>
-                <c:ptCount val="17"/>
-                <c:pt idx="0">
-                  <c:v>7680</c:v>
-                </c:pt>
-                <c:pt idx="1">
-                  <c:v>61600</c:v>
-                </c:pt>
-                <c:pt idx="2">
-                  <c:v>6220</c:v>
-                </c:pt>
-                <c:pt idx="3">
-                  <c:v>3280</c:v>
-                </c:pt>
-                <c:pt idx="4">
-                  <c:v>14400</c:v>
-                </c:pt>
-                <c:pt idx="5">
-                  <c:v>25600</c:v>
-                </c:pt>
-                <c:pt idx="6">
-                  <c:v>7760</c:v>
-                </c:pt>
-                <c:pt idx="7">
-                  <c:v>3250</c:v>
-                </c:pt>
-                <c:pt idx="8">
-                  <c:v>11800</c:v>
-                </c:pt>
-                <c:pt idx="9">
-                  <c:v>15800</c:v>
-                </c:pt>
-                <c:pt idx="10">
-                  <c:v>26300</c:v>
-                </c:pt>
-                <c:pt idx="11">
-                  <c:v>53100</c:v>
-                </c:pt>
-                <c:pt idx="12">
-                  <c:v>15200</c:v>
-                </c:pt>
-                <c:pt idx="13">
-                  <c:v>67400</c:v>
-                </c:pt>
-                <c:pt idx="14">
-                  <c:v>41300</c:v>
-                </c:pt>
-                <c:pt idx="15">
-                  <c:v>60200</c:v>
-                </c:pt>
-                <c:pt idx="16">
-                  <c:v>10500</c:v>
-                </c:pt>
-              </c:numCache>
-            </c:numRef>
-          </c:xVal>
-          <c:yVal>
-            <c:numRef>
-              <c:f>'Chart Data'!$L$2:$L$18</c:f>
-              <c:numCache>
-                <c:formatCode>General</c:formatCode>
-                <c:ptCount val="17"/>
-                <c:pt idx="0">
-                  <c:v>68</c:v>
-                </c:pt>
-                <c:pt idx="1">
-                  <c:v>74</c:v>
-                </c:pt>
-                <c:pt idx="2">
-                  <c:v>72</c:v>
-                </c:pt>
-                <c:pt idx="3">
-                  <c:v>66</c:v>
-                </c:pt>
-                <c:pt idx="4">
-                  <c:v>76</c:v>
-                </c:pt>
-                <c:pt idx="5">
-                  <c:v>70</c:v>
-                </c:pt>
-                <c:pt idx="6">
-                  <c:v>69</c:v>
-                </c:pt>
-                <c:pt idx="7">
-                  <c:v>63</c:v>
-                </c:pt>
-                <c:pt idx="8">
-                  <c:v>73</c:v>
-                </c:pt>
-                <c:pt idx="9">
-                  <c:v>72</c:v>
-                </c:pt>
-                <c:pt idx="10">
-                  <c:v>72</c:v>
-                </c:pt>
-                <c:pt idx="11">
-                  <c:v>80</c:v>
-                </c:pt>
-                <c:pt idx="12">
-                  <c:v>70</c:v>
-                </c:pt>
-                <c:pt idx="13">
-                  <c:v>73</c:v>
-                </c:pt>
-                <c:pt idx="14">
-                  <c:v>79</c:v>
-                </c:pt>
-                <c:pt idx="15">
-                  <c:v>77</c:v>
-                </c:pt>
-                <c:pt idx="16">
-                  <c:v>75</c:v>
-                </c:pt>
-              </c:numCache>
-            </c:numRef>
-          </c:yVal>
-        </c:ser>
-        <c:ser>
-          <c:idx val="6"/>
-          <c:order val="6"/>
-          <c:tx>
-            <c:v>Japan</c:v>
-          </c:tx>
-          <c:spPr>
-            <a:ln xmlns:a="http://schemas.openxmlformats.org/drawingml/2006/main" w="0">
-              <a:noFill/>
-            </a:ln>
-          </c:spPr>
-          <c:marker>
-            <c:symbol val="circle"/>
-            <c:size val="4"/>
-            <c:spPr>
-              <a:solidFill xmlns:a="http://schemas.openxmlformats.org/drawingml/2006/main">
-                <a:srgbClr val="B23C50"/>
-              </a:solidFill>
-            </c:spPr>
-          </c:marker>
-          <c:dLbls>
-            <c:dLbl>
-              <c:idx val="0"/>
-              <c:tx>
-                <c:rich>
-                  <a:bodyPr xmlns:a="http://schemas.openxmlformats.org/drawingml/2006/main"/>
-                  <a:lstStyle xmlns:a="http://schemas.openxmlformats.org/drawingml/2006/main"/>
-                  <a:p xmlns:a="http://schemas.openxmlformats.org/drawingml/2006/main">
-                    <a:r>
-                      <a:rPr sz="900">
-                        <a:solidFill>
-                          <a:srgbClr val="B23C50"/>
-                        </a:solidFill>
-                        <a:latin typeface="Ubuntu Condensed"/>
-                        <a:ea typeface="Ubuntu Condensed"/>
-                        <a:cs typeface="Ubuntu Condensed"/>
-                      </a:rPr>
-                      <a:t>Japan</a:t>
-                    </a:r>
-                  </a:p>
-                </c:rich>
-              </c:tx>
-              <c:txPr>
-                <a:bodyPr xmlns:a="http://schemas.openxmlformats.org/drawingml/2006/main" anchorCtr="1"/>
-                <a:lstStyle xmlns:a="http://schemas.openxmlformats.org/drawingml/2006/main"/>
-                <a:p xmlns:a="http://schemas.openxmlformats.org/drawingml/2006/main">
-                  <a:pPr>
-                    <a:defRPr sz="900">
-                      <a:solidFill>
-                        <a:srgbClr val="B23C50"/>
-                      </a:solidFill>
-                      <a:latin typeface="Ubuntu Condensed"/>
-                      <a:ea typeface="Ubuntu Condensed"/>
-                      <a:cs typeface="Ubuntu Condensed"/>
-                    </a:defRPr>
-                  </a:pPr>
-                </a:p>
-              </c:txPr>
-              <c:dLblPos val="t"/>
-              <c:showVal val="0"/>
-            </c:dLbl>
-          </c:dLbls>
-          <c:xVal>
-            <c:numRef>
-              <c:f>'Chart Data'!$M$2:$M$2</c:f>
-              <c:numCache>
-                <c:formatCode>General</c:formatCode>
-                <c:ptCount val="1"/>
-                <c:pt idx="0">
-                  <c:v>39800</c:v>
-                </c:pt>
-              </c:numCache>
-            </c:numRef>
-          </c:xVal>
-          <c:yVal>
-            <c:numRef>
-              <c:f>'Chart Data'!$N$2:$N$2</c:f>
-              <c:numCache>
-                <c:formatCode>General</c:formatCode>
-                <c:ptCount val="1"/>
-                <c:pt idx="0">
-                  <c:v>85</c:v>
-                </c:pt>
-              </c:numCache>
-            </c:numRef>
-          </c:yVal>
-        </c:ser>
-        <c:dLbls>
-          <c:txPr>
-            <a:bodyPr xmlns:a="http://schemas.openxmlformats.org/drawingml/2006/main" anchorCtr="1"/>
-            <a:lstStyle xmlns:a="http://schemas.openxmlformats.org/drawingml/2006/main"/>
-            <a:p xmlns:a="http://schemas.openxmlformats.org/drawingml/2006/main">
-              <a:pPr>
-                <a:defRPr>
-                  <a:latin typeface="Ubuntu Condensed"/>
-                  <a:ea typeface="Ubuntu Condensed"/>
-                  <a:cs typeface="Ubuntu Condensed"/>
-                </a:defRPr>
-              </a:pPr>
-            </a:p>
-          </c:txPr>
-          <c:showLegendKey val="0"/>
-          <c:showVal val="0"/>
-          <c:showCatName val="0"/>
-          <c:showSerName val="0"/>
-          <c:showPercent val="0"/>
-          <c:showBubbleSize val="0"/>
-          <c:showLeaderLines val="0"/>
-        </c:dLbls>
-        <c:axId val="48650112"/>
-        <c:axId val="48672768"/>
-      </c:scatterChart>
-      <c:valAx>
-        <c:axId val="48672768"/>
-        <c:scaling>
-          <c:orientation val="minMax"/>
-          <c:max val="90"/>
-          <c:min val="40"/>
-        </c:scaling>
-        <c:delete val="0"/>
-        <c:axPos val="l"/>
-        <c:majorGridlines>
-          <c:spPr>
-            <a:ln xmlns:a="http://schemas.openxmlformats.org/drawingml/2006/main" w="9525">
-              <a:solidFill>
-                <a:srgbClr val="EAE7E1"/>
-              </a:solidFill>
-            </a:ln>
-          </c:spPr>
-        </c:majorGridlines>
-        <c:title>
-          <c:tx>
-            <c:rich>
-              <a:bodyPr xmlns:a="http://schemas.openxmlformats.org/drawingml/2006/main"/>
-              <a:lstStyle xmlns:a="http://schemas.openxmlformats.org/drawingml/2006/main"/>
-              <a:p xmlns:a="http://schemas.openxmlformats.org/drawingml/2006/main">
-                <a:r>
-                  <a:rPr sz="900">
-                    <a:solidFill>
-                      <a:srgbClr val="38332E"/>
-                    </a:solidFill>
-                    <a:latin typeface="Ubuntu Condensed"/>
-                    <a:ea typeface="Ubuntu Condensed"/>
-                    <a:cs typeface="Ubuntu Condensed"/>
-                  </a:rPr>
-                  <a:t>Life Expectancy</a:t>
-                </a:r>
-              </a:p>
-            </c:rich>
-          </c:tx>
-          <c:overlay val="0"/>
-          <c:txPr>
-            <a:bodyPr xmlns:a="http://schemas.openxmlformats.org/drawingml/2006/main" anchorCtr="1"/>
-            <a:lstStyle xmlns:a="http://schemas.openxmlformats.org/drawingml/2006/main"/>
-            <a:p xmlns:a="http://schemas.openxmlformats.org/drawingml/2006/main">
-              <a:pPr>
-                <a:defRPr sz="900">
-                  <a:solidFill>
-                    <a:srgbClr val="38332E"/>
-                  </a:solidFill>
-                  <a:latin typeface="Ubuntu Condensed"/>
-                  <a:ea typeface="Ubuntu Condensed"/>
-                  <a:cs typeface="Ubuntu Condensed"/>
-                </a:defRPr>
-              </a:pPr>
-            </a:p>
-          </c:txPr>
-        </c:title>
-        <c:numFmt formatCode="General"/>
-        <c:majorTickMark val="none"/>
-        <c:minorTickMark val="none"/>
-        <c:spPr>
-          <a:ln xmlns:a="http://schemas.openxmlformats.org/drawingml/2006/main" w="0">
-            <a:noFill/>
-          </a:ln>
-        </c:spPr>
-        <c:txPr>
-          <a:bodyPr xmlns:a="http://schemas.openxmlformats.org/drawingml/2006/main" anchorCtr="1"/>
-          <a:lstStyle xmlns:a="http://schemas.openxmlformats.org/drawingml/2006/main"/>
-          <a:p xmlns:a="http://schemas.openxmlformats.org/drawingml/2006/main">
-            <a:pPr>
-              <a:defRPr sz="900">
-                <a:solidFill>
-                  <a:srgbClr val="81796F"/>
-                </a:solidFill>
-                <a:latin typeface="Ubuntu Condensed"/>
-                <a:ea typeface="Ubuntu Condensed"/>
-                <a:cs typeface="Ubuntu Condensed"/>
-              </a:defRPr>
-            </a:pPr>
-          </a:p>
-        </c:txPr>
-        <c:crossAx val="48650112"/>
-        <c:majorUnit val="10"/>
-      </c:valAx>
-      <c:valAx>
-        <c:axId val="48650112"/>
-        <c:scaling>
-          <c:orientation val="minMax"/>
-          <c:max val="220000"/>
-          <c:min val="0"/>
-        </c:scaling>
-        <c:delete val="0"/>
-        <c:axPos val="b"/>
-        <c:majorGridlines>
-          <c:spPr>
-            <a:ln xmlns:a="http://schemas.openxmlformats.org/drawingml/2006/main" w="9525">
-              <a:solidFill>
-                <a:srgbClr val="EAE7E1"/>
-              </a:solidFill>
-            </a:ln>
-          </c:spPr>
-        </c:majorGridlines>
-        <c:title>
-          <c:tx>
-            <c:rich>
-              <a:bodyPr xmlns:a="http://schemas.openxmlformats.org/drawingml/2006/main"/>
-              <a:lstStyle xmlns:a="http://schemas.openxmlformats.org/drawingml/2006/main"/>
-              <a:p xmlns:a="http://schemas.openxmlformats.org/drawingml/2006/main">
-                <a:r>
-                  <a:rPr sz="900">
-                    <a:solidFill>
-                      <a:srgbClr val="38332E"/>
-                    </a:solidFill>
-                    <a:latin typeface="Ubuntu Condensed"/>
-                    <a:ea typeface="Ubuntu Condensed"/>
-                    <a:cs typeface="Ubuntu Condensed"/>
-                  </a:rPr>
-                  <a:t>GDP</a:t>
-                </a:r>
-              </a:p>
-            </c:rich>
-          </c:tx>
-          <c:overlay val="0"/>
-          <c:txPr>
-            <a:bodyPr xmlns:a="http://schemas.openxmlformats.org/drawingml/2006/main" anchorCtr="1"/>
-            <a:lstStyle xmlns:a="http://schemas.openxmlformats.org/drawingml/2006/main"/>
-            <a:p xmlns:a="http://schemas.openxmlformats.org/drawingml/2006/main">
-              <a:pPr>
-                <a:defRPr sz="900">
-                  <a:solidFill>
-                    <a:srgbClr val="38332E"/>
-                  </a:solidFill>
-                  <a:latin typeface="Ubuntu Condensed"/>
-                  <a:ea typeface="Ubuntu Condensed"/>
-                  <a:cs typeface="Ubuntu Condensed"/>
-                </a:defRPr>
-              </a:pPr>
-            </a:p>
-          </c:txPr>
-        </c:title>
-        <c:numFmt formatCode="#,##0"/>
-        <c:majorTickMark val="none"/>
-        <c:minorTickMark val="none"/>
-        <c:spPr>
-          <a:ln xmlns:a="http://schemas.openxmlformats.org/drawingml/2006/main" w="0">
-            <a:noFill/>
-          </a:ln>
-        </c:spPr>
-        <c:txPr>
-          <a:bodyPr xmlns:a="http://schemas.openxmlformats.org/drawingml/2006/main" anchorCtr="1"/>
-          <a:lstStyle xmlns:a="http://schemas.openxmlformats.org/drawingml/2006/main"/>
-          <a:p xmlns:a="http://schemas.openxmlformats.org/drawingml/2006/main">
-            <a:pPr>
-              <a:defRPr sz="900">
-                <a:solidFill>
-                  <a:srgbClr val="81796F"/>
-                </a:solidFill>
-                <a:latin typeface="Ubuntu Condensed"/>
-                <a:ea typeface="Ubuntu Condensed"/>
-                <a:cs typeface="Ubuntu Condensed"/>
-              </a:defRPr>
-            </a:pPr>
-          </a:p>
-        </c:txPr>
-        <c:crossAx val="48672768"/>
-        <c:majorUnit val="100000"/>
-      </c:valAx>
-      <c:spPr>
-        <a:noFill xmlns:a="http://schemas.openxmlformats.org/drawingml/2006/main"/>
-      </c:spPr>
-    </c:plotArea>
-    <c:plotVisOnly val="1"/>
-  </c:chart>
-  <c:spPr>
-    <a:noFill xmlns:a="http://schemas.openxmlformats.org/drawingml/2006/main"/>
-  </c:spPr>
-  <c:externalData r:id="rIdChartSnapshot1">
-    <c:autoUpdate val="0"/>
-  </c:externalData>
-</c:chartSpace>
-</file>
-
-<file path=ppt/slides/charts/chart5.xml><?xml version="1.0" encoding="utf-8"?>
-<c:chartSpace xmlns:c="http://schemas.openxmlformats.org/drawingml/2006/chart" xmlns:r="http://schemas.openxmlformats.org/officeDocument/2006/relationships">
-  <c:lang val="en-US"/>
-  <c:chart>
-    <c:plotArea>
-      <c:lineChart>
-        <c:grouping val="standard"/>
-        <c:varyColors val="0"/>
-        <c:ser>
-          <c:idx val="0"/>
-          <c:order val="0"/>
-          <c:tx>
-            <c:v>Japan</c:v>
-          </c:tx>
-          <c:spPr>
-            <a:ln xmlns:a="http://schemas.openxmlformats.org/drawingml/2006/main" w="28575">
-              <a:solidFill>
-                <a:srgbClr val="B23C50"/>
-              </a:solidFill>
-            </a:ln>
-          </c:spPr>
-          <c:marker>
-            <c:symbol val="none"/>
-          </c:marker>
-          <c:cat>
-            <c:numRef>
-              <c:f>'Chart Data'!$A$2:$A$14</c:f>
-              <c:numCache>
-                <c:formatCode>General</c:formatCode>
-                <c:ptCount val="13"/>
-                <c:pt idx="0">
-                  <c:v>1960</c:v>
-                </c:pt>
-                <c:pt idx="1">
-                  <c:v>1965</c:v>
-                </c:pt>
-                <c:pt idx="2">
-                  <c:v>1970</c:v>
-                </c:pt>
-                <c:pt idx="3">
-                  <c:v>1975</c:v>
-                </c:pt>
-                <c:pt idx="4">
-                  <c:v>1980</c:v>
-                </c:pt>
-                <c:pt idx="5">
-                  <c:v>1985</c:v>
-                </c:pt>
-                <c:pt idx="6">
-                  <c:v>1990</c:v>
-                </c:pt>
-                <c:pt idx="7">
-                  <c:v>1995</c:v>
-                </c:pt>
-                <c:pt idx="8">
-                  <c:v>2000</c:v>
-                </c:pt>
-                <c:pt idx="9">
-                  <c:v>2005</c:v>
-                </c:pt>
-                <c:pt idx="10">
-                  <c:v>2010</c:v>
-                </c:pt>
-                <c:pt idx="11">
-                  <c:v>2015</c:v>
-                </c:pt>
-                <c:pt idx="12">
-                  <c:v>2020</c:v>
-                </c:pt>
-              </c:numCache>
-            </c:numRef>
-          </c:cat>
-          <c:val>
-            <c:numRef>
-              <c:f>'Chart Data'!$B$2:$B$14</c:f>
-              <c:numCache>
-                <c:formatCode>General</c:formatCode>
-                <c:ptCount val="13"/>
-                <c:pt idx="0">
-                  <c:v>68</c:v>
-                </c:pt>
-                <c:pt idx="1">
-                  <c:v>70</c:v>
-                </c:pt>
-                <c:pt idx="2">
-                  <c:v>72</c:v>
-                </c:pt>
-                <c:pt idx="3">
-                  <c:v>74</c:v>
-                </c:pt>
-                <c:pt idx="4">
-                  <c:v>76</c:v>
-                </c:pt>
-                <c:pt idx="5">
-                  <c:v>78</c:v>
-                </c:pt>
-                <c:pt idx="6">
-                  <c:v>79</c:v>
-                </c:pt>
-                <c:pt idx="7">
-                  <c:v>80</c:v>
-                </c:pt>
-                <c:pt idx="8">
-                  <c:v>81</c:v>
-                </c:pt>
-                <c:pt idx="9">
-                  <c:v>82</c:v>
-                </c:pt>
-                <c:pt idx="10">
-                  <c:v>83</c:v>
-                </c:pt>
-                <c:pt idx="11">
-                  <c:v>84</c:v>
-                </c:pt>
-                <c:pt idx="12">
-                  <c:v>85</c:v>
-                </c:pt>
-              </c:numCache>
-            </c:numRef>
-          </c:val>
-        </c:ser>
-        <c:dLbls>
-          <c:txPr>
-            <a:bodyPr xmlns:a="http://schemas.openxmlformats.org/drawingml/2006/main" anchorCtr="1"/>
-            <a:lstStyle xmlns:a="http://schemas.openxmlformats.org/drawingml/2006/main"/>
-            <a:p xmlns:a="http://schemas.openxmlformats.org/drawingml/2006/main">
-              <a:pPr>
-                <a:defRPr>
-                  <a:latin typeface="Ubuntu Condensed"/>
-                  <a:ea typeface="Ubuntu Condensed"/>
-                  <a:cs typeface="Ubuntu Condensed"/>
-                </a:defRPr>
-              </a:pPr>
-            </a:p>
-          </c:txPr>
-          <c:showLegendKey val="0"/>
-          <c:showVal val="0"/>
-          <c:showCatName val="0"/>
-          <c:showSerName val="0"/>
-          <c:showPercent val="0"/>
-          <c:showBubbleSize val="0"/>
-          <c:showLeaderLines val="0"/>
-        </c:dLbls>
-        <c:axId val="48650112"/>
-        <c:axId val="48672768"/>
-      </c:lineChart>
-      <c:catAx>
-        <c:axId val="48650112"/>
-        <c:scaling>
-          <c:orientation val="minMax"/>
-        </c:scaling>
-        <c:delete val="0"/>
-        <c:axPos val="b"/>
-        <c:numFmt formatCode="General"/>
-        <c:majorTickMark val="none"/>
-        <c:minorTickMark val="none"/>
-        <c:tickLblPos val="none"/>
-        <c:spPr>
-          <a:ln xmlns:a="http://schemas.openxmlformats.org/drawingml/2006/main" w="9525">
-            <a:solidFill>
-              <a:srgbClr val="D4D4D4"/>
-            </a:solidFill>
-            <a:prstDash val="solid"/>
-          </a:ln>
-        </c:spPr>
-        <c:txPr>
-          <a:bodyPr xmlns:a="http://schemas.openxmlformats.org/drawingml/2006/main" anchorCtr="1"/>
-          <a:lstStyle xmlns:a="http://schemas.openxmlformats.org/drawingml/2006/main"/>
-          <a:p xmlns:a="http://schemas.openxmlformats.org/drawingml/2006/main">
-            <a:pPr>
-              <a:defRPr sz="900">
-                <a:solidFill>
-                  <a:srgbClr val="81796F"/>
-                </a:solidFill>
-                <a:latin typeface="Ubuntu Condensed"/>
-                <a:ea typeface="Ubuntu Condensed"/>
-                <a:cs typeface="Ubuntu Condensed"/>
-              </a:defRPr>
-            </a:pPr>
-          </a:p>
-        </c:txPr>
-        <c:crossAx val="48672768"/>
-      </c:catAx>
-      <c:valAx>
-        <c:axId val="48672768"/>
-        <c:scaling>
-          <c:orientation val="minMax"/>
-          <c:max val="90"/>
-          <c:min val="40"/>
-        </c:scaling>
-        <c:delete val="0"/>
-        <c:axPos val="l"/>
-        <c:majorGridlines>
-          <c:spPr>
-            <a:ln xmlns:a="http://schemas.openxmlformats.org/drawingml/2006/main" w="9525">
-              <a:solidFill>
-                <a:srgbClr val="EAE7E1"/>
-              </a:solidFill>
-            </a:ln>
-          </c:spPr>
-        </c:majorGridlines>
-        <c:title>
-          <c:tx>
-            <c:rich>
-              <a:bodyPr xmlns:a="http://schemas.openxmlformats.org/drawingml/2006/main"/>
-              <a:lstStyle xmlns:a="http://schemas.openxmlformats.org/drawingml/2006/main"/>
-              <a:p xmlns:a="http://schemas.openxmlformats.org/drawingml/2006/main">
-                <a:r>
-                  <a:rPr sz="900">
-                    <a:solidFill>
-                      <a:srgbClr val="38332E"/>
-                    </a:solidFill>
-                    <a:latin typeface="Ubuntu Condensed"/>
-                    <a:ea typeface="Ubuntu Condensed"/>
-                    <a:cs typeface="Ubuntu Condensed"/>
-                  </a:rPr>
-                  <a:t>Years</a:t>
-                </a:r>
-              </a:p>
-            </c:rich>
-          </c:tx>
-          <c:overlay val="0"/>
-          <c:txPr>
-            <a:bodyPr xmlns:a="http://schemas.openxmlformats.org/drawingml/2006/main" anchorCtr="1"/>
-            <a:lstStyle xmlns:a="http://schemas.openxmlformats.org/drawingml/2006/main"/>
-            <a:p xmlns:a="http://schemas.openxmlformats.org/drawingml/2006/main">
-              <a:pPr>
-                <a:defRPr sz="900">
-                  <a:solidFill>
-                    <a:srgbClr val="38332E"/>
-                  </a:solidFill>
-                  <a:latin typeface="Ubuntu Condensed"/>
-                  <a:ea typeface="Ubuntu Condensed"/>
-                  <a:cs typeface="Ubuntu Condensed"/>
-                </a:defRPr>
-              </a:pPr>
-            </a:p>
-          </c:txPr>
-        </c:title>
-        <c:numFmt formatCode="General"/>
-        <c:majorTickMark val="none"/>
-        <c:minorTickMark val="none"/>
-        <c:spPr>
-          <a:ln xmlns:a="http://schemas.openxmlformats.org/drawingml/2006/main" w="0">
-            <a:noFill/>
-          </a:ln>
-        </c:spPr>
-        <c:txPr>
-          <a:bodyPr xmlns:a="http://schemas.openxmlformats.org/drawingml/2006/main" anchorCtr="1"/>
-          <a:lstStyle xmlns:a="http://schemas.openxmlformats.org/drawingml/2006/main"/>
-          <a:p xmlns:a="http://schemas.openxmlformats.org/drawingml/2006/main">
-            <a:pPr>
-              <a:defRPr sz="900">
-                <a:solidFill>
-                  <a:srgbClr val="81796F"/>
-                </a:solidFill>
-                <a:latin typeface="Ubuntu Condensed"/>
-                <a:ea typeface="Ubuntu Condensed"/>
-                <a:cs typeface="Ubuntu Condensed"/>
-              </a:defRPr>
-            </a:pPr>
-          </a:p>
-        </c:txPr>
-        <c:crossAx val="48650112"/>
-        <c:crossBetween val="between"/>
-        <c:majorUnit val="25"/>
-      </c:valAx>
-      <c:spPr>
-        <a:noFill xmlns:a="http://schemas.openxmlformats.org/drawingml/2006/main"/>
-      </c:spPr>
-    </c:plotArea>
-    <c:plotVisOnly val="1"/>
-  </c:chart>
-  <c:spPr>
-    <a:noFill xmlns:a="http://schemas.openxmlformats.org/drawingml/2006/main"/>
-  </c:spPr>
-  <c:externalData r:id="rIdChartSnapshot1">
-    <c:autoUpdate val="0"/>
-  </c:externalData>
-</c:chartSpace>
-</file>
-
-<file path=ppt/slides/charts/chart6.xml><?xml version="1.0" encoding="utf-8"?>
-<c:chartSpace xmlns:c="http://schemas.openxmlformats.org/drawingml/2006/chart" xmlns:r="http://schemas.openxmlformats.org/officeDocument/2006/relationships">
-  <c:lang val="en-US"/>
-  <c:chart>
-    <c:plotArea>
-      <c:lineChart>
-        <c:grouping val="standard"/>
-        <c:varyColors val="0"/>
-        <c:ser>
-          <c:idx val="0"/>
-          <c:order val="0"/>
-          <c:tx>
-            <c:v>Japan</c:v>
-          </c:tx>
-          <c:spPr>
-            <a:ln xmlns:a="http://schemas.openxmlformats.org/drawingml/2006/main" w="28575">
-              <a:solidFill>
-                <a:srgbClr val="B23C50"/>
-              </a:solidFill>
-            </a:ln>
-          </c:spPr>
-          <c:marker>
-            <c:symbol val="none"/>
-          </c:marker>
-          <c:cat>
-            <c:numRef>
-              <c:f>'Chart Data'!$A$2:$A$14</c:f>
-              <c:numCache>
-                <c:formatCode>General</c:formatCode>
-                <c:ptCount val="13"/>
-                <c:pt idx="0">
-                  <c:v>1960</c:v>
-                </c:pt>
-                <c:pt idx="1">
-                  <c:v>1965</c:v>
-                </c:pt>
-                <c:pt idx="2">
-                  <c:v>1970</c:v>
-                </c:pt>
-                <c:pt idx="3">
-                  <c:v>1975</c:v>
-                </c:pt>
-                <c:pt idx="4">
-                  <c:v>1980</c:v>
-                </c:pt>
-                <c:pt idx="5">
-                  <c:v>1985</c:v>
-                </c:pt>
-                <c:pt idx="6">
-                  <c:v>1990</c:v>
-                </c:pt>
-                <c:pt idx="7">
-                  <c:v>1995</c:v>
-                </c:pt>
-                <c:pt idx="8">
-                  <c:v>2000</c:v>
-                </c:pt>
-                <c:pt idx="9">
-                  <c:v>2005</c:v>
-                </c:pt>
-                <c:pt idx="10">
-                  <c:v>2010</c:v>
-                </c:pt>
-                <c:pt idx="11">
-                  <c:v>2015</c:v>
-                </c:pt>
-                <c:pt idx="12">
-                  <c:v>2020</c:v>
-                </c:pt>
-              </c:numCache>
-            </c:numRef>
-          </c:cat>
-          <c:val>
-            <c:numRef>
-              <c:f>'Chart Data'!$B$2:$B$14</c:f>
-              <c:numCache>
-                <c:formatCode>General</c:formatCode>
-                <c:ptCount val="13"/>
-                <c:pt idx="0">
-                  <c:v>7140</c:v>
-                </c:pt>
-                <c:pt idx="1">
-                  <c:v>10500</c:v>
-                </c:pt>
-                <c:pt idx="2">
-                  <c:v>17000</c:v>
-                </c:pt>
-                <c:pt idx="3">
-                  <c:v>19700</c:v>
-                </c:pt>
-                <c:pt idx="4">
-                  <c:v>23200</c:v>
-                </c:pt>
-                <c:pt idx="5">
-                  <c:v>26900</c:v>
-                </c:pt>
-                <c:pt idx="6">
-                  <c:v>33100</c:v>
-                </c:pt>
-                <c:pt idx="7">
-                  <c:v>35100</c:v>
-                </c:pt>
-                <c:pt idx="8">
-                  <c:v>36400</c:v>
-                </c:pt>
-                <c:pt idx="9">
-                  <c:v>38200</c:v>
-                </c:pt>
-                <c:pt idx="10">
-                  <c:v>37900</c:v>
-                </c:pt>
-                <c:pt idx="11">
-                  <c:v>40200</c:v>
-                </c:pt>
-                <c:pt idx="12">
-                  <c:v>39800</c:v>
-                </c:pt>
-              </c:numCache>
-            </c:numRef>
-          </c:val>
-        </c:ser>
-        <c:dLbls>
-          <c:txPr>
-            <a:bodyPr xmlns:a="http://schemas.openxmlformats.org/drawingml/2006/main" anchorCtr="1"/>
-            <a:lstStyle xmlns:a="http://schemas.openxmlformats.org/drawingml/2006/main"/>
-            <a:p xmlns:a="http://schemas.openxmlformats.org/drawingml/2006/main">
-              <a:pPr>
-                <a:defRPr>
-                  <a:latin typeface="Ubuntu Condensed"/>
-                  <a:ea typeface="Ubuntu Condensed"/>
-                  <a:cs typeface="Ubuntu Condensed"/>
-                </a:defRPr>
-              </a:pPr>
-            </a:p>
-          </c:txPr>
-          <c:showLegendKey val="0"/>
-          <c:showVal val="0"/>
-          <c:showCatName val="0"/>
-          <c:showSerName val="0"/>
-          <c:showPercent val="0"/>
-          <c:showBubbleSize val="0"/>
-          <c:showLeaderLines val="0"/>
-        </c:dLbls>
-        <c:axId val="48650112"/>
-        <c:axId val="48672768"/>
-      </c:lineChart>
-      <c:catAx>
-        <c:axId val="48650112"/>
-        <c:scaling>
-          <c:orientation val="minMax"/>
-        </c:scaling>
-        <c:delete val="0"/>
-        <c:axPos val="b"/>
-        <c:numFmt formatCode="General"/>
-        <c:majorTickMark val="none"/>
-        <c:minorTickMark val="none"/>
-        <c:tickLblPos val="none"/>
-        <c:spPr>
-          <a:ln xmlns:a="http://schemas.openxmlformats.org/drawingml/2006/main" w="9525">
-            <a:solidFill>
-              <a:srgbClr val="D4D4D4"/>
-            </a:solidFill>
-            <a:prstDash val="solid"/>
-          </a:ln>
-        </c:spPr>
-        <c:txPr>
-          <a:bodyPr xmlns:a="http://schemas.openxmlformats.org/drawingml/2006/main" anchorCtr="1"/>
-          <a:lstStyle xmlns:a="http://schemas.openxmlformats.org/drawingml/2006/main"/>
-          <a:p xmlns:a="http://schemas.openxmlformats.org/drawingml/2006/main">
-            <a:pPr>
-              <a:defRPr sz="900">
-                <a:solidFill>
-                  <a:srgbClr val="81796F"/>
-                </a:solidFill>
-                <a:latin typeface="Ubuntu Condensed"/>
-                <a:ea typeface="Ubuntu Condensed"/>
-                <a:cs typeface="Ubuntu Condensed"/>
-              </a:defRPr>
-            </a:pPr>
-          </a:p>
-        </c:txPr>
-        <c:crossAx val="48672768"/>
-      </c:catAx>
-      <c:valAx>
-        <c:axId val="48672768"/>
-        <c:scaling>
-          <c:orientation val="minMax"/>
-          <c:max val="45000"/>
-          <c:min val="0"/>
-        </c:scaling>
-        <c:delete val="0"/>
-        <c:axPos val="l"/>
-        <c:majorGridlines>
-          <c:spPr>
-            <a:ln xmlns:a="http://schemas.openxmlformats.org/drawingml/2006/main" w="9525">
-              <a:solidFill>
-                <a:srgbClr val="EAE7E1"/>
-              </a:solidFill>
-            </a:ln>
-          </c:spPr>
-        </c:majorGridlines>
-        <c:title>
-          <c:tx>
-            <c:rich>
-              <a:bodyPr xmlns:a="http://schemas.openxmlformats.org/drawingml/2006/main"/>
-              <a:lstStyle xmlns:a="http://schemas.openxmlformats.org/drawingml/2006/main"/>
-              <a:p xmlns:a="http://schemas.openxmlformats.org/drawingml/2006/main">
-                <a:r>
-                  <a:rPr sz="900">
-                    <a:solidFill>
-                      <a:srgbClr val="38332E"/>
-                    </a:solidFill>
-                    <a:latin typeface="Ubuntu Condensed"/>
-                    <a:ea typeface="Ubuntu Condensed"/>
-                    <a:cs typeface="Ubuntu Condensed"/>
-                  </a:rPr>
-                  <a:t>GDP</a:t>
-                </a:r>
-              </a:p>
-            </c:rich>
-          </c:tx>
-          <c:overlay val="0"/>
-          <c:txPr>
-            <a:bodyPr xmlns:a="http://schemas.openxmlformats.org/drawingml/2006/main" anchorCtr="1"/>
-            <a:lstStyle xmlns:a="http://schemas.openxmlformats.org/drawingml/2006/main"/>
-            <a:p xmlns:a="http://schemas.openxmlformats.org/drawingml/2006/main">
-              <a:pPr>
-                <a:defRPr sz="900">
-                  <a:solidFill>
-                    <a:srgbClr val="38332E"/>
-                  </a:solidFill>
-                  <a:latin typeface="Ubuntu Condensed"/>
-                  <a:ea typeface="Ubuntu Condensed"/>
-                  <a:cs typeface="Ubuntu Condensed"/>
-                </a:defRPr>
-              </a:pPr>
-            </a:p>
-          </c:txPr>
-        </c:title>
-        <c:numFmt formatCode="General"/>
-        <c:majorTickMark val="none"/>
-        <c:minorTickMark val="none"/>
-        <c:spPr>
-          <a:ln xmlns:a="http://schemas.openxmlformats.org/drawingml/2006/main" w="0">
-            <a:noFill/>
-          </a:ln>
-        </c:spPr>
-        <c:txPr>
-          <a:bodyPr xmlns:a="http://schemas.openxmlformats.org/drawingml/2006/main" anchorCtr="1"/>
-          <a:lstStyle xmlns:a="http://schemas.openxmlformats.org/drawingml/2006/main"/>
-          <a:p xmlns:a="http://schemas.openxmlformats.org/drawingml/2006/main">
-            <a:pPr>
-              <a:defRPr sz="900">
-                <a:solidFill>
-                  <a:srgbClr val="81796F"/>
-                </a:solidFill>
-                <a:latin typeface="Ubuntu Condensed"/>
-                <a:ea typeface="Ubuntu Condensed"/>
-                <a:cs typeface="Ubuntu Condensed"/>
-              </a:defRPr>
-            </a:pPr>
-          </a:p>
-        </c:txPr>
-        <c:crossAx val="48650112"/>
-        <c:crossBetween val="between"/>
-        <c:majorUnit val="20000"/>
-      </c:valAx>
-      <c:spPr>
-        <a:noFill xmlns:a="http://schemas.openxmlformats.org/drawingml/2006/main"/>
-      </c:spPr>
-    </c:plotArea>
-    <c:plotVisOnly val="1"/>
-  </c:chart>
-  <c:spPr>
-    <a:noFill xmlns:a="http://schemas.openxmlformats.org/drawingml/2006/main"/>
-  </c:spPr>
-  <c:externalData r:id="rIdChartSnapshot1">
-    <c:autoUpdate val="0"/>
-  </c:externalData>
-</c:chartSpace>
-</file>
-
-<file path=ppt/slides/charts/chart7.xml><?xml version="1.0" encoding="utf-8"?>
-<c:chartSpace xmlns:c="http://schemas.openxmlformats.org/drawingml/2006/chart" xmlns:r="http://schemas.openxmlformats.org/officeDocument/2006/relationships">
-  <c:lang val="en-US"/>
-  <c:chart>
-    <c:plotArea>
       <c:lineChart>
         <c:grouping val="standard"/>
         <c:varyColors val="0"/>
@@ -7806,7 +5660,7 @@
 </c:chartSpace>
 </file>
 
-<file path=ppt/slides/charts/chart8.xml><?xml version="1.0" encoding="utf-8"?>
+<file path=ppt/slides/charts/chart5.xml><?xml version="1.0" encoding="utf-8"?>
 <c:chartSpace xmlns:c="http://schemas.openxmlformats.org/drawingml/2006/chart" xmlns:r="http://schemas.openxmlformats.org/officeDocument/2006/relationships">
   <c:lang val="en-US"/>
   <c:chart>
@@ -8088,6 +5942,1699 @@
 </c:chartSpace>
 </file>
 
+<file path=ppt/slides/charts/chart6.xml><?xml version="1.0" encoding="utf-8"?>
+<c:chartSpace xmlns:c="http://schemas.openxmlformats.org/drawingml/2006/chart" xmlns:r="http://schemas.openxmlformats.org/officeDocument/2006/relationships">
+  <c:lang val="en-US"/>
+  <c:chart>
+    <c:plotArea>
+      <c:scatterChart>
+        <c:scatterStyle val="marker"/>
+        <c:varyColors val="0"/>
+        <c:ser>
+          <c:idx val="0"/>
+          <c:order val="0"/>
+          <c:tx>
+            <c:v>Africa</c:v>
+          </c:tx>
+          <c:spPr>
+            <a:ln xmlns:a="http://schemas.openxmlformats.org/drawingml/2006/main" w="0">
+              <a:noFill/>
+            </a:ln>
+          </c:spPr>
+          <c:marker>
+            <c:symbol val="circle"/>
+            <c:size val="7"/>
+            <c:spPr>
+              <a:solidFill xmlns:a="http://schemas.openxmlformats.org/drawingml/2006/main">
+                <a:srgbClr val="DBD8D2"/>
+              </a:solidFill>
+            </c:spPr>
+          </c:marker>
+          <c:xVal>
+            <c:numRef>
+              <c:f>'Chart Data'!$A$2:$A$53</c:f>
+              <c:numCache>
+                <c:formatCode>General</c:formatCode>
+                <c:ptCount val="52"/>
+                <c:pt idx="0">
+                  <c:v>10800</c:v>
+                </c:pt>
+                <c:pt idx="1">
+                  <c:v>6030</c:v>
+                </c:pt>
+                <c:pt idx="2">
+                  <c:v>3190</c:v>
+                </c:pt>
+                <c:pt idx="3">
+                  <c:v>13500</c:v>
+                </c:pt>
+                <c:pt idx="4">
+                  <c:v>2090</c:v>
+                </c:pt>
+                <c:pt idx="5">
+                  <c:v>711</c:v>
+                </c:pt>
+                <c:pt idx="6">
+                  <c:v>3680</c:v>
+                </c:pt>
+                <c:pt idx="7">
+                  <c:v>847</c:v>
+                </c:pt>
+                <c:pt idx="8">
+                  <c:v>1490</c:v>
+                </c:pt>
+                <c:pt idx="9">
+                  <c:v>3220</c:v>
+                </c:pt>
+                <c:pt idx="10">
+                  <c:v>1040</c:v>
+                </c:pt>
+                <c:pt idx="11">
+                  <c:v>5090</c:v>
+                </c:pt>
+                <c:pt idx="12">
+                  <c:v>4770</c:v>
+                </c:pt>
+                <c:pt idx="13">
+                  <c:v>12000</c:v>
+                </c:pt>
+                <c:pt idx="14">
+                  <c:v>14900</c:v>
+                </c:pt>
+                <c:pt idx="15">
+                  <c:v>1820</c:v>
+                </c:pt>
+                <c:pt idx="16">
+                  <c:v>8080</c:v>
+                </c:pt>
+                <c:pt idx="17">
+                  <c:v>2250</c:v>
+                </c:pt>
+                <c:pt idx="18">
+                  <c:v>13900</c:v>
+                </c:pt>
+                <c:pt idx="19">
+                  <c:v>2020</c:v>
+                </c:pt>
+                <c:pt idx="20">
+                  <c:v>5280</c:v>
+                </c:pt>
+                <c:pt idx="21">
+                  <c:v>2600</c:v>
+                </c:pt>
+                <c:pt idx="22">
+                  <c:v>1760</c:v>
+                </c:pt>
+                <c:pt idx="23">
+                  <c:v>4500</c:v>
+                </c:pt>
+                <c:pt idx="24">
+                  <c:v>2280</c:v>
+                </c:pt>
+                <c:pt idx="25">
+                  <c:v>1380</c:v>
+                </c:pt>
+                <c:pt idx="26">
+                  <c:v>15600</c:v>
+                </c:pt>
+                <c:pt idx="27">
+                  <c:v>1440</c:v>
+                </c:pt>
+                <c:pt idx="28">
+                  <c:v>1490</c:v>
+                </c:pt>
+                <c:pt idx="29">
+                  <c:v>2120</c:v>
+                </c:pt>
+                <c:pt idx="30">
+                  <c:v>5400</c:v>
+                </c:pt>
+                <c:pt idx="31">
+                  <c:v>20200</c:v>
+                </c:pt>
+                <c:pt idx="32">
+                  <c:v>7540</c:v>
+                </c:pt>
+                <c:pt idx="33">
+                  <c:v>1230</c:v>
+                </c:pt>
+                <c:pt idx="34">
+                  <c:v>9030</c:v>
+                </c:pt>
+                <c:pt idx="35">
+                  <c:v>1210</c:v>
+                </c:pt>
+                <c:pt idx="36">
+                  <c:v>4870</c:v>
+                </c:pt>
+                <c:pt idx="37">
+                  <c:v>2070</c:v>
+                </c:pt>
+                <c:pt idx="38">
+                  <c:v>4060</c:v>
+                </c:pt>
+                <c:pt idx="39">
+                  <c:v>3380</c:v>
+                </c:pt>
+                <c:pt idx="40">
+                  <c:v>27700</c:v>
+                </c:pt>
+                <c:pt idx="41">
+                  <c:v>1590</c:v>
+                </c:pt>
+                <c:pt idx="42">
+                  <c:v>1140</c:v>
+                </c:pt>
+                <c:pt idx="43">
+                  <c:v>12800</c:v>
+                </c:pt>
+                <c:pt idx="44">
+                  <c:v>387</c:v>
+                </c:pt>
+                <c:pt idx="45">
+                  <c:v>3870</c:v>
+                </c:pt>
+                <c:pt idx="46">
+                  <c:v>2550</c:v>
+                </c:pt>
+                <c:pt idx="47">
+                  <c:v>2060</c:v>
+                </c:pt>
+                <c:pt idx="48">
+                  <c:v>10000</c:v>
+                </c:pt>
+                <c:pt idx="49">
+                  <c:v>2240</c:v>
+                </c:pt>
+                <c:pt idx="50">
+                  <c:v>3130</c:v>
+                </c:pt>
+                <c:pt idx="51">
+                  <c:v>1990</c:v>
+                </c:pt>
+              </c:numCache>
+            </c:numRef>
+          </c:xVal>
+          <c:yVal>
+            <c:numRef>
+              <c:f>'Chart Data'!$B$2:$B$53</c:f>
+              <c:numCache>
+                <c:formatCode>General</c:formatCode>
+                <c:ptCount val="52"/>
+                <c:pt idx="0">
+                  <c:v>74</c:v>
+                </c:pt>
+                <c:pt idx="1">
+                  <c:v>64</c:v>
+                </c:pt>
+                <c:pt idx="2">
+                  <c:v>64</c:v>
+                </c:pt>
+                <c:pt idx="3">
+                  <c:v>62</c:v>
+                </c:pt>
+                <c:pt idx="4">
+                  <c:v>61</c:v>
+                </c:pt>
+                <c:pt idx="5">
+                  <c:v>63</c:v>
+                </c:pt>
+                <c:pt idx="6">
+                  <c:v>62</c:v>
+                </c:pt>
+                <c:pt idx="7">
+                  <c:v>52</c:v>
+                </c:pt>
+                <c:pt idx="8">
+                  <c:v>59</c:v>
+                </c:pt>
+                <c:pt idx="9">
+                  <c:v>68</c:v>
+                </c:pt>
+                <c:pt idx="10">
+                  <c:v>64</c:v>
+                </c:pt>
+                <c:pt idx="11">
+                  <c:v>63</c:v>
+                </c:pt>
+                <c:pt idx="12">
+                  <c:v>66</c:v>
+                </c:pt>
+                <c:pt idx="13">
+                  <c:v>70</c:v>
+                </c:pt>
+                <c:pt idx="14">
+                  <c:v>65</c:v>
+                </c:pt>
+                <c:pt idx="15">
+                  <c:v>63</c:v>
+                </c:pt>
+                <c:pt idx="16">
+                  <c:v>57</c:v>
+                </c:pt>
+                <c:pt idx="17">
+                  <c:v>68</c:v>
+                </c:pt>
+                <c:pt idx="18">
+                  <c:v>67</c:v>
+                </c:pt>
+                <c:pt idx="19">
+                  <c:v>65</c:v>
+                </c:pt>
+                <c:pt idx="20">
+                  <c:v>65</c:v>
+                </c:pt>
+                <c:pt idx="21">
+                  <c:v>60</c:v>
+                </c:pt>
+                <c:pt idx="22">
+                  <c:v>60</c:v>
+                </c:pt>
+                <c:pt idx="23">
+                  <c:v>66</c:v>
+                </c:pt>
+                <c:pt idx="24">
+                  <c:v>52</c:v>
+                </c:pt>
+                <c:pt idx="25">
+                  <c:v>65</c:v>
+                </c:pt>
+                <c:pt idx="26">
+                  <c:v>75</c:v>
+                </c:pt>
+                <c:pt idx="27">
+                  <c:v>64</c:v>
+                </c:pt>
+                <c:pt idx="28">
+                  <c:v>64</c:v>
+                </c:pt>
+                <c:pt idx="29">
+                  <c:v>60</c:v>
+                </c:pt>
+                <c:pt idx="30">
+                  <c:v>69</c:v>
+                </c:pt>
+                <c:pt idx="31">
+                  <c:v>74</c:v>
+                </c:pt>
+                <c:pt idx="32">
+                  <c:v>73</c:v>
+                </c:pt>
+                <c:pt idx="33">
+                  <c:v>58</c:v>
+                </c:pt>
+                <c:pt idx="34">
+                  <c:v>65</c:v>
+                </c:pt>
+                <c:pt idx="35">
+                  <c:v>61</c:v>
+                </c:pt>
+                <c:pt idx="36">
+                  <c:v>64</c:v>
+                </c:pt>
+                <c:pt idx="37">
+                  <c:v>69</c:v>
+                </c:pt>
+                <c:pt idx="38">
+                  <c:v>70</c:v>
+                </c:pt>
+                <c:pt idx="39">
+                  <c:v>68</c:v>
+                </c:pt>
+                <c:pt idx="40">
+                  <c:v>72</c:v>
+                </c:pt>
+                <c:pt idx="41">
+                  <c:v>61</c:v>
+                </c:pt>
+                <c:pt idx="42">
+                  <c:v>57</c:v>
+                </c:pt>
+                <c:pt idx="43">
+                  <c:v>64</c:v>
+                </c:pt>
+                <c:pt idx="44">
+                  <c:v>63</c:v>
+                </c:pt>
+                <c:pt idx="45">
+                  <c:v>70</c:v>
+                </c:pt>
+                <c:pt idx="46">
+                  <c:v>66</c:v>
+                </c:pt>
+                <c:pt idx="47">
+                  <c:v>65</c:v>
+                </c:pt>
+                <c:pt idx="48">
+                  <c:v>77</c:v>
+                </c:pt>
+                <c:pt idx="49">
+                  <c:v>66</c:v>
+                </c:pt>
+                <c:pt idx="50">
+                  <c:v>62</c:v>
+                </c:pt>
+                <c:pt idx="51">
+                  <c:v>60</c:v>
+                </c:pt>
+              </c:numCache>
+            </c:numRef>
+          </c:yVal>
+        </c:ser>
+        <c:ser>
+          <c:idx val="1"/>
+          <c:order val="1"/>
+          <c:tx>
+            <c:v>Americas</c:v>
+          </c:tx>
+          <c:spPr>
+            <a:ln xmlns:a="http://schemas.openxmlformats.org/drawingml/2006/main" w="0">
+              <a:noFill/>
+            </a:ln>
+          </c:spPr>
+          <c:marker>
+            <c:symbol val="circle"/>
+            <c:size val="7"/>
+            <c:spPr>
+              <a:solidFill xmlns:a="http://schemas.openxmlformats.org/drawingml/2006/main">
+                <a:srgbClr val="DBD8D2"/>
+              </a:solidFill>
+            </c:spPr>
+          </c:marker>
+          <c:xVal>
+            <c:numRef>
+              <c:f>'Chart Data'!$C$2:$C$33</c:f>
+              <c:numCache>
+                <c:formatCode>General</c:formatCode>
+                <c:ptCount val="32"/>
+                <c:pt idx="0">
+                  <c:v>18500</c:v>
+                </c:pt>
+                <c:pt idx="1">
+                  <c:v>19600</c:v>
+                </c:pt>
+                <c:pt idx="2">
+                  <c:v>26100</c:v>
+                </c:pt>
+                <c:pt idx="3">
+                  <c:v>13900</c:v>
+                </c:pt>
+                <c:pt idx="4">
+                  <c:v>7530</c:v>
+                </c:pt>
+                <c:pt idx="5">
+                  <c:v>14100</c:v>
+                </c:pt>
+                <c:pt idx="6">
+                  <c:v>46100</c:v>
+                </c:pt>
+                <c:pt idx="7">
+                  <c:v>23100</c:v>
+                </c:pt>
+                <c:pt idx="8">
+                  <c:v>13400</c:v>
+                </c:pt>
+                <c:pt idx="9">
+                  <c:v>19700</c:v>
+                </c:pt>
+                <c:pt idx="10">
+                  <c:v>8430</c:v>
+                </c:pt>
+                <c:pt idx="11">
+                  <c:v>10300</c:v>
+                </c:pt>
+                <c:pt idx="12">
+                  <c:v>16800</c:v>
+                </c:pt>
+                <c:pt idx="13">
+                  <c:v>9830</c:v>
+                </c:pt>
+                <c:pt idx="14">
+                  <c:v>8240</c:v>
+                </c:pt>
+                <c:pt idx="15">
+                  <c:v>13200</c:v>
+                </c:pt>
+                <c:pt idx="16">
+                  <c:v>8390</c:v>
+                </c:pt>
+                <c:pt idx="17">
+                  <c:v>18400</c:v>
+                </c:pt>
+                <c:pt idx="18">
+                  <c:v>2970</c:v>
+                </c:pt>
+                <c:pt idx="19">
+                  <c:v>5030</c:v>
+                </c:pt>
+                <c:pt idx="20">
+                  <c:v>9210</c:v>
+                </c:pt>
+                <c:pt idx="21">
+                  <c:v>18200</c:v>
+                </c:pt>
+                <c:pt idx="22">
+                  <c:v>5230</c:v>
+                </c:pt>
+                <c:pt idx="23">
+                  <c:v>26600</c:v>
+                </c:pt>
+                <c:pt idx="24">
+                  <c:v>13300</c:v>
+                </c:pt>
+                <c:pt idx="25">
+                  <c:v>11200</c:v>
+                </c:pt>
+                <c:pt idx="26">
+                  <c:v>11700</c:v>
+                </c:pt>
+                <c:pt idx="27">
+                  <c:v>13700</c:v>
+                </c:pt>
+                <c:pt idx="28">
+                  <c:v>15300</c:v>
+                </c:pt>
+                <c:pt idx="29">
+                  <c:v>23400</c:v>
+                </c:pt>
+                <c:pt idx="30">
+                  <c:v>22000</c:v>
+                </c:pt>
+                <c:pt idx="31">
+                  <c:v>5440</c:v>
+                </c:pt>
+              </c:numCache>
+            </c:numRef>
+          </c:xVal>
+          <c:yVal>
+            <c:numRef>
+              <c:f>'Chart Data'!$D$2:$D$33</c:f>
+              <c:numCache>
+                <c:formatCode>General</c:formatCode>
+                <c:ptCount val="32"/>
+                <c:pt idx="0">
+                  <c:v>76</c:v>
+                </c:pt>
+                <c:pt idx="1">
+                  <c:v>75</c:v>
+                </c:pt>
+                <c:pt idx="2">
+                  <c:v>74</c:v>
+                </c:pt>
+                <c:pt idx="3">
+                  <c:v>76</c:v>
+                </c:pt>
+                <c:pt idx="4">
+                  <c:v>73</c:v>
+                </c:pt>
+                <c:pt idx="5">
+                  <c:v>74</c:v>
+                </c:pt>
+                <c:pt idx="6">
+                  <c:v>81</c:v>
+                </c:pt>
+                <c:pt idx="7">
+                  <c:v>79</c:v>
+                </c:pt>
+                <c:pt idx="8">
+                  <c:v>78</c:v>
+                </c:pt>
+                <c:pt idx="9">
+                  <c:v>79</c:v>
+                </c:pt>
+                <c:pt idx="10">
+                  <c:v>78</c:v>
+                </c:pt>
+                <c:pt idx="11">
+                  <c:v>72</c:v>
+                </c:pt>
+                <c:pt idx="12">
+                  <c:v>72</c:v>
+                </c:pt>
+                <c:pt idx="13">
+                  <c:v>71</c:v>
+                </c:pt>
+                <c:pt idx="14">
+                  <c:v>74</c:v>
+                </c:pt>
+                <c:pt idx="15">
+                  <c:v>73</c:v>
+                </c:pt>
+                <c:pt idx="16">
+                  <c:v>71</c:v>
+                </c:pt>
+                <c:pt idx="17">
+                  <c:v>66</c:v>
+                </c:pt>
+                <c:pt idx="18">
+                  <c:v>63</c:v>
+                </c:pt>
+                <c:pt idx="19">
+                  <c:v>70</c:v>
+                </c:pt>
+                <c:pt idx="20">
+                  <c:v>76</c:v>
+                </c:pt>
+                <c:pt idx="21">
+                  <c:v>71</c:v>
+                </c:pt>
+                <c:pt idx="22">
+                  <c:v>73</c:v>
+                </c:pt>
+                <c:pt idx="23">
+                  <c:v>78</c:v>
+                </c:pt>
+                <c:pt idx="24">
+                  <c:v>76</c:v>
+                </c:pt>
+                <c:pt idx="25">
+                  <c:v>77</c:v>
+                </c:pt>
+                <c:pt idx="26">
+                  <c:v>75</c:v>
+                </c:pt>
+                <c:pt idx="27">
+                  <c:v>72</c:v>
+                </c:pt>
+                <c:pt idx="28">
+                  <c:v>73</c:v>
+                </c:pt>
+                <c:pt idx="29">
+                  <c:v>75</c:v>
+                </c:pt>
+                <c:pt idx="30">
+                  <c:v>78</c:v>
+                </c:pt>
+                <c:pt idx="31">
+                  <c:v>73</c:v>
+                </c:pt>
+              </c:numCache>
+            </c:numRef>
+          </c:yVal>
+        </c:ser>
+        <c:ser>
+          <c:idx val="2"/>
+          <c:order val="2"/>
+          <c:tx>
+            <c:v>Asia</c:v>
+          </c:tx>
+          <c:spPr>
+            <a:ln xmlns:a="http://schemas.openxmlformats.org/drawingml/2006/main" w="0">
+              <a:noFill/>
+            </a:ln>
+          </c:spPr>
+          <c:marker>
+            <c:symbol val="circle"/>
+            <c:size val="7"/>
+            <c:spPr>
+              <a:solidFill xmlns:a="http://schemas.openxmlformats.org/drawingml/2006/main">
+                <a:srgbClr val="DBD8D2"/>
+              </a:solidFill>
+            </c:spPr>
+          </c:marker>
+          <c:xVal>
+            <c:numRef>
+              <c:f>'Chart Data'!$E$2:$E$41</c:f>
+              <c:numCache>
+                <c:formatCode>General</c:formatCode>
+                <c:ptCount val="40"/>
+                <c:pt idx="0">
+                  <c:v>1970</c:v>
+                </c:pt>
+                <c:pt idx="1">
+                  <c:v>13300</c:v>
+                </c:pt>
+                <c:pt idx="2">
+                  <c:v>13700</c:v>
+                </c:pt>
+                <c:pt idx="3">
+                  <c:v>48000</c:v>
+                </c:pt>
+                <c:pt idx="4">
+                  <c:v>5590</c:v>
+                </c:pt>
+                <c:pt idx="5">
+                  <c:v>10500</c:v>
+                </c:pt>
+                <c:pt idx="6">
+                  <c:v>4280</c:v>
+                </c:pt>
+                <c:pt idx="7">
+                  <c:v>16300</c:v>
+                </c:pt>
+                <c:pt idx="8">
+                  <c:v>38300</c:v>
+                </c:pt>
+                <c:pt idx="9">
+                  <c:v>13900</c:v>
+                </c:pt>
+                <c:pt idx="10">
+                  <c:v>6140</c:v>
+                </c:pt>
+                <c:pt idx="11">
+                  <c:v>11500</c:v>
+                </c:pt>
+                <c:pt idx="12">
+                  <c:v>8860</c:v>
+                </c:pt>
+                <c:pt idx="13">
+                  <c:v>39700</c:v>
+                </c:pt>
+                <c:pt idx="14">
+                  <c:v>9060</c:v>
+                </c:pt>
+                <c:pt idx="15">
+                  <c:v>43800</c:v>
+                </c:pt>
+                <c:pt idx="16">
+                  <c:v>4810</c:v>
+                </c:pt>
+                <c:pt idx="17">
+                  <c:v>13800</c:v>
+                </c:pt>
+                <c:pt idx="18">
+                  <c:v>25800</c:v>
+                </c:pt>
+                <c:pt idx="19">
+                  <c:v>13800</c:v>
+                </c:pt>
+                <c:pt idx="20">
+                  <c:v>11700</c:v>
+                </c:pt>
+                <c:pt idx="21">
+                  <c:v>4620</c:v>
+                </c:pt>
+                <c:pt idx="22">
+                  <c:v>3760</c:v>
+                </c:pt>
+                <c:pt idx="23">
+                  <c:v>1810</c:v>
+                </c:pt>
+                <c:pt idx="24">
+                  <c:v>33100</c:v>
+                </c:pt>
+                <c:pt idx="25">
+                  <c:v>5000</c:v>
+                </c:pt>
+                <c:pt idx="26">
+                  <c:v>5400</c:v>
+                </c:pt>
+                <c:pt idx="27">
+                  <c:v>7770</c:v>
+                </c:pt>
+                <c:pt idx="28">
+                  <c:v>89000</c:v>
+                </c:pt>
+                <c:pt idx="29">
+                  <c:v>44300</c:v>
+                </c:pt>
+                <c:pt idx="30">
+                  <c:v>94200</c:v>
+                </c:pt>
+                <c:pt idx="31">
+                  <c:v>42400</c:v>
+                </c:pt>
+                <c:pt idx="32">
+                  <c:v>12900</c:v>
+                </c:pt>
+                <c:pt idx="33">
+                  <c:v>3520</c:v>
+                </c:pt>
+                <c:pt idx="34">
+                  <c:v>3650</c:v>
+                </c:pt>
+                <c:pt idx="35">
+                  <c:v>16900</c:v>
+                </c:pt>
+                <c:pt idx="36">
+                  <c:v>4860</c:v>
+                </c:pt>
+                <c:pt idx="37">
+                  <c:v>28500</c:v>
+                </c:pt>
+                <c:pt idx="38">
+                  <c:v>7410</c:v>
+                </c:pt>
+                <c:pt idx="39">
+                  <c:v>1780</c:v>
+                </c:pt>
+              </c:numCache>
+            </c:numRef>
+          </c:xVal>
+          <c:yVal>
+            <c:numRef>
+              <c:f>'Chart Data'!$F$2:$F$41</c:f>
+              <c:numCache>
+                <c:formatCode>General</c:formatCode>
+                <c:ptCount val="40"/>
+                <c:pt idx="0">
+                  <c:v>62</c:v>
+                </c:pt>
+                <c:pt idx="1">
+                  <c:v>72</c:v>
+                </c:pt>
+                <c:pt idx="2">
+                  <c:v>64</c:v>
+                </c:pt>
+                <c:pt idx="3">
+                  <c:v>76</c:v>
+                </c:pt>
+                <c:pt idx="4">
+                  <c:v>73</c:v>
+                </c:pt>
+                <c:pt idx="5">
+                  <c:v>73</c:v>
+                </c:pt>
+                <c:pt idx="6">
+                  <c:v>69</c:v>
+                </c:pt>
+                <c:pt idx="7">
+                  <c:v>77</c:v>
+                </c:pt>
+                <c:pt idx="8">
+                  <c:v>80</c:v>
+                </c:pt>
+                <c:pt idx="9">
+                  <c:v>72</c:v>
+                </c:pt>
+                <c:pt idx="10">
+                  <c:v>70</c:v>
+                </c:pt>
+                <c:pt idx="11">
+                  <c:v>69</c:v>
+                </c:pt>
+                <c:pt idx="12">
+                  <c:v>70</c:v>
+                </c:pt>
+                <c:pt idx="13">
+                  <c:v>82</c:v>
+                </c:pt>
+                <c:pt idx="14">
+                  <c:v>77</c:v>
+                </c:pt>
+                <c:pt idx="15">
+                  <c:v>78</c:v>
+                </c:pt>
+                <c:pt idx="16">
+                  <c:v>71</c:v>
+                </c:pt>
+                <c:pt idx="17">
+                  <c:v>75</c:v>
+                </c:pt>
+                <c:pt idx="18">
+                  <c:v>75</c:v>
+                </c:pt>
+                <c:pt idx="19">
+                  <c:v>78</c:v>
+                </c:pt>
+                <c:pt idx="20">
+                  <c:v>68</c:v>
+                </c:pt>
+                <c:pt idx="21">
+                  <c:v>69</c:v>
+                </c:pt>
+                <c:pt idx="22">
+                  <c:v>70</c:v>
+                </c:pt>
+                <c:pt idx="23">
+                  <c:v>73</c:v>
+                </c:pt>
+                <c:pt idx="24">
+                  <c:v>70</c:v>
+                </c:pt>
+                <c:pt idx="25">
+                  <c:v>65</c:v>
+                </c:pt>
+                <c:pt idx="26">
+                  <c:v>74</c:v>
+                </c:pt>
+                <c:pt idx="27">
+                  <c:v>72</c:v>
+                </c:pt>
+                <c:pt idx="28">
+                  <c:v>74</c:v>
+                </c:pt>
+                <c:pt idx="29">
+                  <c:v>73</c:v>
+                </c:pt>
+                <c:pt idx="30">
+                  <c:v>83</c:v>
+                </c:pt>
+                <c:pt idx="31">
+                  <c:v>82</c:v>
+                </c:pt>
+                <c:pt idx="32">
+                  <c:v>77</c:v>
+                </c:pt>
+                <c:pt idx="33">
+                  <c:v>74</c:v>
+                </c:pt>
+                <c:pt idx="34">
+                  <c:v>66</c:v>
+                </c:pt>
+                <c:pt idx="35">
+                  <c:v>78</c:v>
+                </c:pt>
+                <c:pt idx="36">
+                  <c:v>70</c:v>
+                </c:pt>
+                <c:pt idx="37">
+                  <c:v>76</c:v>
+                </c:pt>
+                <c:pt idx="38">
+                  <c:v>67</c:v>
+                </c:pt>
+                <c:pt idx="39">
+                  <c:v>67</c:v>
+                </c:pt>
+              </c:numCache>
+            </c:numRef>
+          </c:yVal>
+        </c:ser>
+        <c:ser>
+          <c:idx val="3"/>
+          <c:order val="3"/>
+          <c:tx>
+            <c:v>Europe</c:v>
+          </c:tx>
+          <c:spPr>
+            <a:ln xmlns:a="http://schemas.openxmlformats.org/drawingml/2006/main" w="0">
+              <a:noFill/>
+            </a:ln>
+          </c:spPr>
+          <c:marker>
+            <c:symbol val="circle"/>
+            <c:size val="7"/>
+            <c:spPr>
+              <a:solidFill xmlns:a="http://schemas.openxmlformats.org/drawingml/2006/main">
+                <a:srgbClr val="DBD8D2"/>
+              </a:solidFill>
+            </c:spPr>
+          </c:marker>
+          <c:xVal>
+            <c:numRef>
+              <c:f>'Chart Data'!$G$2:$G$40</c:f>
+              <c:numCache>
+                <c:formatCode>General</c:formatCode>
+                <c:ptCount val="39"/>
+                <c:pt idx="0">
+                  <c:v>13300</c:v>
+                </c:pt>
+                <c:pt idx="1">
+                  <c:v>49700</c:v>
+                </c:pt>
+                <c:pt idx="2">
+                  <c:v>52100</c:v>
+                </c:pt>
+                <c:pt idx="3">
+                  <c:v>19200</c:v>
+                </c:pt>
+                <c:pt idx="4">
+                  <c:v>48700</c:v>
+                </c:pt>
+                <c:pt idx="5">
+                  <c:v>14600</c:v>
+                </c:pt>
+                <c:pt idx="6">
+                  <c:v>22500</c:v>
+                </c:pt>
+                <c:pt idx="7">
+                  <c:v>27000</c:v>
+                </c:pt>
+                <c:pt idx="8">
+                  <c:v>38600</c:v>
+                </c:pt>
+                <c:pt idx="9">
+                  <c:v>54500</c:v>
+                </c:pt>
+                <c:pt idx="10">
+                  <c:v>36100</c:v>
+                </c:pt>
+                <c:pt idx="11">
+                  <c:v>47500</c:v>
+                </c:pt>
+                <c:pt idx="12">
+                  <c:v>42400</c:v>
+                </c:pt>
+                <c:pt idx="13">
+                  <c:v>51600</c:v>
+                </c:pt>
+                <c:pt idx="14">
+                  <c:v>26900</c:v>
+                </c:pt>
+                <c:pt idx="15">
+                  <c:v>31300</c:v>
+                </c:pt>
+                <c:pt idx="16">
+                  <c:v>51200</c:v>
+                </c:pt>
+                <c:pt idx="17">
+                  <c:v>90100</c:v>
+                </c:pt>
+                <c:pt idx="18">
+                  <c:v>38600</c:v>
+                </c:pt>
+                <c:pt idx="19">
+                  <c:v>29800</c:v>
+                </c:pt>
+                <c:pt idx="20">
+                  <c:v>37100</c:v>
+                </c:pt>
+                <c:pt idx="21">
+                  <c:v>110000</c:v>
+                </c:pt>
+                <c:pt idx="22">
+                  <c:v>40800</c:v>
+                </c:pt>
+                <c:pt idx="23">
+                  <c:v>208000</c:v>
+                </c:pt>
+                <c:pt idx="24">
+                  <c:v>18300</c:v>
+                </c:pt>
+                <c:pt idx="25">
+                  <c:v>53600</c:v>
+                </c:pt>
+                <c:pt idx="26">
+                  <c:v>63800</c:v>
+                </c:pt>
+                <c:pt idx="27">
+                  <c:v>32500</c:v>
+                </c:pt>
+                <c:pt idx="28">
+                  <c:v>32100</c:v>
+                </c:pt>
+                <c:pt idx="29">
+                  <c:v>29100</c:v>
+                </c:pt>
+                <c:pt idx="30">
+                  <c:v>26600</c:v>
+                </c:pt>
+                <c:pt idx="31">
+                  <c:v>56400</c:v>
+                </c:pt>
+                <c:pt idx="32">
+                  <c:v>18200</c:v>
+                </c:pt>
+                <c:pt idx="33">
+                  <c:v>31000</c:v>
+                </c:pt>
+                <c:pt idx="34">
+                  <c:v>37100</c:v>
+                </c:pt>
+                <c:pt idx="35">
+                  <c:v>35700</c:v>
+                </c:pt>
+                <c:pt idx="36">
+                  <c:v>51000</c:v>
+                </c:pt>
+                <c:pt idx="37">
+                  <c:v>67000</c:v>
+                </c:pt>
+                <c:pt idx="38">
+                  <c:v>12400</c:v>
+                </c:pt>
+              </c:numCache>
+            </c:numRef>
+          </c:xVal>
+          <c:yVal>
+            <c:numRef>
+              <c:f>'Chart Data'!$H$2:$H$40</c:f>
+              <c:numCache>
+                <c:formatCode>General</c:formatCode>
+                <c:ptCount val="39"/>
+                <c:pt idx="0">
+                  <c:v>76</c:v>
+                </c:pt>
+                <c:pt idx="1">
+                  <c:v>78</c:v>
+                </c:pt>
+                <c:pt idx="2">
+                  <c:v>81</c:v>
+                </c:pt>
+                <c:pt idx="3">
+                  <c:v>72</c:v>
+                </c:pt>
+                <c:pt idx="4">
+                  <c:v>80</c:v>
+                </c:pt>
+                <c:pt idx="5">
+                  <c:v>76</c:v>
+                </c:pt>
+                <c:pt idx="6">
+                  <c:v>72</c:v>
+                </c:pt>
+                <c:pt idx="7">
+                  <c:v>77</c:v>
+                </c:pt>
+                <c:pt idx="8">
+                  <c:v>78</c:v>
+                </c:pt>
+                <c:pt idx="9">
+                  <c:v>81</c:v>
+                </c:pt>
+                <c:pt idx="10">
+                  <c:v>77</c:v>
+                </c:pt>
+                <c:pt idx="11">
+                  <c:v>81</c:v>
+                </c:pt>
+                <c:pt idx="12">
+                  <c:v>82</c:v>
+                </c:pt>
+                <c:pt idx="13">
+                  <c:v>80</c:v>
+                </c:pt>
+                <c:pt idx="14">
+                  <c:v>80</c:v>
+                </c:pt>
+                <c:pt idx="15">
+                  <c:v>75</c:v>
+                </c:pt>
+                <c:pt idx="16">
+                  <c:v>84</c:v>
+                </c:pt>
+                <c:pt idx="17">
+                  <c:v>82</c:v>
+                </c:pt>
+                <c:pt idx="18">
+                  <c:v>82</c:v>
+                </c:pt>
+                <c:pt idx="19">
+                  <c:v>75</c:v>
+                </c:pt>
+                <c:pt idx="20">
+                  <c:v>75</c:v>
+                </c:pt>
+                <c:pt idx="21">
+                  <c:v>82</c:v>
+                </c:pt>
+                <c:pt idx="22">
+                  <c:v>82</c:v>
+                </c:pt>
+                <c:pt idx="23">
+                  <c:v>80</c:v>
+                </c:pt>
+                <c:pt idx="24">
+                  <c:v>75</c:v>
+                </c:pt>
+                <c:pt idx="25">
+                  <c:v>81</c:v>
+                </c:pt>
+                <c:pt idx="26">
+                  <c:v>83</c:v>
+                </c:pt>
+                <c:pt idx="27">
+                  <c:v>77</c:v>
+                </c:pt>
+                <c:pt idx="28">
+                  <c:v>81</c:v>
+                </c:pt>
+                <c:pt idx="29">
+                  <c:v>74</c:v>
+                </c:pt>
+                <c:pt idx="30">
+                  <c:v>70</c:v>
+                </c:pt>
+                <c:pt idx="31">
+                  <c:v>78</c:v>
+                </c:pt>
+                <c:pt idx="32">
+                  <c:v>74</c:v>
+                </c:pt>
+                <c:pt idx="33">
+                  <c:v>76</c:v>
+                </c:pt>
+                <c:pt idx="34">
+                  <c:v>80</c:v>
+                </c:pt>
+                <c:pt idx="35">
+                  <c:v>81</c:v>
+                </c:pt>
+                <c:pt idx="36">
+                  <c:v>82</c:v>
+                </c:pt>
+                <c:pt idx="37">
+                  <c:v>83</c:v>
+                </c:pt>
+                <c:pt idx="38">
+                  <c:v>71</c:v>
+                </c:pt>
+              </c:numCache>
+            </c:numRef>
+          </c:yVal>
+        </c:ser>
+        <c:ser>
+          <c:idx val="4"/>
+          <c:order val="4"/>
+          <c:tx>
+            <c:v>Oceania</c:v>
+          </c:tx>
+          <c:spPr>
+            <a:ln xmlns:a="http://schemas.openxmlformats.org/drawingml/2006/main" w="0">
+              <a:noFill/>
+            </a:ln>
+          </c:spPr>
+          <c:marker>
+            <c:symbol val="circle"/>
+            <c:size val="7"/>
+            <c:spPr>
+              <a:solidFill xmlns:a="http://schemas.openxmlformats.org/drawingml/2006/main">
+                <a:srgbClr val="DBD8D2"/>
+              </a:solidFill>
+            </c:spPr>
+          </c:marker>
+          <c:xVal>
+            <c:numRef>
+              <c:f>'Chart Data'!$I$2:$I$14</c:f>
+              <c:numCache>
+                <c:formatCode>General</c:formatCode>
+                <c:ptCount val="13"/>
+                <c:pt idx="0">
+                  <c:v>48800</c:v>
+                </c:pt>
+                <c:pt idx="1">
+                  <c:v>10900</c:v>
+                </c:pt>
+                <c:pt idx="2">
+                  <c:v>1880</c:v>
+                </c:pt>
+                <c:pt idx="3">
+                  <c:v>5710</c:v>
+                </c:pt>
+                <c:pt idx="4">
+                  <c:v>10400</c:v>
+                </c:pt>
+                <c:pt idx="5">
+                  <c:v>42300</c:v>
+                </c:pt>
+                <c:pt idx="6">
+                  <c:v>16100</c:v>
+                </c:pt>
+                <c:pt idx="7">
+                  <c:v>3770</c:v>
+                </c:pt>
+                <c:pt idx="8">
+                  <c:v>6060</c:v>
+                </c:pt>
+                <c:pt idx="9">
+                  <c:v>2390</c:v>
+                </c:pt>
+                <c:pt idx="10">
+                  <c:v>6360</c:v>
+                </c:pt>
+                <c:pt idx="11">
+                  <c:v>4580</c:v>
+                </c:pt>
+                <c:pt idx="12">
+                  <c:v>2910</c:v>
+                </c:pt>
+              </c:numCache>
+            </c:numRef>
+          </c:xVal>
+          <c:yVal>
+            <c:numRef>
+              <c:f>'Chart Data'!$J$2:$J$14</c:f>
+              <c:numCache>
+                <c:formatCode>General</c:formatCode>
+                <c:ptCount val="13"/>
+                <c:pt idx="0">
+                  <c:v>84</c:v>
+                </c:pt>
+                <c:pt idx="1">
+                  <c:v>68</c:v>
+                </c:pt>
+                <c:pt idx="2">
+                  <c:v>60</c:v>
+                </c:pt>
+                <c:pt idx="3">
+                  <c:v>65</c:v>
+                </c:pt>
+                <c:pt idx="4">
+                  <c:v>63</c:v>
+                </c:pt>
+                <c:pt idx="5">
+                  <c:v>82</c:v>
+                </c:pt>
+                <c:pt idx="6">
+                  <c:v>68</c:v>
+                </c:pt>
+                <c:pt idx="7">
+                  <c:v>65</c:v>
+                </c:pt>
+                <c:pt idx="8">
+                  <c:v>71</c:v>
+                </c:pt>
+                <c:pt idx="9">
+                  <c:v>59</c:v>
+                </c:pt>
+                <c:pt idx="10">
+                  <c:v>73</c:v>
+                </c:pt>
+                <c:pt idx="11">
+                  <c:v>68</c:v>
+                </c:pt>
+                <c:pt idx="12">
+                  <c:v>65</c:v>
+                </c:pt>
+              </c:numCache>
+            </c:numRef>
+          </c:yVal>
+        </c:ser>
+        <c:ser>
+          <c:idx val="5"/>
+          <c:order val="5"/>
+          <c:tx>
+            <c:v>Unknown</c:v>
+          </c:tx>
+          <c:spPr>
+            <a:ln xmlns:a="http://schemas.openxmlformats.org/drawingml/2006/main" w="0">
+              <a:noFill/>
+            </a:ln>
+          </c:spPr>
+          <c:marker>
+            <c:symbol val="circle"/>
+            <c:size val="7"/>
+            <c:spPr>
+              <a:solidFill xmlns:a="http://schemas.openxmlformats.org/drawingml/2006/main">
+                <a:srgbClr val="DBD8D2"/>
+              </a:solidFill>
+            </c:spPr>
+          </c:marker>
+          <c:xVal>
+            <c:numRef>
+              <c:f>'Chart Data'!$K$2:$K$18</c:f>
+              <c:numCache>
+                <c:formatCode>General</c:formatCode>
+                <c:ptCount val="17"/>
+                <c:pt idx="0">
+                  <c:v>7680</c:v>
+                </c:pt>
+                <c:pt idx="1">
+                  <c:v>61600</c:v>
+                </c:pt>
+                <c:pt idx="2">
+                  <c:v>6220</c:v>
+                </c:pt>
+                <c:pt idx="3">
+                  <c:v>3280</c:v>
+                </c:pt>
+                <c:pt idx="4">
+                  <c:v>14400</c:v>
+                </c:pt>
+                <c:pt idx="5">
+                  <c:v>25600</c:v>
+                </c:pt>
+                <c:pt idx="6">
+                  <c:v>7760</c:v>
+                </c:pt>
+                <c:pt idx="7">
+                  <c:v>3250</c:v>
+                </c:pt>
+                <c:pt idx="8">
+                  <c:v>11800</c:v>
+                </c:pt>
+                <c:pt idx="9">
+                  <c:v>15800</c:v>
+                </c:pt>
+                <c:pt idx="10">
+                  <c:v>26300</c:v>
+                </c:pt>
+                <c:pt idx="11">
+                  <c:v>53100</c:v>
+                </c:pt>
+                <c:pt idx="12">
+                  <c:v>15200</c:v>
+                </c:pt>
+                <c:pt idx="13">
+                  <c:v>67400</c:v>
+                </c:pt>
+                <c:pt idx="14">
+                  <c:v>41300</c:v>
+                </c:pt>
+                <c:pt idx="15">
+                  <c:v>60200</c:v>
+                </c:pt>
+                <c:pt idx="16">
+                  <c:v>10500</c:v>
+                </c:pt>
+              </c:numCache>
+            </c:numRef>
+          </c:xVal>
+          <c:yVal>
+            <c:numRef>
+              <c:f>'Chart Data'!$L$2:$L$18</c:f>
+              <c:numCache>
+                <c:formatCode>General</c:formatCode>
+                <c:ptCount val="17"/>
+                <c:pt idx="0">
+                  <c:v>68</c:v>
+                </c:pt>
+                <c:pt idx="1">
+                  <c:v>74</c:v>
+                </c:pt>
+                <c:pt idx="2">
+                  <c:v>72</c:v>
+                </c:pt>
+                <c:pt idx="3">
+                  <c:v>66</c:v>
+                </c:pt>
+                <c:pt idx="4">
+                  <c:v>76</c:v>
+                </c:pt>
+                <c:pt idx="5">
+                  <c:v>70</c:v>
+                </c:pt>
+                <c:pt idx="6">
+                  <c:v>69</c:v>
+                </c:pt>
+                <c:pt idx="7">
+                  <c:v>63</c:v>
+                </c:pt>
+                <c:pt idx="8">
+                  <c:v>73</c:v>
+                </c:pt>
+                <c:pt idx="9">
+                  <c:v>72</c:v>
+                </c:pt>
+                <c:pt idx="10">
+                  <c:v>72</c:v>
+                </c:pt>
+                <c:pt idx="11">
+                  <c:v>80</c:v>
+                </c:pt>
+                <c:pt idx="12">
+                  <c:v>70</c:v>
+                </c:pt>
+                <c:pt idx="13">
+                  <c:v>73</c:v>
+                </c:pt>
+                <c:pt idx="14">
+                  <c:v>79</c:v>
+                </c:pt>
+                <c:pt idx="15">
+                  <c:v>77</c:v>
+                </c:pt>
+                <c:pt idx="16">
+                  <c:v>75</c:v>
+                </c:pt>
+              </c:numCache>
+            </c:numRef>
+          </c:yVal>
+        </c:ser>
+        <c:ser>
+          <c:idx val="6"/>
+          <c:order val="6"/>
+          <c:tx>
+            <c:v>Japan</c:v>
+          </c:tx>
+          <c:spPr>
+            <a:ln xmlns:a="http://schemas.openxmlformats.org/drawingml/2006/main" w="0">
+              <a:noFill/>
+            </a:ln>
+          </c:spPr>
+          <c:marker>
+            <c:symbol val="circle"/>
+            <c:size val="7"/>
+            <c:spPr>
+              <a:solidFill xmlns:a="http://schemas.openxmlformats.org/drawingml/2006/main">
+                <a:srgbClr val="B23C50"/>
+              </a:solidFill>
+            </c:spPr>
+          </c:marker>
+          <c:dLbls>
+            <c:dLbl>
+              <c:idx val="0"/>
+              <c:tx>
+                <c:rich>
+                  <a:bodyPr xmlns:a="http://schemas.openxmlformats.org/drawingml/2006/main"/>
+                  <a:lstStyle xmlns:a="http://schemas.openxmlformats.org/drawingml/2006/main"/>
+                  <a:p xmlns:a="http://schemas.openxmlformats.org/drawingml/2006/main">
+                    <a:r>
+                      <a:rPr sz="1425">
+                        <a:solidFill>
+                          <a:srgbClr val="B23C50"/>
+                        </a:solidFill>
+                        <a:latin typeface="Ubuntu Condensed"/>
+                        <a:ea typeface="Ubuntu Condensed"/>
+                        <a:cs typeface="Ubuntu Condensed"/>
+                      </a:rPr>
+                      <a:t>Japan</a:t>
+                    </a:r>
+                  </a:p>
+                </c:rich>
+              </c:tx>
+              <c:txPr>
+                <a:bodyPr xmlns:a="http://schemas.openxmlformats.org/drawingml/2006/main" anchorCtr="1"/>
+                <a:lstStyle xmlns:a="http://schemas.openxmlformats.org/drawingml/2006/main"/>
+                <a:p xmlns:a="http://schemas.openxmlformats.org/drawingml/2006/main">
+                  <a:pPr>
+                    <a:defRPr sz="1425">
+                      <a:solidFill>
+                        <a:srgbClr val="B23C50"/>
+                      </a:solidFill>
+                      <a:latin typeface="Ubuntu Condensed"/>
+                      <a:ea typeface="Ubuntu Condensed"/>
+                      <a:cs typeface="Ubuntu Condensed"/>
+                    </a:defRPr>
+                  </a:pPr>
+                </a:p>
+              </c:txPr>
+              <c:dLblPos val="t"/>
+              <c:showVal val="0"/>
+            </c:dLbl>
+          </c:dLbls>
+          <c:xVal>
+            <c:numRef>
+              <c:f>'Chart Data'!$M$2:$M$2</c:f>
+              <c:numCache>
+                <c:formatCode>General</c:formatCode>
+                <c:ptCount val="1"/>
+                <c:pt idx="0">
+                  <c:v>39800</c:v>
+                </c:pt>
+              </c:numCache>
+            </c:numRef>
+          </c:xVal>
+          <c:yVal>
+            <c:numRef>
+              <c:f>'Chart Data'!$N$2:$N$2</c:f>
+              <c:numCache>
+                <c:formatCode>General</c:formatCode>
+                <c:ptCount val="1"/>
+                <c:pt idx="0">
+                  <c:v>85</c:v>
+                </c:pt>
+              </c:numCache>
+            </c:numRef>
+          </c:yVal>
+        </c:ser>
+        <c:dLbls>
+          <c:txPr>
+            <a:bodyPr xmlns:a="http://schemas.openxmlformats.org/drawingml/2006/main" anchorCtr="1"/>
+            <a:lstStyle xmlns:a="http://schemas.openxmlformats.org/drawingml/2006/main"/>
+            <a:p xmlns:a="http://schemas.openxmlformats.org/drawingml/2006/main">
+              <a:pPr>
+                <a:defRPr>
+                  <a:latin typeface="Ubuntu Condensed"/>
+                  <a:ea typeface="Ubuntu Condensed"/>
+                  <a:cs typeface="Ubuntu Condensed"/>
+                </a:defRPr>
+              </a:pPr>
+            </a:p>
+          </c:txPr>
+          <c:showLegendKey val="0"/>
+          <c:showVal val="0"/>
+          <c:showCatName val="0"/>
+          <c:showSerName val="0"/>
+          <c:showPercent val="0"/>
+          <c:showBubbleSize val="0"/>
+          <c:showLeaderLines val="0"/>
+        </c:dLbls>
+        <c:axId val="48650112"/>
+        <c:axId val="48672768"/>
+      </c:scatterChart>
+      <c:valAx>
+        <c:axId val="48672768"/>
+        <c:scaling>
+          <c:orientation val="minMax"/>
+          <c:max val="90"/>
+          <c:min val="40"/>
+        </c:scaling>
+        <c:delete val="0"/>
+        <c:axPos val="l"/>
+        <c:majorGridlines>
+          <c:spPr>
+            <a:ln xmlns:a="http://schemas.openxmlformats.org/drawingml/2006/main" w="9525">
+              <a:solidFill>
+                <a:srgbClr val="EAE7E1"/>
+              </a:solidFill>
+            </a:ln>
+          </c:spPr>
+        </c:majorGridlines>
+        <c:title>
+          <c:tx>
+            <c:rich>
+              <a:bodyPr xmlns:a="http://schemas.openxmlformats.org/drawingml/2006/main"/>
+              <a:lstStyle xmlns:a="http://schemas.openxmlformats.org/drawingml/2006/main"/>
+              <a:p xmlns:a="http://schemas.openxmlformats.org/drawingml/2006/main">
+                <a:r>
+                  <a:rPr sz="1425">
+                    <a:solidFill>
+                      <a:srgbClr val="38332E"/>
+                    </a:solidFill>
+                    <a:latin typeface="Ubuntu Condensed"/>
+                    <a:ea typeface="Ubuntu Condensed"/>
+                    <a:cs typeface="Ubuntu Condensed"/>
+                  </a:rPr>
+                  <a:t>Life Expectancy</a:t>
+                </a:r>
+              </a:p>
+            </c:rich>
+          </c:tx>
+          <c:overlay val="0"/>
+          <c:txPr>
+            <a:bodyPr xmlns:a="http://schemas.openxmlformats.org/drawingml/2006/main" anchorCtr="1"/>
+            <a:lstStyle xmlns:a="http://schemas.openxmlformats.org/drawingml/2006/main"/>
+            <a:p xmlns:a="http://schemas.openxmlformats.org/drawingml/2006/main">
+              <a:pPr>
+                <a:defRPr sz="1425">
+                  <a:solidFill>
+                    <a:srgbClr val="38332E"/>
+                  </a:solidFill>
+                  <a:latin typeface="Ubuntu Condensed"/>
+                  <a:ea typeface="Ubuntu Condensed"/>
+                  <a:cs typeface="Ubuntu Condensed"/>
+                </a:defRPr>
+              </a:pPr>
+            </a:p>
+          </c:txPr>
+        </c:title>
+        <c:numFmt formatCode="General"/>
+        <c:majorTickMark val="none"/>
+        <c:minorTickMark val="none"/>
+        <c:spPr>
+          <a:ln xmlns:a="http://schemas.openxmlformats.org/drawingml/2006/main" w="0">
+            <a:noFill/>
+          </a:ln>
+        </c:spPr>
+        <c:txPr>
+          <a:bodyPr xmlns:a="http://schemas.openxmlformats.org/drawingml/2006/main" anchorCtr="1"/>
+          <a:lstStyle xmlns:a="http://schemas.openxmlformats.org/drawingml/2006/main"/>
+          <a:p xmlns:a="http://schemas.openxmlformats.org/drawingml/2006/main">
+            <a:pPr>
+              <a:defRPr sz="1425">
+                <a:solidFill>
+                  <a:srgbClr val="81796F"/>
+                </a:solidFill>
+                <a:latin typeface="Ubuntu Condensed"/>
+                <a:ea typeface="Ubuntu Condensed"/>
+                <a:cs typeface="Ubuntu Condensed"/>
+              </a:defRPr>
+            </a:pPr>
+          </a:p>
+        </c:txPr>
+        <c:crossAx val="48650112"/>
+        <c:majorUnit val="10"/>
+      </c:valAx>
+      <c:valAx>
+        <c:axId val="48650112"/>
+        <c:scaling>
+          <c:orientation val="minMax"/>
+          <c:max val="220000"/>
+          <c:min val="0"/>
+        </c:scaling>
+        <c:delete val="0"/>
+        <c:axPos val="b"/>
+        <c:majorGridlines>
+          <c:spPr>
+            <a:ln xmlns:a="http://schemas.openxmlformats.org/drawingml/2006/main" w="9525">
+              <a:solidFill>
+                <a:srgbClr val="EAE7E1"/>
+              </a:solidFill>
+            </a:ln>
+          </c:spPr>
+        </c:majorGridlines>
+        <c:title>
+          <c:tx>
+            <c:rich>
+              <a:bodyPr xmlns:a="http://schemas.openxmlformats.org/drawingml/2006/main"/>
+              <a:lstStyle xmlns:a="http://schemas.openxmlformats.org/drawingml/2006/main"/>
+              <a:p xmlns:a="http://schemas.openxmlformats.org/drawingml/2006/main">
+                <a:r>
+                  <a:rPr sz="1425">
+                    <a:solidFill>
+                      <a:srgbClr val="38332E"/>
+                    </a:solidFill>
+                    <a:latin typeface="Ubuntu Condensed"/>
+                    <a:ea typeface="Ubuntu Condensed"/>
+                    <a:cs typeface="Ubuntu Condensed"/>
+                  </a:rPr>
+                  <a:t>GDP</a:t>
+                </a:r>
+              </a:p>
+            </c:rich>
+          </c:tx>
+          <c:overlay val="0"/>
+          <c:txPr>
+            <a:bodyPr xmlns:a="http://schemas.openxmlformats.org/drawingml/2006/main" anchorCtr="1"/>
+            <a:lstStyle xmlns:a="http://schemas.openxmlformats.org/drawingml/2006/main"/>
+            <a:p xmlns:a="http://schemas.openxmlformats.org/drawingml/2006/main">
+              <a:pPr>
+                <a:defRPr sz="1425">
+                  <a:solidFill>
+                    <a:srgbClr val="38332E"/>
+                  </a:solidFill>
+                  <a:latin typeface="Ubuntu Condensed"/>
+                  <a:ea typeface="Ubuntu Condensed"/>
+                  <a:cs typeface="Ubuntu Condensed"/>
+                </a:defRPr>
+              </a:pPr>
+            </a:p>
+          </c:txPr>
+        </c:title>
+        <c:numFmt formatCode="#,##0"/>
+        <c:majorTickMark val="none"/>
+        <c:minorTickMark val="none"/>
+        <c:spPr>
+          <a:ln xmlns:a="http://schemas.openxmlformats.org/drawingml/2006/main" w="0">
+            <a:noFill/>
+          </a:ln>
+        </c:spPr>
+        <c:txPr>
+          <a:bodyPr xmlns:a="http://schemas.openxmlformats.org/drawingml/2006/main" anchorCtr="1"/>
+          <a:lstStyle xmlns:a="http://schemas.openxmlformats.org/drawingml/2006/main"/>
+          <a:p xmlns:a="http://schemas.openxmlformats.org/drawingml/2006/main">
+            <a:pPr>
+              <a:defRPr sz="1425">
+                <a:solidFill>
+                  <a:srgbClr val="81796F"/>
+                </a:solidFill>
+                <a:latin typeface="Ubuntu Condensed"/>
+                <a:ea typeface="Ubuntu Condensed"/>
+                <a:cs typeface="Ubuntu Condensed"/>
+              </a:defRPr>
+            </a:pPr>
+          </a:p>
+        </c:txPr>
+        <c:crossAx val="48672768"/>
+        <c:majorUnit val="100000"/>
+      </c:valAx>
+      <c:spPr>
+        <a:noFill xmlns:a="http://schemas.openxmlformats.org/drawingml/2006/main"/>
+      </c:spPr>
+    </c:plotArea>
+    <c:plotVisOnly val="1"/>
+  </c:chart>
+  <c:spPr>
+    <a:noFill xmlns:a="http://schemas.openxmlformats.org/drawingml/2006/main"/>
+  </c:spPr>
+  <c:externalData r:id="rIdChartSnapshot1">
+    <c:autoUpdate val="0"/>
+  </c:externalData>
+</c:chartSpace>
+</file>
+
 <file path=ppt/slides/slide1.xml><?xml version="1.0" encoding="utf-8"?>
 <p:sld xmlns:p="http://schemas.openxmlformats.org/presentationml/2006/main">
   <p:cSld>
@@ -8112,7 +7659,7 @@
           <p:cNvPr id="15" name="">
             <a:extLst xmlns:a="http://schemas.openxmlformats.org/drawingml/2006/main">
               <a:ext uri="{FF2B5EF4-FFF2-40B4-BE49-F238E27FC236}">
-                <a16:creationId xmlns:a16="http://schemas.microsoft.com/office/drawing/2014/main" id="{6B05B811-969B-4EF9-9262-C8FBFD2F1DEF}"/>
+                <a16:creationId xmlns:a16="http://schemas.microsoft.com/office/drawing/2014/main" id="{61BFA0A1-D077-4F1A-A32D-1C24031E6819}"/>
               </a:ext>
             </a:extLst>
           </p:cNvPr>
@@ -8178,7 +7725,7 @@
           <p:cNvPr id="2" name="">
             <a:extLst xmlns:a="http://schemas.openxmlformats.org/drawingml/2006/main">
               <a:ext uri="{FF2B5EF4-FFF2-40B4-BE49-F238E27FC236}">
-                <a16:creationId xmlns:a16="http://schemas.microsoft.com/office/drawing/2014/main" id="{BAD384BB-3C2D-4603-A40F-E2849FDDDB08}"/>
+                <a16:creationId xmlns:a16="http://schemas.microsoft.com/office/drawing/2014/main" id="{6CBD55A9-C61C-42ED-81B8-03854C85E98D}"/>
               </a:ext>
             </a:extLst>
           </p:cNvPr>
@@ -8244,7 +7791,7 @@
           <p:cNvPr id="3" name="">
             <a:extLst xmlns:a="http://schemas.openxmlformats.org/drawingml/2006/main">
               <a:ext uri="{FF2B5EF4-FFF2-40B4-BE49-F238E27FC236}">
-                <a16:creationId xmlns:a16="http://schemas.microsoft.com/office/drawing/2014/main" id="{D528BA4E-302F-4881-8717-B4D36AC1C5D0}"/>
+                <a16:creationId xmlns:a16="http://schemas.microsoft.com/office/drawing/2014/main" id="{6B4D59E4-797A-45B5-AB52-05867B464617}"/>
               </a:ext>
             </a:extLst>
           </p:cNvPr>
@@ -8310,7 +7857,7 @@
           <p:cNvPr id="4" name="">
             <a:extLst xmlns:a="http://schemas.openxmlformats.org/drawingml/2006/main">
               <a:ext uri="{FF2B5EF4-FFF2-40B4-BE49-F238E27FC236}">
-                <a16:creationId xmlns:a16="http://schemas.microsoft.com/office/drawing/2014/main" id="{AA295F46-C954-42A3-8E82-6894CE5F8BB9}"/>
+                <a16:creationId xmlns:a16="http://schemas.microsoft.com/office/drawing/2014/main" id="{E3781B5F-C6F7-4F79-BB2C-1D09B691F87F}"/>
               </a:ext>
             </a:extLst>
           </p:cNvPr>
@@ -8376,7 +7923,7 @@
           <p:cNvPr id="5" name="Chart">
             <a:extLst xmlns:a="http://schemas.openxmlformats.org/drawingml/2006/main">
               <a:ext uri="{FF2B5EF4-FFF2-40B4-BE49-F238E27FC236}">
-                <a16:creationId xmlns:a16="http://schemas.microsoft.com/office/drawing/2014/main" id="{6BA46EE9-6BB0-4624-9B34-CD9EABE69EBA}"/>
+                <a16:creationId xmlns:a16="http://schemas.microsoft.com/office/drawing/2014/main" id="{0BB5248E-CF3C-465D-BD76-AA61EECD7189}"/>
               </a:ext>
             </a:extLst>
           </p:cNvPr>
@@ -8389,7 +7936,7 @@
         </p:xfrm>
         <a:graphic xmlns:a="http://schemas.openxmlformats.org/drawingml/2006/main">
           <a:graphicData uri="http://schemas.openxmlformats.org/drawingml/2006/chart">
-            <c:chart xmlns:r="http://schemas.openxmlformats.org/officeDocument/2006/relationships" xmlns:c="http://schemas.openxmlformats.org/drawingml/2006/chart" r:id="Rb85d58441dd441fa"/>
+            <c:chart xmlns:r="http://schemas.openxmlformats.org/officeDocument/2006/relationships" xmlns:c="http://schemas.openxmlformats.org/drawingml/2006/chart" r:id="R19d51970d5294c12"/>
           </a:graphicData>
         </a:graphic>
       </p:graphicFrame>
@@ -8398,7 +7945,7 @@
           <p:cNvPr id="6" name="">
             <a:extLst xmlns:a="http://schemas.openxmlformats.org/drawingml/2006/main">
               <a:ext uri="{FF2B5EF4-FFF2-40B4-BE49-F238E27FC236}">
-                <a16:creationId xmlns:a16="http://schemas.microsoft.com/office/drawing/2014/main" id="{B5932DDD-C02F-4FB0-B8C2-679F73DB1784}"/>
+                <a16:creationId xmlns:a16="http://schemas.microsoft.com/office/drawing/2014/main" id="{AE98E9F1-8DCA-4A51-A56F-3C45CEB978A5}"/>
               </a:ext>
             </a:extLst>
           </p:cNvPr>
@@ -8464,7 +8011,7 @@
           <p:cNvPr id="7" name="Chart">
             <a:extLst xmlns:a="http://schemas.openxmlformats.org/drawingml/2006/main">
               <a:ext uri="{FF2B5EF4-FFF2-40B4-BE49-F238E27FC236}">
-                <a16:creationId xmlns:a16="http://schemas.microsoft.com/office/drawing/2014/main" id="{08828088-D8B9-4438-9908-65E2D696974D}"/>
+                <a16:creationId xmlns:a16="http://schemas.microsoft.com/office/drawing/2014/main" id="{66FAC151-74A0-4845-AEC9-AD7B1C63BEFC}"/>
               </a:ext>
             </a:extLst>
           </p:cNvPr>
@@ -8477,7 +8024,7 @@
         </p:xfrm>
         <a:graphic xmlns:a="http://schemas.openxmlformats.org/drawingml/2006/main">
           <a:graphicData uri="http://schemas.openxmlformats.org/drawingml/2006/chart">
-            <c:chart xmlns:r="http://schemas.openxmlformats.org/officeDocument/2006/relationships" xmlns:c="http://schemas.openxmlformats.org/drawingml/2006/chart" r:id="R66a44d169bd9437b"/>
+            <c:chart xmlns:r="http://schemas.openxmlformats.org/officeDocument/2006/relationships" xmlns:c="http://schemas.openxmlformats.org/drawingml/2006/chart" r:id="R8c6016c3d9344693"/>
           </a:graphicData>
         </a:graphic>
       </p:graphicFrame>
@@ -8486,7 +8033,7 @@
           <p:cNvPr id="8" name="">
             <a:extLst xmlns:a="http://schemas.openxmlformats.org/drawingml/2006/main">
               <a:ext uri="{FF2B5EF4-FFF2-40B4-BE49-F238E27FC236}">
-                <a16:creationId xmlns:a16="http://schemas.microsoft.com/office/drawing/2014/main" id="{488C6AAD-191E-459E-82F9-ABA64C8C6317}"/>
+                <a16:creationId xmlns:a16="http://schemas.microsoft.com/office/drawing/2014/main" id="{E67E9520-6B7D-49BB-9CED-12D0D9FDCB8F}"/>
               </a:ext>
             </a:extLst>
           </p:cNvPr>
@@ -8552,7 +8099,7 @@
           <p:cNvPr id="9" name="Chart">
             <a:extLst xmlns:a="http://schemas.openxmlformats.org/drawingml/2006/main">
               <a:ext uri="{FF2B5EF4-FFF2-40B4-BE49-F238E27FC236}">
-                <a16:creationId xmlns:a16="http://schemas.microsoft.com/office/drawing/2014/main" id="{37DC4C80-CE28-4A00-97EF-FD993FC22B71}"/>
+                <a16:creationId xmlns:a16="http://schemas.microsoft.com/office/drawing/2014/main" id="{44404043-6BAA-481C-B48A-AA640E850268}"/>
               </a:ext>
             </a:extLst>
           </p:cNvPr>
@@ -8565,7 +8112,7 @@
         </p:xfrm>
         <a:graphic xmlns:a="http://schemas.openxmlformats.org/drawingml/2006/main">
           <a:graphicData uri="http://schemas.openxmlformats.org/drawingml/2006/chart">
-            <c:chart xmlns:r="http://schemas.openxmlformats.org/officeDocument/2006/relationships" xmlns:c="http://schemas.openxmlformats.org/drawingml/2006/chart" r:id="R98e8792e94fc4cc5"/>
+            <c:chart xmlns:r="http://schemas.openxmlformats.org/officeDocument/2006/relationships" xmlns:c="http://schemas.openxmlformats.org/drawingml/2006/chart" r:id="R62b79268055d4967"/>
           </a:graphicData>
         </a:graphic>
       </p:graphicFrame>
@@ -8574,7 +8121,7 @@
           <p:cNvPr id="10" name="">
             <a:extLst xmlns:a="http://schemas.openxmlformats.org/drawingml/2006/main">
               <a:ext uri="{FF2B5EF4-FFF2-40B4-BE49-F238E27FC236}">
-                <a16:creationId xmlns:a16="http://schemas.microsoft.com/office/drawing/2014/main" id="{97E74729-BB99-43A5-B4DA-4B3B76396573}"/>
+                <a16:creationId xmlns:a16="http://schemas.microsoft.com/office/drawing/2014/main" id="{83617047-6587-42B2-ACCC-69E96F87942B}"/>
               </a:ext>
             </a:extLst>
           </p:cNvPr>
@@ -8640,7 +8187,7 @@
           <p:cNvPr id="11" name="">
             <a:extLst xmlns:a="http://schemas.openxmlformats.org/drawingml/2006/main">
               <a:ext uri="{FF2B5EF4-FFF2-40B4-BE49-F238E27FC236}">
-                <a16:creationId xmlns:a16="http://schemas.microsoft.com/office/drawing/2014/main" id="{2EB58EF7-037C-4C82-A7C9-5667C261FF0F}"/>
+                <a16:creationId xmlns:a16="http://schemas.microsoft.com/office/drawing/2014/main" id="{B95937BA-EF37-4619-8FC8-EEE4F075F8DF}"/>
               </a:ext>
             </a:extLst>
           </p:cNvPr>
@@ -8706,7 +8253,7 @@
           <p:cNvPr id="12" name="">
             <a:extLst xmlns:a="http://schemas.openxmlformats.org/drawingml/2006/main">
               <a:ext uri="{FF2B5EF4-FFF2-40B4-BE49-F238E27FC236}">
-                <a16:creationId xmlns:a16="http://schemas.microsoft.com/office/drawing/2014/main" id="{F3FB38AD-9F6C-48F7-A4C2-62331181D2DD}"/>
+                <a16:creationId xmlns:a16="http://schemas.microsoft.com/office/drawing/2014/main" id="{D17AAC30-D73B-4C08-8E41-13AE3BAB50FC}"/>
               </a:ext>
             </a:extLst>
           </p:cNvPr>
@@ -8772,7 +8319,7 @@
           <p:cNvPr id="13" name="">
             <a:extLst xmlns:a="http://schemas.openxmlformats.org/drawingml/2006/main">
               <a:ext uri="{FF2B5EF4-FFF2-40B4-BE49-F238E27FC236}">
-                <a16:creationId xmlns:a16="http://schemas.microsoft.com/office/drawing/2014/main" id="{D31F7BB7-B4D4-4D69-8E46-1D93AAB62A9E}"/>
+                <a16:creationId xmlns:a16="http://schemas.microsoft.com/office/drawing/2014/main" id="{EBB39EEB-62DE-4489-90F6-D9E341F88C79}"/>
               </a:ext>
             </a:extLst>
           </p:cNvPr>
@@ -8838,7 +8385,7 @@
           <p:cNvPr id="14" name="">
             <a:extLst xmlns:a="http://schemas.openxmlformats.org/drawingml/2006/main">
               <a:ext uri="{FF2B5EF4-FFF2-40B4-BE49-F238E27FC236}">
-                <a16:creationId xmlns:a16="http://schemas.microsoft.com/office/drawing/2014/main" id="{4E705F02-1C8E-419B-A65E-ADD46B7734BB}"/>
+                <a16:creationId xmlns:a16="http://schemas.microsoft.com/office/drawing/2014/main" id="{B138B716-E2B0-402D-8C49-2FBFEB6D0F9C}"/>
               </a:ext>
             </a:extLst>
           </p:cNvPr>
@@ -8902,7 +8449,7 @@
     </p:spTree>
     <p:extLst>
       <p:ext uri="{BB962C8B-B14F-4D97-AF65-F5344CB8AC3E}">
-        <p14:creationId xmlns:p14="http://schemas.microsoft.com/office/powerpoint/2010/main" val="968740309"/>
+        <p14:creationId xmlns:p14="http://schemas.microsoft.com/office/powerpoint/2010/main" val="1756363086"/>
       </p:ext>
     </p:extLst>
   </p:cSld>
@@ -8930,10 +8477,10 @@
       </p:grpSpPr>
       <p:sp>
         <p:nvSpPr>
-          <p:cNvPr id="17" name="">
+          <p:cNvPr id="46" name="">
             <a:extLst xmlns:a="http://schemas.openxmlformats.org/drawingml/2006/main">
               <a:ext uri="{FF2B5EF4-FFF2-40B4-BE49-F238E27FC236}">
-                <a16:creationId xmlns:a16="http://schemas.microsoft.com/office/drawing/2014/main" id="{2E5B220F-6CA2-4E2A-84A4-3255AF0342C0}"/>
+                <a16:creationId xmlns:a16="http://schemas.microsoft.com/office/drawing/2014/main" id="{268E2BD2-3AFB-4402-B859-C4D83E8ABDD4}"/>
               </a:ext>
             </a:extLst>
           </p:cNvPr>
@@ -8999,7 +8546,7 @@
           <p:cNvPr id="2" name="">
             <a:extLst xmlns:a="http://schemas.openxmlformats.org/drawingml/2006/main">
               <a:ext uri="{FF2B5EF4-FFF2-40B4-BE49-F238E27FC236}">
-                <a16:creationId xmlns:a16="http://schemas.microsoft.com/office/drawing/2014/main" id="{A26FF63A-5550-4CCD-829B-57A35F33C350}"/>
+                <a16:creationId xmlns:a16="http://schemas.microsoft.com/office/drawing/2014/main" id="{D44EB842-301D-4603-8951-1CFF47EF0A46}"/>
               </a:ext>
             </a:extLst>
           </p:cNvPr>
@@ -9055,7 +8602,7 @@
                 <a:ea typeface="Ubuntu Condensed"/>
                 <a:cs typeface="Ubuntu Condensed"/>
               </a:rPr>
-              <a:t>Use the same hans.csv connection for every sheet</a:t>
+              <a:t>Right-click Year in the Data pane: Convert to Dimension</a:t>
             </a:r>
           </a:p>
         </p:txBody>
@@ -9065,7 +8612,7 @@
           <p:cNvPr id="3" name="">
             <a:extLst xmlns:a="http://schemas.openxmlformats.org/drawingml/2006/main">
               <a:ext uri="{FF2B5EF4-FFF2-40B4-BE49-F238E27FC236}">
-                <a16:creationId xmlns:a16="http://schemas.microsoft.com/office/drawing/2014/main" id="{A110EF4B-4682-4A82-B8AB-54EA05C09B52}"/>
+                <a16:creationId xmlns:a16="http://schemas.microsoft.com/office/drawing/2014/main" id="{CF2A9DCC-BA4D-4967-841A-494DDC1D9CB9}"/>
               </a:ext>
             </a:extLst>
           </p:cNvPr>
@@ -9076,8 +8623,8 @@
         </p:nvSpPr>
         <p:spPr>
           <a:xfrm xmlns:a="http://schemas.openxmlformats.org/drawingml/2006/main">
-            <a:off x="457200" y="1733550"/>
-            <a:ext cx="2952750" cy="342900"/>
+            <a:off x="457200" y="1714500"/>
+            <a:ext cx="3429000" cy="428625"/>
           </a:xfrm>
           <a:prstGeom xmlns:a="http://schemas.openxmlformats.org/drawingml/2006/main" prst="rect">
             <a:avLst/>
@@ -9091,7 +8638,7 @@
           <a:bodyPr xmlns:a="http://schemas.openxmlformats.org/drawingml/2006/main" lIns="0" tIns="0" rIns="0" bIns="0"/>
           <a:lstStyle xmlns:a="http://schemas.openxmlformats.org/drawingml/2006/main">
             <a:defPPr>
-              <a:defRPr sz="2250">
+              <a:defRPr sz="2400">
                 <a:solidFill>
                   <a:srgbClr val="B23C50"/>
                 </a:solidFill>
@@ -9103,7 +8650,7 @@
           </a:lstStyle>
           <a:p xmlns:a="http://schemas.openxmlformats.org/drawingml/2006/main">
             <a:pPr>
-              <a:defRPr sz="2250">
+              <a:defRPr sz="2400">
                 <a:solidFill>
                   <a:srgbClr val="B23C50"/>
                 </a:solidFill>
@@ -9113,7 +8660,7 @@
               </a:defRPr>
             </a:pPr>
             <a:r>
-              <a:rPr sz="2250">
+              <a:rPr sz="2400">
                 <a:solidFill>
                   <a:srgbClr val="B23C50"/>
                 </a:solidFill>
@@ -9126,34 +8673,12 @@
           </a:p>
         </p:txBody>
       </p:sp>
-      <p:graphicFrame>
-        <p:nvGraphicFramePr>
-          <p:cNvPr id="4" name="Chart">
+      <p:sp>
+        <p:nvSpPr>
+          <p:cNvPr id="4" name="">
             <a:extLst xmlns:a="http://schemas.openxmlformats.org/drawingml/2006/main">
               <a:ext uri="{FF2B5EF4-FFF2-40B4-BE49-F238E27FC236}">
-                <a16:creationId xmlns:a16="http://schemas.microsoft.com/office/drawing/2014/main" id="{E4341F7C-9146-4DF8-9B8C-B9A430FF0E3A}"/>
-              </a:ext>
-            </a:extLst>
-          </p:cNvPr>
-          <p:cNvGraphicFramePr/>
-          <p:nvPr/>
-        </p:nvGraphicFramePr>
-        <p:xfrm>
-          <a:off xmlns:a="http://schemas.openxmlformats.org/drawingml/2006/main" x="285750" y="2152650"/>
-          <a:ext xmlns:a="http://schemas.openxmlformats.org/drawingml/2006/main" cx="3048000" cy="1104900"/>
-        </p:xfrm>
-        <a:graphic xmlns:a="http://schemas.openxmlformats.org/drawingml/2006/main">
-          <a:graphicData uri="http://schemas.openxmlformats.org/drawingml/2006/chart">
-            <c:chart xmlns:r="http://schemas.openxmlformats.org/officeDocument/2006/relationships" xmlns:c="http://schemas.openxmlformats.org/drawingml/2006/chart" r:id="R7b4a44303dbe4ad0"/>
-          </a:graphicData>
-        </a:graphic>
-      </p:graphicFrame>
-      <p:sp>
-        <p:nvSpPr>
-          <p:cNvPr id="5" name="">
-            <a:extLst xmlns:a="http://schemas.openxmlformats.org/drawingml/2006/main">
-              <a:ext uri="{FF2B5EF4-FFF2-40B4-BE49-F238E27FC236}">
-                <a16:creationId xmlns:a16="http://schemas.microsoft.com/office/drawing/2014/main" id="{9CF6AEEA-D6CF-459E-AC12-860B7D379A10}"/>
+                <a16:creationId xmlns:a16="http://schemas.microsoft.com/office/drawing/2014/main" id="{44FFCF1A-F0B2-4F37-934E-16C2F5FBB28F}"/>
               </a:ext>
             </a:extLst>
           </p:cNvPr>
@@ -9164,8 +8689,626 @@
         </p:nvSpPr>
         <p:spPr>
           <a:xfrm xmlns:a="http://schemas.openxmlformats.org/drawingml/2006/main">
-            <a:off x="3810000" y="1771650"/>
-            <a:ext cx="7905750" cy="361950"/>
+            <a:off x="457200" y="2419350"/>
+            <a:ext cx="952500" cy="266700"/>
+          </a:xfrm>
+          <a:prstGeom xmlns:a="http://schemas.openxmlformats.org/drawingml/2006/main" prst="rect">
+            <a:avLst/>
+          </a:prstGeom>
+          <a:noFill xmlns:a="http://schemas.openxmlformats.org/drawingml/2006/main"/>
+          <a:ln xmlns:a="http://schemas.openxmlformats.org/drawingml/2006/main" w="0">
+            <a:noFill/>
+          </a:ln>
+        </p:spPr>
+        <p:txBody>
+          <a:bodyPr xmlns:a="http://schemas.openxmlformats.org/drawingml/2006/main" lIns="0" tIns="0" rIns="0" bIns="0"/>
+          <a:lstStyle xmlns:a="http://schemas.openxmlformats.org/drawingml/2006/main">
+            <a:defPPr>
+              <a:defRPr sz="1575">
+                <a:solidFill>
+                  <a:srgbClr val="81796F"/>
+                </a:solidFill>
+                <a:latin typeface="Ubuntu Condensed"/>
+                <a:ea typeface="Ubuntu Condensed"/>
+                <a:cs typeface="Ubuntu Condensed"/>
+              </a:defRPr>
+            </a:defPPr>
+          </a:lstStyle>
+          <a:p xmlns:a="http://schemas.openxmlformats.org/drawingml/2006/main">
+            <a:pPr>
+              <a:defRPr sz="1575">
+                <a:solidFill>
+                  <a:srgbClr val="81796F"/>
+                </a:solidFill>
+                <a:latin typeface="Ubuntu Condensed"/>
+                <a:ea typeface="Ubuntu Condensed"/>
+                <a:cs typeface="Ubuntu Condensed"/>
+              </a:defRPr>
+            </a:pPr>
+            <a:r>
+              <a:rPr sz="1575">
+                <a:solidFill>
+                  <a:srgbClr val="81796F"/>
+                </a:solidFill>
+                <a:latin typeface="Ubuntu Condensed"/>
+                <a:ea typeface="Ubuntu Condensed"/>
+                <a:cs typeface="Ubuntu Condensed"/>
+              </a:rPr>
+              <a:t>Columns</a:t>
+            </a:r>
+          </a:p>
+        </p:txBody>
+      </p:sp>
+      <p:sp>
+        <p:nvSpPr>
+          <p:cNvPr id="5" name="">
+            <a:extLst xmlns:a="http://schemas.openxmlformats.org/drawingml/2006/main">
+              <a:ext uri="{FF2B5EF4-FFF2-40B4-BE49-F238E27FC236}">
+                <a16:creationId xmlns:a16="http://schemas.microsoft.com/office/drawing/2014/main" id="{820DBAB9-0FCE-452C-9843-9FF61D724D69}"/>
+              </a:ext>
+            </a:extLst>
+          </p:cNvPr>
+          <p:cNvSpPr>
+            <a:spLocks xmlns:a="http://schemas.openxmlformats.org/drawingml/2006/main" noGrp="1"/>
+          </p:cNvSpPr>
+          <p:nvPr/>
+        </p:nvSpPr>
+        <p:spPr>
+          <a:xfrm xmlns:a="http://schemas.openxmlformats.org/drawingml/2006/main">
+            <a:off x="1419225" y="2381250"/>
+            <a:ext cx="2400300" cy="333375"/>
+          </a:xfrm>
+          <a:prstGeom xmlns:a="http://schemas.openxmlformats.org/drawingml/2006/main" prst="rect">
+            <a:avLst/>
+          </a:prstGeom>
+          <a:solidFill xmlns:a="http://schemas.openxmlformats.org/drawingml/2006/main">
+            <a:srgbClr val="647545"/>
+          </a:solidFill>
+          <a:ln xmlns:a="http://schemas.openxmlformats.org/drawingml/2006/main" w="0">
+            <a:noFill/>
+          </a:ln>
+        </p:spPr>
+      </p:sp>
+      <p:sp>
+        <p:nvSpPr>
+          <p:cNvPr id="6" name="">
+            <a:extLst xmlns:a="http://schemas.openxmlformats.org/drawingml/2006/main">
+              <a:ext uri="{FF2B5EF4-FFF2-40B4-BE49-F238E27FC236}">
+                <a16:creationId xmlns:a16="http://schemas.microsoft.com/office/drawing/2014/main" id="{8216499D-1740-4DD2-AA13-E7B791B88AE7}"/>
+              </a:ext>
+            </a:extLst>
+          </p:cNvPr>
+          <p:cNvSpPr>
+            <a:spLocks xmlns:a="http://schemas.openxmlformats.org/drawingml/2006/main" noGrp="1"/>
+          </p:cNvSpPr>
+          <p:nvPr/>
+        </p:nvSpPr>
+        <p:spPr>
+          <a:xfrm xmlns:a="http://schemas.openxmlformats.org/drawingml/2006/main">
+            <a:off x="1504950" y="2419350"/>
+            <a:ext cx="2228850" cy="266700"/>
+          </a:xfrm>
+          <a:prstGeom xmlns:a="http://schemas.openxmlformats.org/drawingml/2006/main" prst="rect">
+            <a:avLst/>
+          </a:prstGeom>
+          <a:noFill xmlns:a="http://schemas.openxmlformats.org/drawingml/2006/main"/>
+          <a:ln xmlns:a="http://schemas.openxmlformats.org/drawingml/2006/main" w="0">
+            <a:noFill/>
+          </a:ln>
+        </p:spPr>
+        <p:txBody>
+          <a:bodyPr xmlns:a="http://schemas.openxmlformats.org/drawingml/2006/main" lIns="0" tIns="0" rIns="0" bIns="0"/>
+          <a:lstStyle xmlns:a="http://schemas.openxmlformats.org/drawingml/2006/main">
+            <a:defPPr algn="ctr">
+              <a:defRPr sz="1575">
+                <a:solidFill>
+                  <a:srgbClr val="FFFFFF"/>
+                </a:solidFill>
+                <a:latin typeface="Ubuntu Condensed"/>
+                <a:ea typeface="Ubuntu Condensed"/>
+                <a:cs typeface="Ubuntu Condensed"/>
+              </a:defRPr>
+            </a:defPPr>
+          </a:lstStyle>
+          <a:p xmlns:a="http://schemas.openxmlformats.org/drawingml/2006/main">
+            <a:pPr algn="ctr">
+              <a:defRPr sz="1575">
+                <a:solidFill>
+                  <a:srgbClr val="FFFFFF"/>
+                </a:solidFill>
+                <a:latin typeface="Ubuntu Condensed"/>
+                <a:ea typeface="Ubuntu Condensed"/>
+                <a:cs typeface="Ubuntu Condensed"/>
+              </a:defRPr>
+            </a:pPr>
+            <a:r>
+              <a:rPr sz="1575">
+                <a:solidFill>
+                  <a:srgbClr val="FFFFFF"/>
+                </a:solidFill>
+                <a:latin typeface="Ubuntu Condensed"/>
+                <a:ea typeface="Ubuntu Condensed"/>
+                <a:cs typeface="Ubuntu Condensed"/>
+              </a:rPr>
+              <a:t>AVG(GDP)</a:t>
+            </a:r>
+          </a:p>
+        </p:txBody>
+      </p:sp>
+      <p:sp>
+        <p:nvSpPr>
+          <p:cNvPr id="7" name="">
+            <a:extLst xmlns:a="http://schemas.openxmlformats.org/drawingml/2006/main">
+              <a:ext uri="{FF2B5EF4-FFF2-40B4-BE49-F238E27FC236}">
+                <a16:creationId xmlns:a16="http://schemas.microsoft.com/office/drawing/2014/main" id="{A6B8BBE7-1A60-488F-9D90-77DC2176A6EC}"/>
+              </a:ext>
+            </a:extLst>
+          </p:cNvPr>
+          <p:cNvSpPr>
+            <a:spLocks xmlns:a="http://schemas.openxmlformats.org/drawingml/2006/main" noGrp="1"/>
+          </p:cNvSpPr>
+          <p:nvPr/>
+        </p:nvSpPr>
+        <p:spPr>
+          <a:xfrm xmlns:a="http://schemas.openxmlformats.org/drawingml/2006/main">
+            <a:off x="457200" y="2876550"/>
+            <a:ext cx="952500" cy="266700"/>
+          </a:xfrm>
+          <a:prstGeom xmlns:a="http://schemas.openxmlformats.org/drawingml/2006/main" prst="rect">
+            <a:avLst/>
+          </a:prstGeom>
+          <a:noFill xmlns:a="http://schemas.openxmlformats.org/drawingml/2006/main"/>
+          <a:ln xmlns:a="http://schemas.openxmlformats.org/drawingml/2006/main" w="0">
+            <a:noFill/>
+          </a:ln>
+        </p:spPr>
+        <p:txBody>
+          <a:bodyPr xmlns:a="http://schemas.openxmlformats.org/drawingml/2006/main" lIns="0" tIns="0" rIns="0" bIns="0"/>
+          <a:lstStyle xmlns:a="http://schemas.openxmlformats.org/drawingml/2006/main">
+            <a:defPPr>
+              <a:defRPr sz="1575">
+                <a:solidFill>
+                  <a:srgbClr val="81796F"/>
+                </a:solidFill>
+                <a:latin typeface="Ubuntu Condensed"/>
+                <a:ea typeface="Ubuntu Condensed"/>
+                <a:cs typeface="Ubuntu Condensed"/>
+              </a:defRPr>
+            </a:defPPr>
+          </a:lstStyle>
+          <a:p xmlns:a="http://schemas.openxmlformats.org/drawingml/2006/main">
+            <a:pPr>
+              <a:defRPr sz="1575">
+                <a:solidFill>
+                  <a:srgbClr val="81796F"/>
+                </a:solidFill>
+                <a:latin typeface="Ubuntu Condensed"/>
+                <a:ea typeface="Ubuntu Condensed"/>
+                <a:cs typeface="Ubuntu Condensed"/>
+              </a:defRPr>
+            </a:pPr>
+            <a:r>
+              <a:rPr sz="1575">
+                <a:solidFill>
+                  <a:srgbClr val="81796F"/>
+                </a:solidFill>
+                <a:latin typeface="Ubuntu Condensed"/>
+                <a:ea typeface="Ubuntu Condensed"/>
+                <a:cs typeface="Ubuntu Condensed"/>
+              </a:rPr>
+              <a:t>Rows</a:t>
+            </a:r>
+          </a:p>
+        </p:txBody>
+      </p:sp>
+      <p:sp>
+        <p:nvSpPr>
+          <p:cNvPr id="8" name="">
+            <a:extLst xmlns:a="http://schemas.openxmlformats.org/drawingml/2006/main">
+              <a:ext uri="{FF2B5EF4-FFF2-40B4-BE49-F238E27FC236}">
+                <a16:creationId xmlns:a16="http://schemas.microsoft.com/office/drawing/2014/main" id="{4E3240EA-2942-4820-99C0-63272A4653B1}"/>
+              </a:ext>
+            </a:extLst>
+          </p:cNvPr>
+          <p:cNvSpPr>
+            <a:spLocks xmlns:a="http://schemas.openxmlformats.org/drawingml/2006/main" noGrp="1"/>
+          </p:cNvSpPr>
+          <p:nvPr/>
+        </p:nvSpPr>
+        <p:spPr>
+          <a:xfrm xmlns:a="http://schemas.openxmlformats.org/drawingml/2006/main">
+            <a:off x="1419225" y="2838450"/>
+            <a:ext cx="2400300" cy="333375"/>
+          </a:xfrm>
+          <a:prstGeom xmlns:a="http://schemas.openxmlformats.org/drawingml/2006/main" prst="rect">
+            <a:avLst/>
+          </a:prstGeom>
+          <a:solidFill xmlns:a="http://schemas.openxmlformats.org/drawingml/2006/main">
+            <a:srgbClr val="647545"/>
+          </a:solidFill>
+          <a:ln xmlns:a="http://schemas.openxmlformats.org/drawingml/2006/main" w="0">
+            <a:noFill/>
+          </a:ln>
+        </p:spPr>
+      </p:sp>
+      <p:sp>
+        <p:nvSpPr>
+          <p:cNvPr id="9" name="">
+            <a:extLst xmlns:a="http://schemas.openxmlformats.org/drawingml/2006/main">
+              <a:ext uri="{FF2B5EF4-FFF2-40B4-BE49-F238E27FC236}">
+                <a16:creationId xmlns:a16="http://schemas.microsoft.com/office/drawing/2014/main" id="{3CAE6F61-1612-4CC8-B95D-1959279F207D}"/>
+              </a:ext>
+            </a:extLst>
+          </p:cNvPr>
+          <p:cNvSpPr>
+            <a:spLocks xmlns:a="http://schemas.openxmlformats.org/drawingml/2006/main" noGrp="1"/>
+          </p:cNvSpPr>
+          <p:nvPr/>
+        </p:nvSpPr>
+        <p:spPr>
+          <a:xfrm xmlns:a="http://schemas.openxmlformats.org/drawingml/2006/main">
+            <a:off x="1504950" y="2876550"/>
+            <a:ext cx="2228850" cy="266700"/>
+          </a:xfrm>
+          <a:prstGeom xmlns:a="http://schemas.openxmlformats.org/drawingml/2006/main" prst="rect">
+            <a:avLst/>
+          </a:prstGeom>
+          <a:noFill xmlns:a="http://schemas.openxmlformats.org/drawingml/2006/main"/>
+          <a:ln xmlns:a="http://schemas.openxmlformats.org/drawingml/2006/main" w="0">
+            <a:noFill/>
+          </a:ln>
+        </p:spPr>
+        <p:txBody>
+          <a:bodyPr xmlns:a="http://schemas.openxmlformats.org/drawingml/2006/main" lIns="0" tIns="0" rIns="0" bIns="0"/>
+          <a:lstStyle xmlns:a="http://schemas.openxmlformats.org/drawingml/2006/main">
+            <a:defPPr algn="ctr">
+              <a:defRPr sz="1575">
+                <a:solidFill>
+                  <a:srgbClr val="FFFFFF"/>
+                </a:solidFill>
+                <a:latin typeface="Ubuntu Condensed"/>
+                <a:ea typeface="Ubuntu Condensed"/>
+                <a:cs typeface="Ubuntu Condensed"/>
+              </a:defRPr>
+            </a:defPPr>
+          </a:lstStyle>
+          <a:p xmlns:a="http://schemas.openxmlformats.org/drawingml/2006/main">
+            <a:pPr algn="ctr">
+              <a:defRPr sz="1575">
+                <a:solidFill>
+                  <a:srgbClr val="FFFFFF"/>
+                </a:solidFill>
+                <a:latin typeface="Ubuntu Condensed"/>
+                <a:ea typeface="Ubuntu Condensed"/>
+                <a:cs typeface="Ubuntu Condensed"/>
+              </a:defRPr>
+            </a:pPr>
+            <a:r>
+              <a:rPr sz="1575">
+                <a:solidFill>
+                  <a:srgbClr val="FFFFFF"/>
+                </a:solidFill>
+                <a:latin typeface="Ubuntu Condensed"/>
+                <a:ea typeface="Ubuntu Condensed"/>
+                <a:cs typeface="Ubuntu Condensed"/>
+              </a:rPr>
+              <a:t>AVG(Life Expectancy)</a:t>
+            </a:r>
+          </a:p>
+        </p:txBody>
+      </p:sp>
+      <p:sp>
+        <p:nvSpPr>
+          <p:cNvPr id="10" name="">
+            <a:extLst xmlns:a="http://schemas.openxmlformats.org/drawingml/2006/main">
+              <a:ext uri="{FF2B5EF4-FFF2-40B4-BE49-F238E27FC236}">
+                <a16:creationId xmlns:a16="http://schemas.microsoft.com/office/drawing/2014/main" id="{7204A9D2-E6AC-4798-8C59-A3B3557E5F3D}"/>
+              </a:ext>
+            </a:extLst>
+          </p:cNvPr>
+          <p:cNvSpPr>
+            <a:spLocks xmlns:a="http://schemas.openxmlformats.org/drawingml/2006/main" noGrp="1"/>
+          </p:cNvSpPr>
+          <p:nvPr/>
+        </p:nvSpPr>
+        <p:spPr>
+          <a:xfrm xmlns:a="http://schemas.openxmlformats.org/drawingml/2006/main">
+            <a:off x="457200" y="3333750"/>
+            <a:ext cx="952500" cy="266700"/>
+          </a:xfrm>
+          <a:prstGeom xmlns:a="http://schemas.openxmlformats.org/drawingml/2006/main" prst="rect">
+            <a:avLst/>
+          </a:prstGeom>
+          <a:noFill xmlns:a="http://schemas.openxmlformats.org/drawingml/2006/main"/>
+          <a:ln xmlns:a="http://schemas.openxmlformats.org/drawingml/2006/main" w="0">
+            <a:noFill/>
+          </a:ln>
+        </p:spPr>
+        <p:txBody>
+          <a:bodyPr xmlns:a="http://schemas.openxmlformats.org/drawingml/2006/main" lIns="0" tIns="0" rIns="0" bIns="0"/>
+          <a:lstStyle xmlns:a="http://schemas.openxmlformats.org/drawingml/2006/main">
+            <a:defPPr>
+              <a:defRPr sz="1575">
+                <a:solidFill>
+                  <a:srgbClr val="81796F"/>
+                </a:solidFill>
+                <a:latin typeface="Ubuntu Condensed"/>
+                <a:ea typeface="Ubuntu Condensed"/>
+                <a:cs typeface="Ubuntu Condensed"/>
+              </a:defRPr>
+            </a:defPPr>
+          </a:lstStyle>
+          <a:p xmlns:a="http://schemas.openxmlformats.org/drawingml/2006/main">
+            <a:pPr>
+              <a:defRPr sz="1575">
+                <a:solidFill>
+                  <a:srgbClr val="81796F"/>
+                </a:solidFill>
+                <a:latin typeface="Ubuntu Condensed"/>
+                <a:ea typeface="Ubuntu Condensed"/>
+                <a:cs typeface="Ubuntu Condensed"/>
+              </a:defRPr>
+            </a:pPr>
+            <a:r>
+              <a:rPr sz="1575">
+                <a:solidFill>
+                  <a:srgbClr val="81796F"/>
+                </a:solidFill>
+                <a:latin typeface="Ubuntu Condensed"/>
+                <a:ea typeface="Ubuntu Condensed"/>
+                <a:cs typeface="Ubuntu Condensed"/>
+              </a:rPr>
+              <a:t>Filters</a:t>
+            </a:r>
+          </a:p>
+        </p:txBody>
+      </p:sp>
+      <p:sp>
+        <p:nvSpPr>
+          <p:cNvPr id="11" name="">
+            <a:extLst xmlns:a="http://schemas.openxmlformats.org/drawingml/2006/main">
+              <a:ext uri="{FF2B5EF4-FFF2-40B4-BE49-F238E27FC236}">
+                <a16:creationId xmlns:a16="http://schemas.microsoft.com/office/drawing/2014/main" id="{91DE13C7-E3E7-40E3-9B0C-64E66B264FB6}"/>
+              </a:ext>
+            </a:extLst>
+          </p:cNvPr>
+          <p:cNvSpPr>
+            <a:spLocks xmlns:a="http://schemas.openxmlformats.org/drawingml/2006/main" noGrp="1"/>
+          </p:cNvSpPr>
+          <p:nvPr/>
+        </p:nvSpPr>
+        <p:spPr>
+          <a:xfrm xmlns:a="http://schemas.openxmlformats.org/drawingml/2006/main">
+            <a:off x="1419225" y="3295650"/>
+            <a:ext cx="2400300" cy="333375"/>
+          </a:xfrm>
+          <a:prstGeom xmlns:a="http://schemas.openxmlformats.org/drawingml/2006/main" prst="rect">
+            <a:avLst/>
+          </a:prstGeom>
+          <a:solidFill xmlns:a="http://schemas.openxmlformats.org/drawingml/2006/main">
+            <a:srgbClr val="457985"/>
+          </a:solidFill>
+          <a:ln xmlns:a="http://schemas.openxmlformats.org/drawingml/2006/main" w="0">
+            <a:noFill/>
+          </a:ln>
+        </p:spPr>
+      </p:sp>
+      <p:sp>
+        <p:nvSpPr>
+          <p:cNvPr id="12" name="">
+            <a:extLst xmlns:a="http://schemas.openxmlformats.org/drawingml/2006/main">
+              <a:ext uri="{FF2B5EF4-FFF2-40B4-BE49-F238E27FC236}">
+                <a16:creationId xmlns:a16="http://schemas.microsoft.com/office/drawing/2014/main" id="{4273804E-7F66-4C6A-9791-964BA33C6A60}"/>
+              </a:ext>
+            </a:extLst>
+          </p:cNvPr>
+          <p:cNvSpPr>
+            <a:spLocks xmlns:a="http://schemas.openxmlformats.org/drawingml/2006/main" noGrp="1"/>
+          </p:cNvSpPr>
+          <p:nvPr/>
+        </p:nvSpPr>
+        <p:spPr>
+          <a:xfrm xmlns:a="http://schemas.openxmlformats.org/drawingml/2006/main">
+            <a:off x="1504950" y="3333750"/>
+            <a:ext cx="2228850" cy="266700"/>
+          </a:xfrm>
+          <a:prstGeom xmlns:a="http://schemas.openxmlformats.org/drawingml/2006/main" prst="rect">
+            <a:avLst/>
+          </a:prstGeom>
+          <a:noFill xmlns:a="http://schemas.openxmlformats.org/drawingml/2006/main"/>
+          <a:ln xmlns:a="http://schemas.openxmlformats.org/drawingml/2006/main" w="0">
+            <a:noFill/>
+          </a:ln>
+        </p:spPr>
+        <p:txBody>
+          <a:bodyPr xmlns:a="http://schemas.openxmlformats.org/drawingml/2006/main" lIns="0" tIns="0" rIns="0" bIns="0"/>
+          <a:lstStyle xmlns:a="http://schemas.openxmlformats.org/drawingml/2006/main">
+            <a:defPPr algn="ctr">
+              <a:defRPr sz="1575">
+                <a:solidFill>
+                  <a:srgbClr val="FFFFFF"/>
+                </a:solidFill>
+                <a:latin typeface="Ubuntu Condensed"/>
+                <a:ea typeface="Ubuntu Condensed"/>
+                <a:cs typeface="Ubuntu Condensed"/>
+              </a:defRPr>
+            </a:defPPr>
+          </a:lstStyle>
+          <a:p xmlns:a="http://schemas.openxmlformats.org/drawingml/2006/main">
+            <a:pPr algn="ctr">
+              <a:defRPr sz="1575">
+                <a:solidFill>
+                  <a:srgbClr val="FFFFFF"/>
+                </a:solidFill>
+                <a:latin typeface="Ubuntu Condensed"/>
+                <a:ea typeface="Ubuntu Condensed"/>
+                <a:cs typeface="Ubuntu Condensed"/>
+              </a:defRPr>
+            </a:pPr>
+            <a:r>
+              <a:rPr sz="1575">
+                <a:solidFill>
+                  <a:srgbClr val="FFFFFF"/>
+                </a:solidFill>
+                <a:latin typeface="Ubuntu Condensed"/>
+                <a:ea typeface="Ubuntu Condensed"/>
+                <a:cs typeface="Ubuntu Condensed"/>
+              </a:rPr>
+              <a:t>Year: 2020</a:t>
+            </a:r>
+          </a:p>
+        </p:txBody>
+      </p:sp>
+      <p:sp>
+        <p:nvSpPr>
+          <p:cNvPr id="13" name="">
+            <a:extLst xmlns:a="http://schemas.openxmlformats.org/drawingml/2006/main">
+              <a:ext uri="{FF2B5EF4-FFF2-40B4-BE49-F238E27FC236}">
+                <a16:creationId xmlns:a16="http://schemas.microsoft.com/office/drawing/2014/main" id="{F8B4FCA5-B51B-4E4B-9EC6-068A27FDAB79}"/>
+              </a:ext>
+            </a:extLst>
+          </p:cNvPr>
+          <p:cNvSpPr>
+            <a:spLocks xmlns:a="http://schemas.openxmlformats.org/drawingml/2006/main" noGrp="1"/>
+          </p:cNvSpPr>
+          <p:nvPr/>
+        </p:nvSpPr>
+        <p:spPr>
+          <a:xfrm xmlns:a="http://schemas.openxmlformats.org/drawingml/2006/main">
+            <a:off x="457200" y="3962400"/>
+            <a:ext cx="952500" cy="285750"/>
+          </a:xfrm>
+          <a:prstGeom xmlns:a="http://schemas.openxmlformats.org/drawingml/2006/main" prst="rect">
+            <a:avLst/>
+          </a:prstGeom>
+          <a:noFill xmlns:a="http://schemas.openxmlformats.org/drawingml/2006/main"/>
+          <a:ln xmlns:a="http://schemas.openxmlformats.org/drawingml/2006/main" w="0">
+            <a:noFill/>
+          </a:ln>
+        </p:spPr>
+        <p:txBody>
+          <a:bodyPr xmlns:a="http://schemas.openxmlformats.org/drawingml/2006/main" lIns="0" tIns="0" rIns="0" bIns="0"/>
+          <a:lstStyle xmlns:a="http://schemas.openxmlformats.org/drawingml/2006/main">
+            <a:defPPr>
+              <a:defRPr sz="1725">
+                <a:solidFill>
+                  <a:srgbClr val="81796F"/>
+                </a:solidFill>
+                <a:latin typeface="Ubuntu Condensed"/>
+                <a:ea typeface="Ubuntu Condensed"/>
+                <a:cs typeface="Ubuntu Condensed"/>
+              </a:defRPr>
+            </a:defPPr>
+          </a:lstStyle>
+          <a:p xmlns:a="http://schemas.openxmlformats.org/drawingml/2006/main">
+            <a:pPr>
+              <a:defRPr sz="1725">
+                <a:solidFill>
+                  <a:srgbClr val="81796F"/>
+                </a:solidFill>
+                <a:latin typeface="Ubuntu Condensed"/>
+                <a:ea typeface="Ubuntu Condensed"/>
+                <a:cs typeface="Ubuntu Condensed"/>
+              </a:defRPr>
+            </a:pPr>
+            <a:r>
+              <a:rPr sz="1725">
+                <a:solidFill>
+                  <a:srgbClr val="81796F"/>
+                </a:solidFill>
+                <a:latin typeface="Ubuntu Condensed"/>
+                <a:ea typeface="Ubuntu Condensed"/>
+                <a:cs typeface="Ubuntu Condensed"/>
+              </a:rPr>
+              <a:t>Marks</a:t>
+            </a:r>
+          </a:p>
+        </p:txBody>
+      </p:sp>
+      <p:sp>
+        <p:nvSpPr>
+          <p:cNvPr id="14" name="">
+            <a:extLst xmlns:a="http://schemas.openxmlformats.org/drawingml/2006/main">
+              <a:ext uri="{FF2B5EF4-FFF2-40B4-BE49-F238E27FC236}">
+                <a16:creationId xmlns:a16="http://schemas.microsoft.com/office/drawing/2014/main" id="{3716434E-651B-4804-8EDD-0A5F4561D4DC}"/>
+              </a:ext>
+            </a:extLst>
+          </p:cNvPr>
+          <p:cNvSpPr>
+            <a:spLocks xmlns:a="http://schemas.openxmlformats.org/drawingml/2006/main" noGrp="1"/>
+          </p:cNvSpPr>
+          <p:nvPr/>
+        </p:nvSpPr>
+        <p:spPr>
+          <a:xfrm xmlns:a="http://schemas.openxmlformats.org/drawingml/2006/main">
+            <a:off x="1419225" y="3914775"/>
+            <a:ext cx="2400300" cy="381000"/>
+          </a:xfrm>
+          <a:prstGeom xmlns:a="http://schemas.openxmlformats.org/drawingml/2006/main" prst="rect">
+            <a:avLst/>
+          </a:prstGeom>
+          <a:noFill xmlns:a="http://schemas.openxmlformats.org/drawingml/2006/main"/>
+          <a:ln xmlns:a="http://schemas.openxmlformats.org/drawingml/2006/main" w="0">
+            <a:noFill/>
+          </a:ln>
+        </p:spPr>
+        <p:txBody>
+          <a:bodyPr xmlns:a="http://schemas.openxmlformats.org/drawingml/2006/main" lIns="0" tIns="0" rIns="0" bIns="0"/>
+          <a:lstStyle xmlns:a="http://schemas.openxmlformats.org/drawingml/2006/main">
+            <a:defPPr>
+              <a:defRPr sz="2100">
+                <a:solidFill>
+                  <a:srgbClr val="38332E"/>
+                </a:solidFill>
+                <a:latin typeface="Ubuntu Condensed"/>
+                <a:ea typeface="Ubuntu Condensed"/>
+                <a:cs typeface="Ubuntu Condensed"/>
+              </a:defRPr>
+            </a:defPPr>
+          </a:lstStyle>
+          <a:p xmlns:a="http://schemas.openxmlformats.org/drawingml/2006/main">
+            <a:pPr>
+              <a:defRPr sz="2100">
+                <a:solidFill>
+                  <a:srgbClr val="38332E"/>
+                </a:solidFill>
+                <a:latin typeface="Ubuntu Condensed"/>
+                <a:ea typeface="Ubuntu Condensed"/>
+                <a:cs typeface="Ubuntu Condensed"/>
+              </a:defRPr>
+            </a:pPr>
+            <a:r>
+              <a:rPr sz="2100">
+                <a:solidFill>
+                  <a:srgbClr val="38332E"/>
+                </a:solidFill>
+                <a:latin typeface="Ubuntu Condensed"/>
+                <a:ea typeface="Ubuntu Condensed"/>
+                <a:cs typeface="Ubuntu Condensed"/>
+              </a:rPr>
+              <a:t>Circle</a:t>
+            </a:r>
+          </a:p>
+        </p:txBody>
+      </p:sp>
+      <p:sp>
+        <p:nvSpPr>
+          <p:cNvPr id="15" name="">
+            <a:extLst xmlns:a="http://schemas.openxmlformats.org/drawingml/2006/main">
+              <a:ext uri="{FF2B5EF4-FFF2-40B4-BE49-F238E27FC236}">
+                <a16:creationId xmlns:a16="http://schemas.microsoft.com/office/drawing/2014/main" id="{7A88DE09-1C4C-4ACD-ABFA-0710003E4163}"/>
+              </a:ext>
+            </a:extLst>
+          </p:cNvPr>
+          <p:cNvSpPr>
+            <a:spLocks xmlns:a="http://schemas.openxmlformats.org/drawingml/2006/main" noGrp="1"/>
+          </p:cNvSpPr>
+          <p:nvPr/>
+        </p:nvSpPr>
+        <p:spPr>
+          <a:xfrm xmlns:a="http://schemas.openxmlformats.org/drawingml/2006/main">
+            <a:off x="457200" y="4448175"/>
+            <a:ext cx="3429000" cy="762000"/>
           </a:xfrm>
           <a:prstGeom xmlns:a="http://schemas.openxmlformats.org/drawingml/2006/main" prst="rect">
             <a:avLst/>
@@ -9209,17 +9352,40 @@
                 <a:ea typeface="Ubuntu Condensed"/>
                 <a:cs typeface="Ubuntu Condensed"/>
               </a:rPr>
-              <a:t>Columns  AVG(GDP)     Rows  AVG(Life Expectancy)</a:t>
+              <a:t>Country on Detail</a:t>
+            </a:r>
+          </a:p>
+          <a:p xmlns:a="http://schemas.openxmlformats.org/drawingml/2006/main">
+            <a:pPr>
+              <a:defRPr sz="1950">
+                <a:solidFill>
+                  <a:srgbClr val="38332E"/>
+                </a:solidFill>
+                <a:latin typeface="Ubuntu Condensed"/>
+                <a:ea typeface="Ubuntu Condensed"/>
+                <a:cs typeface="Ubuntu Condensed"/>
+              </a:defRPr>
+            </a:pPr>
+            <a:r>
+              <a:rPr sz="1950">
+                <a:solidFill>
+                  <a:srgbClr val="38332E"/>
+                </a:solidFill>
+                <a:latin typeface="Ubuntu Condensed"/>
+                <a:ea typeface="Ubuntu Condensed"/>
+                <a:cs typeface="Ubuntu Condensed"/>
+              </a:rPr>
+              <a:t>Region on Color</a:t>
             </a:r>
           </a:p>
         </p:txBody>
       </p:sp>
       <p:sp>
         <p:nvSpPr>
-          <p:cNvPr id="6" name="">
+          <p:cNvPr id="16" name="">
             <a:extLst xmlns:a="http://schemas.openxmlformats.org/drawingml/2006/main">
               <a:ext uri="{FF2B5EF4-FFF2-40B4-BE49-F238E27FC236}">
-                <a16:creationId xmlns:a16="http://schemas.microsoft.com/office/drawing/2014/main" id="{3B430D7F-B9D1-4EE4-80B2-167EE79469BF}"/>
+                <a16:creationId xmlns:a16="http://schemas.microsoft.com/office/drawing/2014/main" id="{8039BF5A-A437-4B2B-B579-BCFA5691511B}"/>
               </a:ext>
             </a:extLst>
           </p:cNvPr>
@@ -9230,8 +9396,1775 @@
         </p:nvSpPr>
         <p:spPr>
           <a:xfrm xmlns:a="http://schemas.openxmlformats.org/drawingml/2006/main">
-            <a:off x="3810000" y="2190750"/>
-            <a:ext cx="7905750" cy="361950"/>
+            <a:off x="457200" y="5391150"/>
+            <a:ext cx="3429000" cy="723900"/>
+          </a:xfrm>
+          <a:prstGeom xmlns:a="http://schemas.openxmlformats.org/drawingml/2006/main" prst="rect">
+            <a:avLst/>
+          </a:prstGeom>
+          <a:noFill xmlns:a="http://schemas.openxmlformats.org/drawingml/2006/main"/>
+          <a:ln xmlns:a="http://schemas.openxmlformats.org/drawingml/2006/main" w="0">
+            <a:noFill/>
+          </a:ln>
+        </p:spPr>
+        <p:txBody>
+          <a:bodyPr xmlns:a="http://schemas.openxmlformats.org/drawingml/2006/main" lIns="0" tIns="0" rIns="0" bIns="0"/>
+          <a:lstStyle xmlns:a="http://schemas.openxmlformats.org/drawingml/2006/main">
+            <a:defPPr>
+              <a:defRPr sz="1725">
+                <a:solidFill>
+                  <a:srgbClr val="81796F"/>
+                </a:solidFill>
+                <a:latin typeface="Ubuntu Condensed"/>
+                <a:ea typeface="Ubuntu Condensed"/>
+                <a:cs typeface="Ubuntu Condensed"/>
+              </a:defRPr>
+            </a:defPPr>
+          </a:lstStyle>
+          <a:p xmlns:a="http://schemas.openxmlformats.org/drawingml/2006/main">
+            <a:pPr>
+              <a:defRPr sz="1725">
+                <a:solidFill>
+                  <a:srgbClr val="81796F"/>
+                </a:solidFill>
+                <a:latin typeface="Ubuntu Condensed"/>
+                <a:ea typeface="Ubuntu Condensed"/>
+                <a:cs typeface="Ubuntu Condensed"/>
+              </a:defRPr>
+            </a:pPr>
+            <a:r>
+              <a:rPr sz="1725">
+                <a:solidFill>
+                  <a:srgbClr val="81796F"/>
+                </a:solidFill>
+                <a:latin typeface="Ubuntu Condensed"/>
+                <a:ea typeface="Ubuntu Condensed"/>
+                <a:cs typeface="Ubuntu Condensed"/>
+              </a:rPr>
+              <a:t>Filters: GDP &gt; 0</a:t>
+            </a:r>
+          </a:p>
+          <a:p xmlns:a="http://schemas.openxmlformats.org/drawingml/2006/main">
+            <a:pPr>
+              <a:defRPr sz="1725">
+                <a:solidFill>
+                  <a:srgbClr val="81796F"/>
+                </a:solidFill>
+                <a:latin typeface="Ubuntu Condensed"/>
+                <a:ea typeface="Ubuntu Condensed"/>
+                <a:cs typeface="Ubuntu Condensed"/>
+              </a:defRPr>
+            </a:pPr>
+            <a:r>
+              <a:rPr sz="1725">
+                <a:solidFill>
+                  <a:srgbClr val="81796F"/>
+                </a:solidFill>
+                <a:latin typeface="Ubuntu Condensed"/>
+                <a:ea typeface="Ubuntu Condensed"/>
+                <a:cs typeface="Ubuntu Condensed"/>
+              </a:rPr>
+              <a:t>Life Expectancy &gt; 0</a:t>
+            </a:r>
+          </a:p>
+        </p:txBody>
+      </p:sp>
+      <p:sp>
+        <p:nvSpPr>
+          <p:cNvPr id="17" name="">
+            <a:extLst xmlns:a="http://schemas.openxmlformats.org/drawingml/2006/main">
+              <a:ext uri="{FF2B5EF4-FFF2-40B4-BE49-F238E27FC236}">
+                <a16:creationId xmlns:a16="http://schemas.microsoft.com/office/drawing/2014/main" id="{F28C6632-8072-4AC0-ACD8-99FC7BD20E09}"/>
+              </a:ext>
+            </a:extLst>
+          </p:cNvPr>
+          <p:cNvSpPr>
+            <a:spLocks xmlns:a="http://schemas.openxmlformats.org/drawingml/2006/main" noGrp="1"/>
+          </p:cNvSpPr>
+          <p:nvPr/>
+        </p:nvSpPr>
+        <p:spPr>
+          <a:xfrm xmlns:a="http://schemas.openxmlformats.org/drawingml/2006/main">
+            <a:off x="4343400" y="1714500"/>
+            <a:ext cx="3429000" cy="428625"/>
+          </a:xfrm>
+          <a:prstGeom xmlns:a="http://schemas.openxmlformats.org/drawingml/2006/main" prst="rect">
+            <a:avLst/>
+          </a:prstGeom>
+          <a:noFill xmlns:a="http://schemas.openxmlformats.org/drawingml/2006/main"/>
+          <a:ln xmlns:a="http://schemas.openxmlformats.org/drawingml/2006/main" w="0">
+            <a:noFill/>
+          </a:ln>
+        </p:spPr>
+        <p:txBody>
+          <a:bodyPr xmlns:a="http://schemas.openxmlformats.org/drawingml/2006/main" lIns="0" tIns="0" rIns="0" bIns="0"/>
+          <a:lstStyle xmlns:a="http://schemas.openxmlformats.org/drawingml/2006/main">
+            <a:defPPr>
+              <a:defRPr sz="2400">
+                <a:solidFill>
+                  <a:srgbClr val="B23C50"/>
+                </a:solidFill>
+                <a:latin typeface="Ubuntu Condensed"/>
+                <a:ea typeface="Ubuntu Condensed"/>
+                <a:cs typeface="Ubuntu Condensed"/>
+              </a:defRPr>
+            </a:defPPr>
+          </a:lstStyle>
+          <a:p xmlns:a="http://schemas.openxmlformats.org/drawingml/2006/main">
+            <a:pPr>
+              <a:defRPr sz="2400">
+                <a:solidFill>
+                  <a:srgbClr val="B23C50"/>
+                </a:solidFill>
+                <a:latin typeface="Ubuntu Condensed"/>
+                <a:ea typeface="Ubuntu Condensed"/>
+                <a:cs typeface="Ubuntu Condensed"/>
+              </a:defRPr>
+            </a:pPr>
+            <a:r>
+              <a:rPr sz="2400">
+                <a:solidFill>
+                  <a:srgbClr val="B23C50"/>
+                </a:solidFill>
+                <a:latin typeface="Ubuntu Condensed"/>
+                <a:ea typeface="Ubuntu Condensed"/>
+                <a:cs typeface="Ubuntu Condensed"/>
+              </a:rPr>
+              <a:t>2  Life History</a:t>
+            </a:r>
+          </a:p>
+        </p:txBody>
+      </p:sp>
+      <p:sp>
+        <p:nvSpPr>
+          <p:cNvPr id="18" name="">
+            <a:extLst xmlns:a="http://schemas.openxmlformats.org/drawingml/2006/main">
+              <a:ext uri="{FF2B5EF4-FFF2-40B4-BE49-F238E27FC236}">
+                <a16:creationId xmlns:a16="http://schemas.microsoft.com/office/drawing/2014/main" id="{3FDC6240-961F-4D25-894C-917D53BEB57E}"/>
+              </a:ext>
+            </a:extLst>
+          </p:cNvPr>
+          <p:cNvSpPr>
+            <a:spLocks xmlns:a="http://schemas.openxmlformats.org/drawingml/2006/main" noGrp="1"/>
+          </p:cNvSpPr>
+          <p:nvPr/>
+        </p:nvSpPr>
+        <p:spPr>
+          <a:xfrm xmlns:a="http://schemas.openxmlformats.org/drawingml/2006/main">
+            <a:off x="4343400" y="2419350"/>
+            <a:ext cx="952500" cy="266700"/>
+          </a:xfrm>
+          <a:prstGeom xmlns:a="http://schemas.openxmlformats.org/drawingml/2006/main" prst="rect">
+            <a:avLst/>
+          </a:prstGeom>
+          <a:noFill xmlns:a="http://schemas.openxmlformats.org/drawingml/2006/main"/>
+          <a:ln xmlns:a="http://schemas.openxmlformats.org/drawingml/2006/main" w="0">
+            <a:noFill/>
+          </a:ln>
+        </p:spPr>
+        <p:txBody>
+          <a:bodyPr xmlns:a="http://schemas.openxmlformats.org/drawingml/2006/main" lIns="0" tIns="0" rIns="0" bIns="0"/>
+          <a:lstStyle xmlns:a="http://schemas.openxmlformats.org/drawingml/2006/main">
+            <a:defPPr>
+              <a:defRPr sz="1575">
+                <a:solidFill>
+                  <a:srgbClr val="81796F"/>
+                </a:solidFill>
+                <a:latin typeface="Ubuntu Condensed"/>
+                <a:ea typeface="Ubuntu Condensed"/>
+                <a:cs typeface="Ubuntu Condensed"/>
+              </a:defRPr>
+            </a:defPPr>
+          </a:lstStyle>
+          <a:p xmlns:a="http://schemas.openxmlformats.org/drawingml/2006/main">
+            <a:pPr>
+              <a:defRPr sz="1575">
+                <a:solidFill>
+                  <a:srgbClr val="81796F"/>
+                </a:solidFill>
+                <a:latin typeface="Ubuntu Condensed"/>
+                <a:ea typeface="Ubuntu Condensed"/>
+                <a:cs typeface="Ubuntu Condensed"/>
+              </a:defRPr>
+            </a:pPr>
+            <a:r>
+              <a:rPr sz="1575">
+                <a:solidFill>
+                  <a:srgbClr val="81796F"/>
+                </a:solidFill>
+                <a:latin typeface="Ubuntu Condensed"/>
+                <a:ea typeface="Ubuntu Condensed"/>
+                <a:cs typeface="Ubuntu Condensed"/>
+              </a:rPr>
+              <a:t>Columns</a:t>
+            </a:r>
+          </a:p>
+        </p:txBody>
+      </p:sp>
+      <p:sp>
+        <p:nvSpPr>
+          <p:cNvPr id="19" name="">
+            <a:extLst xmlns:a="http://schemas.openxmlformats.org/drawingml/2006/main">
+              <a:ext uri="{FF2B5EF4-FFF2-40B4-BE49-F238E27FC236}">
+                <a16:creationId xmlns:a16="http://schemas.microsoft.com/office/drawing/2014/main" id="{A287203B-6E84-4784-A62B-C45AC3D59A5D}"/>
+              </a:ext>
+            </a:extLst>
+          </p:cNvPr>
+          <p:cNvSpPr>
+            <a:spLocks xmlns:a="http://schemas.openxmlformats.org/drawingml/2006/main" noGrp="1"/>
+          </p:cNvSpPr>
+          <p:nvPr/>
+        </p:nvSpPr>
+        <p:spPr>
+          <a:xfrm xmlns:a="http://schemas.openxmlformats.org/drawingml/2006/main">
+            <a:off x="5305425" y="2381250"/>
+            <a:ext cx="2400300" cy="333375"/>
+          </a:xfrm>
+          <a:prstGeom xmlns:a="http://schemas.openxmlformats.org/drawingml/2006/main" prst="rect">
+            <a:avLst/>
+          </a:prstGeom>
+          <a:solidFill xmlns:a="http://schemas.openxmlformats.org/drawingml/2006/main">
+            <a:srgbClr val="647545"/>
+          </a:solidFill>
+          <a:ln xmlns:a="http://schemas.openxmlformats.org/drawingml/2006/main" w="0">
+            <a:noFill/>
+          </a:ln>
+        </p:spPr>
+      </p:sp>
+      <p:sp>
+        <p:nvSpPr>
+          <p:cNvPr id="20" name="">
+            <a:extLst xmlns:a="http://schemas.openxmlformats.org/drawingml/2006/main">
+              <a:ext uri="{FF2B5EF4-FFF2-40B4-BE49-F238E27FC236}">
+                <a16:creationId xmlns:a16="http://schemas.microsoft.com/office/drawing/2014/main" id="{BA7EBDD4-6115-43D2-BA3C-0C75C0841AC3}"/>
+              </a:ext>
+            </a:extLst>
+          </p:cNvPr>
+          <p:cNvSpPr>
+            <a:spLocks xmlns:a="http://schemas.openxmlformats.org/drawingml/2006/main" noGrp="1"/>
+          </p:cNvSpPr>
+          <p:nvPr/>
+        </p:nvSpPr>
+        <p:spPr>
+          <a:xfrm xmlns:a="http://schemas.openxmlformats.org/drawingml/2006/main">
+            <a:off x="5391150" y="2419350"/>
+            <a:ext cx="2228850" cy="266700"/>
+          </a:xfrm>
+          <a:prstGeom xmlns:a="http://schemas.openxmlformats.org/drawingml/2006/main" prst="rect">
+            <a:avLst/>
+          </a:prstGeom>
+          <a:noFill xmlns:a="http://schemas.openxmlformats.org/drawingml/2006/main"/>
+          <a:ln xmlns:a="http://schemas.openxmlformats.org/drawingml/2006/main" w="0">
+            <a:noFill/>
+          </a:ln>
+        </p:spPr>
+        <p:txBody>
+          <a:bodyPr xmlns:a="http://schemas.openxmlformats.org/drawingml/2006/main" lIns="0" tIns="0" rIns="0" bIns="0"/>
+          <a:lstStyle xmlns:a="http://schemas.openxmlformats.org/drawingml/2006/main">
+            <a:defPPr algn="ctr">
+              <a:defRPr sz="1575">
+                <a:solidFill>
+                  <a:srgbClr val="FFFFFF"/>
+                </a:solidFill>
+                <a:latin typeface="Ubuntu Condensed"/>
+                <a:ea typeface="Ubuntu Condensed"/>
+                <a:cs typeface="Ubuntu Condensed"/>
+              </a:defRPr>
+            </a:defPPr>
+          </a:lstStyle>
+          <a:p xmlns:a="http://schemas.openxmlformats.org/drawingml/2006/main">
+            <a:pPr algn="ctr">
+              <a:defRPr sz="1575">
+                <a:solidFill>
+                  <a:srgbClr val="FFFFFF"/>
+                </a:solidFill>
+                <a:latin typeface="Ubuntu Condensed"/>
+                <a:ea typeface="Ubuntu Condensed"/>
+                <a:cs typeface="Ubuntu Condensed"/>
+              </a:defRPr>
+            </a:pPr>
+            <a:r>
+              <a:rPr sz="1575">
+                <a:solidFill>
+                  <a:srgbClr val="FFFFFF"/>
+                </a:solidFill>
+                <a:latin typeface="Ubuntu Condensed"/>
+                <a:ea typeface="Ubuntu Condensed"/>
+                <a:cs typeface="Ubuntu Condensed"/>
+              </a:rPr>
+              <a:t>Year</a:t>
+            </a:r>
+          </a:p>
+        </p:txBody>
+      </p:sp>
+      <p:sp>
+        <p:nvSpPr>
+          <p:cNvPr id="21" name="">
+            <a:extLst xmlns:a="http://schemas.openxmlformats.org/drawingml/2006/main">
+              <a:ext uri="{FF2B5EF4-FFF2-40B4-BE49-F238E27FC236}">
+                <a16:creationId xmlns:a16="http://schemas.microsoft.com/office/drawing/2014/main" id="{F17EF61E-63FA-488C-99B0-9B147BCE3558}"/>
+              </a:ext>
+            </a:extLst>
+          </p:cNvPr>
+          <p:cNvSpPr>
+            <a:spLocks xmlns:a="http://schemas.openxmlformats.org/drawingml/2006/main" noGrp="1"/>
+          </p:cNvSpPr>
+          <p:nvPr/>
+        </p:nvSpPr>
+        <p:spPr>
+          <a:xfrm xmlns:a="http://schemas.openxmlformats.org/drawingml/2006/main">
+            <a:off x="4343400" y="2876550"/>
+            <a:ext cx="952500" cy="266700"/>
+          </a:xfrm>
+          <a:prstGeom xmlns:a="http://schemas.openxmlformats.org/drawingml/2006/main" prst="rect">
+            <a:avLst/>
+          </a:prstGeom>
+          <a:noFill xmlns:a="http://schemas.openxmlformats.org/drawingml/2006/main"/>
+          <a:ln xmlns:a="http://schemas.openxmlformats.org/drawingml/2006/main" w="0">
+            <a:noFill/>
+          </a:ln>
+        </p:spPr>
+        <p:txBody>
+          <a:bodyPr xmlns:a="http://schemas.openxmlformats.org/drawingml/2006/main" lIns="0" tIns="0" rIns="0" bIns="0"/>
+          <a:lstStyle xmlns:a="http://schemas.openxmlformats.org/drawingml/2006/main">
+            <a:defPPr>
+              <a:defRPr sz="1575">
+                <a:solidFill>
+                  <a:srgbClr val="81796F"/>
+                </a:solidFill>
+                <a:latin typeface="Ubuntu Condensed"/>
+                <a:ea typeface="Ubuntu Condensed"/>
+                <a:cs typeface="Ubuntu Condensed"/>
+              </a:defRPr>
+            </a:defPPr>
+          </a:lstStyle>
+          <a:p xmlns:a="http://schemas.openxmlformats.org/drawingml/2006/main">
+            <a:pPr>
+              <a:defRPr sz="1575">
+                <a:solidFill>
+                  <a:srgbClr val="81796F"/>
+                </a:solidFill>
+                <a:latin typeface="Ubuntu Condensed"/>
+                <a:ea typeface="Ubuntu Condensed"/>
+                <a:cs typeface="Ubuntu Condensed"/>
+              </a:defRPr>
+            </a:pPr>
+            <a:r>
+              <a:rPr sz="1575">
+                <a:solidFill>
+                  <a:srgbClr val="81796F"/>
+                </a:solidFill>
+                <a:latin typeface="Ubuntu Condensed"/>
+                <a:ea typeface="Ubuntu Condensed"/>
+                <a:cs typeface="Ubuntu Condensed"/>
+              </a:rPr>
+              <a:t>Rows</a:t>
+            </a:r>
+          </a:p>
+        </p:txBody>
+      </p:sp>
+      <p:sp>
+        <p:nvSpPr>
+          <p:cNvPr id="22" name="">
+            <a:extLst xmlns:a="http://schemas.openxmlformats.org/drawingml/2006/main">
+              <a:ext uri="{FF2B5EF4-FFF2-40B4-BE49-F238E27FC236}">
+                <a16:creationId xmlns:a16="http://schemas.microsoft.com/office/drawing/2014/main" id="{CE94FF15-D7C5-4D1D-BD9C-E85B39DC2B41}"/>
+              </a:ext>
+            </a:extLst>
+          </p:cNvPr>
+          <p:cNvSpPr>
+            <a:spLocks xmlns:a="http://schemas.openxmlformats.org/drawingml/2006/main" noGrp="1"/>
+          </p:cNvSpPr>
+          <p:nvPr/>
+        </p:nvSpPr>
+        <p:spPr>
+          <a:xfrm xmlns:a="http://schemas.openxmlformats.org/drawingml/2006/main">
+            <a:off x="5305425" y="2838450"/>
+            <a:ext cx="2400300" cy="333375"/>
+          </a:xfrm>
+          <a:prstGeom xmlns:a="http://schemas.openxmlformats.org/drawingml/2006/main" prst="rect">
+            <a:avLst/>
+          </a:prstGeom>
+          <a:solidFill xmlns:a="http://schemas.openxmlformats.org/drawingml/2006/main">
+            <a:srgbClr val="647545"/>
+          </a:solidFill>
+          <a:ln xmlns:a="http://schemas.openxmlformats.org/drawingml/2006/main" w="0">
+            <a:noFill/>
+          </a:ln>
+        </p:spPr>
+      </p:sp>
+      <p:sp>
+        <p:nvSpPr>
+          <p:cNvPr id="23" name="">
+            <a:extLst xmlns:a="http://schemas.openxmlformats.org/drawingml/2006/main">
+              <a:ext uri="{FF2B5EF4-FFF2-40B4-BE49-F238E27FC236}">
+                <a16:creationId xmlns:a16="http://schemas.microsoft.com/office/drawing/2014/main" id="{66142D3A-27B9-46AF-9F83-3DA362105E6D}"/>
+              </a:ext>
+            </a:extLst>
+          </p:cNvPr>
+          <p:cNvSpPr>
+            <a:spLocks xmlns:a="http://schemas.openxmlformats.org/drawingml/2006/main" noGrp="1"/>
+          </p:cNvSpPr>
+          <p:nvPr/>
+        </p:nvSpPr>
+        <p:spPr>
+          <a:xfrm xmlns:a="http://schemas.openxmlformats.org/drawingml/2006/main">
+            <a:off x="5391150" y="2876550"/>
+            <a:ext cx="2228850" cy="266700"/>
+          </a:xfrm>
+          <a:prstGeom xmlns:a="http://schemas.openxmlformats.org/drawingml/2006/main" prst="rect">
+            <a:avLst/>
+          </a:prstGeom>
+          <a:noFill xmlns:a="http://schemas.openxmlformats.org/drawingml/2006/main"/>
+          <a:ln xmlns:a="http://schemas.openxmlformats.org/drawingml/2006/main" w="0">
+            <a:noFill/>
+          </a:ln>
+        </p:spPr>
+        <p:txBody>
+          <a:bodyPr xmlns:a="http://schemas.openxmlformats.org/drawingml/2006/main" lIns="0" tIns="0" rIns="0" bIns="0"/>
+          <a:lstStyle xmlns:a="http://schemas.openxmlformats.org/drawingml/2006/main">
+            <a:defPPr algn="ctr">
+              <a:defRPr sz="1575">
+                <a:solidFill>
+                  <a:srgbClr val="FFFFFF"/>
+                </a:solidFill>
+                <a:latin typeface="Ubuntu Condensed"/>
+                <a:ea typeface="Ubuntu Condensed"/>
+                <a:cs typeface="Ubuntu Condensed"/>
+              </a:defRPr>
+            </a:defPPr>
+          </a:lstStyle>
+          <a:p xmlns:a="http://schemas.openxmlformats.org/drawingml/2006/main">
+            <a:pPr algn="ctr">
+              <a:defRPr sz="1575">
+                <a:solidFill>
+                  <a:srgbClr val="FFFFFF"/>
+                </a:solidFill>
+                <a:latin typeface="Ubuntu Condensed"/>
+                <a:ea typeface="Ubuntu Condensed"/>
+                <a:cs typeface="Ubuntu Condensed"/>
+              </a:defRPr>
+            </a:pPr>
+            <a:r>
+              <a:rPr sz="1575">
+                <a:solidFill>
+                  <a:srgbClr val="FFFFFF"/>
+                </a:solidFill>
+                <a:latin typeface="Ubuntu Condensed"/>
+                <a:ea typeface="Ubuntu Condensed"/>
+                <a:cs typeface="Ubuntu Condensed"/>
+              </a:rPr>
+              <a:t>AVG(Life Expectancy)</a:t>
+            </a:r>
+          </a:p>
+        </p:txBody>
+      </p:sp>
+      <p:sp>
+        <p:nvSpPr>
+          <p:cNvPr id="24" name="">
+            <a:extLst xmlns:a="http://schemas.openxmlformats.org/drawingml/2006/main">
+              <a:ext uri="{FF2B5EF4-FFF2-40B4-BE49-F238E27FC236}">
+                <a16:creationId xmlns:a16="http://schemas.microsoft.com/office/drawing/2014/main" id="{AF79D207-A4A5-4E71-AB6F-E2928636DAD9}"/>
+              </a:ext>
+            </a:extLst>
+          </p:cNvPr>
+          <p:cNvSpPr>
+            <a:spLocks xmlns:a="http://schemas.openxmlformats.org/drawingml/2006/main" noGrp="1"/>
+          </p:cNvSpPr>
+          <p:nvPr/>
+        </p:nvSpPr>
+        <p:spPr>
+          <a:xfrm xmlns:a="http://schemas.openxmlformats.org/drawingml/2006/main">
+            <a:off x="4343400" y="3333750"/>
+            <a:ext cx="952500" cy="266700"/>
+          </a:xfrm>
+          <a:prstGeom xmlns:a="http://schemas.openxmlformats.org/drawingml/2006/main" prst="rect">
+            <a:avLst/>
+          </a:prstGeom>
+          <a:noFill xmlns:a="http://schemas.openxmlformats.org/drawingml/2006/main"/>
+          <a:ln xmlns:a="http://schemas.openxmlformats.org/drawingml/2006/main" w="0">
+            <a:noFill/>
+          </a:ln>
+        </p:spPr>
+        <p:txBody>
+          <a:bodyPr xmlns:a="http://schemas.openxmlformats.org/drawingml/2006/main" lIns="0" tIns="0" rIns="0" bIns="0"/>
+          <a:lstStyle xmlns:a="http://schemas.openxmlformats.org/drawingml/2006/main">
+            <a:defPPr>
+              <a:defRPr sz="1575">
+                <a:solidFill>
+                  <a:srgbClr val="81796F"/>
+                </a:solidFill>
+                <a:latin typeface="Ubuntu Condensed"/>
+                <a:ea typeface="Ubuntu Condensed"/>
+                <a:cs typeface="Ubuntu Condensed"/>
+              </a:defRPr>
+            </a:defPPr>
+          </a:lstStyle>
+          <a:p xmlns:a="http://schemas.openxmlformats.org/drawingml/2006/main">
+            <a:pPr>
+              <a:defRPr sz="1575">
+                <a:solidFill>
+                  <a:srgbClr val="81796F"/>
+                </a:solidFill>
+                <a:latin typeface="Ubuntu Condensed"/>
+                <a:ea typeface="Ubuntu Condensed"/>
+                <a:cs typeface="Ubuntu Condensed"/>
+              </a:defRPr>
+            </a:pPr>
+            <a:r>
+              <a:rPr sz="1575">
+                <a:solidFill>
+                  <a:srgbClr val="81796F"/>
+                </a:solidFill>
+                <a:latin typeface="Ubuntu Condensed"/>
+                <a:ea typeface="Ubuntu Condensed"/>
+                <a:cs typeface="Ubuntu Condensed"/>
+              </a:rPr>
+              <a:t>Filters</a:t>
+            </a:r>
+          </a:p>
+        </p:txBody>
+      </p:sp>
+      <p:sp>
+        <p:nvSpPr>
+          <p:cNvPr id="25" name="">
+            <a:extLst xmlns:a="http://schemas.openxmlformats.org/drawingml/2006/main">
+              <a:ext uri="{FF2B5EF4-FFF2-40B4-BE49-F238E27FC236}">
+                <a16:creationId xmlns:a16="http://schemas.microsoft.com/office/drawing/2014/main" id="{0184B821-D2E1-401A-A70A-0E49B18729D6}"/>
+              </a:ext>
+            </a:extLst>
+          </p:cNvPr>
+          <p:cNvSpPr>
+            <a:spLocks xmlns:a="http://schemas.openxmlformats.org/drawingml/2006/main" noGrp="1"/>
+          </p:cNvSpPr>
+          <p:nvPr/>
+        </p:nvSpPr>
+        <p:spPr>
+          <a:xfrm xmlns:a="http://schemas.openxmlformats.org/drawingml/2006/main">
+            <a:off x="5305425" y="3295650"/>
+            <a:ext cx="2400300" cy="333375"/>
+          </a:xfrm>
+          <a:prstGeom xmlns:a="http://schemas.openxmlformats.org/drawingml/2006/main" prst="rect">
+            <a:avLst/>
+          </a:prstGeom>
+          <a:solidFill xmlns:a="http://schemas.openxmlformats.org/drawingml/2006/main">
+            <a:srgbClr val="457985"/>
+          </a:solidFill>
+          <a:ln xmlns:a="http://schemas.openxmlformats.org/drawingml/2006/main" w="0">
+            <a:noFill/>
+          </a:ln>
+        </p:spPr>
+      </p:sp>
+      <p:sp>
+        <p:nvSpPr>
+          <p:cNvPr id="26" name="">
+            <a:extLst xmlns:a="http://schemas.openxmlformats.org/drawingml/2006/main">
+              <a:ext uri="{FF2B5EF4-FFF2-40B4-BE49-F238E27FC236}">
+                <a16:creationId xmlns:a16="http://schemas.microsoft.com/office/drawing/2014/main" id="{AF7BF4E8-804A-408C-A28D-EB6B083BCD8C}"/>
+              </a:ext>
+            </a:extLst>
+          </p:cNvPr>
+          <p:cNvSpPr>
+            <a:spLocks xmlns:a="http://schemas.openxmlformats.org/drawingml/2006/main" noGrp="1"/>
+          </p:cNvSpPr>
+          <p:nvPr/>
+        </p:nvSpPr>
+        <p:spPr>
+          <a:xfrm xmlns:a="http://schemas.openxmlformats.org/drawingml/2006/main">
+            <a:off x="5391150" y="3333750"/>
+            <a:ext cx="2228850" cy="266700"/>
+          </a:xfrm>
+          <a:prstGeom xmlns:a="http://schemas.openxmlformats.org/drawingml/2006/main" prst="rect">
+            <a:avLst/>
+          </a:prstGeom>
+          <a:noFill xmlns:a="http://schemas.openxmlformats.org/drawingml/2006/main"/>
+          <a:ln xmlns:a="http://schemas.openxmlformats.org/drawingml/2006/main" w="0">
+            <a:noFill/>
+          </a:ln>
+        </p:spPr>
+        <p:txBody>
+          <a:bodyPr xmlns:a="http://schemas.openxmlformats.org/drawingml/2006/main" lIns="0" tIns="0" rIns="0" bIns="0"/>
+          <a:lstStyle xmlns:a="http://schemas.openxmlformats.org/drawingml/2006/main">
+            <a:defPPr algn="ctr">
+              <a:defRPr sz="1575">
+                <a:solidFill>
+                  <a:srgbClr val="FFFFFF"/>
+                </a:solidFill>
+                <a:latin typeface="Ubuntu Condensed"/>
+                <a:ea typeface="Ubuntu Condensed"/>
+                <a:cs typeface="Ubuntu Condensed"/>
+              </a:defRPr>
+            </a:defPPr>
+          </a:lstStyle>
+          <a:p xmlns:a="http://schemas.openxmlformats.org/drawingml/2006/main">
+            <a:pPr algn="ctr">
+              <a:defRPr sz="1575">
+                <a:solidFill>
+                  <a:srgbClr val="FFFFFF"/>
+                </a:solidFill>
+                <a:latin typeface="Ubuntu Condensed"/>
+                <a:ea typeface="Ubuntu Condensed"/>
+                <a:cs typeface="Ubuntu Condensed"/>
+              </a:defRPr>
+            </a:pPr>
+            <a:r>
+              <a:rPr sz="1575">
+                <a:solidFill>
+                  <a:srgbClr val="FFFFFF"/>
+                </a:solidFill>
+                <a:latin typeface="Ubuntu Condensed"/>
+                <a:ea typeface="Ubuntu Condensed"/>
+                <a:cs typeface="Ubuntu Condensed"/>
+              </a:rPr>
+              <a:t>Year: 1960–2020</a:t>
+            </a:r>
+          </a:p>
+        </p:txBody>
+      </p:sp>
+      <p:sp>
+        <p:nvSpPr>
+          <p:cNvPr id="27" name="">
+            <a:extLst xmlns:a="http://schemas.openxmlformats.org/drawingml/2006/main">
+              <a:ext uri="{FF2B5EF4-FFF2-40B4-BE49-F238E27FC236}">
+                <a16:creationId xmlns:a16="http://schemas.microsoft.com/office/drawing/2014/main" id="{380724F8-0216-425C-BBA9-BC9FCD9D961D}"/>
+              </a:ext>
+            </a:extLst>
+          </p:cNvPr>
+          <p:cNvSpPr>
+            <a:spLocks xmlns:a="http://schemas.openxmlformats.org/drawingml/2006/main" noGrp="1"/>
+          </p:cNvSpPr>
+          <p:nvPr/>
+        </p:nvSpPr>
+        <p:spPr>
+          <a:xfrm xmlns:a="http://schemas.openxmlformats.org/drawingml/2006/main">
+            <a:off x="4343400" y="3962400"/>
+            <a:ext cx="952500" cy="285750"/>
+          </a:xfrm>
+          <a:prstGeom xmlns:a="http://schemas.openxmlformats.org/drawingml/2006/main" prst="rect">
+            <a:avLst/>
+          </a:prstGeom>
+          <a:noFill xmlns:a="http://schemas.openxmlformats.org/drawingml/2006/main"/>
+          <a:ln xmlns:a="http://schemas.openxmlformats.org/drawingml/2006/main" w="0">
+            <a:noFill/>
+          </a:ln>
+        </p:spPr>
+        <p:txBody>
+          <a:bodyPr xmlns:a="http://schemas.openxmlformats.org/drawingml/2006/main" lIns="0" tIns="0" rIns="0" bIns="0"/>
+          <a:lstStyle xmlns:a="http://schemas.openxmlformats.org/drawingml/2006/main">
+            <a:defPPr>
+              <a:defRPr sz="1725">
+                <a:solidFill>
+                  <a:srgbClr val="81796F"/>
+                </a:solidFill>
+                <a:latin typeface="Ubuntu Condensed"/>
+                <a:ea typeface="Ubuntu Condensed"/>
+                <a:cs typeface="Ubuntu Condensed"/>
+              </a:defRPr>
+            </a:defPPr>
+          </a:lstStyle>
+          <a:p xmlns:a="http://schemas.openxmlformats.org/drawingml/2006/main">
+            <a:pPr>
+              <a:defRPr sz="1725">
+                <a:solidFill>
+                  <a:srgbClr val="81796F"/>
+                </a:solidFill>
+                <a:latin typeface="Ubuntu Condensed"/>
+                <a:ea typeface="Ubuntu Condensed"/>
+                <a:cs typeface="Ubuntu Condensed"/>
+              </a:defRPr>
+            </a:pPr>
+            <a:r>
+              <a:rPr sz="1725">
+                <a:solidFill>
+                  <a:srgbClr val="81796F"/>
+                </a:solidFill>
+                <a:latin typeface="Ubuntu Condensed"/>
+                <a:ea typeface="Ubuntu Condensed"/>
+                <a:cs typeface="Ubuntu Condensed"/>
+              </a:rPr>
+              <a:t>Marks</a:t>
+            </a:r>
+          </a:p>
+        </p:txBody>
+      </p:sp>
+      <p:sp>
+        <p:nvSpPr>
+          <p:cNvPr id="28" name="">
+            <a:extLst xmlns:a="http://schemas.openxmlformats.org/drawingml/2006/main">
+              <a:ext uri="{FF2B5EF4-FFF2-40B4-BE49-F238E27FC236}">
+                <a16:creationId xmlns:a16="http://schemas.microsoft.com/office/drawing/2014/main" id="{5033DB98-E3D7-4578-B6B1-4EBBE20D75AC}"/>
+              </a:ext>
+            </a:extLst>
+          </p:cNvPr>
+          <p:cNvSpPr>
+            <a:spLocks xmlns:a="http://schemas.openxmlformats.org/drawingml/2006/main" noGrp="1"/>
+          </p:cNvSpPr>
+          <p:nvPr/>
+        </p:nvSpPr>
+        <p:spPr>
+          <a:xfrm xmlns:a="http://schemas.openxmlformats.org/drawingml/2006/main">
+            <a:off x="5305425" y="3914775"/>
+            <a:ext cx="2400300" cy="381000"/>
+          </a:xfrm>
+          <a:prstGeom xmlns:a="http://schemas.openxmlformats.org/drawingml/2006/main" prst="rect">
+            <a:avLst/>
+          </a:prstGeom>
+          <a:noFill xmlns:a="http://schemas.openxmlformats.org/drawingml/2006/main"/>
+          <a:ln xmlns:a="http://schemas.openxmlformats.org/drawingml/2006/main" w="0">
+            <a:noFill/>
+          </a:ln>
+        </p:spPr>
+        <p:txBody>
+          <a:bodyPr xmlns:a="http://schemas.openxmlformats.org/drawingml/2006/main" lIns="0" tIns="0" rIns="0" bIns="0"/>
+          <a:lstStyle xmlns:a="http://schemas.openxmlformats.org/drawingml/2006/main">
+            <a:defPPr>
+              <a:defRPr sz="2100">
+                <a:solidFill>
+                  <a:srgbClr val="38332E"/>
+                </a:solidFill>
+                <a:latin typeface="Ubuntu Condensed"/>
+                <a:ea typeface="Ubuntu Condensed"/>
+                <a:cs typeface="Ubuntu Condensed"/>
+              </a:defRPr>
+            </a:defPPr>
+          </a:lstStyle>
+          <a:p xmlns:a="http://schemas.openxmlformats.org/drawingml/2006/main">
+            <a:pPr>
+              <a:defRPr sz="2100">
+                <a:solidFill>
+                  <a:srgbClr val="38332E"/>
+                </a:solidFill>
+                <a:latin typeface="Ubuntu Condensed"/>
+                <a:ea typeface="Ubuntu Condensed"/>
+                <a:cs typeface="Ubuntu Condensed"/>
+              </a:defRPr>
+            </a:pPr>
+            <a:r>
+              <a:rPr sz="2100">
+                <a:solidFill>
+                  <a:srgbClr val="38332E"/>
+                </a:solidFill>
+                <a:latin typeface="Ubuntu Condensed"/>
+                <a:ea typeface="Ubuntu Condensed"/>
+                <a:cs typeface="Ubuntu Condensed"/>
+              </a:rPr>
+              <a:t>Line</a:t>
+            </a:r>
+          </a:p>
+        </p:txBody>
+      </p:sp>
+      <p:sp>
+        <p:nvSpPr>
+          <p:cNvPr id="29" name="">
+            <a:extLst xmlns:a="http://schemas.openxmlformats.org/drawingml/2006/main">
+              <a:ext uri="{FF2B5EF4-FFF2-40B4-BE49-F238E27FC236}">
+                <a16:creationId xmlns:a16="http://schemas.microsoft.com/office/drawing/2014/main" id="{F10FC7EC-9BDB-4E03-BA2E-6B3B2D78C1ED}"/>
+              </a:ext>
+            </a:extLst>
+          </p:cNvPr>
+          <p:cNvSpPr>
+            <a:spLocks xmlns:a="http://schemas.openxmlformats.org/drawingml/2006/main" noGrp="1"/>
+          </p:cNvSpPr>
+          <p:nvPr/>
+        </p:nvSpPr>
+        <p:spPr>
+          <a:xfrm xmlns:a="http://schemas.openxmlformats.org/drawingml/2006/main">
+            <a:off x="4343400" y="4448175"/>
+            <a:ext cx="3429000" cy="762000"/>
+          </a:xfrm>
+          <a:prstGeom xmlns:a="http://schemas.openxmlformats.org/drawingml/2006/main" prst="rect">
+            <a:avLst/>
+          </a:prstGeom>
+          <a:noFill xmlns:a="http://schemas.openxmlformats.org/drawingml/2006/main"/>
+          <a:ln xmlns:a="http://schemas.openxmlformats.org/drawingml/2006/main" w="0">
+            <a:noFill/>
+          </a:ln>
+        </p:spPr>
+        <p:txBody>
+          <a:bodyPr xmlns:a="http://schemas.openxmlformats.org/drawingml/2006/main" lIns="0" tIns="0" rIns="0" bIns="0"/>
+          <a:lstStyle xmlns:a="http://schemas.openxmlformats.org/drawingml/2006/main">
+            <a:defPPr>
+              <a:defRPr sz="1950">
+                <a:solidFill>
+                  <a:srgbClr val="38332E"/>
+                </a:solidFill>
+                <a:latin typeface="Ubuntu Condensed"/>
+                <a:ea typeface="Ubuntu Condensed"/>
+                <a:cs typeface="Ubuntu Condensed"/>
+              </a:defRPr>
+            </a:defPPr>
+          </a:lstStyle>
+          <a:p xmlns:a="http://schemas.openxmlformats.org/drawingml/2006/main">
+            <a:pPr>
+              <a:defRPr sz="1950">
+                <a:solidFill>
+                  <a:srgbClr val="38332E"/>
+                </a:solidFill>
+                <a:latin typeface="Ubuntu Condensed"/>
+                <a:ea typeface="Ubuntu Condensed"/>
+                <a:cs typeface="Ubuntu Condensed"/>
+              </a:defRPr>
+            </a:pPr>
+            <a:r>
+              <a:rPr sz="1950">
+                <a:solidFill>
+                  <a:srgbClr val="38332E"/>
+                </a:solidFill>
+                <a:latin typeface="Ubuntu Condensed"/>
+                <a:ea typeface="Ubuntu Condensed"/>
+                <a:cs typeface="Ubuntu Condensed"/>
+              </a:rPr>
+              <a:t>Country on Color</a:t>
+            </a:r>
+          </a:p>
+        </p:txBody>
+      </p:sp>
+      <p:sp>
+        <p:nvSpPr>
+          <p:cNvPr id="30" name="">
+            <a:extLst xmlns:a="http://schemas.openxmlformats.org/drawingml/2006/main">
+              <a:ext uri="{FF2B5EF4-FFF2-40B4-BE49-F238E27FC236}">
+                <a16:creationId xmlns:a16="http://schemas.microsoft.com/office/drawing/2014/main" id="{7B08E7C0-3100-44B6-AD4E-5A4E404DCE28}"/>
+              </a:ext>
+            </a:extLst>
+          </p:cNvPr>
+          <p:cNvSpPr>
+            <a:spLocks xmlns:a="http://schemas.openxmlformats.org/drawingml/2006/main" noGrp="1"/>
+          </p:cNvSpPr>
+          <p:nvPr/>
+        </p:nvSpPr>
+        <p:spPr>
+          <a:xfrm xmlns:a="http://schemas.openxmlformats.org/drawingml/2006/main">
+            <a:off x="4343400" y="5391150"/>
+            <a:ext cx="3429000" cy="723900"/>
+          </a:xfrm>
+          <a:prstGeom xmlns:a="http://schemas.openxmlformats.org/drawingml/2006/main" prst="rect">
+            <a:avLst/>
+          </a:prstGeom>
+          <a:noFill xmlns:a="http://schemas.openxmlformats.org/drawingml/2006/main"/>
+          <a:ln xmlns:a="http://schemas.openxmlformats.org/drawingml/2006/main" w="0">
+            <a:noFill/>
+          </a:ln>
+        </p:spPr>
+        <p:txBody>
+          <a:bodyPr xmlns:a="http://schemas.openxmlformats.org/drawingml/2006/main" lIns="0" tIns="0" rIns="0" bIns="0"/>
+          <a:lstStyle xmlns:a="http://schemas.openxmlformats.org/drawingml/2006/main">
+            <a:defPPr>
+              <a:defRPr sz="1725">
+                <a:solidFill>
+                  <a:srgbClr val="81796F"/>
+                </a:solidFill>
+                <a:latin typeface="Ubuntu Condensed"/>
+                <a:ea typeface="Ubuntu Condensed"/>
+                <a:cs typeface="Ubuntu Condensed"/>
+              </a:defRPr>
+            </a:defPPr>
+          </a:lstStyle>
+          <a:p xmlns:a="http://schemas.openxmlformats.org/drawingml/2006/main">
+            <a:pPr>
+              <a:defRPr sz="1725">
+                <a:solidFill>
+                  <a:srgbClr val="81796F"/>
+                </a:solidFill>
+                <a:latin typeface="Ubuntu Condensed"/>
+                <a:ea typeface="Ubuntu Condensed"/>
+                <a:cs typeface="Ubuntu Condensed"/>
+              </a:defRPr>
+            </a:pPr>
+            <a:r>
+              <a:rPr sz="1725">
+                <a:solidFill>
+                  <a:srgbClr val="81796F"/>
+                </a:solidFill>
+                <a:latin typeface="Ubuntu Condensed"/>
+                <a:ea typeface="Ubuntu Condensed"/>
+                <a:cs typeface="Ubuntu Condensed"/>
+              </a:rPr>
+              <a:t>Year pill menu: Continuous</a:t>
+            </a:r>
+          </a:p>
+          <a:p xmlns:a="http://schemas.openxmlformats.org/drawingml/2006/main">
+            <a:pPr>
+              <a:defRPr sz="1725">
+                <a:solidFill>
+                  <a:srgbClr val="81796F"/>
+                </a:solidFill>
+                <a:latin typeface="Ubuntu Condensed"/>
+                <a:ea typeface="Ubuntu Condensed"/>
+                <a:cs typeface="Ubuntu Condensed"/>
+              </a:defRPr>
+            </a:pPr>
+            <a:r>
+              <a:rPr sz="1725">
+                <a:solidFill>
+                  <a:srgbClr val="81796F"/>
+                </a:solidFill>
+                <a:latin typeface="Ubuntu Condensed"/>
+                <a:ea typeface="Ubuntu Condensed"/>
+                <a:cs typeface="Ubuntu Condensed"/>
+              </a:rPr>
+              <a:t>Keep the full year range.</a:t>
+            </a:r>
+          </a:p>
+        </p:txBody>
+      </p:sp>
+      <p:sp>
+        <p:nvSpPr>
+          <p:cNvPr id="31" name="">
+            <a:extLst xmlns:a="http://schemas.openxmlformats.org/drawingml/2006/main">
+              <a:ext uri="{FF2B5EF4-FFF2-40B4-BE49-F238E27FC236}">
+                <a16:creationId xmlns:a16="http://schemas.microsoft.com/office/drawing/2014/main" id="{C9048343-BB66-4600-85B9-2DB5E2299671}"/>
+              </a:ext>
+            </a:extLst>
+          </p:cNvPr>
+          <p:cNvSpPr>
+            <a:spLocks xmlns:a="http://schemas.openxmlformats.org/drawingml/2006/main" noGrp="1"/>
+          </p:cNvSpPr>
+          <p:nvPr/>
+        </p:nvSpPr>
+        <p:spPr>
+          <a:xfrm xmlns:a="http://schemas.openxmlformats.org/drawingml/2006/main">
+            <a:off x="8229600" y="1714500"/>
+            <a:ext cx="3429000" cy="428625"/>
+          </a:xfrm>
+          <a:prstGeom xmlns:a="http://schemas.openxmlformats.org/drawingml/2006/main" prst="rect">
+            <a:avLst/>
+          </a:prstGeom>
+          <a:noFill xmlns:a="http://schemas.openxmlformats.org/drawingml/2006/main"/>
+          <a:ln xmlns:a="http://schemas.openxmlformats.org/drawingml/2006/main" w="0">
+            <a:noFill/>
+          </a:ln>
+        </p:spPr>
+        <p:txBody>
+          <a:bodyPr xmlns:a="http://schemas.openxmlformats.org/drawingml/2006/main" lIns="0" tIns="0" rIns="0" bIns="0"/>
+          <a:lstStyle xmlns:a="http://schemas.openxmlformats.org/drawingml/2006/main">
+            <a:defPPr>
+              <a:defRPr sz="2400">
+                <a:solidFill>
+                  <a:srgbClr val="B23C50"/>
+                </a:solidFill>
+                <a:latin typeface="Ubuntu Condensed"/>
+                <a:ea typeface="Ubuntu Condensed"/>
+                <a:cs typeface="Ubuntu Condensed"/>
+              </a:defRPr>
+            </a:defPPr>
+          </a:lstStyle>
+          <a:p xmlns:a="http://schemas.openxmlformats.org/drawingml/2006/main">
+            <a:pPr>
+              <a:defRPr sz="2400">
+                <a:solidFill>
+                  <a:srgbClr val="B23C50"/>
+                </a:solidFill>
+                <a:latin typeface="Ubuntu Condensed"/>
+                <a:ea typeface="Ubuntu Condensed"/>
+                <a:cs typeface="Ubuntu Condensed"/>
+              </a:defRPr>
+            </a:pPr>
+            <a:r>
+              <a:rPr sz="2400">
+                <a:solidFill>
+                  <a:srgbClr val="B23C50"/>
+                </a:solidFill>
+                <a:latin typeface="Ubuntu Condensed"/>
+                <a:ea typeface="Ubuntu Condensed"/>
+                <a:cs typeface="Ubuntu Condensed"/>
+              </a:rPr>
+              <a:t>3  GDP History</a:t>
+            </a:r>
+          </a:p>
+        </p:txBody>
+      </p:sp>
+      <p:sp>
+        <p:nvSpPr>
+          <p:cNvPr id="32" name="">
+            <a:extLst xmlns:a="http://schemas.openxmlformats.org/drawingml/2006/main">
+              <a:ext uri="{FF2B5EF4-FFF2-40B4-BE49-F238E27FC236}">
+                <a16:creationId xmlns:a16="http://schemas.microsoft.com/office/drawing/2014/main" id="{393FF21F-C609-4766-9C1D-DABD54370931}"/>
+              </a:ext>
+            </a:extLst>
+          </p:cNvPr>
+          <p:cNvSpPr>
+            <a:spLocks xmlns:a="http://schemas.openxmlformats.org/drawingml/2006/main" noGrp="1"/>
+          </p:cNvSpPr>
+          <p:nvPr/>
+        </p:nvSpPr>
+        <p:spPr>
+          <a:xfrm xmlns:a="http://schemas.openxmlformats.org/drawingml/2006/main">
+            <a:off x="8229600" y="2419350"/>
+            <a:ext cx="952500" cy="266700"/>
+          </a:xfrm>
+          <a:prstGeom xmlns:a="http://schemas.openxmlformats.org/drawingml/2006/main" prst="rect">
+            <a:avLst/>
+          </a:prstGeom>
+          <a:noFill xmlns:a="http://schemas.openxmlformats.org/drawingml/2006/main"/>
+          <a:ln xmlns:a="http://schemas.openxmlformats.org/drawingml/2006/main" w="0">
+            <a:noFill/>
+          </a:ln>
+        </p:spPr>
+        <p:txBody>
+          <a:bodyPr xmlns:a="http://schemas.openxmlformats.org/drawingml/2006/main" lIns="0" tIns="0" rIns="0" bIns="0"/>
+          <a:lstStyle xmlns:a="http://schemas.openxmlformats.org/drawingml/2006/main">
+            <a:defPPr>
+              <a:defRPr sz="1575">
+                <a:solidFill>
+                  <a:srgbClr val="81796F"/>
+                </a:solidFill>
+                <a:latin typeface="Ubuntu Condensed"/>
+                <a:ea typeface="Ubuntu Condensed"/>
+                <a:cs typeface="Ubuntu Condensed"/>
+              </a:defRPr>
+            </a:defPPr>
+          </a:lstStyle>
+          <a:p xmlns:a="http://schemas.openxmlformats.org/drawingml/2006/main">
+            <a:pPr>
+              <a:defRPr sz="1575">
+                <a:solidFill>
+                  <a:srgbClr val="81796F"/>
+                </a:solidFill>
+                <a:latin typeface="Ubuntu Condensed"/>
+                <a:ea typeface="Ubuntu Condensed"/>
+                <a:cs typeface="Ubuntu Condensed"/>
+              </a:defRPr>
+            </a:pPr>
+            <a:r>
+              <a:rPr sz="1575">
+                <a:solidFill>
+                  <a:srgbClr val="81796F"/>
+                </a:solidFill>
+                <a:latin typeface="Ubuntu Condensed"/>
+                <a:ea typeface="Ubuntu Condensed"/>
+                <a:cs typeface="Ubuntu Condensed"/>
+              </a:rPr>
+              <a:t>Columns</a:t>
+            </a:r>
+          </a:p>
+        </p:txBody>
+      </p:sp>
+      <p:sp>
+        <p:nvSpPr>
+          <p:cNvPr id="33" name="">
+            <a:extLst xmlns:a="http://schemas.openxmlformats.org/drawingml/2006/main">
+              <a:ext uri="{FF2B5EF4-FFF2-40B4-BE49-F238E27FC236}">
+                <a16:creationId xmlns:a16="http://schemas.microsoft.com/office/drawing/2014/main" id="{4869EFBF-FEE9-40E0-91E4-2C6D37D97589}"/>
+              </a:ext>
+            </a:extLst>
+          </p:cNvPr>
+          <p:cNvSpPr>
+            <a:spLocks xmlns:a="http://schemas.openxmlformats.org/drawingml/2006/main" noGrp="1"/>
+          </p:cNvSpPr>
+          <p:nvPr/>
+        </p:nvSpPr>
+        <p:spPr>
+          <a:xfrm xmlns:a="http://schemas.openxmlformats.org/drawingml/2006/main">
+            <a:off x="9191625" y="2381250"/>
+            <a:ext cx="2400300" cy="333375"/>
+          </a:xfrm>
+          <a:prstGeom xmlns:a="http://schemas.openxmlformats.org/drawingml/2006/main" prst="rect">
+            <a:avLst/>
+          </a:prstGeom>
+          <a:solidFill xmlns:a="http://schemas.openxmlformats.org/drawingml/2006/main">
+            <a:srgbClr val="647545"/>
+          </a:solidFill>
+          <a:ln xmlns:a="http://schemas.openxmlformats.org/drawingml/2006/main" w="0">
+            <a:noFill/>
+          </a:ln>
+        </p:spPr>
+      </p:sp>
+      <p:sp>
+        <p:nvSpPr>
+          <p:cNvPr id="34" name="">
+            <a:extLst xmlns:a="http://schemas.openxmlformats.org/drawingml/2006/main">
+              <a:ext uri="{FF2B5EF4-FFF2-40B4-BE49-F238E27FC236}">
+                <a16:creationId xmlns:a16="http://schemas.microsoft.com/office/drawing/2014/main" id="{A18E32D3-10A3-4325-A6AC-80D2798F215E}"/>
+              </a:ext>
+            </a:extLst>
+          </p:cNvPr>
+          <p:cNvSpPr>
+            <a:spLocks xmlns:a="http://schemas.openxmlformats.org/drawingml/2006/main" noGrp="1"/>
+          </p:cNvSpPr>
+          <p:nvPr/>
+        </p:nvSpPr>
+        <p:spPr>
+          <a:xfrm xmlns:a="http://schemas.openxmlformats.org/drawingml/2006/main">
+            <a:off x="9277350" y="2419350"/>
+            <a:ext cx="2228850" cy="266700"/>
+          </a:xfrm>
+          <a:prstGeom xmlns:a="http://schemas.openxmlformats.org/drawingml/2006/main" prst="rect">
+            <a:avLst/>
+          </a:prstGeom>
+          <a:noFill xmlns:a="http://schemas.openxmlformats.org/drawingml/2006/main"/>
+          <a:ln xmlns:a="http://schemas.openxmlformats.org/drawingml/2006/main" w="0">
+            <a:noFill/>
+          </a:ln>
+        </p:spPr>
+        <p:txBody>
+          <a:bodyPr xmlns:a="http://schemas.openxmlformats.org/drawingml/2006/main" lIns="0" tIns="0" rIns="0" bIns="0"/>
+          <a:lstStyle xmlns:a="http://schemas.openxmlformats.org/drawingml/2006/main">
+            <a:defPPr algn="ctr">
+              <a:defRPr sz="1575">
+                <a:solidFill>
+                  <a:srgbClr val="FFFFFF"/>
+                </a:solidFill>
+                <a:latin typeface="Ubuntu Condensed"/>
+                <a:ea typeface="Ubuntu Condensed"/>
+                <a:cs typeface="Ubuntu Condensed"/>
+              </a:defRPr>
+            </a:defPPr>
+          </a:lstStyle>
+          <a:p xmlns:a="http://schemas.openxmlformats.org/drawingml/2006/main">
+            <a:pPr algn="ctr">
+              <a:defRPr sz="1575">
+                <a:solidFill>
+                  <a:srgbClr val="FFFFFF"/>
+                </a:solidFill>
+                <a:latin typeface="Ubuntu Condensed"/>
+                <a:ea typeface="Ubuntu Condensed"/>
+                <a:cs typeface="Ubuntu Condensed"/>
+              </a:defRPr>
+            </a:pPr>
+            <a:r>
+              <a:rPr sz="1575">
+                <a:solidFill>
+                  <a:srgbClr val="FFFFFF"/>
+                </a:solidFill>
+                <a:latin typeface="Ubuntu Condensed"/>
+                <a:ea typeface="Ubuntu Condensed"/>
+                <a:cs typeface="Ubuntu Condensed"/>
+              </a:rPr>
+              <a:t>Year</a:t>
+            </a:r>
+          </a:p>
+        </p:txBody>
+      </p:sp>
+      <p:sp>
+        <p:nvSpPr>
+          <p:cNvPr id="35" name="">
+            <a:extLst xmlns:a="http://schemas.openxmlformats.org/drawingml/2006/main">
+              <a:ext uri="{FF2B5EF4-FFF2-40B4-BE49-F238E27FC236}">
+                <a16:creationId xmlns:a16="http://schemas.microsoft.com/office/drawing/2014/main" id="{DA749540-87C9-477B-84FE-545C270135A3}"/>
+              </a:ext>
+            </a:extLst>
+          </p:cNvPr>
+          <p:cNvSpPr>
+            <a:spLocks xmlns:a="http://schemas.openxmlformats.org/drawingml/2006/main" noGrp="1"/>
+          </p:cNvSpPr>
+          <p:nvPr/>
+        </p:nvSpPr>
+        <p:spPr>
+          <a:xfrm xmlns:a="http://schemas.openxmlformats.org/drawingml/2006/main">
+            <a:off x="8229600" y="2876550"/>
+            <a:ext cx="952500" cy="266700"/>
+          </a:xfrm>
+          <a:prstGeom xmlns:a="http://schemas.openxmlformats.org/drawingml/2006/main" prst="rect">
+            <a:avLst/>
+          </a:prstGeom>
+          <a:noFill xmlns:a="http://schemas.openxmlformats.org/drawingml/2006/main"/>
+          <a:ln xmlns:a="http://schemas.openxmlformats.org/drawingml/2006/main" w="0">
+            <a:noFill/>
+          </a:ln>
+        </p:spPr>
+        <p:txBody>
+          <a:bodyPr xmlns:a="http://schemas.openxmlformats.org/drawingml/2006/main" lIns="0" tIns="0" rIns="0" bIns="0"/>
+          <a:lstStyle xmlns:a="http://schemas.openxmlformats.org/drawingml/2006/main">
+            <a:defPPr>
+              <a:defRPr sz="1575">
+                <a:solidFill>
+                  <a:srgbClr val="81796F"/>
+                </a:solidFill>
+                <a:latin typeface="Ubuntu Condensed"/>
+                <a:ea typeface="Ubuntu Condensed"/>
+                <a:cs typeface="Ubuntu Condensed"/>
+              </a:defRPr>
+            </a:defPPr>
+          </a:lstStyle>
+          <a:p xmlns:a="http://schemas.openxmlformats.org/drawingml/2006/main">
+            <a:pPr>
+              <a:defRPr sz="1575">
+                <a:solidFill>
+                  <a:srgbClr val="81796F"/>
+                </a:solidFill>
+                <a:latin typeface="Ubuntu Condensed"/>
+                <a:ea typeface="Ubuntu Condensed"/>
+                <a:cs typeface="Ubuntu Condensed"/>
+              </a:defRPr>
+            </a:pPr>
+            <a:r>
+              <a:rPr sz="1575">
+                <a:solidFill>
+                  <a:srgbClr val="81796F"/>
+                </a:solidFill>
+                <a:latin typeface="Ubuntu Condensed"/>
+                <a:ea typeface="Ubuntu Condensed"/>
+                <a:cs typeface="Ubuntu Condensed"/>
+              </a:rPr>
+              <a:t>Rows</a:t>
+            </a:r>
+          </a:p>
+        </p:txBody>
+      </p:sp>
+      <p:sp>
+        <p:nvSpPr>
+          <p:cNvPr id="36" name="">
+            <a:extLst xmlns:a="http://schemas.openxmlformats.org/drawingml/2006/main">
+              <a:ext uri="{FF2B5EF4-FFF2-40B4-BE49-F238E27FC236}">
+                <a16:creationId xmlns:a16="http://schemas.microsoft.com/office/drawing/2014/main" id="{3F056AF7-38C3-4A68-814F-34615E7BD496}"/>
+              </a:ext>
+            </a:extLst>
+          </p:cNvPr>
+          <p:cNvSpPr>
+            <a:spLocks xmlns:a="http://schemas.openxmlformats.org/drawingml/2006/main" noGrp="1"/>
+          </p:cNvSpPr>
+          <p:nvPr/>
+        </p:nvSpPr>
+        <p:spPr>
+          <a:xfrm xmlns:a="http://schemas.openxmlformats.org/drawingml/2006/main">
+            <a:off x="9191625" y="2838450"/>
+            <a:ext cx="2400300" cy="333375"/>
+          </a:xfrm>
+          <a:prstGeom xmlns:a="http://schemas.openxmlformats.org/drawingml/2006/main" prst="rect">
+            <a:avLst/>
+          </a:prstGeom>
+          <a:solidFill xmlns:a="http://schemas.openxmlformats.org/drawingml/2006/main">
+            <a:srgbClr val="647545"/>
+          </a:solidFill>
+          <a:ln xmlns:a="http://schemas.openxmlformats.org/drawingml/2006/main" w="0">
+            <a:noFill/>
+          </a:ln>
+        </p:spPr>
+      </p:sp>
+      <p:sp>
+        <p:nvSpPr>
+          <p:cNvPr id="37" name="">
+            <a:extLst xmlns:a="http://schemas.openxmlformats.org/drawingml/2006/main">
+              <a:ext uri="{FF2B5EF4-FFF2-40B4-BE49-F238E27FC236}">
+                <a16:creationId xmlns:a16="http://schemas.microsoft.com/office/drawing/2014/main" id="{119C8F19-8628-4902-9F3C-7B7F23F83BD6}"/>
+              </a:ext>
+            </a:extLst>
+          </p:cNvPr>
+          <p:cNvSpPr>
+            <a:spLocks xmlns:a="http://schemas.openxmlformats.org/drawingml/2006/main" noGrp="1"/>
+          </p:cNvSpPr>
+          <p:nvPr/>
+        </p:nvSpPr>
+        <p:spPr>
+          <a:xfrm xmlns:a="http://schemas.openxmlformats.org/drawingml/2006/main">
+            <a:off x="9277350" y="2876550"/>
+            <a:ext cx="2228850" cy="266700"/>
+          </a:xfrm>
+          <a:prstGeom xmlns:a="http://schemas.openxmlformats.org/drawingml/2006/main" prst="rect">
+            <a:avLst/>
+          </a:prstGeom>
+          <a:noFill xmlns:a="http://schemas.openxmlformats.org/drawingml/2006/main"/>
+          <a:ln xmlns:a="http://schemas.openxmlformats.org/drawingml/2006/main" w="0">
+            <a:noFill/>
+          </a:ln>
+        </p:spPr>
+        <p:txBody>
+          <a:bodyPr xmlns:a="http://schemas.openxmlformats.org/drawingml/2006/main" lIns="0" tIns="0" rIns="0" bIns="0"/>
+          <a:lstStyle xmlns:a="http://schemas.openxmlformats.org/drawingml/2006/main">
+            <a:defPPr algn="ctr">
+              <a:defRPr sz="1575">
+                <a:solidFill>
+                  <a:srgbClr val="FFFFFF"/>
+                </a:solidFill>
+                <a:latin typeface="Ubuntu Condensed"/>
+                <a:ea typeface="Ubuntu Condensed"/>
+                <a:cs typeface="Ubuntu Condensed"/>
+              </a:defRPr>
+            </a:defPPr>
+          </a:lstStyle>
+          <a:p xmlns:a="http://schemas.openxmlformats.org/drawingml/2006/main">
+            <a:pPr algn="ctr">
+              <a:defRPr sz="1575">
+                <a:solidFill>
+                  <a:srgbClr val="FFFFFF"/>
+                </a:solidFill>
+                <a:latin typeface="Ubuntu Condensed"/>
+                <a:ea typeface="Ubuntu Condensed"/>
+                <a:cs typeface="Ubuntu Condensed"/>
+              </a:defRPr>
+            </a:pPr>
+            <a:r>
+              <a:rPr sz="1575">
+                <a:solidFill>
+                  <a:srgbClr val="FFFFFF"/>
+                </a:solidFill>
+                <a:latin typeface="Ubuntu Condensed"/>
+                <a:ea typeface="Ubuntu Condensed"/>
+                <a:cs typeface="Ubuntu Condensed"/>
+              </a:rPr>
+              <a:t>AVG(GDP)</a:t>
+            </a:r>
+          </a:p>
+        </p:txBody>
+      </p:sp>
+      <p:sp>
+        <p:nvSpPr>
+          <p:cNvPr id="38" name="">
+            <a:extLst xmlns:a="http://schemas.openxmlformats.org/drawingml/2006/main">
+              <a:ext uri="{FF2B5EF4-FFF2-40B4-BE49-F238E27FC236}">
+                <a16:creationId xmlns:a16="http://schemas.microsoft.com/office/drawing/2014/main" id="{87CC5A38-A30B-42BA-8057-A5AA84F8953C}"/>
+              </a:ext>
+            </a:extLst>
+          </p:cNvPr>
+          <p:cNvSpPr>
+            <a:spLocks xmlns:a="http://schemas.openxmlformats.org/drawingml/2006/main" noGrp="1"/>
+          </p:cNvSpPr>
+          <p:nvPr/>
+        </p:nvSpPr>
+        <p:spPr>
+          <a:xfrm xmlns:a="http://schemas.openxmlformats.org/drawingml/2006/main">
+            <a:off x="8229600" y="3333750"/>
+            <a:ext cx="952500" cy="266700"/>
+          </a:xfrm>
+          <a:prstGeom xmlns:a="http://schemas.openxmlformats.org/drawingml/2006/main" prst="rect">
+            <a:avLst/>
+          </a:prstGeom>
+          <a:noFill xmlns:a="http://schemas.openxmlformats.org/drawingml/2006/main"/>
+          <a:ln xmlns:a="http://schemas.openxmlformats.org/drawingml/2006/main" w="0">
+            <a:noFill/>
+          </a:ln>
+        </p:spPr>
+        <p:txBody>
+          <a:bodyPr xmlns:a="http://schemas.openxmlformats.org/drawingml/2006/main" lIns="0" tIns="0" rIns="0" bIns="0"/>
+          <a:lstStyle xmlns:a="http://schemas.openxmlformats.org/drawingml/2006/main">
+            <a:defPPr>
+              <a:defRPr sz="1575">
+                <a:solidFill>
+                  <a:srgbClr val="81796F"/>
+                </a:solidFill>
+                <a:latin typeface="Ubuntu Condensed"/>
+                <a:ea typeface="Ubuntu Condensed"/>
+                <a:cs typeface="Ubuntu Condensed"/>
+              </a:defRPr>
+            </a:defPPr>
+          </a:lstStyle>
+          <a:p xmlns:a="http://schemas.openxmlformats.org/drawingml/2006/main">
+            <a:pPr>
+              <a:defRPr sz="1575">
+                <a:solidFill>
+                  <a:srgbClr val="81796F"/>
+                </a:solidFill>
+                <a:latin typeface="Ubuntu Condensed"/>
+                <a:ea typeface="Ubuntu Condensed"/>
+                <a:cs typeface="Ubuntu Condensed"/>
+              </a:defRPr>
+            </a:pPr>
+            <a:r>
+              <a:rPr sz="1575">
+                <a:solidFill>
+                  <a:srgbClr val="81796F"/>
+                </a:solidFill>
+                <a:latin typeface="Ubuntu Condensed"/>
+                <a:ea typeface="Ubuntu Condensed"/>
+                <a:cs typeface="Ubuntu Condensed"/>
+              </a:rPr>
+              <a:t>Filters</a:t>
+            </a:r>
+          </a:p>
+        </p:txBody>
+      </p:sp>
+      <p:sp>
+        <p:nvSpPr>
+          <p:cNvPr id="39" name="">
+            <a:extLst xmlns:a="http://schemas.openxmlformats.org/drawingml/2006/main">
+              <a:ext uri="{FF2B5EF4-FFF2-40B4-BE49-F238E27FC236}">
+                <a16:creationId xmlns:a16="http://schemas.microsoft.com/office/drawing/2014/main" id="{6542C334-E1B3-40A9-A5B6-10906306028C}"/>
+              </a:ext>
+            </a:extLst>
+          </p:cNvPr>
+          <p:cNvSpPr>
+            <a:spLocks xmlns:a="http://schemas.openxmlformats.org/drawingml/2006/main" noGrp="1"/>
+          </p:cNvSpPr>
+          <p:nvPr/>
+        </p:nvSpPr>
+        <p:spPr>
+          <a:xfrm xmlns:a="http://schemas.openxmlformats.org/drawingml/2006/main">
+            <a:off x="9191625" y="3295650"/>
+            <a:ext cx="2400300" cy="333375"/>
+          </a:xfrm>
+          <a:prstGeom xmlns:a="http://schemas.openxmlformats.org/drawingml/2006/main" prst="rect">
+            <a:avLst/>
+          </a:prstGeom>
+          <a:solidFill xmlns:a="http://schemas.openxmlformats.org/drawingml/2006/main">
+            <a:srgbClr val="457985"/>
+          </a:solidFill>
+          <a:ln xmlns:a="http://schemas.openxmlformats.org/drawingml/2006/main" w="0">
+            <a:noFill/>
+          </a:ln>
+        </p:spPr>
+      </p:sp>
+      <p:sp>
+        <p:nvSpPr>
+          <p:cNvPr id="40" name="">
+            <a:extLst xmlns:a="http://schemas.openxmlformats.org/drawingml/2006/main">
+              <a:ext uri="{FF2B5EF4-FFF2-40B4-BE49-F238E27FC236}">
+                <a16:creationId xmlns:a16="http://schemas.microsoft.com/office/drawing/2014/main" id="{2636F55C-8E5C-45FB-A9B6-AB1371A49C89}"/>
+              </a:ext>
+            </a:extLst>
+          </p:cNvPr>
+          <p:cNvSpPr>
+            <a:spLocks xmlns:a="http://schemas.openxmlformats.org/drawingml/2006/main" noGrp="1"/>
+          </p:cNvSpPr>
+          <p:nvPr/>
+        </p:nvSpPr>
+        <p:spPr>
+          <a:xfrm xmlns:a="http://schemas.openxmlformats.org/drawingml/2006/main">
+            <a:off x="9277350" y="3333750"/>
+            <a:ext cx="2228850" cy="266700"/>
+          </a:xfrm>
+          <a:prstGeom xmlns:a="http://schemas.openxmlformats.org/drawingml/2006/main" prst="rect">
+            <a:avLst/>
+          </a:prstGeom>
+          <a:noFill xmlns:a="http://schemas.openxmlformats.org/drawingml/2006/main"/>
+          <a:ln xmlns:a="http://schemas.openxmlformats.org/drawingml/2006/main" w="0">
+            <a:noFill/>
+          </a:ln>
+        </p:spPr>
+        <p:txBody>
+          <a:bodyPr xmlns:a="http://schemas.openxmlformats.org/drawingml/2006/main" lIns="0" tIns="0" rIns="0" bIns="0"/>
+          <a:lstStyle xmlns:a="http://schemas.openxmlformats.org/drawingml/2006/main">
+            <a:defPPr algn="ctr">
+              <a:defRPr sz="1575">
+                <a:solidFill>
+                  <a:srgbClr val="FFFFFF"/>
+                </a:solidFill>
+                <a:latin typeface="Ubuntu Condensed"/>
+                <a:ea typeface="Ubuntu Condensed"/>
+                <a:cs typeface="Ubuntu Condensed"/>
+              </a:defRPr>
+            </a:defPPr>
+          </a:lstStyle>
+          <a:p xmlns:a="http://schemas.openxmlformats.org/drawingml/2006/main">
+            <a:pPr algn="ctr">
+              <a:defRPr sz="1575">
+                <a:solidFill>
+                  <a:srgbClr val="FFFFFF"/>
+                </a:solidFill>
+                <a:latin typeface="Ubuntu Condensed"/>
+                <a:ea typeface="Ubuntu Condensed"/>
+                <a:cs typeface="Ubuntu Condensed"/>
+              </a:defRPr>
+            </a:pPr>
+            <a:r>
+              <a:rPr sz="1575">
+                <a:solidFill>
+                  <a:srgbClr val="FFFFFF"/>
+                </a:solidFill>
+                <a:latin typeface="Ubuntu Condensed"/>
+                <a:ea typeface="Ubuntu Condensed"/>
+                <a:cs typeface="Ubuntu Condensed"/>
+              </a:rPr>
+              <a:t>Year: 1960–2020</a:t>
+            </a:r>
+          </a:p>
+        </p:txBody>
+      </p:sp>
+      <p:sp>
+        <p:nvSpPr>
+          <p:cNvPr id="41" name="">
+            <a:extLst xmlns:a="http://schemas.openxmlformats.org/drawingml/2006/main">
+              <a:ext uri="{FF2B5EF4-FFF2-40B4-BE49-F238E27FC236}">
+                <a16:creationId xmlns:a16="http://schemas.microsoft.com/office/drawing/2014/main" id="{FFDBBA42-370C-4DF8-A38B-2118E67AF77E}"/>
+              </a:ext>
+            </a:extLst>
+          </p:cNvPr>
+          <p:cNvSpPr>
+            <a:spLocks xmlns:a="http://schemas.openxmlformats.org/drawingml/2006/main" noGrp="1"/>
+          </p:cNvSpPr>
+          <p:nvPr/>
+        </p:nvSpPr>
+        <p:spPr>
+          <a:xfrm xmlns:a="http://schemas.openxmlformats.org/drawingml/2006/main">
+            <a:off x="8229600" y="3962400"/>
+            <a:ext cx="952500" cy="285750"/>
+          </a:xfrm>
+          <a:prstGeom xmlns:a="http://schemas.openxmlformats.org/drawingml/2006/main" prst="rect">
+            <a:avLst/>
+          </a:prstGeom>
+          <a:noFill xmlns:a="http://schemas.openxmlformats.org/drawingml/2006/main"/>
+          <a:ln xmlns:a="http://schemas.openxmlformats.org/drawingml/2006/main" w="0">
+            <a:noFill/>
+          </a:ln>
+        </p:spPr>
+        <p:txBody>
+          <a:bodyPr xmlns:a="http://schemas.openxmlformats.org/drawingml/2006/main" lIns="0" tIns="0" rIns="0" bIns="0"/>
+          <a:lstStyle xmlns:a="http://schemas.openxmlformats.org/drawingml/2006/main">
+            <a:defPPr>
+              <a:defRPr sz="1725">
+                <a:solidFill>
+                  <a:srgbClr val="81796F"/>
+                </a:solidFill>
+                <a:latin typeface="Ubuntu Condensed"/>
+                <a:ea typeface="Ubuntu Condensed"/>
+                <a:cs typeface="Ubuntu Condensed"/>
+              </a:defRPr>
+            </a:defPPr>
+          </a:lstStyle>
+          <a:p xmlns:a="http://schemas.openxmlformats.org/drawingml/2006/main">
+            <a:pPr>
+              <a:defRPr sz="1725">
+                <a:solidFill>
+                  <a:srgbClr val="81796F"/>
+                </a:solidFill>
+                <a:latin typeface="Ubuntu Condensed"/>
+                <a:ea typeface="Ubuntu Condensed"/>
+                <a:cs typeface="Ubuntu Condensed"/>
+              </a:defRPr>
+            </a:pPr>
+            <a:r>
+              <a:rPr sz="1725">
+                <a:solidFill>
+                  <a:srgbClr val="81796F"/>
+                </a:solidFill>
+                <a:latin typeface="Ubuntu Condensed"/>
+                <a:ea typeface="Ubuntu Condensed"/>
+                <a:cs typeface="Ubuntu Condensed"/>
+              </a:rPr>
+              <a:t>Marks</a:t>
+            </a:r>
+          </a:p>
+        </p:txBody>
+      </p:sp>
+      <p:sp>
+        <p:nvSpPr>
+          <p:cNvPr id="42" name="">
+            <a:extLst xmlns:a="http://schemas.openxmlformats.org/drawingml/2006/main">
+              <a:ext uri="{FF2B5EF4-FFF2-40B4-BE49-F238E27FC236}">
+                <a16:creationId xmlns:a16="http://schemas.microsoft.com/office/drawing/2014/main" id="{714745C9-EF79-4E4D-8F55-CF73486B5141}"/>
+              </a:ext>
+            </a:extLst>
+          </p:cNvPr>
+          <p:cNvSpPr>
+            <a:spLocks xmlns:a="http://schemas.openxmlformats.org/drawingml/2006/main" noGrp="1"/>
+          </p:cNvSpPr>
+          <p:nvPr/>
+        </p:nvSpPr>
+        <p:spPr>
+          <a:xfrm xmlns:a="http://schemas.openxmlformats.org/drawingml/2006/main">
+            <a:off x="9191625" y="3914775"/>
+            <a:ext cx="2400300" cy="381000"/>
+          </a:xfrm>
+          <a:prstGeom xmlns:a="http://schemas.openxmlformats.org/drawingml/2006/main" prst="rect">
+            <a:avLst/>
+          </a:prstGeom>
+          <a:noFill xmlns:a="http://schemas.openxmlformats.org/drawingml/2006/main"/>
+          <a:ln xmlns:a="http://schemas.openxmlformats.org/drawingml/2006/main" w="0">
+            <a:noFill/>
+          </a:ln>
+        </p:spPr>
+        <p:txBody>
+          <a:bodyPr xmlns:a="http://schemas.openxmlformats.org/drawingml/2006/main" lIns="0" tIns="0" rIns="0" bIns="0"/>
+          <a:lstStyle xmlns:a="http://schemas.openxmlformats.org/drawingml/2006/main">
+            <a:defPPr>
+              <a:defRPr sz="2100">
+                <a:solidFill>
+                  <a:srgbClr val="38332E"/>
+                </a:solidFill>
+                <a:latin typeface="Ubuntu Condensed"/>
+                <a:ea typeface="Ubuntu Condensed"/>
+                <a:cs typeface="Ubuntu Condensed"/>
+              </a:defRPr>
+            </a:defPPr>
+          </a:lstStyle>
+          <a:p xmlns:a="http://schemas.openxmlformats.org/drawingml/2006/main">
+            <a:pPr>
+              <a:defRPr sz="2100">
+                <a:solidFill>
+                  <a:srgbClr val="38332E"/>
+                </a:solidFill>
+                <a:latin typeface="Ubuntu Condensed"/>
+                <a:ea typeface="Ubuntu Condensed"/>
+                <a:cs typeface="Ubuntu Condensed"/>
+              </a:defRPr>
+            </a:pPr>
+            <a:r>
+              <a:rPr sz="2100">
+                <a:solidFill>
+                  <a:srgbClr val="38332E"/>
+                </a:solidFill>
+                <a:latin typeface="Ubuntu Condensed"/>
+                <a:ea typeface="Ubuntu Condensed"/>
+                <a:cs typeface="Ubuntu Condensed"/>
+              </a:rPr>
+              <a:t>Line</a:t>
+            </a:r>
+          </a:p>
+        </p:txBody>
+      </p:sp>
+      <p:sp>
+        <p:nvSpPr>
+          <p:cNvPr id="43" name="">
+            <a:extLst xmlns:a="http://schemas.openxmlformats.org/drawingml/2006/main">
+              <a:ext uri="{FF2B5EF4-FFF2-40B4-BE49-F238E27FC236}">
+                <a16:creationId xmlns:a16="http://schemas.microsoft.com/office/drawing/2014/main" id="{E08E25EA-801C-4346-AFF0-1596A03BF300}"/>
+              </a:ext>
+            </a:extLst>
+          </p:cNvPr>
+          <p:cNvSpPr>
+            <a:spLocks xmlns:a="http://schemas.openxmlformats.org/drawingml/2006/main" noGrp="1"/>
+          </p:cNvSpPr>
+          <p:nvPr/>
+        </p:nvSpPr>
+        <p:spPr>
+          <a:xfrm xmlns:a="http://schemas.openxmlformats.org/drawingml/2006/main">
+            <a:off x="8229600" y="4448175"/>
+            <a:ext cx="3429000" cy="762000"/>
+          </a:xfrm>
+          <a:prstGeom xmlns:a="http://schemas.openxmlformats.org/drawingml/2006/main" prst="rect">
+            <a:avLst/>
+          </a:prstGeom>
+          <a:noFill xmlns:a="http://schemas.openxmlformats.org/drawingml/2006/main"/>
+          <a:ln xmlns:a="http://schemas.openxmlformats.org/drawingml/2006/main" w="0">
+            <a:noFill/>
+          </a:ln>
+        </p:spPr>
+        <p:txBody>
+          <a:bodyPr xmlns:a="http://schemas.openxmlformats.org/drawingml/2006/main" lIns="0" tIns="0" rIns="0" bIns="0"/>
+          <a:lstStyle xmlns:a="http://schemas.openxmlformats.org/drawingml/2006/main">
+            <a:defPPr>
+              <a:defRPr sz="1950">
+                <a:solidFill>
+                  <a:srgbClr val="38332E"/>
+                </a:solidFill>
+                <a:latin typeface="Ubuntu Condensed"/>
+                <a:ea typeface="Ubuntu Condensed"/>
+                <a:cs typeface="Ubuntu Condensed"/>
+              </a:defRPr>
+            </a:defPPr>
+          </a:lstStyle>
+          <a:p xmlns:a="http://schemas.openxmlformats.org/drawingml/2006/main">
+            <a:pPr>
+              <a:defRPr sz="1950">
+                <a:solidFill>
+                  <a:srgbClr val="38332E"/>
+                </a:solidFill>
+                <a:latin typeface="Ubuntu Condensed"/>
+                <a:ea typeface="Ubuntu Condensed"/>
+                <a:cs typeface="Ubuntu Condensed"/>
+              </a:defRPr>
+            </a:pPr>
+            <a:r>
+              <a:rPr sz="1950">
+                <a:solidFill>
+                  <a:srgbClr val="38332E"/>
+                </a:solidFill>
+                <a:latin typeface="Ubuntu Condensed"/>
+                <a:ea typeface="Ubuntu Condensed"/>
+                <a:cs typeface="Ubuntu Condensed"/>
+              </a:rPr>
+              <a:t>Country on Color</a:t>
+            </a:r>
+          </a:p>
+        </p:txBody>
+      </p:sp>
+      <p:sp>
+        <p:nvSpPr>
+          <p:cNvPr id="44" name="">
+            <a:extLst xmlns:a="http://schemas.openxmlformats.org/drawingml/2006/main">
+              <a:ext uri="{FF2B5EF4-FFF2-40B4-BE49-F238E27FC236}">
+                <a16:creationId xmlns:a16="http://schemas.microsoft.com/office/drawing/2014/main" id="{7016282C-336B-4D33-82A5-139E07037573}"/>
+              </a:ext>
+            </a:extLst>
+          </p:cNvPr>
+          <p:cNvSpPr>
+            <a:spLocks xmlns:a="http://schemas.openxmlformats.org/drawingml/2006/main" noGrp="1"/>
+          </p:cNvSpPr>
+          <p:nvPr/>
+        </p:nvSpPr>
+        <p:spPr>
+          <a:xfrm xmlns:a="http://schemas.openxmlformats.org/drawingml/2006/main">
+            <a:off x="8229600" y="5391150"/>
+            <a:ext cx="3429000" cy="723900"/>
+          </a:xfrm>
+          <a:prstGeom xmlns:a="http://schemas.openxmlformats.org/drawingml/2006/main" prst="rect">
+            <a:avLst/>
+          </a:prstGeom>
+          <a:noFill xmlns:a="http://schemas.openxmlformats.org/drawingml/2006/main"/>
+          <a:ln xmlns:a="http://schemas.openxmlformats.org/drawingml/2006/main" w="0">
+            <a:noFill/>
+          </a:ln>
+        </p:spPr>
+        <p:txBody>
+          <a:bodyPr xmlns:a="http://schemas.openxmlformats.org/drawingml/2006/main" lIns="0" tIns="0" rIns="0" bIns="0"/>
+          <a:lstStyle xmlns:a="http://schemas.openxmlformats.org/drawingml/2006/main">
+            <a:defPPr>
+              <a:defRPr sz="1725">
+                <a:solidFill>
+                  <a:srgbClr val="81796F"/>
+                </a:solidFill>
+                <a:latin typeface="Ubuntu Condensed"/>
+                <a:ea typeface="Ubuntu Condensed"/>
+                <a:cs typeface="Ubuntu Condensed"/>
+              </a:defRPr>
+            </a:defPPr>
+          </a:lstStyle>
+          <a:p xmlns:a="http://schemas.openxmlformats.org/drawingml/2006/main">
+            <a:pPr>
+              <a:defRPr sz="1725">
+                <a:solidFill>
+                  <a:srgbClr val="81796F"/>
+                </a:solidFill>
+                <a:latin typeface="Ubuntu Condensed"/>
+                <a:ea typeface="Ubuntu Condensed"/>
+                <a:cs typeface="Ubuntu Condensed"/>
+              </a:defRPr>
+            </a:pPr>
+            <a:r>
+              <a:rPr sz="1725">
+                <a:solidFill>
+                  <a:srgbClr val="81796F"/>
+                </a:solidFill>
+                <a:latin typeface="Ubuntu Condensed"/>
+                <a:ea typeface="Ubuntu Condensed"/>
+                <a:cs typeface="Ubuntu Condensed"/>
+              </a:rPr>
+              <a:t>Duplicate Life History.</a:t>
+            </a:r>
+          </a:p>
+          <a:p xmlns:a="http://schemas.openxmlformats.org/drawingml/2006/main">
+            <a:pPr>
+              <a:defRPr sz="1725">
+                <a:solidFill>
+                  <a:srgbClr val="81796F"/>
+                </a:solidFill>
+                <a:latin typeface="Ubuntu Condensed"/>
+                <a:ea typeface="Ubuntu Condensed"/>
+                <a:cs typeface="Ubuntu Condensed"/>
+              </a:defRPr>
+            </a:pPr>
+            <a:r>
+              <a:rPr sz="1725">
+                <a:solidFill>
+                  <a:srgbClr val="81796F"/>
+                </a:solidFill>
+                <a:latin typeface="Ubuntu Condensed"/>
+                <a:ea typeface="Ubuntu Condensed"/>
+                <a:cs typeface="Ubuntu Condensed"/>
+              </a:rPr>
+              <a:t>Replace the measure on Rows.</a:t>
+            </a:r>
+          </a:p>
+        </p:txBody>
+      </p:sp>
+      <p:sp>
+        <p:nvSpPr>
+          <p:cNvPr id="45" name="">
+            <a:extLst xmlns:a="http://schemas.openxmlformats.org/drawingml/2006/main">
+              <a:ext uri="{FF2B5EF4-FFF2-40B4-BE49-F238E27FC236}">
+                <a16:creationId xmlns:a16="http://schemas.microsoft.com/office/drawing/2014/main" id="{09AC07DF-A687-41EC-9D4A-379F22565FEE}"/>
+              </a:ext>
+            </a:extLst>
+          </p:cNvPr>
+          <p:cNvSpPr>
+            <a:spLocks xmlns:a="http://schemas.openxmlformats.org/drawingml/2006/main" noGrp="1"/>
+          </p:cNvSpPr>
+          <p:nvPr/>
+        </p:nvSpPr>
+        <p:spPr>
+          <a:xfrm xmlns:a="http://schemas.openxmlformats.org/drawingml/2006/main">
+            <a:off x="457200" y="6381750"/>
+            <a:ext cx="11239500" cy="323850"/>
           </a:xfrm>
           <a:prstGeom xmlns:a="http://schemas.openxmlformats.org/drawingml/2006/main" prst="rect">
             <a:avLst/>
@@ -9247,7 +11180,7 @@
             <a:defPPr>
               <a:defRPr sz="1875">
                 <a:solidFill>
-                  <a:srgbClr val="38332E"/>
+                  <a:srgbClr val="B23C50"/>
                 </a:solidFill>
                 <a:latin typeface="Ubuntu Condensed"/>
                 <a:ea typeface="Ubuntu Condensed"/>
@@ -9259,7 +11192,7 @@
             <a:pPr>
               <a:defRPr sz="1875">
                 <a:solidFill>
-                  <a:srgbClr val="38332E"/>
+                  <a:srgbClr val="B23C50"/>
                 </a:solidFill>
                 <a:latin typeface="Ubuntu Condensed"/>
                 <a:ea typeface="Ubuntu Condensed"/>
@@ -9269,608 +11202,13 @@
             <a:r>
               <a:rPr sz="1875">
                 <a:solidFill>
-                  <a:srgbClr val="38332E"/>
+                  <a:srgbClr val="B23C50"/>
                 </a:solidFill>
                 <a:latin typeface="Ubuntu Condensed"/>
                 <a:ea typeface="Ubuntu Condensed"/>
                 <a:cs typeface="Ubuntu Condensed"/>
               </a:rPr>
-              <a:t>Circle     Country: Detail     region: Color     Year: 2020</a:t>
-            </a:r>
-          </a:p>
-        </p:txBody>
-      </p:sp>
-      <p:sp>
-        <p:nvSpPr>
-          <p:cNvPr id="7" name="">
-            <a:extLst xmlns:a="http://schemas.openxmlformats.org/drawingml/2006/main">
-              <a:ext uri="{FF2B5EF4-FFF2-40B4-BE49-F238E27FC236}">
-                <a16:creationId xmlns:a16="http://schemas.microsoft.com/office/drawing/2014/main" id="{AC1C9FF7-CA7F-4981-9F4D-5AC77FDD20C5}"/>
-              </a:ext>
-            </a:extLst>
-          </p:cNvPr>
-          <p:cNvSpPr>
-            <a:spLocks xmlns:a="http://schemas.openxmlformats.org/drawingml/2006/main" noGrp="1"/>
-          </p:cNvSpPr>
-          <p:nvPr/>
-        </p:nvSpPr>
-        <p:spPr>
-          <a:xfrm xmlns:a="http://schemas.openxmlformats.org/drawingml/2006/main">
-            <a:off x="3810000" y="2609850"/>
-            <a:ext cx="7905750" cy="333375"/>
-          </a:xfrm>
-          <a:prstGeom xmlns:a="http://schemas.openxmlformats.org/drawingml/2006/main" prst="rect">
-            <a:avLst/>
-          </a:prstGeom>
-          <a:noFill xmlns:a="http://schemas.openxmlformats.org/drawingml/2006/main"/>
-          <a:ln xmlns:a="http://schemas.openxmlformats.org/drawingml/2006/main" w="0">
-            <a:noFill/>
-          </a:ln>
-        </p:spPr>
-        <p:txBody>
-          <a:bodyPr xmlns:a="http://schemas.openxmlformats.org/drawingml/2006/main" lIns="0" tIns="0" rIns="0" bIns="0"/>
-          <a:lstStyle xmlns:a="http://schemas.openxmlformats.org/drawingml/2006/main">
-            <a:defPPr>
-              <a:defRPr sz="1725">
-                <a:solidFill>
-                  <a:srgbClr val="81796F"/>
-                </a:solidFill>
-                <a:latin typeface="Ubuntu Condensed"/>
-                <a:ea typeface="Ubuntu Condensed"/>
-                <a:cs typeface="Ubuntu Condensed"/>
-              </a:defRPr>
-            </a:defPPr>
-          </a:lstStyle>
-          <a:p xmlns:a="http://schemas.openxmlformats.org/drawingml/2006/main">
-            <a:pPr>
-              <a:defRPr sz="1725">
-                <a:solidFill>
-                  <a:srgbClr val="81796F"/>
-                </a:solidFill>
-                <a:latin typeface="Ubuntu Condensed"/>
-                <a:ea typeface="Ubuntu Condensed"/>
-                <a:cs typeface="Ubuntu Condensed"/>
-              </a:defRPr>
-            </a:pPr>
-            <a:r>
-              <a:rPr sz="1725">
-                <a:solidFill>
-                  <a:srgbClr val="81796F"/>
-                </a:solidFill>
-                <a:latin typeface="Ubuntu Condensed"/>
-                <a:ea typeface="Ubuntu Condensed"/>
-                <a:cs typeface="Ubuntu Condensed"/>
-              </a:rPr>
-              <a:t>Year goes in Filters, not Pages. Keep one circle per country.</a:t>
-            </a:r>
-          </a:p>
-        </p:txBody>
-      </p:sp>
-      <p:sp>
-        <p:nvSpPr>
-          <p:cNvPr id="8" name="">
-            <a:extLst xmlns:a="http://schemas.openxmlformats.org/drawingml/2006/main">
-              <a:ext uri="{FF2B5EF4-FFF2-40B4-BE49-F238E27FC236}">
-                <a16:creationId xmlns:a16="http://schemas.microsoft.com/office/drawing/2014/main" id="{58831E75-A1F3-48ED-9DFF-B9BDB648FC6D}"/>
-              </a:ext>
-            </a:extLst>
-          </p:cNvPr>
-          <p:cNvSpPr>
-            <a:spLocks xmlns:a="http://schemas.openxmlformats.org/drawingml/2006/main" noGrp="1"/>
-          </p:cNvSpPr>
-          <p:nvPr/>
-        </p:nvSpPr>
-        <p:spPr>
-          <a:xfrm xmlns:a="http://schemas.openxmlformats.org/drawingml/2006/main">
-            <a:off x="457200" y="3295650"/>
-            <a:ext cx="3048000" cy="342900"/>
-          </a:xfrm>
-          <a:prstGeom xmlns:a="http://schemas.openxmlformats.org/drawingml/2006/main" prst="rect">
-            <a:avLst/>
-          </a:prstGeom>
-          <a:noFill xmlns:a="http://schemas.openxmlformats.org/drawingml/2006/main"/>
-          <a:ln xmlns:a="http://schemas.openxmlformats.org/drawingml/2006/main" w="0">
-            <a:noFill/>
-          </a:ln>
-        </p:spPr>
-        <p:txBody>
-          <a:bodyPr xmlns:a="http://schemas.openxmlformats.org/drawingml/2006/main" lIns="0" tIns="0" rIns="0" bIns="0"/>
-          <a:lstStyle xmlns:a="http://schemas.openxmlformats.org/drawingml/2006/main">
-            <a:defPPr>
-              <a:defRPr sz="2250">
-                <a:solidFill>
-                  <a:srgbClr val="B23C50"/>
-                </a:solidFill>
-                <a:latin typeface="Ubuntu Condensed"/>
-                <a:ea typeface="Ubuntu Condensed"/>
-                <a:cs typeface="Ubuntu Condensed"/>
-              </a:defRPr>
-            </a:defPPr>
-          </a:lstStyle>
-          <a:p xmlns:a="http://schemas.openxmlformats.org/drawingml/2006/main">
-            <a:pPr>
-              <a:defRPr sz="2250">
-                <a:solidFill>
-                  <a:srgbClr val="B23C50"/>
-                </a:solidFill>
-                <a:latin typeface="Ubuntu Condensed"/>
-                <a:ea typeface="Ubuntu Condensed"/>
-                <a:cs typeface="Ubuntu Condensed"/>
-              </a:defRPr>
-            </a:pPr>
-            <a:r>
-              <a:rPr sz="2250">
-                <a:solidFill>
-                  <a:srgbClr val="B23C50"/>
-                </a:solidFill>
-                <a:latin typeface="Ubuntu Condensed"/>
-                <a:ea typeface="Ubuntu Condensed"/>
-                <a:cs typeface="Ubuntu Condensed"/>
-              </a:rPr>
-              <a:t>2  Life History</a:t>
-            </a:r>
-          </a:p>
-        </p:txBody>
-      </p:sp>
-      <p:graphicFrame>
-        <p:nvGraphicFramePr>
-          <p:cNvPr id="9" name="Chart">
-            <a:extLst xmlns:a="http://schemas.openxmlformats.org/drawingml/2006/main">
-              <a:ext uri="{FF2B5EF4-FFF2-40B4-BE49-F238E27FC236}">
-                <a16:creationId xmlns:a16="http://schemas.microsoft.com/office/drawing/2014/main" id="{F3AD4CB4-F843-4026-8EE3-8634DAEF42C8}"/>
-              </a:ext>
-            </a:extLst>
-          </p:cNvPr>
-          <p:cNvGraphicFramePr/>
-          <p:nvPr/>
-        </p:nvGraphicFramePr>
-        <p:xfrm>
-          <a:off xmlns:a="http://schemas.openxmlformats.org/drawingml/2006/main" x="285750" y="3676650"/>
-          <a:ext xmlns:a="http://schemas.openxmlformats.org/drawingml/2006/main" cx="3048000" cy="1104900"/>
-        </p:xfrm>
-        <a:graphic xmlns:a="http://schemas.openxmlformats.org/drawingml/2006/main">
-          <a:graphicData uri="http://schemas.openxmlformats.org/drawingml/2006/chart">
-            <c:chart xmlns:r="http://schemas.openxmlformats.org/officeDocument/2006/relationships" xmlns:c="http://schemas.openxmlformats.org/drawingml/2006/chart" r:id="R038ec14d4b0c4a25"/>
-          </a:graphicData>
-        </a:graphic>
-      </p:graphicFrame>
-      <p:sp>
-        <p:nvSpPr>
-          <p:cNvPr id="10" name="">
-            <a:extLst xmlns:a="http://schemas.openxmlformats.org/drawingml/2006/main">
-              <a:ext uri="{FF2B5EF4-FFF2-40B4-BE49-F238E27FC236}">
-                <a16:creationId xmlns:a16="http://schemas.microsoft.com/office/drawing/2014/main" id="{D4B51E8D-8EA9-4394-9EBB-71053661D811}"/>
-              </a:ext>
-            </a:extLst>
-          </p:cNvPr>
-          <p:cNvSpPr>
-            <a:spLocks xmlns:a="http://schemas.openxmlformats.org/drawingml/2006/main" noGrp="1"/>
-          </p:cNvSpPr>
-          <p:nvPr/>
-        </p:nvSpPr>
-        <p:spPr>
-          <a:xfrm xmlns:a="http://schemas.openxmlformats.org/drawingml/2006/main">
-            <a:off x="3810000" y="3333750"/>
-            <a:ext cx="7905750" cy="361950"/>
-          </a:xfrm>
-          <a:prstGeom xmlns:a="http://schemas.openxmlformats.org/drawingml/2006/main" prst="rect">
-            <a:avLst/>
-          </a:prstGeom>
-          <a:noFill xmlns:a="http://schemas.openxmlformats.org/drawingml/2006/main"/>
-          <a:ln xmlns:a="http://schemas.openxmlformats.org/drawingml/2006/main" w="0">
-            <a:noFill/>
-          </a:ln>
-        </p:spPr>
-        <p:txBody>
-          <a:bodyPr xmlns:a="http://schemas.openxmlformats.org/drawingml/2006/main" lIns="0" tIns="0" rIns="0" bIns="0"/>
-          <a:lstStyle xmlns:a="http://schemas.openxmlformats.org/drawingml/2006/main">
-            <a:defPPr>
-              <a:defRPr sz="1950">
-                <a:solidFill>
-                  <a:srgbClr val="38332E"/>
-                </a:solidFill>
-                <a:latin typeface="Ubuntu Condensed"/>
-                <a:ea typeface="Ubuntu Condensed"/>
-                <a:cs typeface="Ubuntu Condensed"/>
-              </a:defRPr>
-            </a:defPPr>
-          </a:lstStyle>
-          <a:p xmlns:a="http://schemas.openxmlformats.org/drawingml/2006/main">
-            <a:pPr>
-              <a:defRPr sz="1950">
-                <a:solidFill>
-                  <a:srgbClr val="38332E"/>
-                </a:solidFill>
-                <a:latin typeface="Ubuntu Condensed"/>
-                <a:ea typeface="Ubuntu Condensed"/>
-                <a:cs typeface="Ubuntu Condensed"/>
-              </a:defRPr>
-            </a:pPr>
-            <a:r>
-              <a:rPr sz="1950">
-                <a:solidFill>
-                  <a:srgbClr val="38332E"/>
-                </a:solidFill>
-                <a:latin typeface="Ubuntu Condensed"/>
-                <a:ea typeface="Ubuntu Condensed"/>
-                <a:cs typeface="Ubuntu Condensed"/>
-              </a:rPr>
-              <a:t>Columns  Year (continuous)     Rows  AVG(Life Expectancy)</a:t>
-            </a:r>
-          </a:p>
-        </p:txBody>
-      </p:sp>
-      <p:sp>
-        <p:nvSpPr>
-          <p:cNvPr id="11" name="">
-            <a:extLst xmlns:a="http://schemas.openxmlformats.org/drawingml/2006/main">
-              <a:ext uri="{FF2B5EF4-FFF2-40B4-BE49-F238E27FC236}">
-                <a16:creationId xmlns:a16="http://schemas.microsoft.com/office/drawing/2014/main" id="{918FCF26-EE4D-4E4D-9691-1681761104FB}"/>
-              </a:ext>
-            </a:extLst>
-          </p:cNvPr>
-          <p:cNvSpPr>
-            <a:spLocks xmlns:a="http://schemas.openxmlformats.org/drawingml/2006/main" noGrp="1"/>
-          </p:cNvSpPr>
-          <p:nvPr/>
-        </p:nvSpPr>
-        <p:spPr>
-          <a:xfrm xmlns:a="http://schemas.openxmlformats.org/drawingml/2006/main">
-            <a:off x="3810000" y="3752850"/>
-            <a:ext cx="7905750" cy="361950"/>
-          </a:xfrm>
-          <a:prstGeom xmlns:a="http://schemas.openxmlformats.org/drawingml/2006/main" prst="rect">
-            <a:avLst/>
-          </a:prstGeom>
-          <a:noFill xmlns:a="http://schemas.openxmlformats.org/drawingml/2006/main"/>
-          <a:ln xmlns:a="http://schemas.openxmlformats.org/drawingml/2006/main" w="0">
-            <a:noFill/>
-          </a:ln>
-        </p:spPr>
-        <p:txBody>
-          <a:bodyPr xmlns:a="http://schemas.openxmlformats.org/drawingml/2006/main" lIns="0" tIns="0" rIns="0" bIns="0"/>
-          <a:lstStyle xmlns:a="http://schemas.openxmlformats.org/drawingml/2006/main">
-            <a:defPPr>
-              <a:defRPr sz="1875">
-                <a:solidFill>
-                  <a:srgbClr val="38332E"/>
-                </a:solidFill>
-                <a:latin typeface="Ubuntu Condensed"/>
-                <a:ea typeface="Ubuntu Condensed"/>
-                <a:cs typeface="Ubuntu Condensed"/>
-              </a:defRPr>
-            </a:defPPr>
-          </a:lstStyle>
-          <a:p xmlns:a="http://schemas.openxmlformats.org/drawingml/2006/main">
-            <a:pPr>
-              <a:defRPr sz="1875">
-                <a:solidFill>
-                  <a:srgbClr val="38332E"/>
-                </a:solidFill>
-                <a:latin typeface="Ubuntu Condensed"/>
-                <a:ea typeface="Ubuntu Condensed"/>
-                <a:cs typeface="Ubuntu Condensed"/>
-              </a:defRPr>
-            </a:pPr>
-            <a:r>
-              <a:rPr sz="1875">
-                <a:solidFill>
-                  <a:srgbClr val="38332E"/>
-                </a:solidFill>
-                <a:latin typeface="Ubuntu Condensed"/>
-                <a:ea typeface="Ubuntu Condensed"/>
-                <a:cs typeface="Ubuntu Condensed"/>
-              </a:rPr>
-              <a:t>Line     Country: Color     Year: 1960–2020</a:t>
-            </a:r>
-          </a:p>
-        </p:txBody>
-      </p:sp>
-      <p:sp>
-        <p:nvSpPr>
-          <p:cNvPr id="12" name="">
-            <a:extLst xmlns:a="http://schemas.openxmlformats.org/drawingml/2006/main">
-              <a:ext uri="{FF2B5EF4-FFF2-40B4-BE49-F238E27FC236}">
-                <a16:creationId xmlns:a16="http://schemas.microsoft.com/office/drawing/2014/main" id="{70973EF0-0E83-4843-B69B-21E181654D18}"/>
-              </a:ext>
-            </a:extLst>
-          </p:cNvPr>
-          <p:cNvSpPr>
-            <a:spLocks xmlns:a="http://schemas.openxmlformats.org/drawingml/2006/main" noGrp="1"/>
-          </p:cNvSpPr>
-          <p:nvPr/>
-        </p:nvSpPr>
-        <p:spPr>
-          <a:xfrm xmlns:a="http://schemas.openxmlformats.org/drawingml/2006/main">
-            <a:off x="3810000" y="4171950"/>
-            <a:ext cx="7905750" cy="333375"/>
-          </a:xfrm>
-          <a:prstGeom xmlns:a="http://schemas.openxmlformats.org/drawingml/2006/main" prst="rect">
-            <a:avLst/>
-          </a:prstGeom>
-          <a:noFill xmlns:a="http://schemas.openxmlformats.org/drawingml/2006/main"/>
-          <a:ln xmlns:a="http://schemas.openxmlformats.org/drawingml/2006/main" w="0">
-            <a:noFill/>
-          </a:ln>
-        </p:spPr>
-        <p:txBody>
-          <a:bodyPr xmlns:a="http://schemas.openxmlformats.org/drawingml/2006/main" lIns="0" tIns="0" rIns="0" bIns="0"/>
-          <a:lstStyle xmlns:a="http://schemas.openxmlformats.org/drawingml/2006/main">
-            <a:defPPr>
-              <a:defRPr sz="1725">
-                <a:solidFill>
-                  <a:srgbClr val="81796F"/>
-                </a:solidFill>
-                <a:latin typeface="Ubuntu Condensed"/>
-                <a:ea typeface="Ubuntu Condensed"/>
-                <a:cs typeface="Ubuntu Condensed"/>
-              </a:defRPr>
-            </a:defPPr>
-          </a:lstStyle>
-          <a:p xmlns:a="http://schemas.openxmlformats.org/drawingml/2006/main">
-            <a:pPr>
-              <a:defRPr sz="1725">
-                <a:solidFill>
-                  <a:srgbClr val="81796F"/>
-                </a:solidFill>
-                <a:latin typeface="Ubuntu Condensed"/>
-                <a:ea typeface="Ubuntu Condensed"/>
-                <a:cs typeface="Ubuntu Condensed"/>
-              </a:defRPr>
-            </a:pPr>
-            <a:r>
-              <a:rPr sz="1725">
-                <a:solidFill>
-                  <a:srgbClr val="81796F"/>
-                </a:solidFill>
-                <a:latin typeface="Ubuntu Condensed"/>
-                <a:ea typeface="Ubuntu Condensed"/>
-                <a:cs typeface="Ubuntu Condensed"/>
-              </a:rPr>
-              <a:t>Convert Year to Dimension, then Continuous. Keep 1960–2020.</a:t>
-            </a:r>
-          </a:p>
-        </p:txBody>
-      </p:sp>
-      <p:sp>
-        <p:nvSpPr>
-          <p:cNvPr id="13" name="">
-            <a:extLst xmlns:a="http://schemas.openxmlformats.org/drawingml/2006/main">
-              <a:ext uri="{FF2B5EF4-FFF2-40B4-BE49-F238E27FC236}">
-                <a16:creationId xmlns:a16="http://schemas.microsoft.com/office/drawing/2014/main" id="{0DA2F988-774D-4D51-B269-640309C71C5D}"/>
-              </a:ext>
-            </a:extLst>
-          </p:cNvPr>
-          <p:cNvSpPr>
-            <a:spLocks xmlns:a="http://schemas.openxmlformats.org/drawingml/2006/main" noGrp="1"/>
-          </p:cNvSpPr>
-          <p:nvPr/>
-        </p:nvSpPr>
-        <p:spPr>
-          <a:xfrm xmlns:a="http://schemas.openxmlformats.org/drawingml/2006/main">
-            <a:off x="457200" y="4857750"/>
-            <a:ext cx="3048000" cy="342900"/>
-          </a:xfrm>
-          <a:prstGeom xmlns:a="http://schemas.openxmlformats.org/drawingml/2006/main" prst="rect">
-            <a:avLst/>
-          </a:prstGeom>
-          <a:noFill xmlns:a="http://schemas.openxmlformats.org/drawingml/2006/main"/>
-          <a:ln xmlns:a="http://schemas.openxmlformats.org/drawingml/2006/main" w="0">
-            <a:noFill/>
-          </a:ln>
-        </p:spPr>
-        <p:txBody>
-          <a:bodyPr xmlns:a="http://schemas.openxmlformats.org/drawingml/2006/main" lIns="0" tIns="0" rIns="0" bIns="0"/>
-          <a:lstStyle xmlns:a="http://schemas.openxmlformats.org/drawingml/2006/main">
-            <a:defPPr>
-              <a:defRPr sz="2250">
-                <a:solidFill>
-                  <a:srgbClr val="B23C50"/>
-                </a:solidFill>
-                <a:latin typeface="Ubuntu Condensed"/>
-                <a:ea typeface="Ubuntu Condensed"/>
-                <a:cs typeface="Ubuntu Condensed"/>
-              </a:defRPr>
-            </a:defPPr>
-          </a:lstStyle>
-          <a:p xmlns:a="http://schemas.openxmlformats.org/drawingml/2006/main">
-            <a:pPr>
-              <a:defRPr sz="2250">
-                <a:solidFill>
-                  <a:srgbClr val="B23C50"/>
-                </a:solidFill>
-                <a:latin typeface="Ubuntu Condensed"/>
-                <a:ea typeface="Ubuntu Condensed"/>
-                <a:cs typeface="Ubuntu Condensed"/>
-              </a:defRPr>
-            </a:pPr>
-            <a:r>
-              <a:rPr sz="2250">
-                <a:solidFill>
-                  <a:srgbClr val="B23C50"/>
-                </a:solidFill>
-                <a:latin typeface="Ubuntu Condensed"/>
-                <a:ea typeface="Ubuntu Condensed"/>
-                <a:cs typeface="Ubuntu Condensed"/>
-              </a:rPr>
-              <a:t>3  GDP History</a:t>
-            </a:r>
-          </a:p>
-        </p:txBody>
-      </p:sp>
-      <p:graphicFrame>
-        <p:nvGraphicFramePr>
-          <p:cNvPr id="14" name="Chart">
-            <a:extLst xmlns:a="http://schemas.openxmlformats.org/drawingml/2006/main">
-              <a:ext uri="{FF2B5EF4-FFF2-40B4-BE49-F238E27FC236}">
-                <a16:creationId xmlns:a16="http://schemas.microsoft.com/office/drawing/2014/main" id="{E758541A-21B5-4149-8217-8A1E37220929}"/>
-              </a:ext>
-            </a:extLst>
-          </p:cNvPr>
-          <p:cNvGraphicFramePr/>
-          <p:nvPr/>
-        </p:nvGraphicFramePr>
-        <p:xfrm>
-          <a:off xmlns:a="http://schemas.openxmlformats.org/drawingml/2006/main" x="285750" y="5238750"/>
-          <a:ext xmlns:a="http://schemas.openxmlformats.org/drawingml/2006/main" cx="3048000" cy="1104900"/>
-        </p:xfrm>
-        <a:graphic xmlns:a="http://schemas.openxmlformats.org/drawingml/2006/main">
-          <a:graphicData uri="http://schemas.openxmlformats.org/drawingml/2006/chart">
-            <c:chart xmlns:r="http://schemas.openxmlformats.org/officeDocument/2006/relationships" xmlns:c="http://schemas.openxmlformats.org/drawingml/2006/chart" r:id="R720b1dd974be432a"/>
-          </a:graphicData>
-        </a:graphic>
-      </p:graphicFrame>
-      <p:sp>
-        <p:nvSpPr>
-          <p:cNvPr id="15" name="">
-            <a:extLst xmlns:a="http://schemas.openxmlformats.org/drawingml/2006/main">
-              <a:ext uri="{FF2B5EF4-FFF2-40B4-BE49-F238E27FC236}">
-                <a16:creationId xmlns:a16="http://schemas.microsoft.com/office/drawing/2014/main" id="{D1D50D82-517E-46D5-A642-C5381A9B6724}"/>
-              </a:ext>
-            </a:extLst>
-          </p:cNvPr>
-          <p:cNvSpPr>
-            <a:spLocks xmlns:a="http://schemas.openxmlformats.org/drawingml/2006/main" noGrp="1"/>
-          </p:cNvSpPr>
-          <p:nvPr/>
-        </p:nvSpPr>
-        <p:spPr>
-          <a:xfrm xmlns:a="http://schemas.openxmlformats.org/drawingml/2006/main">
-            <a:off x="3810000" y="4895850"/>
-            <a:ext cx="7905750" cy="666750"/>
-          </a:xfrm>
-          <a:prstGeom xmlns:a="http://schemas.openxmlformats.org/drawingml/2006/main" prst="rect">
-            <a:avLst/>
-          </a:prstGeom>
-          <a:noFill xmlns:a="http://schemas.openxmlformats.org/drawingml/2006/main"/>
-          <a:ln xmlns:a="http://schemas.openxmlformats.org/drawingml/2006/main" w="0">
-            <a:noFill/>
-          </a:ln>
-        </p:spPr>
-        <p:txBody>
-          <a:bodyPr xmlns:a="http://schemas.openxmlformats.org/drawingml/2006/main" lIns="0" tIns="0" rIns="0" bIns="0"/>
-          <a:lstStyle xmlns:a="http://schemas.openxmlformats.org/drawingml/2006/main">
-            <a:defPPr>
-              <a:defRPr sz="1950">
-                <a:solidFill>
-                  <a:srgbClr val="38332E"/>
-                </a:solidFill>
-                <a:latin typeface="Ubuntu Condensed"/>
-                <a:ea typeface="Ubuntu Condensed"/>
-                <a:cs typeface="Ubuntu Condensed"/>
-              </a:defRPr>
-            </a:defPPr>
-          </a:lstStyle>
-          <a:p xmlns:a="http://schemas.openxmlformats.org/drawingml/2006/main">
-            <a:pPr>
-              <a:defRPr sz="1950">
-                <a:solidFill>
-                  <a:srgbClr val="38332E"/>
-                </a:solidFill>
-                <a:latin typeface="Ubuntu Condensed"/>
-                <a:ea typeface="Ubuntu Condensed"/>
-                <a:cs typeface="Ubuntu Condensed"/>
-              </a:defRPr>
-            </a:pPr>
-            <a:r>
-              <a:rPr sz="1950">
-                <a:solidFill>
-                  <a:srgbClr val="38332E"/>
-                </a:solidFill>
-                <a:latin typeface="Ubuntu Condensed"/>
-                <a:ea typeface="Ubuntu Condensed"/>
-                <a:cs typeface="Ubuntu Condensed"/>
-              </a:rPr>
-              <a:t>Duplicate Life History.</a:t>
-            </a:r>
-          </a:p>
-          <a:p xmlns:a="http://schemas.openxmlformats.org/drawingml/2006/main">
-            <a:pPr>
-              <a:defRPr sz="1950">
-                <a:solidFill>
-                  <a:srgbClr val="38332E"/>
-                </a:solidFill>
-                <a:latin typeface="Ubuntu Condensed"/>
-                <a:ea typeface="Ubuntu Condensed"/>
-                <a:cs typeface="Ubuntu Condensed"/>
-              </a:defRPr>
-            </a:pPr>
-            <a:r>
-              <a:rPr sz="1950">
-                <a:solidFill>
-                  <a:srgbClr val="38332E"/>
-                </a:solidFill>
-                <a:latin typeface="Ubuntu Condensed"/>
-                <a:ea typeface="Ubuntu Condensed"/>
-                <a:cs typeface="Ubuntu Condensed"/>
-              </a:rPr>
-              <a:t>Replace the measure with AVG(GDP).</a:t>
-            </a:r>
-          </a:p>
-        </p:txBody>
-      </p:sp>
-      <p:sp>
-        <p:nvSpPr>
-          <p:cNvPr id="16" name="">
-            <a:extLst xmlns:a="http://schemas.openxmlformats.org/drawingml/2006/main">
-              <a:ext uri="{FF2B5EF4-FFF2-40B4-BE49-F238E27FC236}">
-                <a16:creationId xmlns:a16="http://schemas.microsoft.com/office/drawing/2014/main" id="{EF1F00FA-D8C6-4BCA-96BB-DCCE82B659B1}"/>
-              </a:ext>
-            </a:extLst>
-          </p:cNvPr>
-          <p:cNvSpPr>
-            <a:spLocks xmlns:a="http://schemas.openxmlformats.org/drawingml/2006/main" noGrp="1"/>
-          </p:cNvSpPr>
-          <p:nvPr/>
-        </p:nvSpPr>
-        <p:spPr>
-          <a:xfrm xmlns:a="http://schemas.openxmlformats.org/drawingml/2006/main">
-            <a:off x="3810000" y="5695950"/>
-            <a:ext cx="7905750" cy="361950"/>
-          </a:xfrm>
-          <a:prstGeom xmlns:a="http://schemas.openxmlformats.org/drawingml/2006/main" prst="rect">
-            <a:avLst/>
-          </a:prstGeom>
-          <a:noFill xmlns:a="http://schemas.openxmlformats.org/drawingml/2006/main"/>
-          <a:ln xmlns:a="http://schemas.openxmlformats.org/drawingml/2006/main" w="0">
-            <a:noFill/>
-          </a:ln>
-        </p:spPr>
-        <p:txBody>
-          <a:bodyPr xmlns:a="http://schemas.openxmlformats.org/drawingml/2006/main" lIns="0" tIns="0" rIns="0" bIns="0"/>
-          <a:lstStyle xmlns:a="http://schemas.openxmlformats.org/drawingml/2006/main">
-            <a:defPPr>
-              <a:defRPr sz="1725">
-                <a:solidFill>
-                  <a:srgbClr val="81796F"/>
-                </a:solidFill>
-                <a:latin typeface="Ubuntu Condensed"/>
-                <a:ea typeface="Ubuntu Condensed"/>
-                <a:cs typeface="Ubuntu Condensed"/>
-              </a:defRPr>
-            </a:defPPr>
-          </a:lstStyle>
-          <a:p xmlns:a="http://schemas.openxmlformats.org/drawingml/2006/main">
-            <a:pPr>
-              <a:defRPr sz="1725">
-                <a:solidFill>
-                  <a:srgbClr val="81796F"/>
-                </a:solidFill>
-                <a:latin typeface="Ubuntu Condensed"/>
-                <a:ea typeface="Ubuntu Condensed"/>
-                <a:cs typeface="Ubuntu Condensed"/>
-              </a:defRPr>
-            </a:pPr>
-            <a:r>
-              <a:rPr sz="1725">
-                <a:solidFill>
-                  <a:srgbClr val="81796F"/>
-                </a:solidFill>
-                <a:latin typeface="Ubuntu Condensed"/>
-                <a:ea typeface="Ubuntu Condensed"/>
-                <a:cs typeface="Ubuntu Condensed"/>
-              </a:rPr>
-              <a:t>Same countries. Same years. A different measure.</a:t>
+              <a:t>Measure pill menu: Measure &gt; Average. Leave Pages empty for this dashboard.</a:t>
             </a:r>
           </a:p>
         </p:txBody>
@@ -9878,7 +11216,7 @@
     </p:spTree>
     <p:extLst>
       <p:ext uri="{BB962C8B-B14F-4D97-AF65-F5344CB8AC3E}">
-        <p14:creationId xmlns:p14="http://schemas.microsoft.com/office/powerpoint/2010/main" val="304946477"/>
+        <p14:creationId xmlns:p14="http://schemas.microsoft.com/office/powerpoint/2010/main" val="1476580172"/>
       </p:ext>
     </p:extLst>
   </p:cSld>
@@ -9909,7 +11247,7 @@
           <p:cNvPr id="18" name="">
             <a:extLst xmlns:a="http://schemas.openxmlformats.org/drawingml/2006/main">
               <a:ext uri="{FF2B5EF4-FFF2-40B4-BE49-F238E27FC236}">
-                <a16:creationId xmlns:a16="http://schemas.microsoft.com/office/drawing/2014/main" id="{488509F0-7D1B-49B8-8CC5-7B514A164B4B}"/>
+                <a16:creationId xmlns:a16="http://schemas.microsoft.com/office/drawing/2014/main" id="{6D024117-2A93-4F45-B72B-E05613133DC2}"/>
               </a:ext>
             </a:extLst>
           </p:cNvPr>
@@ -9975,7 +11313,7 @@
           <p:cNvPr id="2" name="">
             <a:extLst xmlns:a="http://schemas.openxmlformats.org/drawingml/2006/main">
               <a:ext uri="{FF2B5EF4-FFF2-40B4-BE49-F238E27FC236}">
-                <a16:creationId xmlns:a16="http://schemas.microsoft.com/office/drawing/2014/main" id="{AF1417FB-B26D-4745-82B0-3C50E7F52F36}"/>
+                <a16:creationId xmlns:a16="http://schemas.microsoft.com/office/drawing/2014/main" id="{440035F4-5C64-4A9F-B0AA-7680194CE23B}"/>
               </a:ext>
             </a:extLst>
           </p:cNvPr>
@@ -10041,7 +11379,7 @@
           <p:cNvPr id="3" name="">
             <a:extLst xmlns:a="http://schemas.openxmlformats.org/drawingml/2006/main">
               <a:ext uri="{FF2B5EF4-FFF2-40B4-BE49-F238E27FC236}">
-                <a16:creationId xmlns:a16="http://schemas.microsoft.com/office/drawing/2014/main" id="{12AF815A-B4E0-4BD1-92CF-A57BC5800A6E}"/>
+                <a16:creationId xmlns:a16="http://schemas.microsoft.com/office/drawing/2014/main" id="{CB50257A-A159-41E9-9894-7DB8185E514E}"/>
               </a:ext>
             </a:extLst>
           </p:cNvPr>
@@ -10107,7 +11445,7 @@
           <p:cNvPr id="4" name="">
             <a:extLst xmlns:a="http://schemas.openxmlformats.org/drawingml/2006/main">
               <a:ext uri="{FF2B5EF4-FFF2-40B4-BE49-F238E27FC236}">
-                <a16:creationId xmlns:a16="http://schemas.microsoft.com/office/drawing/2014/main" id="{4FC470B6-CD6C-4773-8DEC-E6F317544CAD}"/>
+                <a16:creationId xmlns:a16="http://schemas.microsoft.com/office/drawing/2014/main" id="{35CFF698-B3B1-4E38-9DEF-9208613563A4}"/>
               </a:ext>
             </a:extLst>
           </p:cNvPr>
@@ -10137,7 +11475,7 @@
           <p:cNvPr id="5" name="">
             <a:extLst xmlns:a="http://schemas.openxmlformats.org/drawingml/2006/main">
               <a:ext uri="{FF2B5EF4-FFF2-40B4-BE49-F238E27FC236}">
-                <a16:creationId xmlns:a16="http://schemas.microsoft.com/office/drawing/2014/main" id="{AA735E11-80D4-4157-AD89-EA8238458C05}"/>
+                <a16:creationId xmlns:a16="http://schemas.microsoft.com/office/drawing/2014/main" id="{B6D427C6-E2C0-4E5A-8247-66DDF6659AC3}"/>
               </a:ext>
             </a:extLst>
           </p:cNvPr>
@@ -10167,7 +11505,7 @@
           <p:cNvPr id="6" name="">
             <a:extLst xmlns:a="http://schemas.openxmlformats.org/drawingml/2006/main">
               <a:ext uri="{FF2B5EF4-FFF2-40B4-BE49-F238E27FC236}">
-                <a16:creationId xmlns:a16="http://schemas.microsoft.com/office/drawing/2014/main" id="{3A4AC909-05FB-41C3-AB6F-9B55D83ED93A}"/>
+                <a16:creationId xmlns:a16="http://schemas.microsoft.com/office/drawing/2014/main" id="{452AE3BB-6000-487D-9F57-43D0D73BB2AB}"/>
               </a:ext>
             </a:extLst>
           </p:cNvPr>
@@ -10197,7 +11535,7 @@
           <p:cNvPr id="7" name="">
             <a:extLst xmlns:a="http://schemas.openxmlformats.org/drawingml/2006/main">
               <a:ext uri="{FF2B5EF4-FFF2-40B4-BE49-F238E27FC236}">
-                <a16:creationId xmlns:a16="http://schemas.microsoft.com/office/drawing/2014/main" id="{607CA69B-95F6-431E-9A46-179F06602421}"/>
+                <a16:creationId xmlns:a16="http://schemas.microsoft.com/office/drawing/2014/main" id="{4FBDCF10-14A5-4FDD-9F7B-DCC9E28B6F06}"/>
               </a:ext>
             </a:extLst>
           </p:cNvPr>
@@ -10263,7 +11601,7 @@
           <p:cNvPr id="8" name="">
             <a:extLst xmlns:a="http://schemas.openxmlformats.org/drawingml/2006/main">
               <a:ext uri="{FF2B5EF4-FFF2-40B4-BE49-F238E27FC236}">
-                <a16:creationId xmlns:a16="http://schemas.microsoft.com/office/drawing/2014/main" id="{C41AB026-BA1D-4614-8E5B-A1FD3F3882D0}"/>
+                <a16:creationId xmlns:a16="http://schemas.microsoft.com/office/drawing/2014/main" id="{C59163D8-DEF9-46F9-8E57-E1ED566CC93D}"/>
               </a:ext>
             </a:extLst>
           </p:cNvPr>
@@ -10352,7 +11690,7 @@
           <p:cNvPr id="9" name="">
             <a:extLst xmlns:a="http://schemas.openxmlformats.org/drawingml/2006/main">
               <a:ext uri="{FF2B5EF4-FFF2-40B4-BE49-F238E27FC236}">
-                <a16:creationId xmlns:a16="http://schemas.microsoft.com/office/drawing/2014/main" id="{28BF0B2F-DA31-469A-9D23-E768FE83D079}"/>
+                <a16:creationId xmlns:a16="http://schemas.microsoft.com/office/drawing/2014/main" id="{4B8A53D6-A969-4B10-B16F-E18B63903988}"/>
               </a:ext>
             </a:extLst>
           </p:cNvPr>
@@ -10441,7 +11779,7 @@
           <p:cNvPr id="10" name="">
             <a:extLst xmlns:a="http://schemas.openxmlformats.org/drawingml/2006/main">
               <a:ext uri="{FF2B5EF4-FFF2-40B4-BE49-F238E27FC236}">
-                <a16:creationId xmlns:a16="http://schemas.microsoft.com/office/drawing/2014/main" id="{1C64B343-D758-4BBE-9819-C2781A046956}"/>
+                <a16:creationId xmlns:a16="http://schemas.microsoft.com/office/drawing/2014/main" id="{8318B8F3-E2D4-4667-8314-433B3FA545E3}"/>
               </a:ext>
             </a:extLst>
           </p:cNvPr>
@@ -10507,7 +11845,7 @@
           <p:cNvPr id="11" name="">
             <a:extLst xmlns:a="http://schemas.openxmlformats.org/drawingml/2006/main">
               <a:ext uri="{FF2B5EF4-FFF2-40B4-BE49-F238E27FC236}">
-                <a16:creationId xmlns:a16="http://schemas.microsoft.com/office/drawing/2014/main" id="{E3B9A716-7418-4C3E-A263-B66F2361DCBB}"/>
+                <a16:creationId xmlns:a16="http://schemas.microsoft.com/office/drawing/2014/main" id="{386463BB-5FF3-45FD-B08B-A68D77406421}"/>
               </a:ext>
             </a:extLst>
           </p:cNvPr>
@@ -10518,8 +11856,8 @@
         </p:nvSpPr>
         <p:spPr>
           <a:xfrm xmlns:a="http://schemas.openxmlformats.org/drawingml/2006/main">
-            <a:off x="7334250" y="1752600"/>
-            <a:ext cx="4286250" cy="400050"/>
+            <a:off x="7143750" y="1676400"/>
+            <a:ext cx="4572000" cy="400050"/>
           </a:xfrm>
           <a:prstGeom xmlns:a="http://schemas.openxmlformats.org/drawingml/2006/main" prst="rect">
             <a:avLst/>
@@ -10563,7 +11901,7 @@
                 <a:ea typeface="Ubuntu Condensed"/>
                 <a:cs typeface="Ubuntu Condensed"/>
               </a:rPr>
-              <a:t>1  New Dashboard</a:t>
+              <a:t>1  Dashboard size</a:t>
             </a:r>
           </a:p>
         </p:txBody>
@@ -10573,7 +11911,7 @@
           <p:cNvPr id="12" name="">
             <a:extLst xmlns:a="http://schemas.openxmlformats.org/drawingml/2006/main">
               <a:ext uri="{FF2B5EF4-FFF2-40B4-BE49-F238E27FC236}">
-                <a16:creationId xmlns:a16="http://schemas.microsoft.com/office/drawing/2014/main" id="{D1CF3A7F-77D9-4F98-A4A1-07EEA5371C26}"/>
+                <a16:creationId xmlns:a16="http://schemas.microsoft.com/office/drawing/2014/main" id="{BA202225-FE1E-4713-BAF8-7705591F2591}"/>
               </a:ext>
             </a:extLst>
           </p:cNvPr>
@@ -10584,8 +11922,8 @@
         </p:nvSpPr>
         <p:spPr>
           <a:xfrm xmlns:a="http://schemas.openxmlformats.org/drawingml/2006/main">
-            <a:off x="7334250" y="2228850"/>
-            <a:ext cx="4286250" cy="571500"/>
+            <a:off x="7143750" y="2152650"/>
+            <a:ext cx="4572000" cy="1047750"/>
           </a:xfrm>
           <a:prstGeom xmlns:a="http://schemas.openxmlformats.org/drawingml/2006/main" prst="rect">
             <a:avLst/>
@@ -10629,7 +11967,53 @@
                 <a:ea typeface="Ubuntu Condensed"/>
                 <a:cs typeface="Ubuntu Condensed"/>
               </a:rPr>
-              <a:t>Set Size to Fixed: 1200 × 800.</a:t>
+              <a:t>Turn Device Preview off. Select Default.</a:t>
+            </a:r>
+          </a:p>
+          <a:p xmlns:a="http://schemas.openxmlformats.org/drawingml/2006/main">
+            <a:pPr>
+              <a:defRPr sz="1875">
+                <a:solidFill>
+                  <a:srgbClr val="38332E"/>
+                </a:solidFill>
+                <a:latin typeface="Ubuntu Condensed"/>
+                <a:ea typeface="Ubuntu Condensed"/>
+                <a:cs typeface="Ubuntu Condensed"/>
+              </a:defRPr>
+            </a:pPr>
+            <a:r>
+              <a:rPr sz="1875">
+                <a:solidFill>
+                  <a:srgbClr val="38332E"/>
+                </a:solidFill>
+                <a:latin typeface="Ubuntu Condensed"/>
+                <a:ea typeface="Ubuntu Condensed"/>
+                <a:cs typeface="Ubuntu Condensed"/>
+              </a:rPr>
+              <a:t>Dashboard pane &gt; Size &gt; Fixed size</a:t>
+            </a:r>
+          </a:p>
+          <a:p xmlns:a="http://schemas.openxmlformats.org/drawingml/2006/main">
+            <a:pPr>
+              <a:defRPr sz="1875">
+                <a:solidFill>
+                  <a:srgbClr val="38332E"/>
+                </a:solidFill>
+                <a:latin typeface="Ubuntu Condensed"/>
+                <a:ea typeface="Ubuntu Condensed"/>
+                <a:cs typeface="Ubuntu Condensed"/>
+              </a:defRPr>
+            </a:pPr>
+            <a:r>
+              <a:rPr sz="1875">
+                <a:solidFill>
+                  <a:srgbClr val="38332E"/>
+                </a:solidFill>
+                <a:latin typeface="Ubuntu Condensed"/>
+                <a:ea typeface="Ubuntu Condensed"/>
+                <a:cs typeface="Ubuntu Condensed"/>
+              </a:rPr>
+              <a:t>Custom: Width 1200, Height 800</a:t>
             </a:r>
           </a:p>
         </p:txBody>
@@ -10639,7 +12023,7 @@
           <p:cNvPr id="13" name="">
             <a:extLst xmlns:a="http://schemas.openxmlformats.org/drawingml/2006/main">
               <a:ext uri="{FF2B5EF4-FFF2-40B4-BE49-F238E27FC236}">
-                <a16:creationId xmlns:a16="http://schemas.microsoft.com/office/drawing/2014/main" id="{E7EBD61D-7030-472E-9714-176381BFE5FC}"/>
+                <a16:creationId xmlns:a16="http://schemas.microsoft.com/office/drawing/2014/main" id="{A52F0C90-4D14-4587-8E5B-16C547B1D17F}"/>
               </a:ext>
             </a:extLst>
           </p:cNvPr>
@@ -10650,8 +12034,97 @@
         </p:nvSpPr>
         <p:spPr>
           <a:xfrm xmlns:a="http://schemas.openxmlformats.org/drawingml/2006/main">
-            <a:off x="7334250" y="3057525"/>
-            <a:ext cx="4286250" cy="400050"/>
+            <a:off x="7143750" y="3228975"/>
+            <a:ext cx="4572000" cy="666750"/>
+          </a:xfrm>
+          <a:prstGeom xmlns:a="http://schemas.openxmlformats.org/drawingml/2006/main" prst="rect">
+            <a:avLst/>
+          </a:prstGeom>
+          <a:noFill xmlns:a="http://schemas.openxmlformats.org/drawingml/2006/main"/>
+          <a:ln xmlns:a="http://schemas.openxmlformats.org/drawingml/2006/main" w="0">
+            <a:noFill/>
+          </a:ln>
+        </p:spPr>
+        <p:txBody>
+          <a:bodyPr xmlns:a="http://schemas.openxmlformats.org/drawingml/2006/main" lIns="0" tIns="0" rIns="0" bIns="0"/>
+          <a:lstStyle xmlns:a="http://schemas.openxmlformats.org/drawingml/2006/main">
+            <a:defPPr>
+              <a:defRPr sz="1800">
+                <a:solidFill>
+                  <a:srgbClr val="81796F"/>
+                </a:solidFill>
+                <a:latin typeface="Ubuntu Condensed"/>
+                <a:ea typeface="Ubuntu Condensed"/>
+                <a:cs typeface="Ubuntu Condensed"/>
+              </a:defRPr>
+            </a:defPPr>
+          </a:lstStyle>
+          <a:p xmlns:a="http://schemas.openxmlformats.org/drawingml/2006/main">
+            <a:pPr>
+              <a:defRPr sz="1800">
+                <a:solidFill>
+                  <a:srgbClr val="81796F"/>
+                </a:solidFill>
+                <a:latin typeface="Ubuntu Condensed"/>
+                <a:ea typeface="Ubuntu Condensed"/>
+                <a:cs typeface="Ubuntu Condensed"/>
+              </a:defRPr>
+            </a:pPr>
+            <a:r>
+              <a:rPr sz="1800">
+                <a:solidFill>
+                  <a:srgbClr val="81796F"/>
+                </a:solidFill>
+                <a:latin typeface="Ubuntu Condensed"/>
+                <a:ea typeface="Ubuntu Condensed"/>
+                <a:cs typeface="Ubuntu Condensed"/>
+              </a:rPr>
+              <a:t>Drop sheets in the white canvas.</a:t>
+            </a:r>
+          </a:p>
+          <a:p xmlns:a="http://schemas.openxmlformats.org/drawingml/2006/main">
+            <a:pPr>
+              <a:defRPr sz="1800">
+                <a:solidFill>
+                  <a:srgbClr val="81796F"/>
+                </a:solidFill>
+                <a:latin typeface="Ubuntu Condensed"/>
+                <a:ea typeface="Ubuntu Condensed"/>
+                <a:cs typeface="Ubuntu Condensed"/>
+              </a:defRPr>
+            </a:pPr>
+            <a:r>
+              <a:rPr sz="1800">
+                <a:solidFill>
+                  <a:srgbClr val="81796F"/>
+                </a:solidFill>
+                <a:latin typeface="Ubuntu Condensed"/>
+                <a:ea typeface="Ubuntu Condensed"/>
+                <a:cs typeface="Ubuntu Condensed"/>
+              </a:rPr>
+              <a:t>Gray space is outside the dashboard.</a:t>
+            </a:r>
+          </a:p>
+        </p:txBody>
+      </p:sp>
+      <p:sp>
+        <p:nvSpPr>
+          <p:cNvPr id="14" name="">
+            <a:extLst xmlns:a="http://schemas.openxmlformats.org/drawingml/2006/main">
+              <a:ext uri="{FF2B5EF4-FFF2-40B4-BE49-F238E27FC236}">
+                <a16:creationId xmlns:a16="http://schemas.microsoft.com/office/drawing/2014/main" id="{F8A04E1C-0102-4CEB-BD75-433ADF548AD8}"/>
+              </a:ext>
+            </a:extLst>
+          </p:cNvPr>
+          <p:cNvSpPr>
+            <a:spLocks xmlns:a="http://schemas.openxmlformats.org/drawingml/2006/main" noGrp="1"/>
+          </p:cNvSpPr>
+          <p:nvPr/>
+        </p:nvSpPr>
+        <p:spPr>
+          <a:xfrm xmlns:a="http://schemas.openxmlformats.org/drawingml/2006/main">
+            <a:off x="7143750" y="4114800"/>
+            <a:ext cx="4572000" cy="400050"/>
           </a:xfrm>
           <a:prstGeom xmlns:a="http://schemas.openxmlformats.org/drawingml/2006/main" prst="rect">
             <a:avLst/>
@@ -10702,10 +12175,10 @@
       </p:sp>
       <p:sp>
         <p:nvSpPr>
-          <p:cNvPr id="14" name="">
+          <p:cNvPr id="15" name="">
             <a:extLst xmlns:a="http://schemas.openxmlformats.org/drawingml/2006/main">
               <a:ext uri="{FF2B5EF4-FFF2-40B4-BE49-F238E27FC236}">
-                <a16:creationId xmlns:a16="http://schemas.microsoft.com/office/drawing/2014/main" id="{5CBB6A05-D082-45B2-8F7D-9FD9E923B445}"/>
+                <a16:creationId xmlns:a16="http://schemas.microsoft.com/office/drawing/2014/main" id="{AEE0BEBE-AE29-4F06-A12E-C3F93C7259D1}"/>
               </a:ext>
             </a:extLst>
           </p:cNvPr>
@@ -10716,8 +12189,8 @@
         </p:nvSpPr>
         <p:spPr>
           <a:xfrm xmlns:a="http://schemas.openxmlformats.org/drawingml/2006/main">
-            <a:off x="7334250" y="3524250"/>
-            <a:ext cx="4286250" cy="838200"/>
+            <a:off x="7143750" y="4572000"/>
+            <a:ext cx="4572000" cy="857250"/>
           </a:xfrm>
           <a:prstGeom xmlns:a="http://schemas.openxmlformats.org/drawingml/2006/main" prst="rect">
             <a:avLst/>
@@ -10761,17 +12234,40 @@
                 <a:ea typeface="Ubuntu Condensed"/>
                 <a:cs typeface="Ubuntu Condensed"/>
               </a:rPr>
-              <a:t>Drag World left. Stack both histories on the right.</a:t>
+              <a:t>World on the left.</a:t>
+            </a:r>
+          </a:p>
+          <a:p xmlns:a="http://schemas.openxmlformats.org/drawingml/2006/main">
+            <a:pPr>
+              <a:defRPr sz="1875">
+                <a:solidFill>
+                  <a:srgbClr val="38332E"/>
+                </a:solidFill>
+                <a:latin typeface="Ubuntu Condensed"/>
+                <a:ea typeface="Ubuntu Condensed"/>
+                <a:cs typeface="Ubuntu Condensed"/>
+              </a:defRPr>
+            </a:pPr>
+            <a:r>
+              <a:rPr sz="1875">
+                <a:solidFill>
+                  <a:srgbClr val="38332E"/>
+                </a:solidFill>
+                <a:latin typeface="Ubuntu Condensed"/>
+                <a:ea typeface="Ubuntu Condensed"/>
+                <a:cs typeface="Ubuntu Condensed"/>
+              </a:rPr>
+              <a:t>Both histories in a vertical container on the right.</a:t>
             </a:r>
           </a:p>
         </p:txBody>
       </p:sp>
       <p:sp>
         <p:nvSpPr>
-          <p:cNvPr id="15" name="">
+          <p:cNvPr id="16" name="">
             <a:extLst xmlns:a="http://schemas.openxmlformats.org/drawingml/2006/main">
               <a:ext uri="{FF2B5EF4-FFF2-40B4-BE49-F238E27FC236}">
-                <a16:creationId xmlns:a16="http://schemas.microsoft.com/office/drawing/2014/main" id="{992CE7AB-A4CF-451C-A3F7-8A0D537C20F4}"/>
+                <a16:creationId xmlns:a16="http://schemas.microsoft.com/office/drawing/2014/main" id="{C143B7D1-91C8-41F3-BE88-CE3BC512B3A0}"/>
               </a:ext>
             </a:extLst>
           </p:cNvPr>
@@ -10782,8 +12278,8 @@
         </p:nvSpPr>
         <p:spPr>
           <a:xfrm xmlns:a="http://schemas.openxmlformats.org/drawingml/2006/main">
-            <a:off x="7334250" y="4619625"/>
-            <a:ext cx="4286250" cy="400050"/>
+            <a:off x="7143750" y="5486400"/>
+            <a:ext cx="4572000" cy="400050"/>
           </a:xfrm>
           <a:prstGeom xmlns:a="http://schemas.openxmlformats.org/drawingml/2006/main" prst="rect">
             <a:avLst/>
@@ -10827,17 +12323,17 @@
                 <a:ea typeface="Ubuntu Condensed"/>
                 <a:cs typeface="Ubuntu Condensed"/>
               </a:rPr>
-              <a:t>3  One year control</a:t>
+              <a:t>3  Year filter scope</a:t>
             </a:r>
           </a:p>
         </p:txBody>
       </p:sp>
       <p:sp>
         <p:nvSpPr>
-          <p:cNvPr id="16" name="">
+          <p:cNvPr id="17" name="">
             <a:extLst xmlns:a="http://schemas.openxmlformats.org/drawingml/2006/main">
               <a:ext uri="{FF2B5EF4-FFF2-40B4-BE49-F238E27FC236}">
-                <a16:creationId xmlns:a16="http://schemas.microsoft.com/office/drawing/2014/main" id="{91F8C492-CB5C-4A30-BB6B-5230824BB6AB}"/>
+                <a16:creationId xmlns:a16="http://schemas.microsoft.com/office/drawing/2014/main" id="{25582069-6D70-43F9-9312-A0A547AFCC15}"/>
               </a:ext>
             </a:extLst>
           </p:cNvPr>
@@ -10848,120 +12344,8 @@
         </p:nvSpPr>
         <p:spPr>
           <a:xfrm xmlns:a="http://schemas.openxmlformats.org/drawingml/2006/main">
-            <a:off x="7334250" y="5105400"/>
-            <a:ext cx="4286250" cy="952500"/>
-          </a:xfrm>
-          <a:prstGeom xmlns:a="http://schemas.openxmlformats.org/drawingml/2006/main" prst="rect">
-            <a:avLst/>
-          </a:prstGeom>
-          <a:noFill xmlns:a="http://schemas.openxmlformats.org/drawingml/2006/main"/>
-          <a:ln xmlns:a="http://schemas.openxmlformats.org/drawingml/2006/main" w="0">
-            <a:noFill/>
-          </a:ln>
-        </p:spPr>
-        <p:txBody>
-          <a:bodyPr xmlns:a="http://schemas.openxmlformats.org/drawingml/2006/main" lIns="0" tIns="0" rIns="0" bIns="0"/>
-          <a:lstStyle xmlns:a="http://schemas.openxmlformats.org/drawingml/2006/main">
-            <a:defPPr>
-              <a:defRPr sz="1875">
-                <a:solidFill>
-                  <a:srgbClr val="38332E"/>
-                </a:solidFill>
-                <a:latin typeface="Ubuntu Condensed"/>
-                <a:ea typeface="Ubuntu Condensed"/>
-                <a:cs typeface="Ubuntu Condensed"/>
-              </a:defRPr>
-            </a:defPPr>
-          </a:lstStyle>
-          <a:p xmlns:a="http://schemas.openxmlformats.org/drawingml/2006/main">
-            <a:pPr>
-              <a:defRPr sz="1875">
-                <a:solidFill>
-                  <a:srgbClr val="38332E"/>
-                </a:solidFill>
-                <a:latin typeface="Ubuntu Condensed"/>
-                <a:ea typeface="Ubuntu Condensed"/>
-                <a:cs typeface="Ubuntu Condensed"/>
-              </a:defRPr>
-            </a:pPr>
-            <a:r>
-              <a:rPr sz="1875">
-                <a:solidFill>
-                  <a:srgbClr val="38332E"/>
-                </a:solidFill>
-                <a:latin typeface="Ubuntu Condensed"/>
-                <a:ea typeface="Ubuntu Condensed"/>
-                <a:cs typeface="Ubuntu Condensed"/>
-              </a:rPr>
-              <a:t>Year filter menu:</a:t>
-            </a:r>
-          </a:p>
-          <a:p xmlns:a="http://schemas.openxmlformats.org/drawingml/2006/main">
-            <a:pPr>
-              <a:defRPr sz="1875">
-                <a:solidFill>
-                  <a:srgbClr val="38332E"/>
-                </a:solidFill>
-                <a:latin typeface="Ubuntu Condensed"/>
-                <a:ea typeface="Ubuntu Condensed"/>
-                <a:cs typeface="Ubuntu Condensed"/>
-              </a:defRPr>
-            </a:pPr>
-            <a:r>
-              <a:rPr sz="1875">
-                <a:solidFill>
-                  <a:srgbClr val="38332E"/>
-                </a:solidFill>
-                <a:latin typeface="Ubuntu Condensed"/>
-                <a:ea typeface="Ubuntu Condensed"/>
-                <a:cs typeface="Ubuntu Condensed"/>
-              </a:rPr>
-              <a:t>Apply to Worksheets</a:t>
-            </a:r>
-          </a:p>
-          <a:p xmlns:a="http://schemas.openxmlformats.org/drawingml/2006/main">
-            <a:pPr>
-              <a:defRPr sz="1875">
-                <a:solidFill>
-                  <a:srgbClr val="38332E"/>
-                </a:solidFill>
-                <a:latin typeface="Ubuntu Condensed"/>
-                <a:ea typeface="Ubuntu Condensed"/>
-                <a:cs typeface="Ubuntu Condensed"/>
-              </a:defRPr>
-            </a:pPr>
-            <a:r>
-              <a:rPr sz="1875">
-                <a:solidFill>
-                  <a:srgbClr val="38332E"/>
-                </a:solidFill>
-                <a:latin typeface="Ubuntu Condensed"/>
-                <a:ea typeface="Ubuntu Condensed"/>
-                <a:cs typeface="Ubuntu Condensed"/>
-              </a:rPr>
-              <a:t>Selected Worksheets: World only.</a:t>
-            </a:r>
-          </a:p>
-        </p:txBody>
-      </p:sp>
-      <p:sp>
-        <p:nvSpPr>
-          <p:cNvPr id="17" name="">
-            <a:extLst xmlns:a="http://schemas.openxmlformats.org/drawingml/2006/main">
-              <a:ext uri="{FF2B5EF4-FFF2-40B4-BE49-F238E27FC236}">
-                <a16:creationId xmlns:a16="http://schemas.microsoft.com/office/drawing/2014/main" id="{883C52DE-7CA1-45FE-AFF4-C64B82A3BD47}"/>
-              </a:ext>
-            </a:extLst>
-          </p:cNvPr>
-          <p:cNvSpPr>
-            <a:spLocks xmlns:a="http://schemas.openxmlformats.org/drawingml/2006/main" noGrp="1"/>
-          </p:cNvSpPr>
-          <p:nvPr/>
-        </p:nvSpPr>
-        <p:spPr>
-          <a:xfrm xmlns:a="http://schemas.openxmlformats.org/drawingml/2006/main">
-            <a:off x="7334250" y="6229350"/>
-            <a:ext cx="4286250" cy="333375"/>
+            <a:off x="7143750" y="5934075"/>
+            <a:ext cx="4572000" cy="809625"/>
           </a:xfrm>
           <a:prstGeom xmlns:a="http://schemas.openxmlformats.org/drawingml/2006/main" prst="rect">
             <a:avLst/>
@@ -10977,7 +12361,7 @@
             <a:defPPr>
               <a:defRPr sz="1725">
                 <a:solidFill>
-                  <a:srgbClr val="B23C50"/>
+                  <a:srgbClr val="38332E"/>
                 </a:solidFill>
                 <a:latin typeface="Ubuntu Condensed"/>
                 <a:ea typeface="Ubuntu Condensed"/>
@@ -10989,7 +12373,7 @@
             <a:pPr>
               <a:defRPr sz="1725">
                 <a:solidFill>
-                  <a:srgbClr val="B23C50"/>
+                  <a:srgbClr val="38332E"/>
                 </a:solidFill>
                 <a:latin typeface="Ubuntu Condensed"/>
                 <a:ea typeface="Ubuntu Condensed"/>
@@ -10999,13 +12383,59 @@
             <a:r>
               <a:rPr sz="1725">
                 <a:solidFill>
-                  <a:srgbClr val="B23C50"/>
+                  <a:srgbClr val="38332E"/>
                 </a:solidFill>
                 <a:latin typeface="Ubuntu Condensed"/>
                 <a:ea typeface="Ubuntu Condensed"/>
                 <a:cs typeface="Ubuntu Condensed"/>
               </a:rPr>
-              <a:t>Keep both histories at 1960–2020.</a:t>
+              <a:t>Year filter menu: Apply to Worksheets</a:t>
+            </a:r>
+          </a:p>
+          <a:p xmlns:a="http://schemas.openxmlformats.org/drawingml/2006/main">
+            <a:pPr>
+              <a:defRPr sz="1725">
+                <a:solidFill>
+                  <a:srgbClr val="38332E"/>
+                </a:solidFill>
+                <a:latin typeface="Ubuntu Condensed"/>
+                <a:ea typeface="Ubuntu Condensed"/>
+                <a:cs typeface="Ubuntu Condensed"/>
+              </a:defRPr>
+            </a:pPr>
+            <a:r>
+              <a:rPr sz="1725">
+                <a:solidFill>
+                  <a:srgbClr val="38332E"/>
+                </a:solidFill>
+                <a:latin typeface="Ubuntu Condensed"/>
+                <a:ea typeface="Ubuntu Condensed"/>
+                <a:cs typeface="Ubuntu Condensed"/>
+              </a:rPr>
+              <a:t>Selected Worksheets: World only</a:t>
+            </a:r>
+          </a:p>
+          <a:p xmlns:a="http://schemas.openxmlformats.org/drawingml/2006/main">
+            <a:pPr>
+              <a:defRPr sz="1725">
+                <a:solidFill>
+                  <a:srgbClr val="38332E"/>
+                </a:solidFill>
+                <a:latin typeface="Ubuntu Condensed"/>
+                <a:ea typeface="Ubuntu Condensed"/>
+                <a:cs typeface="Ubuntu Condensed"/>
+              </a:defRPr>
+            </a:pPr>
+            <a:r>
+              <a:rPr sz="1725">
+                <a:solidFill>
+                  <a:srgbClr val="38332E"/>
+                </a:solidFill>
+                <a:latin typeface="Ubuntu Condensed"/>
+                <a:ea typeface="Ubuntu Condensed"/>
+                <a:cs typeface="Ubuntu Condensed"/>
+              </a:rPr>
+              <a:t>Histories keep 1960–2020.</a:t>
             </a:r>
           </a:p>
         </p:txBody>
@@ -11013,7 +12443,7 @@
     </p:spTree>
     <p:extLst>
       <p:ext uri="{BB962C8B-B14F-4D97-AF65-F5344CB8AC3E}">
-        <p14:creationId xmlns:p14="http://schemas.microsoft.com/office/powerpoint/2010/main" val="1998203320"/>
+        <p14:creationId xmlns:p14="http://schemas.microsoft.com/office/powerpoint/2010/main" val="503650653"/>
       </p:ext>
     </p:extLst>
   </p:cSld>
@@ -11044,7 +12474,7 @@
           <p:cNvPr id="23" name="">
             <a:extLst xmlns:a="http://schemas.openxmlformats.org/drawingml/2006/main">
               <a:ext uri="{FF2B5EF4-FFF2-40B4-BE49-F238E27FC236}">
-                <a16:creationId xmlns:a16="http://schemas.microsoft.com/office/drawing/2014/main" id="{8BE7A930-C0B7-4D6B-A05D-A8CD3CD38DF7}"/>
+                <a16:creationId xmlns:a16="http://schemas.microsoft.com/office/drawing/2014/main" id="{35669CD6-8EC0-4263-B783-20F3800E66F5}"/>
               </a:ext>
             </a:extLst>
           </p:cNvPr>
@@ -11110,7 +12540,7 @@
           <p:cNvPr id="2" name="">
             <a:extLst xmlns:a="http://schemas.openxmlformats.org/drawingml/2006/main">
               <a:ext uri="{FF2B5EF4-FFF2-40B4-BE49-F238E27FC236}">
-                <a16:creationId xmlns:a16="http://schemas.microsoft.com/office/drawing/2014/main" id="{D9BB4FCA-3C20-4939-8F74-AD66F6AEFE9A}"/>
+                <a16:creationId xmlns:a16="http://schemas.microsoft.com/office/drawing/2014/main" id="{86BF6DD4-55A4-4046-875D-6AAE071429CF}"/>
               </a:ext>
             </a:extLst>
           </p:cNvPr>
@@ -11176,7 +12606,7 @@
           <p:cNvPr id="3" name="">
             <a:extLst xmlns:a="http://schemas.openxmlformats.org/drawingml/2006/main">
               <a:ext uri="{FF2B5EF4-FFF2-40B4-BE49-F238E27FC236}">
-                <a16:creationId xmlns:a16="http://schemas.microsoft.com/office/drawing/2014/main" id="{1BCA4824-74A5-480D-B5DA-009FA3D3DC7F}"/>
+                <a16:creationId xmlns:a16="http://schemas.microsoft.com/office/drawing/2014/main" id="{09D5F89B-7401-403E-AE94-17F4F756867E}"/>
               </a:ext>
             </a:extLst>
           </p:cNvPr>
@@ -11242,7 +12672,7 @@
           <p:cNvPr id="4" name="">
             <a:extLst xmlns:a="http://schemas.openxmlformats.org/drawingml/2006/main">
               <a:ext uri="{FF2B5EF4-FFF2-40B4-BE49-F238E27FC236}">
-                <a16:creationId xmlns:a16="http://schemas.microsoft.com/office/drawing/2014/main" id="{C048C99A-B386-49E5-BA85-101CB99687B4}"/>
+                <a16:creationId xmlns:a16="http://schemas.microsoft.com/office/drawing/2014/main" id="{455BD023-1AD4-4F7C-AC1D-C5B4D796C8E0}"/>
               </a:ext>
             </a:extLst>
           </p:cNvPr>
@@ -11308,7 +12738,7 @@
           <p:cNvPr id="5" name="">
             <a:extLst xmlns:a="http://schemas.openxmlformats.org/drawingml/2006/main">
               <a:ext uri="{FF2B5EF4-FFF2-40B4-BE49-F238E27FC236}">
-                <a16:creationId xmlns:a16="http://schemas.microsoft.com/office/drawing/2014/main" id="{4C621B15-BC7B-4816-B6E5-BA3E8DDA6A20}"/>
+                <a16:creationId xmlns:a16="http://schemas.microsoft.com/office/drawing/2014/main" id="{8B2E7CD3-8095-4A5B-8A22-9ED9B346E27F}"/>
               </a:ext>
             </a:extLst>
           </p:cNvPr>
@@ -11374,7 +12804,7 @@
           <p:cNvPr id="6" name="">
             <a:extLst xmlns:a="http://schemas.openxmlformats.org/drawingml/2006/main">
               <a:ext uri="{FF2B5EF4-FFF2-40B4-BE49-F238E27FC236}">
-                <a16:creationId xmlns:a16="http://schemas.microsoft.com/office/drawing/2014/main" id="{B00DC95E-DEEA-4DF2-B1AE-03660E1D243A}"/>
+                <a16:creationId xmlns:a16="http://schemas.microsoft.com/office/drawing/2014/main" id="{E1A99B34-FA22-402B-9A45-10A5AA8DA60F}"/>
               </a:ext>
             </a:extLst>
           </p:cNvPr>
@@ -11440,7 +12870,7 @@
           <p:cNvPr id="7" name="">
             <a:extLst xmlns:a="http://schemas.openxmlformats.org/drawingml/2006/main">
               <a:ext uri="{FF2B5EF4-FFF2-40B4-BE49-F238E27FC236}">
-                <a16:creationId xmlns:a16="http://schemas.microsoft.com/office/drawing/2014/main" id="{38C5A71E-4FE9-4C5A-B229-E7206209EBA1}"/>
+                <a16:creationId xmlns:a16="http://schemas.microsoft.com/office/drawing/2014/main" id="{B48B875B-FAA5-41EB-ABB3-B9315A9EA07D}"/>
               </a:ext>
             </a:extLst>
           </p:cNvPr>
@@ -11506,7 +12936,7 @@
           <p:cNvPr id="8" name="">
             <a:extLst xmlns:a="http://schemas.openxmlformats.org/drawingml/2006/main">
               <a:ext uri="{FF2B5EF4-FFF2-40B4-BE49-F238E27FC236}">
-                <a16:creationId xmlns:a16="http://schemas.microsoft.com/office/drawing/2014/main" id="{A6ABB27D-E035-4E78-92F2-A2572095C866}"/>
+                <a16:creationId xmlns:a16="http://schemas.microsoft.com/office/drawing/2014/main" id="{ECD96BC6-4070-4518-9C64-242EE4AE1F52}"/>
               </a:ext>
             </a:extLst>
           </p:cNvPr>
@@ -11572,7 +13002,7 @@
           <p:cNvPr id="9" name="">
             <a:extLst xmlns:a="http://schemas.openxmlformats.org/drawingml/2006/main">
               <a:ext uri="{FF2B5EF4-FFF2-40B4-BE49-F238E27FC236}">
-                <a16:creationId xmlns:a16="http://schemas.microsoft.com/office/drawing/2014/main" id="{7BF7AEBD-4B11-4554-A022-EC0EC1A2F2B5}"/>
+                <a16:creationId xmlns:a16="http://schemas.microsoft.com/office/drawing/2014/main" id="{6AC856F3-260F-4EB6-AF6A-4A96D29D4DC7}"/>
               </a:ext>
             </a:extLst>
           </p:cNvPr>
@@ -11638,7 +13068,7 @@
           <p:cNvPr id="10" name="">
             <a:extLst xmlns:a="http://schemas.openxmlformats.org/drawingml/2006/main">
               <a:ext uri="{FF2B5EF4-FFF2-40B4-BE49-F238E27FC236}">
-                <a16:creationId xmlns:a16="http://schemas.microsoft.com/office/drawing/2014/main" id="{0B5EB834-DEA0-42A7-A894-B52440F755B9}"/>
+                <a16:creationId xmlns:a16="http://schemas.microsoft.com/office/drawing/2014/main" id="{236E3D55-D70B-4293-98DC-683573F0B7AE}"/>
               </a:ext>
             </a:extLst>
           </p:cNvPr>
@@ -11704,7 +13134,7 @@
           <p:cNvPr id="11" name="">
             <a:extLst xmlns:a="http://schemas.openxmlformats.org/drawingml/2006/main">
               <a:ext uri="{FF2B5EF4-FFF2-40B4-BE49-F238E27FC236}">
-                <a16:creationId xmlns:a16="http://schemas.microsoft.com/office/drawing/2014/main" id="{5E069921-CF45-49F1-91C1-D5B342833F99}"/>
+                <a16:creationId xmlns:a16="http://schemas.microsoft.com/office/drawing/2014/main" id="{64C6ED73-2A4E-47D0-9957-75B112B6BDEC}"/>
               </a:ext>
             </a:extLst>
           </p:cNvPr>
@@ -11770,7 +13200,7 @@
           <p:cNvPr id="12" name="">
             <a:extLst xmlns:a="http://schemas.openxmlformats.org/drawingml/2006/main">
               <a:ext uri="{FF2B5EF4-FFF2-40B4-BE49-F238E27FC236}">
-                <a16:creationId xmlns:a16="http://schemas.microsoft.com/office/drawing/2014/main" id="{DF58BFC8-360F-44BD-9D0F-4D456143B484}"/>
+                <a16:creationId xmlns:a16="http://schemas.microsoft.com/office/drawing/2014/main" id="{3E59FF9E-A28C-48C4-94F4-D187E7B6A9AF}"/>
               </a:ext>
             </a:extLst>
           </p:cNvPr>
@@ -11836,7 +13266,7 @@
           <p:cNvPr id="13" name="">
             <a:extLst xmlns:a="http://schemas.openxmlformats.org/drawingml/2006/main">
               <a:ext uri="{FF2B5EF4-FFF2-40B4-BE49-F238E27FC236}">
-                <a16:creationId xmlns:a16="http://schemas.microsoft.com/office/drawing/2014/main" id="{0BDCA6FB-4535-4AB2-9A2B-4B71E7F9E003}"/>
+                <a16:creationId xmlns:a16="http://schemas.microsoft.com/office/drawing/2014/main" id="{A91CE2D0-6593-43CE-9835-5E6A36F214FC}"/>
               </a:ext>
             </a:extLst>
           </p:cNvPr>
@@ -11902,7 +13332,7 @@
           <p:cNvPr id="14" name="">
             <a:extLst xmlns:a="http://schemas.openxmlformats.org/drawingml/2006/main">
               <a:ext uri="{FF2B5EF4-FFF2-40B4-BE49-F238E27FC236}">
-                <a16:creationId xmlns:a16="http://schemas.microsoft.com/office/drawing/2014/main" id="{73C25F9E-3E97-4097-B503-5116E844879A}"/>
+                <a16:creationId xmlns:a16="http://schemas.microsoft.com/office/drawing/2014/main" id="{0DBC5C7A-5E25-401D-8A91-2E3C67142370}"/>
               </a:ext>
             </a:extLst>
           </p:cNvPr>
@@ -11968,7 +13398,7 @@
           <p:cNvPr id="15" name="Chart">
             <a:extLst xmlns:a="http://schemas.openxmlformats.org/drawingml/2006/main">
               <a:ext uri="{FF2B5EF4-FFF2-40B4-BE49-F238E27FC236}">
-                <a16:creationId xmlns:a16="http://schemas.microsoft.com/office/drawing/2014/main" id="{068A4C5C-D339-48F5-BE27-B3827EBDC466}"/>
+                <a16:creationId xmlns:a16="http://schemas.microsoft.com/office/drawing/2014/main" id="{FA3D24A1-DACE-40F1-92D9-88BE783EDC9A}"/>
               </a:ext>
             </a:extLst>
           </p:cNvPr>
@@ -11981,7 +13411,7 @@
         </p:xfrm>
         <a:graphic xmlns:a="http://schemas.openxmlformats.org/drawingml/2006/main">
           <a:graphicData uri="http://schemas.openxmlformats.org/drawingml/2006/chart">
-            <c:chart xmlns:r="http://schemas.openxmlformats.org/officeDocument/2006/relationships" xmlns:c="http://schemas.openxmlformats.org/drawingml/2006/chart" r:id="R6c5a540893d74c2b"/>
+            <c:chart xmlns:r="http://schemas.openxmlformats.org/officeDocument/2006/relationships" xmlns:c="http://schemas.openxmlformats.org/drawingml/2006/chart" r:id="R2df22954b45440e0"/>
           </a:graphicData>
         </a:graphic>
       </p:graphicFrame>
@@ -11990,7 +13420,7 @@
           <p:cNvPr id="16" name="">
             <a:extLst xmlns:a="http://schemas.openxmlformats.org/drawingml/2006/main">
               <a:ext uri="{FF2B5EF4-FFF2-40B4-BE49-F238E27FC236}">
-                <a16:creationId xmlns:a16="http://schemas.microsoft.com/office/drawing/2014/main" id="{AE85CCC6-D6F1-441A-9B80-07239529B3FB}"/>
+                <a16:creationId xmlns:a16="http://schemas.microsoft.com/office/drawing/2014/main" id="{F38BAE88-10A1-4B0D-B052-C674379DE9A8}"/>
               </a:ext>
             </a:extLst>
           </p:cNvPr>
@@ -12056,7 +13486,7 @@
           <p:cNvPr id="17" name="">
             <a:extLst xmlns:a="http://schemas.openxmlformats.org/drawingml/2006/main">
               <a:ext uri="{FF2B5EF4-FFF2-40B4-BE49-F238E27FC236}">
-                <a16:creationId xmlns:a16="http://schemas.microsoft.com/office/drawing/2014/main" id="{06A8DAF9-F50A-46F9-A579-E7915572B97F}"/>
+                <a16:creationId xmlns:a16="http://schemas.microsoft.com/office/drawing/2014/main" id="{ACBEA023-3979-419A-B9F7-06CFA99257AF}"/>
               </a:ext>
             </a:extLst>
           </p:cNvPr>
@@ -12122,7 +13552,7 @@
           <p:cNvPr id="18" name="">
             <a:extLst xmlns:a="http://schemas.openxmlformats.org/drawingml/2006/main">
               <a:ext uri="{FF2B5EF4-FFF2-40B4-BE49-F238E27FC236}">
-                <a16:creationId xmlns:a16="http://schemas.microsoft.com/office/drawing/2014/main" id="{D2E54830-5A08-4AD5-89E7-3FE688CD33CE}"/>
+                <a16:creationId xmlns:a16="http://schemas.microsoft.com/office/drawing/2014/main" id="{4F37BF22-00AF-4D1A-ADF0-3DFFFDF9CE78}"/>
               </a:ext>
             </a:extLst>
           </p:cNvPr>
@@ -12188,7 +13618,7 @@
           <p:cNvPr id="19" name="Chart">
             <a:extLst xmlns:a="http://schemas.openxmlformats.org/drawingml/2006/main">
               <a:ext uri="{FF2B5EF4-FFF2-40B4-BE49-F238E27FC236}">
-                <a16:creationId xmlns:a16="http://schemas.microsoft.com/office/drawing/2014/main" id="{9526678A-570E-4006-BA34-0313F6C5D59C}"/>
+                <a16:creationId xmlns:a16="http://schemas.microsoft.com/office/drawing/2014/main" id="{8D0668DF-A343-4AAB-9810-32673D0B3F2C}"/>
               </a:ext>
             </a:extLst>
           </p:cNvPr>
@@ -12201,7 +13631,7 @@
         </p:xfrm>
         <a:graphic xmlns:a="http://schemas.openxmlformats.org/drawingml/2006/main">
           <a:graphicData uri="http://schemas.openxmlformats.org/drawingml/2006/chart">
-            <c:chart xmlns:r="http://schemas.openxmlformats.org/officeDocument/2006/relationships" xmlns:c="http://schemas.openxmlformats.org/drawingml/2006/chart" r:id="Rb21e99281b9349b9"/>
+            <c:chart xmlns:r="http://schemas.openxmlformats.org/officeDocument/2006/relationships" xmlns:c="http://schemas.openxmlformats.org/drawingml/2006/chart" r:id="R1f8206adc9104131"/>
           </a:graphicData>
         </a:graphic>
       </p:graphicFrame>
@@ -12210,7 +13640,7 @@
           <p:cNvPr id="20" name="">
             <a:extLst xmlns:a="http://schemas.openxmlformats.org/drawingml/2006/main">
               <a:ext uri="{FF2B5EF4-FFF2-40B4-BE49-F238E27FC236}">
-                <a16:creationId xmlns:a16="http://schemas.microsoft.com/office/drawing/2014/main" id="{D66570C9-90FB-4DAB-988D-5E2B5F1E1B76}"/>
+                <a16:creationId xmlns:a16="http://schemas.microsoft.com/office/drawing/2014/main" id="{6633D29A-B85A-46A9-BA7B-F89D018994F8}"/>
               </a:ext>
             </a:extLst>
           </p:cNvPr>
@@ -12276,7 +13706,7 @@
           <p:cNvPr id="21" name="">
             <a:extLst xmlns:a="http://schemas.openxmlformats.org/drawingml/2006/main">
               <a:ext uri="{FF2B5EF4-FFF2-40B4-BE49-F238E27FC236}">
-                <a16:creationId xmlns:a16="http://schemas.microsoft.com/office/drawing/2014/main" id="{63EBB13E-A61E-4EAC-B4B6-6FA462BA0AFF}"/>
+                <a16:creationId xmlns:a16="http://schemas.microsoft.com/office/drawing/2014/main" id="{79F3DD77-004E-4375-93E8-627E424208C1}"/>
               </a:ext>
             </a:extLst>
           </p:cNvPr>
@@ -12342,7 +13772,7 @@
           <p:cNvPr id="22" name="">
             <a:extLst xmlns:a="http://schemas.openxmlformats.org/drawingml/2006/main">
               <a:ext uri="{FF2B5EF4-FFF2-40B4-BE49-F238E27FC236}">
-                <a16:creationId xmlns:a16="http://schemas.microsoft.com/office/drawing/2014/main" id="{BCCF1C3A-A79C-4E6A-92D2-D89D85164CDC}"/>
+                <a16:creationId xmlns:a16="http://schemas.microsoft.com/office/drawing/2014/main" id="{A2507981-BFCA-4722-8E10-75D328F15AD8}"/>
               </a:ext>
             </a:extLst>
           </p:cNvPr>
@@ -12406,7 +13836,873 @@
     </p:spTree>
     <p:extLst>
       <p:ext uri="{BB962C8B-B14F-4D97-AF65-F5344CB8AC3E}">
-        <p14:creationId xmlns:p14="http://schemas.microsoft.com/office/powerpoint/2010/main" val="1913916461"/>
+        <p14:creationId xmlns:p14="http://schemas.microsoft.com/office/powerpoint/2010/main" val="18119054"/>
+      </p:ext>
+    </p:extLst>
+  </p:cSld>
+</p:sld>
+</file>
+
+<file path=ppt/slides/slide5.xml><?xml version="1.0" encoding="utf-8"?>
+<p:sld xmlns:p="http://schemas.openxmlformats.org/presentationml/2006/main">
+  <p:cSld>
+    <p:bg>
+      <p:bgPr>
+        <a:solidFill xmlns:a="http://schemas.openxmlformats.org/drawingml/2006/main">
+          <a:srgbClr val="FFFFFF"/>
+        </a:solidFill>
+      </p:bgPr>
+    </p:bg>
+    <p:spTree>
+      <p:nvGrpSpPr>
+        <p:cNvPr id="1" name=""/>
+        <p:cNvGrpSpPr/>
+        <p:nvPr/>
+      </p:nvGrpSpPr>
+      <p:grpSpPr>
+        <a:xfrm xmlns:a="http://schemas.openxmlformats.org/drawingml/2006/main"/>
+      </p:grpSpPr>
+      <p:sp>
+        <p:nvSpPr>
+          <p:cNvPr id="14" name="">
+            <a:extLst xmlns:a="http://schemas.openxmlformats.org/drawingml/2006/main">
+              <a:ext uri="{FF2B5EF4-FFF2-40B4-BE49-F238E27FC236}">
+                <a16:creationId xmlns:a16="http://schemas.microsoft.com/office/drawing/2014/main" id="{8427FA3D-D72F-4C9D-845B-A8E0D9045D25}"/>
+              </a:ext>
+            </a:extLst>
+          </p:cNvPr>
+          <p:cNvSpPr>
+            <a:spLocks xmlns:a="http://schemas.openxmlformats.org/drawingml/2006/main" noGrp="1"/>
+          </p:cNvSpPr>
+          <p:nvPr/>
+        </p:nvSpPr>
+        <p:spPr>
+          <a:xfrm xmlns:a="http://schemas.openxmlformats.org/drawingml/2006/main">
+            <a:off x="419100" y="266700"/>
+            <a:ext cx="11353800" cy="619125"/>
+          </a:xfrm>
+          <a:prstGeom xmlns:a="http://schemas.openxmlformats.org/drawingml/2006/main" prst="rect">
+            <a:avLst/>
+          </a:prstGeom>
+          <a:noFill xmlns:a="http://schemas.openxmlformats.org/drawingml/2006/main"/>
+          <a:ln xmlns:a="http://schemas.openxmlformats.org/drawingml/2006/main" w="0">
+            <a:noFill/>
+          </a:ln>
+        </p:spPr>
+        <p:txBody>
+          <a:bodyPr xmlns:a="http://schemas.openxmlformats.org/drawingml/2006/main" lIns="0" tIns="0" rIns="0" bIns="0"/>
+          <a:lstStyle xmlns:a="http://schemas.openxmlformats.org/drawingml/2006/main">
+            <a:defPPr>
+              <a:defRPr sz="3450">
+                <a:solidFill>
+                  <a:srgbClr val="38332E"/>
+                </a:solidFill>
+                <a:latin typeface="Ubuntu Condensed"/>
+                <a:ea typeface="Ubuntu Condensed"/>
+                <a:cs typeface="Ubuntu Condensed"/>
+              </a:defRPr>
+            </a:defPPr>
+          </a:lstStyle>
+          <a:p xmlns:a="http://schemas.openxmlformats.org/drawingml/2006/main">
+            <a:pPr>
+              <a:defRPr sz="3450">
+                <a:solidFill>
+                  <a:srgbClr val="38332E"/>
+                </a:solidFill>
+                <a:latin typeface="Ubuntu Condensed"/>
+                <a:ea typeface="Ubuntu Condensed"/>
+                <a:cs typeface="Ubuntu Condensed"/>
+              </a:defRPr>
+            </a:pPr>
+            <a:r>
+              <a:rPr sz="3450">
+                <a:solidFill>
+                  <a:srgbClr val="38332E"/>
+                </a:solidFill>
+                <a:latin typeface="Ubuntu Condensed"/>
+                <a:ea typeface="Ubuntu Condensed"/>
+                <a:cs typeface="Ubuntu Condensed"/>
+              </a:rPr>
+              <a:t>Highlighting the selected country</a:t>
+            </a:r>
+          </a:p>
+        </p:txBody>
+      </p:sp>
+      <p:sp>
+        <p:nvSpPr>
+          <p:cNvPr id="2" name="">
+            <a:extLst xmlns:a="http://schemas.openxmlformats.org/drawingml/2006/main">
+              <a:ext uri="{FF2B5EF4-FFF2-40B4-BE49-F238E27FC236}">
+                <a16:creationId xmlns:a16="http://schemas.microsoft.com/office/drawing/2014/main" id="{05A88776-CEE5-4B1A-B915-17CFA517708D}"/>
+              </a:ext>
+            </a:extLst>
+          </p:cNvPr>
+          <p:cNvSpPr>
+            <a:spLocks xmlns:a="http://schemas.openxmlformats.org/drawingml/2006/main" noGrp="1"/>
+          </p:cNvSpPr>
+          <p:nvPr/>
+        </p:nvSpPr>
+        <p:spPr>
+          <a:xfrm xmlns:a="http://schemas.openxmlformats.org/drawingml/2006/main">
+            <a:off x="438150" y="990600"/>
+            <a:ext cx="11334750" cy="428625"/>
+          </a:xfrm>
+          <a:prstGeom xmlns:a="http://schemas.openxmlformats.org/drawingml/2006/main" prst="rect">
+            <a:avLst/>
+          </a:prstGeom>
+          <a:noFill xmlns:a="http://schemas.openxmlformats.org/drawingml/2006/main"/>
+          <a:ln xmlns:a="http://schemas.openxmlformats.org/drawingml/2006/main" w="0">
+            <a:noFill/>
+          </a:ln>
+        </p:spPr>
+        <p:txBody>
+          <a:bodyPr xmlns:a="http://schemas.openxmlformats.org/drawingml/2006/main" lIns="0" tIns="0" rIns="0" bIns="0"/>
+          <a:lstStyle xmlns:a="http://schemas.openxmlformats.org/drawingml/2006/main">
+            <a:defPPr>
+              <a:defRPr sz="1875">
+                <a:solidFill>
+                  <a:srgbClr val="81796F"/>
+                </a:solidFill>
+                <a:latin typeface="Ubuntu Condensed"/>
+                <a:ea typeface="Ubuntu Condensed"/>
+                <a:cs typeface="Ubuntu Condensed"/>
+              </a:defRPr>
+            </a:defPPr>
+          </a:lstStyle>
+          <a:p xmlns:a="http://schemas.openxmlformats.org/drawingml/2006/main">
+            <a:pPr>
+              <a:defRPr sz="1875">
+                <a:solidFill>
+                  <a:srgbClr val="81796F"/>
+                </a:solidFill>
+                <a:latin typeface="Ubuntu Condensed"/>
+                <a:ea typeface="Ubuntu Condensed"/>
+                <a:cs typeface="Ubuntu Condensed"/>
+              </a:defRPr>
+            </a:pPr>
+            <a:r>
+              <a:rPr sz="1875">
+                <a:solidFill>
+                  <a:srgbClr val="81796F"/>
+                </a:solidFill>
+                <a:latin typeface="Ubuntu Condensed"/>
+                <a:ea typeface="Ubuntu Condensed"/>
+                <a:cs typeface="Ubuntu Condensed"/>
+              </a:rPr>
+              <a:t>Dashboard &gt; Actions &gt; Add Action &gt; Highlight</a:t>
+            </a:r>
+          </a:p>
+        </p:txBody>
+      </p:sp>
+      <p:sp>
+        <p:nvSpPr>
+          <p:cNvPr id="3" name="">
+            <a:extLst xmlns:a="http://schemas.openxmlformats.org/drawingml/2006/main">
+              <a:ext uri="{FF2B5EF4-FFF2-40B4-BE49-F238E27FC236}">
+                <a16:creationId xmlns:a16="http://schemas.microsoft.com/office/drawing/2014/main" id="{A4BA0FC3-16F3-4CC5-8618-771A4B1E26DD}"/>
+              </a:ext>
+            </a:extLst>
+          </p:cNvPr>
+          <p:cNvSpPr>
+            <a:spLocks xmlns:a="http://schemas.openxmlformats.org/drawingml/2006/main" noGrp="1"/>
+          </p:cNvSpPr>
+          <p:nvPr/>
+        </p:nvSpPr>
+        <p:spPr>
+          <a:xfrm xmlns:a="http://schemas.openxmlformats.org/drawingml/2006/main">
+            <a:off x="457200" y="1762125"/>
+            <a:ext cx="4857750" cy="266700"/>
+          </a:xfrm>
+          <a:prstGeom xmlns:a="http://schemas.openxmlformats.org/drawingml/2006/main" prst="rect">
+            <a:avLst/>
+          </a:prstGeom>
+          <a:noFill xmlns:a="http://schemas.openxmlformats.org/drawingml/2006/main"/>
+          <a:ln xmlns:a="http://schemas.openxmlformats.org/drawingml/2006/main" w="0">
+            <a:noFill/>
+          </a:ln>
+        </p:spPr>
+        <p:txBody>
+          <a:bodyPr xmlns:a="http://schemas.openxmlformats.org/drawingml/2006/main" lIns="0" tIns="0" rIns="0" bIns="0"/>
+          <a:lstStyle xmlns:a="http://schemas.openxmlformats.org/drawingml/2006/main">
+            <a:defPPr>
+              <a:defRPr sz="1725">
+                <a:solidFill>
+                  <a:srgbClr val="81796F"/>
+                </a:solidFill>
+                <a:latin typeface="Ubuntu Condensed"/>
+                <a:ea typeface="Ubuntu Condensed"/>
+                <a:cs typeface="Ubuntu Condensed"/>
+              </a:defRPr>
+            </a:defPPr>
+          </a:lstStyle>
+          <a:p xmlns:a="http://schemas.openxmlformats.org/drawingml/2006/main">
+            <a:pPr>
+              <a:defRPr sz="1725">
+                <a:solidFill>
+                  <a:srgbClr val="81796F"/>
+                </a:solidFill>
+                <a:latin typeface="Ubuntu Condensed"/>
+                <a:ea typeface="Ubuntu Condensed"/>
+                <a:cs typeface="Ubuntu Condensed"/>
+              </a:defRPr>
+            </a:pPr>
+            <a:r>
+              <a:rPr sz="1725">
+                <a:solidFill>
+                  <a:srgbClr val="81796F"/>
+                </a:solidFill>
+                <a:latin typeface="Ubuntu Condensed"/>
+                <a:ea typeface="Ubuntu Condensed"/>
+                <a:cs typeface="Ubuntu Condensed"/>
+              </a:rPr>
+              <a:t>Source sheet</a:t>
+            </a:r>
+          </a:p>
+        </p:txBody>
+      </p:sp>
+      <p:sp>
+        <p:nvSpPr>
+          <p:cNvPr id="4" name="">
+            <a:extLst xmlns:a="http://schemas.openxmlformats.org/drawingml/2006/main">
+              <a:ext uri="{FF2B5EF4-FFF2-40B4-BE49-F238E27FC236}">
+                <a16:creationId xmlns:a16="http://schemas.microsoft.com/office/drawing/2014/main" id="{EAC5D4C1-1BF9-40BF-B293-87DF9B3BA965}"/>
+              </a:ext>
+            </a:extLst>
+          </p:cNvPr>
+          <p:cNvSpPr>
+            <a:spLocks xmlns:a="http://schemas.openxmlformats.org/drawingml/2006/main" noGrp="1"/>
+          </p:cNvSpPr>
+          <p:nvPr/>
+        </p:nvSpPr>
+        <p:spPr>
+          <a:xfrm xmlns:a="http://schemas.openxmlformats.org/drawingml/2006/main">
+            <a:off x="457200" y="2085975"/>
+            <a:ext cx="5143500" cy="419100"/>
+          </a:xfrm>
+          <a:prstGeom xmlns:a="http://schemas.openxmlformats.org/drawingml/2006/main" prst="rect">
+            <a:avLst/>
+          </a:prstGeom>
+          <a:noFill xmlns:a="http://schemas.openxmlformats.org/drawingml/2006/main"/>
+          <a:ln xmlns:a="http://schemas.openxmlformats.org/drawingml/2006/main" w="0">
+            <a:noFill/>
+          </a:ln>
+        </p:spPr>
+        <p:txBody>
+          <a:bodyPr xmlns:a="http://schemas.openxmlformats.org/drawingml/2006/main" lIns="0" tIns="0" rIns="0" bIns="0"/>
+          <a:lstStyle xmlns:a="http://schemas.openxmlformats.org/drawingml/2006/main">
+            <a:defPPr>
+              <a:defRPr sz="2250">
+                <a:solidFill>
+                  <a:srgbClr val="38332E"/>
+                </a:solidFill>
+                <a:latin typeface="Ubuntu Condensed"/>
+                <a:ea typeface="Ubuntu Condensed"/>
+                <a:cs typeface="Ubuntu Condensed"/>
+              </a:defRPr>
+            </a:defPPr>
+          </a:lstStyle>
+          <a:p xmlns:a="http://schemas.openxmlformats.org/drawingml/2006/main">
+            <a:pPr>
+              <a:defRPr sz="2250">
+                <a:solidFill>
+                  <a:srgbClr val="38332E"/>
+                </a:solidFill>
+                <a:latin typeface="Ubuntu Condensed"/>
+                <a:ea typeface="Ubuntu Condensed"/>
+                <a:cs typeface="Ubuntu Condensed"/>
+              </a:defRPr>
+            </a:pPr>
+            <a:r>
+              <a:rPr sz="2250">
+                <a:solidFill>
+                  <a:srgbClr val="38332E"/>
+                </a:solidFill>
+                <a:latin typeface="Ubuntu Condensed"/>
+                <a:ea typeface="Ubuntu Condensed"/>
+                <a:cs typeface="Ubuntu Condensed"/>
+              </a:rPr>
+              <a:t>World</a:t>
+            </a:r>
+          </a:p>
+        </p:txBody>
+      </p:sp>
+      <p:sp>
+        <p:nvSpPr>
+          <p:cNvPr id="5" name="">
+            <a:extLst xmlns:a="http://schemas.openxmlformats.org/drawingml/2006/main">
+              <a:ext uri="{FF2B5EF4-FFF2-40B4-BE49-F238E27FC236}">
+                <a16:creationId xmlns:a16="http://schemas.microsoft.com/office/drawing/2014/main" id="{B7CF8607-45A4-420A-BFB8-2A16E160AB12}"/>
+              </a:ext>
+            </a:extLst>
+          </p:cNvPr>
+          <p:cNvSpPr>
+            <a:spLocks xmlns:a="http://schemas.openxmlformats.org/drawingml/2006/main" noGrp="1"/>
+          </p:cNvSpPr>
+          <p:nvPr/>
+        </p:nvSpPr>
+        <p:spPr>
+          <a:xfrm xmlns:a="http://schemas.openxmlformats.org/drawingml/2006/main">
+            <a:off x="457200" y="2705100"/>
+            <a:ext cx="4857750" cy="266700"/>
+          </a:xfrm>
+          <a:prstGeom xmlns:a="http://schemas.openxmlformats.org/drawingml/2006/main" prst="rect">
+            <a:avLst/>
+          </a:prstGeom>
+          <a:noFill xmlns:a="http://schemas.openxmlformats.org/drawingml/2006/main"/>
+          <a:ln xmlns:a="http://schemas.openxmlformats.org/drawingml/2006/main" w="0">
+            <a:noFill/>
+          </a:ln>
+        </p:spPr>
+        <p:txBody>
+          <a:bodyPr xmlns:a="http://schemas.openxmlformats.org/drawingml/2006/main" lIns="0" tIns="0" rIns="0" bIns="0"/>
+          <a:lstStyle xmlns:a="http://schemas.openxmlformats.org/drawingml/2006/main">
+            <a:defPPr>
+              <a:defRPr sz="1725">
+                <a:solidFill>
+                  <a:srgbClr val="81796F"/>
+                </a:solidFill>
+                <a:latin typeface="Ubuntu Condensed"/>
+                <a:ea typeface="Ubuntu Condensed"/>
+                <a:cs typeface="Ubuntu Condensed"/>
+              </a:defRPr>
+            </a:defPPr>
+          </a:lstStyle>
+          <a:p xmlns:a="http://schemas.openxmlformats.org/drawingml/2006/main">
+            <a:pPr>
+              <a:defRPr sz="1725">
+                <a:solidFill>
+                  <a:srgbClr val="81796F"/>
+                </a:solidFill>
+                <a:latin typeface="Ubuntu Condensed"/>
+                <a:ea typeface="Ubuntu Condensed"/>
+                <a:cs typeface="Ubuntu Condensed"/>
+              </a:defRPr>
+            </a:pPr>
+            <a:r>
+              <a:rPr sz="1725">
+                <a:solidFill>
+                  <a:srgbClr val="81796F"/>
+                </a:solidFill>
+                <a:latin typeface="Ubuntu Condensed"/>
+                <a:ea typeface="Ubuntu Condensed"/>
+                <a:cs typeface="Ubuntu Condensed"/>
+              </a:rPr>
+              <a:t>Run action on</a:t>
+            </a:r>
+          </a:p>
+        </p:txBody>
+      </p:sp>
+      <p:sp>
+        <p:nvSpPr>
+          <p:cNvPr id="6" name="">
+            <a:extLst xmlns:a="http://schemas.openxmlformats.org/drawingml/2006/main">
+              <a:ext uri="{FF2B5EF4-FFF2-40B4-BE49-F238E27FC236}">
+                <a16:creationId xmlns:a16="http://schemas.microsoft.com/office/drawing/2014/main" id="{E13BCFFE-FFC2-4E73-BE53-87943556BC8C}"/>
+              </a:ext>
+            </a:extLst>
+          </p:cNvPr>
+          <p:cNvSpPr>
+            <a:spLocks xmlns:a="http://schemas.openxmlformats.org/drawingml/2006/main" noGrp="1"/>
+          </p:cNvSpPr>
+          <p:nvPr/>
+        </p:nvSpPr>
+        <p:spPr>
+          <a:xfrm xmlns:a="http://schemas.openxmlformats.org/drawingml/2006/main">
+            <a:off x="457200" y="3028950"/>
+            <a:ext cx="5143500" cy="419100"/>
+          </a:xfrm>
+          <a:prstGeom xmlns:a="http://schemas.openxmlformats.org/drawingml/2006/main" prst="rect">
+            <a:avLst/>
+          </a:prstGeom>
+          <a:noFill xmlns:a="http://schemas.openxmlformats.org/drawingml/2006/main"/>
+          <a:ln xmlns:a="http://schemas.openxmlformats.org/drawingml/2006/main" w="0">
+            <a:noFill/>
+          </a:ln>
+        </p:spPr>
+        <p:txBody>
+          <a:bodyPr xmlns:a="http://schemas.openxmlformats.org/drawingml/2006/main" lIns="0" tIns="0" rIns="0" bIns="0"/>
+          <a:lstStyle xmlns:a="http://schemas.openxmlformats.org/drawingml/2006/main">
+            <a:defPPr>
+              <a:defRPr sz="2250">
+                <a:solidFill>
+                  <a:srgbClr val="38332E"/>
+                </a:solidFill>
+                <a:latin typeface="Ubuntu Condensed"/>
+                <a:ea typeface="Ubuntu Condensed"/>
+                <a:cs typeface="Ubuntu Condensed"/>
+              </a:defRPr>
+            </a:defPPr>
+          </a:lstStyle>
+          <a:p xmlns:a="http://schemas.openxmlformats.org/drawingml/2006/main">
+            <a:pPr>
+              <a:defRPr sz="2250">
+                <a:solidFill>
+                  <a:srgbClr val="38332E"/>
+                </a:solidFill>
+                <a:latin typeface="Ubuntu Condensed"/>
+                <a:ea typeface="Ubuntu Condensed"/>
+                <a:cs typeface="Ubuntu Condensed"/>
+              </a:defRPr>
+            </a:pPr>
+            <a:r>
+              <a:rPr sz="2250">
+                <a:solidFill>
+                  <a:srgbClr val="38332E"/>
+                </a:solidFill>
+                <a:latin typeface="Ubuntu Condensed"/>
+                <a:ea typeface="Ubuntu Condensed"/>
+                <a:cs typeface="Ubuntu Condensed"/>
+              </a:rPr>
+              <a:t>Select</a:t>
+            </a:r>
+          </a:p>
+        </p:txBody>
+      </p:sp>
+      <p:sp>
+        <p:nvSpPr>
+          <p:cNvPr id="7" name="">
+            <a:extLst xmlns:a="http://schemas.openxmlformats.org/drawingml/2006/main">
+              <a:ext uri="{FF2B5EF4-FFF2-40B4-BE49-F238E27FC236}">
+                <a16:creationId xmlns:a16="http://schemas.microsoft.com/office/drawing/2014/main" id="{2E9BFEA4-B196-4D59-8328-DC5B189CE25C}"/>
+              </a:ext>
+            </a:extLst>
+          </p:cNvPr>
+          <p:cNvSpPr>
+            <a:spLocks xmlns:a="http://schemas.openxmlformats.org/drawingml/2006/main" noGrp="1"/>
+          </p:cNvSpPr>
+          <p:nvPr/>
+        </p:nvSpPr>
+        <p:spPr>
+          <a:xfrm xmlns:a="http://schemas.openxmlformats.org/drawingml/2006/main">
+            <a:off x="457200" y="3648075"/>
+            <a:ext cx="4857750" cy="266700"/>
+          </a:xfrm>
+          <a:prstGeom xmlns:a="http://schemas.openxmlformats.org/drawingml/2006/main" prst="rect">
+            <a:avLst/>
+          </a:prstGeom>
+          <a:noFill xmlns:a="http://schemas.openxmlformats.org/drawingml/2006/main"/>
+          <a:ln xmlns:a="http://schemas.openxmlformats.org/drawingml/2006/main" w="0">
+            <a:noFill/>
+          </a:ln>
+        </p:spPr>
+        <p:txBody>
+          <a:bodyPr xmlns:a="http://schemas.openxmlformats.org/drawingml/2006/main" lIns="0" tIns="0" rIns="0" bIns="0"/>
+          <a:lstStyle xmlns:a="http://schemas.openxmlformats.org/drawingml/2006/main">
+            <a:defPPr>
+              <a:defRPr sz="1725">
+                <a:solidFill>
+                  <a:srgbClr val="81796F"/>
+                </a:solidFill>
+                <a:latin typeface="Ubuntu Condensed"/>
+                <a:ea typeface="Ubuntu Condensed"/>
+                <a:cs typeface="Ubuntu Condensed"/>
+              </a:defRPr>
+            </a:defPPr>
+          </a:lstStyle>
+          <a:p xmlns:a="http://schemas.openxmlformats.org/drawingml/2006/main">
+            <a:pPr>
+              <a:defRPr sz="1725">
+                <a:solidFill>
+                  <a:srgbClr val="81796F"/>
+                </a:solidFill>
+                <a:latin typeface="Ubuntu Condensed"/>
+                <a:ea typeface="Ubuntu Condensed"/>
+                <a:cs typeface="Ubuntu Condensed"/>
+              </a:defRPr>
+            </a:pPr>
+            <a:r>
+              <a:rPr sz="1725">
+                <a:solidFill>
+                  <a:srgbClr val="81796F"/>
+                </a:solidFill>
+                <a:latin typeface="Ubuntu Condensed"/>
+                <a:ea typeface="Ubuntu Condensed"/>
+                <a:cs typeface="Ubuntu Condensed"/>
+              </a:rPr>
+              <a:t>Target sheet</a:t>
+            </a:r>
+          </a:p>
+        </p:txBody>
+      </p:sp>
+      <p:sp>
+        <p:nvSpPr>
+          <p:cNvPr id="8" name="">
+            <a:extLst xmlns:a="http://schemas.openxmlformats.org/drawingml/2006/main">
+              <a:ext uri="{FF2B5EF4-FFF2-40B4-BE49-F238E27FC236}">
+                <a16:creationId xmlns:a16="http://schemas.microsoft.com/office/drawing/2014/main" id="{74B30C78-DE17-45D7-94B1-2E3C78213B29}"/>
+              </a:ext>
+            </a:extLst>
+          </p:cNvPr>
+          <p:cNvSpPr>
+            <a:spLocks xmlns:a="http://schemas.openxmlformats.org/drawingml/2006/main" noGrp="1"/>
+          </p:cNvSpPr>
+          <p:nvPr/>
+        </p:nvSpPr>
+        <p:spPr>
+          <a:xfrm xmlns:a="http://schemas.openxmlformats.org/drawingml/2006/main">
+            <a:off x="457200" y="3971925"/>
+            <a:ext cx="5143500" cy="419100"/>
+          </a:xfrm>
+          <a:prstGeom xmlns:a="http://schemas.openxmlformats.org/drawingml/2006/main" prst="rect">
+            <a:avLst/>
+          </a:prstGeom>
+          <a:noFill xmlns:a="http://schemas.openxmlformats.org/drawingml/2006/main"/>
+          <a:ln xmlns:a="http://schemas.openxmlformats.org/drawingml/2006/main" w="0">
+            <a:noFill/>
+          </a:ln>
+        </p:spPr>
+        <p:txBody>
+          <a:bodyPr xmlns:a="http://schemas.openxmlformats.org/drawingml/2006/main" lIns="0" tIns="0" rIns="0" bIns="0"/>
+          <a:lstStyle xmlns:a="http://schemas.openxmlformats.org/drawingml/2006/main">
+            <a:defPPr>
+              <a:defRPr sz="2250">
+                <a:solidFill>
+                  <a:srgbClr val="38332E"/>
+                </a:solidFill>
+                <a:latin typeface="Ubuntu Condensed"/>
+                <a:ea typeface="Ubuntu Condensed"/>
+                <a:cs typeface="Ubuntu Condensed"/>
+              </a:defRPr>
+            </a:defPPr>
+          </a:lstStyle>
+          <a:p xmlns:a="http://schemas.openxmlformats.org/drawingml/2006/main">
+            <a:pPr>
+              <a:defRPr sz="2250">
+                <a:solidFill>
+                  <a:srgbClr val="38332E"/>
+                </a:solidFill>
+                <a:latin typeface="Ubuntu Condensed"/>
+                <a:ea typeface="Ubuntu Condensed"/>
+                <a:cs typeface="Ubuntu Condensed"/>
+              </a:defRPr>
+            </a:pPr>
+            <a:r>
+              <a:rPr sz="2250">
+                <a:solidFill>
+                  <a:srgbClr val="38332E"/>
+                </a:solidFill>
+                <a:latin typeface="Ubuntu Condensed"/>
+                <a:ea typeface="Ubuntu Condensed"/>
+                <a:cs typeface="Ubuntu Condensed"/>
+              </a:rPr>
+              <a:t>World</a:t>
+            </a:r>
+          </a:p>
+        </p:txBody>
+      </p:sp>
+      <p:sp>
+        <p:nvSpPr>
+          <p:cNvPr id="9" name="">
+            <a:extLst xmlns:a="http://schemas.openxmlformats.org/drawingml/2006/main">
+              <a:ext uri="{FF2B5EF4-FFF2-40B4-BE49-F238E27FC236}">
+                <a16:creationId xmlns:a16="http://schemas.microsoft.com/office/drawing/2014/main" id="{BB9C6088-EFDA-4D79-A0A6-41406E2117C3}"/>
+              </a:ext>
+            </a:extLst>
+          </p:cNvPr>
+          <p:cNvSpPr>
+            <a:spLocks xmlns:a="http://schemas.openxmlformats.org/drawingml/2006/main" noGrp="1"/>
+          </p:cNvSpPr>
+          <p:nvPr/>
+        </p:nvSpPr>
+        <p:spPr>
+          <a:xfrm xmlns:a="http://schemas.openxmlformats.org/drawingml/2006/main">
+            <a:off x="457200" y="4591050"/>
+            <a:ext cx="4857750" cy="266700"/>
+          </a:xfrm>
+          <a:prstGeom xmlns:a="http://schemas.openxmlformats.org/drawingml/2006/main" prst="rect">
+            <a:avLst/>
+          </a:prstGeom>
+          <a:noFill xmlns:a="http://schemas.openxmlformats.org/drawingml/2006/main"/>
+          <a:ln xmlns:a="http://schemas.openxmlformats.org/drawingml/2006/main" w="0">
+            <a:noFill/>
+          </a:ln>
+        </p:spPr>
+        <p:txBody>
+          <a:bodyPr xmlns:a="http://schemas.openxmlformats.org/drawingml/2006/main" lIns="0" tIns="0" rIns="0" bIns="0"/>
+          <a:lstStyle xmlns:a="http://schemas.openxmlformats.org/drawingml/2006/main">
+            <a:defPPr>
+              <a:defRPr sz="1725">
+                <a:solidFill>
+                  <a:srgbClr val="81796F"/>
+                </a:solidFill>
+                <a:latin typeface="Ubuntu Condensed"/>
+                <a:ea typeface="Ubuntu Condensed"/>
+                <a:cs typeface="Ubuntu Condensed"/>
+              </a:defRPr>
+            </a:defPPr>
+          </a:lstStyle>
+          <a:p xmlns:a="http://schemas.openxmlformats.org/drawingml/2006/main">
+            <a:pPr>
+              <a:defRPr sz="1725">
+                <a:solidFill>
+                  <a:srgbClr val="81796F"/>
+                </a:solidFill>
+                <a:latin typeface="Ubuntu Condensed"/>
+                <a:ea typeface="Ubuntu Condensed"/>
+                <a:cs typeface="Ubuntu Condensed"/>
+              </a:defRPr>
+            </a:pPr>
+            <a:r>
+              <a:rPr sz="1725">
+                <a:solidFill>
+                  <a:srgbClr val="81796F"/>
+                </a:solidFill>
+                <a:latin typeface="Ubuntu Condensed"/>
+                <a:ea typeface="Ubuntu Condensed"/>
+                <a:cs typeface="Ubuntu Condensed"/>
+              </a:rPr>
+              <a:t>Target Highlighting</a:t>
+            </a:r>
+          </a:p>
+        </p:txBody>
+      </p:sp>
+      <p:sp>
+        <p:nvSpPr>
+          <p:cNvPr id="10" name="">
+            <a:extLst xmlns:a="http://schemas.openxmlformats.org/drawingml/2006/main">
+              <a:ext uri="{FF2B5EF4-FFF2-40B4-BE49-F238E27FC236}">
+                <a16:creationId xmlns:a16="http://schemas.microsoft.com/office/drawing/2014/main" id="{1BAF0093-92F9-460D-89B3-B0D0557B717C}"/>
+              </a:ext>
+            </a:extLst>
+          </p:cNvPr>
+          <p:cNvSpPr>
+            <a:spLocks xmlns:a="http://schemas.openxmlformats.org/drawingml/2006/main" noGrp="1"/>
+          </p:cNvSpPr>
+          <p:nvPr/>
+        </p:nvSpPr>
+        <p:spPr>
+          <a:xfrm xmlns:a="http://schemas.openxmlformats.org/drawingml/2006/main">
+            <a:off x="457200" y="4914900"/>
+            <a:ext cx="5143500" cy="419100"/>
+          </a:xfrm>
+          <a:prstGeom xmlns:a="http://schemas.openxmlformats.org/drawingml/2006/main" prst="rect">
+            <a:avLst/>
+          </a:prstGeom>
+          <a:noFill xmlns:a="http://schemas.openxmlformats.org/drawingml/2006/main"/>
+          <a:ln xmlns:a="http://schemas.openxmlformats.org/drawingml/2006/main" w="0">
+            <a:noFill/>
+          </a:ln>
+        </p:spPr>
+        <p:txBody>
+          <a:bodyPr xmlns:a="http://schemas.openxmlformats.org/drawingml/2006/main" lIns="0" tIns="0" rIns="0" bIns="0"/>
+          <a:lstStyle xmlns:a="http://schemas.openxmlformats.org/drawingml/2006/main">
+            <a:defPPr>
+              <a:defRPr sz="2250">
+                <a:solidFill>
+                  <a:srgbClr val="B23C50"/>
+                </a:solidFill>
+                <a:latin typeface="Ubuntu Condensed"/>
+                <a:ea typeface="Ubuntu Condensed"/>
+                <a:cs typeface="Ubuntu Condensed"/>
+              </a:defRPr>
+            </a:defPPr>
+          </a:lstStyle>
+          <a:p xmlns:a="http://schemas.openxmlformats.org/drawingml/2006/main">
+            <a:pPr>
+              <a:defRPr sz="2250">
+                <a:solidFill>
+                  <a:srgbClr val="B23C50"/>
+                </a:solidFill>
+                <a:latin typeface="Ubuntu Condensed"/>
+                <a:ea typeface="Ubuntu Condensed"/>
+                <a:cs typeface="Ubuntu Condensed"/>
+              </a:defRPr>
+            </a:pPr>
+            <a:r>
+              <a:rPr sz="2250">
+                <a:solidFill>
+                  <a:srgbClr val="B23C50"/>
+                </a:solidFill>
+                <a:latin typeface="Ubuntu Condensed"/>
+                <a:ea typeface="Ubuntu Condensed"/>
+                <a:cs typeface="Ubuntu Condensed"/>
+              </a:rPr>
+              <a:t>Selected Fields: Country</a:t>
+            </a:r>
+          </a:p>
+        </p:txBody>
+      </p:sp>
+      <p:graphicFrame>
+        <p:nvGraphicFramePr>
+          <p:cNvPr id="11" name="Chart">
+            <a:extLst xmlns:a="http://schemas.openxmlformats.org/drawingml/2006/main">
+              <a:ext uri="{FF2B5EF4-FFF2-40B4-BE49-F238E27FC236}">
+                <a16:creationId xmlns:a16="http://schemas.microsoft.com/office/drawing/2014/main" id="{D35E1179-49D8-491E-ACA6-0DA27B22A3D5}"/>
+              </a:ext>
+            </a:extLst>
+          </p:cNvPr>
+          <p:cNvGraphicFramePr/>
+          <p:nvPr/>
+        </p:nvGraphicFramePr>
+        <p:xfrm>
+          <a:off xmlns:a="http://schemas.openxmlformats.org/drawingml/2006/main" x="6143625" y="1714500"/>
+          <a:ext xmlns:a="http://schemas.openxmlformats.org/drawingml/2006/main" cx="5667375" cy="3276600"/>
+        </p:xfrm>
+        <a:graphic xmlns:a="http://schemas.openxmlformats.org/drawingml/2006/main">
+          <a:graphicData uri="http://schemas.openxmlformats.org/drawingml/2006/chart">
+            <c:chart xmlns:r="http://schemas.openxmlformats.org/officeDocument/2006/relationships" xmlns:c="http://schemas.openxmlformats.org/drawingml/2006/chart" r:id="Ra8b222ccd32549a0"/>
+          </a:graphicData>
+        </a:graphic>
+      </p:graphicFrame>
+      <p:sp>
+        <p:nvSpPr>
+          <p:cNvPr id="12" name="">
+            <a:extLst xmlns:a="http://schemas.openxmlformats.org/drawingml/2006/main">
+              <a:ext uri="{FF2B5EF4-FFF2-40B4-BE49-F238E27FC236}">
+                <a16:creationId xmlns:a16="http://schemas.microsoft.com/office/drawing/2014/main" id="{820850A5-391F-436B-BE3E-7FF4F9DF32FF}"/>
+              </a:ext>
+            </a:extLst>
+          </p:cNvPr>
+          <p:cNvSpPr>
+            <a:spLocks xmlns:a="http://schemas.openxmlformats.org/drawingml/2006/main" noGrp="1"/>
+          </p:cNvSpPr>
+          <p:nvPr/>
+        </p:nvSpPr>
+        <p:spPr>
+          <a:xfrm xmlns:a="http://schemas.openxmlformats.org/drawingml/2006/main">
+            <a:off x="6572250" y="5200650"/>
+            <a:ext cx="5143500" cy="762000"/>
+          </a:xfrm>
+          <a:prstGeom xmlns:a="http://schemas.openxmlformats.org/drawingml/2006/main" prst="rect">
+            <a:avLst/>
+          </a:prstGeom>
+          <a:noFill xmlns:a="http://schemas.openxmlformats.org/drawingml/2006/main"/>
+          <a:ln xmlns:a="http://schemas.openxmlformats.org/drawingml/2006/main" w="0">
+            <a:noFill/>
+          </a:ln>
+        </p:spPr>
+        <p:txBody>
+          <a:bodyPr xmlns:a="http://schemas.openxmlformats.org/drawingml/2006/main" lIns="0" tIns="0" rIns="0" bIns="0"/>
+          <a:lstStyle xmlns:a="http://schemas.openxmlformats.org/drawingml/2006/main">
+            <a:defPPr>
+              <a:defRPr sz="2025">
+                <a:solidFill>
+                  <a:srgbClr val="38332E"/>
+                </a:solidFill>
+                <a:latin typeface="Ubuntu Condensed"/>
+                <a:ea typeface="Ubuntu Condensed"/>
+                <a:cs typeface="Ubuntu Condensed"/>
+              </a:defRPr>
+            </a:defPPr>
+          </a:lstStyle>
+          <a:p xmlns:a="http://schemas.openxmlformats.org/drawingml/2006/main">
+            <a:pPr>
+              <a:defRPr sz="2025">
+                <a:solidFill>
+                  <a:srgbClr val="38332E"/>
+                </a:solidFill>
+                <a:latin typeface="Ubuntu Condensed"/>
+                <a:ea typeface="Ubuntu Condensed"/>
+                <a:cs typeface="Ubuntu Condensed"/>
+              </a:defRPr>
+            </a:pPr>
+            <a:r>
+              <a:rPr sz="2025">
+                <a:solidFill>
+                  <a:srgbClr val="38332E"/>
+                </a:solidFill>
+                <a:latin typeface="Ubuntu Condensed"/>
+                <a:ea typeface="Ubuntu Condensed"/>
+                <a:cs typeface="Ubuntu Condensed"/>
+              </a:rPr>
+              <a:t>Click Japan: other circles fade.</a:t>
+            </a:r>
+          </a:p>
+          <a:p xmlns:a="http://schemas.openxmlformats.org/drawingml/2006/main">
+            <a:pPr>
+              <a:defRPr sz="2025">
+                <a:solidFill>
+                  <a:srgbClr val="38332E"/>
+                </a:solidFill>
+                <a:latin typeface="Ubuntu Condensed"/>
+                <a:ea typeface="Ubuntu Condensed"/>
+                <a:cs typeface="Ubuntu Condensed"/>
+              </a:defRPr>
+            </a:pPr>
+            <a:r>
+              <a:rPr sz="2025">
+                <a:solidFill>
+                  <a:srgbClr val="38332E"/>
+                </a:solidFill>
+                <a:latin typeface="Ubuntu Condensed"/>
+                <a:ea typeface="Ubuntu Condensed"/>
+                <a:cs typeface="Ubuntu Condensed"/>
+              </a:rPr>
+              <a:t>Click empty space to clear.</a:t>
+            </a:r>
+          </a:p>
+        </p:txBody>
+      </p:sp>
+      <p:sp>
+        <p:nvSpPr>
+          <p:cNvPr id="13" name="">
+            <a:extLst xmlns:a="http://schemas.openxmlformats.org/drawingml/2006/main">
+              <a:ext uri="{FF2B5EF4-FFF2-40B4-BE49-F238E27FC236}">
+                <a16:creationId xmlns:a16="http://schemas.microsoft.com/office/drawing/2014/main" id="{4ACBC68C-E85C-4E28-A4AA-9A2256034F5C}"/>
+              </a:ext>
+            </a:extLst>
+          </p:cNvPr>
+          <p:cNvSpPr>
+            <a:spLocks xmlns:a="http://schemas.openxmlformats.org/drawingml/2006/main" noGrp="1"/>
+          </p:cNvSpPr>
+          <p:nvPr/>
+        </p:nvSpPr>
+        <p:spPr>
+          <a:xfrm xmlns:a="http://schemas.openxmlformats.org/drawingml/2006/main">
+            <a:off x="457200" y="6305550"/>
+            <a:ext cx="11239500" cy="428625"/>
+          </a:xfrm>
+          <a:prstGeom xmlns:a="http://schemas.openxmlformats.org/drawingml/2006/main" prst="rect">
+            <a:avLst/>
+          </a:prstGeom>
+          <a:noFill xmlns:a="http://schemas.openxmlformats.org/drawingml/2006/main"/>
+          <a:ln xmlns:a="http://schemas.openxmlformats.org/drawingml/2006/main" w="0">
+            <a:noFill/>
+          </a:ln>
+        </p:spPr>
+        <p:txBody>
+          <a:bodyPr xmlns:a="http://schemas.openxmlformats.org/drawingml/2006/main" lIns="0" tIns="0" rIns="0" bIns="0"/>
+          <a:lstStyle xmlns:a="http://schemas.openxmlformats.org/drawingml/2006/main">
+            <a:defPPr>
+              <a:defRPr sz="1950">
+                <a:solidFill>
+                  <a:srgbClr val="B23C50"/>
+                </a:solidFill>
+                <a:latin typeface="Ubuntu Condensed"/>
+                <a:ea typeface="Ubuntu Condensed"/>
+                <a:cs typeface="Ubuntu Condensed"/>
+              </a:defRPr>
+            </a:defPPr>
+          </a:lstStyle>
+          <a:p xmlns:a="http://schemas.openxmlformats.org/drawingml/2006/main">
+            <a:pPr>
+              <a:defRPr sz="1950">
+                <a:solidFill>
+                  <a:srgbClr val="B23C50"/>
+                </a:solidFill>
+                <a:latin typeface="Ubuntu Condensed"/>
+                <a:ea typeface="Ubuntu Condensed"/>
+                <a:cs typeface="Ubuntu Condensed"/>
+              </a:defRPr>
+            </a:pPr>
+            <a:r>
+              <a:rPr sz="1950">
+                <a:solidFill>
+                  <a:srgbClr val="B23C50"/>
+                </a:solidFill>
+                <a:latin typeface="Ubuntu Condensed"/>
+                <a:ea typeface="Ubuntu Condensed"/>
+                <a:cs typeface="Ubuntu Condensed"/>
+              </a:rPr>
+              <a:t>Highlight: keep other countries visible. Filter: show only the selected country.</a:t>
+            </a:r>
+          </a:p>
+        </p:txBody>
+      </p:sp>
+    </p:spTree>
+    <p:extLst>
+      <p:ext uri="{BB962C8B-B14F-4D97-AF65-F5344CB8AC3E}">
+        <p14:creationId xmlns:p14="http://schemas.microsoft.com/office/powerpoint/2010/main" val="408857870"/>
       </p:ext>
     </p:extLst>
   </p:cSld>

--- a/lectures/w04-tableau-dashboard.pptx
+++ b/lectures/w04-tableau-dashboard.pptx
@@ -2,17 +2,17 @@
 <file path=ppt/presentation.xml><?xml version="1.0" encoding="utf-8"?>
 <p:presentation xmlns:p="http://schemas.openxmlformats.org/presentationml/2006/main">
   <p:sldMasterIdLst>
-    <p:sldMasterId xmlns:r="http://schemas.openxmlformats.org/officeDocument/2006/relationships" id="2147483648" r:id="R6b5ce873ac5f412b"/>
+    <p:sldMasterId xmlns:r="http://schemas.openxmlformats.org/officeDocument/2006/relationships" id="2147483648" r:id="R974146abb5b94347"/>
   </p:sldMasterIdLst>
   <p:notesMasterIdLst>
-    <p:notesMasterId xmlns:r="http://schemas.openxmlformats.org/officeDocument/2006/relationships" r:id="R55020a8003d94f46"/>
+    <p:notesMasterId xmlns:r="http://schemas.openxmlformats.org/officeDocument/2006/relationships" r:id="R0b24f63238a145f2"/>
   </p:notesMasterIdLst>
   <p:sldIdLst>
-    <p:sldId xmlns:r="http://schemas.openxmlformats.org/officeDocument/2006/relationships" id="256" r:id="R0ad41581167f4baa"/>
-    <p:sldId xmlns:r="http://schemas.openxmlformats.org/officeDocument/2006/relationships" id="257" r:id="Rce1e9a9194164481"/>
-    <p:sldId xmlns:r="http://schemas.openxmlformats.org/officeDocument/2006/relationships" id="258" r:id="R7a608076e21e4fff"/>
-    <p:sldId xmlns:r="http://schemas.openxmlformats.org/officeDocument/2006/relationships" id="259" r:id="R3131e20005cc4ea9"/>
-    <p:sldId xmlns:r="http://schemas.openxmlformats.org/officeDocument/2006/relationships" id="260" r:id="R06b32826c5d748a4"/>
+    <p:sldId xmlns:r="http://schemas.openxmlformats.org/officeDocument/2006/relationships" id="256" r:id="Ra3f4c2a980b44141"/>
+    <p:sldId xmlns:r="http://schemas.openxmlformats.org/officeDocument/2006/relationships" id="257" r:id="R13ffc787e0da4657"/>
+    <p:sldId xmlns:r="http://schemas.openxmlformats.org/officeDocument/2006/relationships" id="258" r:id="Ree8287eded2c46ba"/>
+    <p:sldId xmlns:r="http://schemas.openxmlformats.org/officeDocument/2006/relationships" id="259" r:id="R05bf4635bece493b"/>
+    <p:sldId xmlns:r="http://schemas.openxmlformats.org/officeDocument/2006/relationships" id="260" r:id="R181eaf8d46754c53"/>
   </p:sldIdLst>
   <p:sldSz cx="12192000" cy="6858000"/>
   <p:notesSz cx="6858000" cy="9144000"/>
@@ -741,7 +741,12 @@
           <a:lstStyle xmlns:a="http://schemas.openxmlformats.org/drawingml/2006/main"/>
           <a:p xmlns:a="http://schemas.openxmlformats.org/drawingml/2006/main">
             <a:r>
-              <a:t>Create a Filter action. Source sheet World. Run action on Select; optionally Single-select only. Target sheets Life History and GDP History. Choose Selected Fields, then map Country to Country using the same data source. Do not use All Fields: it can pass Year=2020 and region along with Country and destroy the time series. Clearing selection: Show all values. If a generated Use as Filter action already exists, edit or remove it rather than leaving a conflicting second action. In this example the top right chart shows Japan and bottom right India, as two successive selection outcomes; the action updates both histories in the actual dashboard. Test Japan, India, then click empty space to clear. Finally publish the dashboard on Tableau Public and check the shared view in a signed-out browser. UI labels may vary by version/language.</a:t>
+              <a:t>On the dashboard, select the World sheet to reveal its toolbar. Click the funnel icon, Use as Filter. The sheet menu also offers Use as Filter. Click Japan or India in the chart to filter the other sheets. Tableau creates a generated Filter action. In Dashboard &gt; Actions, edit that existing generated action rather than adding a second one. Confirm source World, Run on Select, target sheets Life History and GDP History. Under Target Filters choose Selected Fields and map Country to Country only. Do not pass Year=2020 to the histories. Set clearing selection to Show all values. Test that Japan and India each show 1960-2020, then click empty space to reset. The two right-hand charts illustrate successive country selections, not two different target sheets.</a:t>
+            </a:r>
+          </a:p>
+          <a:p xmlns:a="http://schemas.openxmlformats.org/drawingml/2006/main">
+            <a:r>
+              <a:t>https://help.tableau.com/current/pro/desktop/en-us/actions_filter.htm</a:t>
             </a:r>
           </a:p>
           <a:p xmlns:a="http://schemas.openxmlformats.org/drawingml/2006/main">
@@ -913,7 +918,7 @@
           <p:cNvPr id="3" name="Title">
             <a:extLst xmlns:a="http://schemas.openxmlformats.org/drawingml/2006/main">
               <a:ext uri="{FF2B5EF4-FFF2-40B4-BE49-F238E27FC236}">
-                <a16:creationId xmlns:a16="http://schemas.microsoft.com/office/drawing/2014/main" id="{0D8DF9FD-38A9-419E-A485-79B495A98DD1}"/>
+                <a16:creationId xmlns:a16="http://schemas.microsoft.com/office/drawing/2014/main" id="{64D5C3A6-BDD0-4F20-A376-AECF000603C2}"/>
               </a:ext>
             </a:extLst>
           </p:cNvPr>
@@ -1070,7 +1075,7 @@
           <p:cNvPr id="2" name="Subtitle">
             <a:extLst xmlns:a="http://schemas.openxmlformats.org/drawingml/2006/main">
               <a:ext uri="{FF2B5EF4-FFF2-40B4-BE49-F238E27FC236}">
-                <a16:creationId xmlns:a16="http://schemas.microsoft.com/office/drawing/2014/main" id="{AB1D4785-0599-463B-BDBA-EAA0B52A417A}"/>
+                <a16:creationId xmlns:a16="http://schemas.microsoft.com/office/drawing/2014/main" id="{BB4AEBE0-A2C2-4147-9144-C4E2323F50EA}"/>
               </a:ext>
             </a:extLst>
           </p:cNvPr>
@@ -1244,7 +1249,7 @@
           <p:cNvPr id="2" name="Section title">
             <a:extLst xmlns:a="http://schemas.openxmlformats.org/drawingml/2006/main">
               <a:ext uri="{FF2B5EF4-FFF2-40B4-BE49-F238E27FC236}">
-                <a16:creationId xmlns:a16="http://schemas.microsoft.com/office/drawing/2014/main" id="{57928535-44E9-446A-B536-1ABEA75D0069}"/>
+                <a16:creationId xmlns:a16="http://schemas.microsoft.com/office/drawing/2014/main" id="{0E670F62-3D9C-4712-BC25-044568A3CB1F}"/>
               </a:ext>
             </a:extLst>
           </p:cNvPr>
@@ -1418,7 +1423,7 @@
           <p:cNvPr id="3" name="Title">
             <a:extLst xmlns:a="http://schemas.openxmlformats.org/drawingml/2006/main">
               <a:ext uri="{FF2B5EF4-FFF2-40B4-BE49-F238E27FC236}">
-                <a16:creationId xmlns:a16="http://schemas.microsoft.com/office/drawing/2014/main" id="{D179F0E9-41C4-421E-B6E0-7C315AD9C4DE}"/>
+                <a16:creationId xmlns:a16="http://schemas.microsoft.com/office/drawing/2014/main" id="{7274B51F-E685-47DC-A9F1-B1F88F539C4A}"/>
               </a:ext>
             </a:extLst>
           </p:cNvPr>
@@ -1575,7 +1580,7 @@
           <p:cNvPr id="2" name="Body">
             <a:extLst xmlns:a="http://schemas.openxmlformats.org/drawingml/2006/main">
               <a:ext uri="{FF2B5EF4-FFF2-40B4-BE49-F238E27FC236}">
-                <a16:creationId xmlns:a16="http://schemas.microsoft.com/office/drawing/2014/main" id="{828D7E05-F928-49CC-A5B5-C8716B73A46B}"/>
+                <a16:creationId xmlns:a16="http://schemas.microsoft.com/office/drawing/2014/main" id="{744503B7-0BB0-43F3-B8A4-3DF562B3854C}"/>
               </a:ext>
             </a:extLst>
           </p:cNvPr>
@@ -1749,7 +1754,7 @@
           <p:cNvPr id="4" name="Title">
             <a:extLst xmlns:a="http://schemas.openxmlformats.org/drawingml/2006/main">
               <a:ext uri="{FF2B5EF4-FFF2-40B4-BE49-F238E27FC236}">
-                <a16:creationId xmlns:a16="http://schemas.microsoft.com/office/drawing/2014/main" id="{94BA8C28-6BB3-471C-8695-C43A9B08C391}"/>
+                <a16:creationId xmlns:a16="http://schemas.microsoft.com/office/drawing/2014/main" id="{0C252B36-77FF-4F5B-B463-6E628E1796C3}"/>
               </a:ext>
             </a:extLst>
           </p:cNvPr>
@@ -1906,7 +1911,7 @@
           <p:cNvPr id="2" name="Left column">
             <a:extLst xmlns:a="http://schemas.openxmlformats.org/drawingml/2006/main">
               <a:ext uri="{FF2B5EF4-FFF2-40B4-BE49-F238E27FC236}">
-                <a16:creationId xmlns:a16="http://schemas.microsoft.com/office/drawing/2014/main" id="{91CAF296-28DD-4C23-B776-6386CDEF06E1}"/>
+                <a16:creationId xmlns:a16="http://schemas.microsoft.com/office/drawing/2014/main" id="{87236022-97E1-4C9F-9394-212DA04FCB08}"/>
               </a:ext>
             </a:extLst>
           </p:cNvPr>
@@ -2063,7 +2068,7 @@
           <p:cNvPr id="3" name="Right column">
             <a:extLst xmlns:a="http://schemas.openxmlformats.org/drawingml/2006/main">
               <a:ext uri="{FF2B5EF4-FFF2-40B4-BE49-F238E27FC236}">
-                <a16:creationId xmlns:a16="http://schemas.microsoft.com/office/drawing/2014/main" id="{45718407-0B03-4D4E-90B1-5A6C0B8CCAB6}"/>
+                <a16:creationId xmlns:a16="http://schemas.microsoft.com/office/drawing/2014/main" id="{BB0723CA-70EA-40DF-A969-813A390FAF5B}"/>
               </a:ext>
             </a:extLst>
           </p:cNvPr>
@@ -2237,7 +2242,7 @@
           <p:cNvPr id="3" name="Title">
             <a:extLst xmlns:a="http://schemas.openxmlformats.org/drawingml/2006/main">
               <a:ext uri="{FF2B5EF4-FFF2-40B4-BE49-F238E27FC236}">
-                <a16:creationId xmlns:a16="http://schemas.microsoft.com/office/drawing/2014/main" id="{2874E402-9DB7-4255-89A9-D7190266403D}"/>
+                <a16:creationId xmlns:a16="http://schemas.microsoft.com/office/drawing/2014/main" id="{51175EE1-8EEB-4831-97C0-23845FFCB1C2}"/>
               </a:ext>
             </a:extLst>
           </p:cNvPr>
@@ -2394,7 +2399,7 @@
           <p:cNvPr id="2" name="Left column">
             <a:extLst xmlns:a="http://schemas.openxmlformats.org/drawingml/2006/main">
               <a:ext uri="{FF2B5EF4-FFF2-40B4-BE49-F238E27FC236}">
-                <a16:creationId xmlns:a16="http://schemas.microsoft.com/office/drawing/2014/main" id="{E1B8B523-5A9E-4B75-ABC4-A50D488071CA}"/>
+                <a16:creationId xmlns:a16="http://schemas.microsoft.com/office/drawing/2014/main" id="{67C6FD5D-EA2F-4C4A-B235-D410B87D4CF1}"/>
               </a:ext>
             </a:extLst>
           </p:cNvPr>
@@ -2589,12 +2594,12 @@
   </p:cSld>
   <p:clrMap bg1="lt1" tx1="dk1" bg2="lt2" tx2="dk2" accent1="accent1" accent2="accent2" accent3="accent3" accent4="accent4" accent5="accent5" accent6="accent6" hlink="hlink" folHlink="folHlink"/>
   <p:sldLayoutIdLst>
-    <p:sldLayoutId xmlns:r="http://schemas.openxmlformats.org/officeDocument/2006/relationships" id="2147483649" r:id="R7e49addc1ec940b9"/>
-    <p:sldLayoutId xmlns:r="http://schemas.openxmlformats.org/officeDocument/2006/relationships" id="2147483650" r:id="R9032ab64745f4b9f"/>
-    <p:sldLayoutId xmlns:r="http://schemas.openxmlformats.org/officeDocument/2006/relationships" id="2147483651" r:id="Re97901e19e00493b"/>
-    <p:sldLayoutId xmlns:r="http://schemas.openxmlformats.org/officeDocument/2006/relationships" id="2147483652" r:id="Rfa105abbde9a4700"/>
-    <p:sldLayoutId xmlns:r="http://schemas.openxmlformats.org/officeDocument/2006/relationships" id="2147483653" r:id="Rc9a4834d9dc243e9"/>
-    <p:sldLayoutId xmlns:r="http://schemas.openxmlformats.org/officeDocument/2006/relationships" id="2147483654" r:id="R1dfc1a2cedfb4ae1"/>
+    <p:sldLayoutId xmlns:r="http://schemas.openxmlformats.org/officeDocument/2006/relationships" id="2147483649" r:id="Reab03b29f7924fd7"/>
+    <p:sldLayoutId xmlns:r="http://schemas.openxmlformats.org/officeDocument/2006/relationships" id="2147483650" r:id="Rdaeafe35fd2d47a3"/>
+    <p:sldLayoutId xmlns:r="http://schemas.openxmlformats.org/officeDocument/2006/relationships" id="2147483651" r:id="Rd6b04119da344616"/>
+    <p:sldLayoutId xmlns:r="http://schemas.openxmlformats.org/officeDocument/2006/relationships" id="2147483652" r:id="R461c56dec2b740db"/>
+    <p:sldLayoutId xmlns:r="http://schemas.openxmlformats.org/officeDocument/2006/relationships" id="2147483653" r:id="R34b24e82bdda4861"/>
+    <p:sldLayoutId xmlns:r="http://schemas.openxmlformats.org/officeDocument/2006/relationships" id="2147483654" r:id="R8ce254d3aed548bc"/>
   </p:sldLayoutIdLst>
   <p:txStyles>
     <p:titleStyle>
@@ -7659,7 +7664,7 @@
           <p:cNvPr id="15" name="">
             <a:extLst xmlns:a="http://schemas.openxmlformats.org/drawingml/2006/main">
               <a:ext uri="{FF2B5EF4-FFF2-40B4-BE49-F238E27FC236}">
-                <a16:creationId xmlns:a16="http://schemas.microsoft.com/office/drawing/2014/main" id="{61BFA0A1-D077-4F1A-A32D-1C24031E6819}"/>
+                <a16:creationId xmlns:a16="http://schemas.microsoft.com/office/drawing/2014/main" id="{9249D605-71B9-4C62-B4CF-A9AADE0D2F33}"/>
               </a:ext>
             </a:extLst>
           </p:cNvPr>
@@ -7725,7 +7730,7 @@
           <p:cNvPr id="2" name="">
             <a:extLst xmlns:a="http://schemas.openxmlformats.org/drawingml/2006/main">
               <a:ext uri="{FF2B5EF4-FFF2-40B4-BE49-F238E27FC236}">
-                <a16:creationId xmlns:a16="http://schemas.microsoft.com/office/drawing/2014/main" id="{6CBD55A9-C61C-42ED-81B8-03854C85E98D}"/>
+                <a16:creationId xmlns:a16="http://schemas.microsoft.com/office/drawing/2014/main" id="{2D39E979-7536-4CEB-BB3D-C645E489BE3E}"/>
               </a:ext>
             </a:extLst>
           </p:cNvPr>
@@ -7791,7 +7796,7 @@
           <p:cNvPr id="3" name="">
             <a:extLst xmlns:a="http://schemas.openxmlformats.org/drawingml/2006/main">
               <a:ext uri="{FF2B5EF4-FFF2-40B4-BE49-F238E27FC236}">
-                <a16:creationId xmlns:a16="http://schemas.microsoft.com/office/drawing/2014/main" id="{6B4D59E4-797A-45B5-AB52-05867B464617}"/>
+                <a16:creationId xmlns:a16="http://schemas.microsoft.com/office/drawing/2014/main" id="{6349A6F6-C46D-44CE-8137-BF01CB716AD1}"/>
               </a:ext>
             </a:extLst>
           </p:cNvPr>
@@ -7857,7 +7862,7 @@
           <p:cNvPr id="4" name="">
             <a:extLst xmlns:a="http://schemas.openxmlformats.org/drawingml/2006/main">
               <a:ext uri="{FF2B5EF4-FFF2-40B4-BE49-F238E27FC236}">
-                <a16:creationId xmlns:a16="http://schemas.microsoft.com/office/drawing/2014/main" id="{E3781B5F-C6F7-4F79-BB2C-1D09B691F87F}"/>
+                <a16:creationId xmlns:a16="http://schemas.microsoft.com/office/drawing/2014/main" id="{6D4C1F8E-C0D8-4D2E-99A1-6F236A49E4F4}"/>
               </a:ext>
             </a:extLst>
           </p:cNvPr>
@@ -7923,7 +7928,7 @@
           <p:cNvPr id="5" name="Chart">
             <a:extLst xmlns:a="http://schemas.openxmlformats.org/drawingml/2006/main">
               <a:ext uri="{FF2B5EF4-FFF2-40B4-BE49-F238E27FC236}">
-                <a16:creationId xmlns:a16="http://schemas.microsoft.com/office/drawing/2014/main" id="{0BB5248E-CF3C-465D-BD76-AA61EECD7189}"/>
+                <a16:creationId xmlns:a16="http://schemas.microsoft.com/office/drawing/2014/main" id="{E4DDA5A4-1BF0-437C-8CC0-EB39E8D0A82E}"/>
               </a:ext>
             </a:extLst>
           </p:cNvPr>
@@ -7936,7 +7941,7 @@
         </p:xfrm>
         <a:graphic xmlns:a="http://schemas.openxmlformats.org/drawingml/2006/main">
           <a:graphicData uri="http://schemas.openxmlformats.org/drawingml/2006/chart">
-            <c:chart xmlns:r="http://schemas.openxmlformats.org/officeDocument/2006/relationships" xmlns:c="http://schemas.openxmlformats.org/drawingml/2006/chart" r:id="R19d51970d5294c12"/>
+            <c:chart xmlns:r="http://schemas.openxmlformats.org/officeDocument/2006/relationships" xmlns:c="http://schemas.openxmlformats.org/drawingml/2006/chart" r:id="R8589705092bf4b46"/>
           </a:graphicData>
         </a:graphic>
       </p:graphicFrame>
@@ -7945,7 +7950,7 @@
           <p:cNvPr id="6" name="">
             <a:extLst xmlns:a="http://schemas.openxmlformats.org/drawingml/2006/main">
               <a:ext uri="{FF2B5EF4-FFF2-40B4-BE49-F238E27FC236}">
-                <a16:creationId xmlns:a16="http://schemas.microsoft.com/office/drawing/2014/main" id="{AE98E9F1-8DCA-4A51-A56F-3C45CEB978A5}"/>
+                <a16:creationId xmlns:a16="http://schemas.microsoft.com/office/drawing/2014/main" id="{E5A5731C-D0CE-403A-85C8-C430219DDC52}"/>
               </a:ext>
             </a:extLst>
           </p:cNvPr>
@@ -8011,7 +8016,7 @@
           <p:cNvPr id="7" name="Chart">
             <a:extLst xmlns:a="http://schemas.openxmlformats.org/drawingml/2006/main">
               <a:ext uri="{FF2B5EF4-FFF2-40B4-BE49-F238E27FC236}">
-                <a16:creationId xmlns:a16="http://schemas.microsoft.com/office/drawing/2014/main" id="{66FAC151-74A0-4845-AEC9-AD7B1C63BEFC}"/>
+                <a16:creationId xmlns:a16="http://schemas.microsoft.com/office/drawing/2014/main" id="{5B22A62D-B6A8-454B-94E8-A7FDD60C3A45}"/>
               </a:ext>
             </a:extLst>
           </p:cNvPr>
@@ -8024,7 +8029,7 @@
         </p:xfrm>
         <a:graphic xmlns:a="http://schemas.openxmlformats.org/drawingml/2006/main">
           <a:graphicData uri="http://schemas.openxmlformats.org/drawingml/2006/chart">
-            <c:chart xmlns:r="http://schemas.openxmlformats.org/officeDocument/2006/relationships" xmlns:c="http://schemas.openxmlformats.org/drawingml/2006/chart" r:id="R8c6016c3d9344693"/>
+            <c:chart xmlns:r="http://schemas.openxmlformats.org/officeDocument/2006/relationships" xmlns:c="http://schemas.openxmlformats.org/drawingml/2006/chart" r:id="Ra43629a6f380478f"/>
           </a:graphicData>
         </a:graphic>
       </p:graphicFrame>
@@ -8033,7 +8038,7 @@
           <p:cNvPr id="8" name="">
             <a:extLst xmlns:a="http://schemas.openxmlformats.org/drawingml/2006/main">
               <a:ext uri="{FF2B5EF4-FFF2-40B4-BE49-F238E27FC236}">
-                <a16:creationId xmlns:a16="http://schemas.microsoft.com/office/drawing/2014/main" id="{E67E9520-6B7D-49BB-9CED-12D0D9FDCB8F}"/>
+                <a16:creationId xmlns:a16="http://schemas.microsoft.com/office/drawing/2014/main" id="{1C89F9F8-F1D6-44EE-AE01-BCCEEDA37D2E}"/>
               </a:ext>
             </a:extLst>
           </p:cNvPr>
@@ -8099,7 +8104,7 @@
           <p:cNvPr id="9" name="Chart">
             <a:extLst xmlns:a="http://schemas.openxmlformats.org/drawingml/2006/main">
               <a:ext uri="{FF2B5EF4-FFF2-40B4-BE49-F238E27FC236}">
-                <a16:creationId xmlns:a16="http://schemas.microsoft.com/office/drawing/2014/main" id="{44404043-6BAA-481C-B48A-AA640E850268}"/>
+                <a16:creationId xmlns:a16="http://schemas.microsoft.com/office/drawing/2014/main" id="{3B19A254-7CC8-49D9-8258-A3F991B4A239}"/>
               </a:ext>
             </a:extLst>
           </p:cNvPr>
@@ -8112,7 +8117,7 @@
         </p:xfrm>
         <a:graphic xmlns:a="http://schemas.openxmlformats.org/drawingml/2006/main">
           <a:graphicData uri="http://schemas.openxmlformats.org/drawingml/2006/chart">
-            <c:chart xmlns:r="http://schemas.openxmlformats.org/officeDocument/2006/relationships" xmlns:c="http://schemas.openxmlformats.org/drawingml/2006/chart" r:id="R62b79268055d4967"/>
+            <c:chart xmlns:r="http://schemas.openxmlformats.org/officeDocument/2006/relationships" xmlns:c="http://schemas.openxmlformats.org/drawingml/2006/chart" r:id="R0a3f7415c12e4ffd"/>
           </a:graphicData>
         </a:graphic>
       </p:graphicFrame>
@@ -8121,7 +8126,7 @@
           <p:cNvPr id="10" name="">
             <a:extLst xmlns:a="http://schemas.openxmlformats.org/drawingml/2006/main">
               <a:ext uri="{FF2B5EF4-FFF2-40B4-BE49-F238E27FC236}">
-                <a16:creationId xmlns:a16="http://schemas.microsoft.com/office/drawing/2014/main" id="{83617047-6587-42B2-ACCC-69E96F87942B}"/>
+                <a16:creationId xmlns:a16="http://schemas.microsoft.com/office/drawing/2014/main" id="{5112435A-3FB6-457E-85E6-E77D2B99A39D}"/>
               </a:ext>
             </a:extLst>
           </p:cNvPr>
@@ -8187,7 +8192,7 @@
           <p:cNvPr id="11" name="">
             <a:extLst xmlns:a="http://schemas.openxmlformats.org/drawingml/2006/main">
               <a:ext uri="{FF2B5EF4-FFF2-40B4-BE49-F238E27FC236}">
-                <a16:creationId xmlns:a16="http://schemas.microsoft.com/office/drawing/2014/main" id="{B95937BA-EF37-4619-8FC8-EEE4F075F8DF}"/>
+                <a16:creationId xmlns:a16="http://schemas.microsoft.com/office/drawing/2014/main" id="{3F75F268-C625-4B9B-BEB9-74AB1FD44AC7}"/>
               </a:ext>
             </a:extLst>
           </p:cNvPr>
@@ -8253,7 +8258,7 @@
           <p:cNvPr id="12" name="">
             <a:extLst xmlns:a="http://schemas.openxmlformats.org/drawingml/2006/main">
               <a:ext uri="{FF2B5EF4-FFF2-40B4-BE49-F238E27FC236}">
-                <a16:creationId xmlns:a16="http://schemas.microsoft.com/office/drawing/2014/main" id="{D17AAC30-D73B-4C08-8E41-13AE3BAB50FC}"/>
+                <a16:creationId xmlns:a16="http://schemas.microsoft.com/office/drawing/2014/main" id="{0C87B709-E85E-4F9B-87F2-B56FF91B6AF7}"/>
               </a:ext>
             </a:extLst>
           </p:cNvPr>
@@ -8319,7 +8324,7 @@
           <p:cNvPr id="13" name="">
             <a:extLst xmlns:a="http://schemas.openxmlformats.org/drawingml/2006/main">
               <a:ext uri="{FF2B5EF4-FFF2-40B4-BE49-F238E27FC236}">
-                <a16:creationId xmlns:a16="http://schemas.microsoft.com/office/drawing/2014/main" id="{EBB39EEB-62DE-4489-90F6-D9E341F88C79}"/>
+                <a16:creationId xmlns:a16="http://schemas.microsoft.com/office/drawing/2014/main" id="{EF752CDD-3B75-4131-B0C8-AEE01848B420}"/>
               </a:ext>
             </a:extLst>
           </p:cNvPr>
@@ -8385,7 +8390,7 @@
           <p:cNvPr id="14" name="">
             <a:extLst xmlns:a="http://schemas.openxmlformats.org/drawingml/2006/main">
               <a:ext uri="{FF2B5EF4-FFF2-40B4-BE49-F238E27FC236}">
-                <a16:creationId xmlns:a16="http://schemas.microsoft.com/office/drawing/2014/main" id="{B138B716-E2B0-402D-8C49-2FBFEB6D0F9C}"/>
+                <a16:creationId xmlns:a16="http://schemas.microsoft.com/office/drawing/2014/main" id="{A7F11816-B373-480F-9A21-CEE15BCCC392}"/>
               </a:ext>
             </a:extLst>
           </p:cNvPr>
@@ -8449,7 +8454,7 @@
     </p:spTree>
     <p:extLst>
       <p:ext uri="{BB962C8B-B14F-4D97-AF65-F5344CB8AC3E}">
-        <p14:creationId xmlns:p14="http://schemas.microsoft.com/office/powerpoint/2010/main" val="1756363086"/>
+        <p14:creationId xmlns:p14="http://schemas.microsoft.com/office/powerpoint/2010/main" val="554577772"/>
       </p:ext>
     </p:extLst>
   </p:cSld>
@@ -8480,7 +8485,7 @@
           <p:cNvPr id="46" name="">
             <a:extLst xmlns:a="http://schemas.openxmlformats.org/drawingml/2006/main">
               <a:ext uri="{FF2B5EF4-FFF2-40B4-BE49-F238E27FC236}">
-                <a16:creationId xmlns:a16="http://schemas.microsoft.com/office/drawing/2014/main" id="{268E2BD2-3AFB-4402-B859-C4D83E8ABDD4}"/>
+                <a16:creationId xmlns:a16="http://schemas.microsoft.com/office/drawing/2014/main" id="{064FFDBC-E867-4D0F-BDB8-F811DE900EED}"/>
               </a:ext>
             </a:extLst>
           </p:cNvPr>
@@ -8546,7 +8551,7 @@
           <p:cNvPr id="2" name="">
             <a:extLst xmlns:a="http://schemas.openxmlformats.org/drawingml/2006/main">
               <a:ext uri="{FF2B5EF4-FFF2-40B4-BE49-F238E27FC236}">
-                <a16:creationId xmlns:a16="http://schemas.microsoft.com/office/drawing/2014/main" id="{D44EB842-301D-4603-8951-1CFF47EF0A46}"/>
+                <a16:creationId xmlns:a16="http://schemas.microsoft.com/office/drawing/2014/main" id="{2801327F-4278-40C0-B047-1D6B9DE02F6C}"/>
               </a:ext>
             </a:extLst>
           </p:cNvPr>
@@ -8612,7 +8617,7 @@
           <p:cNvPr id="3" name="">
             <a:extLst xmlns:a="http://schemas.openxmlformats.org/drawingml/2006/main">
               <a:ext uri="{FF2B5EF4-FFF2-40B4-BE49-F238E27FC236}">
-                <a16:creationId xmlns:a16="http://schemas.microsoft.com/office/drawing/2014/main" id="{CF2A9DCC-BA4D-4967-841A-494DDC1D9CB9}"/>
+                <a16:creationId xmlns:a16="http://schemas.microsoft.com/office/drawing/2014/main" id="{534862A8-963A-43E0-9658-A2BBE09A5FD6}"/>
               </a:ext>
             </a:extLst>
           </p:cNvPr>
@@ -8678,7 +8683,7 @@
           <p:cNvPr id="4" name="">
             <a:extLst xmlns:a="http://schemas.openxmlformats.org/drawingml/2006/main">
               <a:ext uri="{FF2B5EF4-FFF2-40B4-BE49-F238E27FC236}">
-                <a16:creationId xmlns:a16="http://schemas.microsoft.com/office/drawing/2014/main" id="{44FFCF1A-F0B2-4F37-934E-16C2F5FBB28F}"/>
+                <a16:creationId xmlns:a16="http://schemas.microsoft.com/office/drawing/2014/main" id="{41CF9541-4321-42FC-956D-CD799FBBD3F0}"/>
               </a:ext>
             </a:extLst>
           </p:cNvPr>
@@ -8744,7 +8749,7 @@
           <p:cNvPr id="5" name="">
             <a:extLst xmlns:a="http://schemas.openxmlformats.org/drawingml/2006/main">
               <a:ext uri="{FF2B5EF4-FFF2-40B4-BE49-F238E27FC236}">
-                <a16:creationId xmlns:a16="http://schemas.microsoft.com/office/drawing/2014/main" id="{820DBAB9-0FCE-452C-9843-9FF61D724D69}"/>
+                <a16:creationId xmlns:a16="http://schemas.microsoft.com/office/drawing/2014/main" id="{95C51C02-A617-4F9D-A8CE-07B25D9DFA41}"/>
               </a:ext>
             </a:extLst>
           </p:cNvPr>
@@ -8774,7 +8779,7 @@
           <p:cNvPr id="6" name="">
             <a:extLst xmlns:a="http://schemas.openxmlformats.org/drawingml/2006/main">
               <a:ext uri="{FF2B5EF4-FFF2-40B4-BE49-F238E27FC236}">
-                <a16:creationId xmlns:a16="http://schemas.microsoft.com/office/drawing/2014/main" id="{8216499D-1740-4DD2-AA13-E7B791B88AE7}"/>
+                <a16:creationId xmlns:a16="http://schemas.microsoft.com/office/drawing/2014/main" id="{585AC045-2A38-4658-9152-7B02BF552D9C}"/>
               </a:ext>
             </a:extLst>
           </p:cNvPr>
@@ -8840,7 +8845,7 @@
           <p:cNvPr id="7" name="">
             <a:extLst xmlns:a="http://schemas.openxmlformats.org/drawingml/2006/main">
               <a:ext uri="{FF2B5EF4-FFF2-40B4-BE49-F238E27FC236}">
-                <a16:creationId xmlns:a16="http://schemas.microsoft.com/office/drawing/2014/main" id="{A6B8BBE7-1A60-488F-9D90-77DC2176A6EC}"/>
+                <a16:creationId xmlns:a16="http://schemas.microsoft.com/office/drawing/2014/main" id="{7529F99E-28A8-4999-BF26-CCB965D445D2}"/>
               </a:ext>
             </a:extLst>
           </p:cNvPr>
@@ -8906,7 +8911,7 @@
           <p:cNvPr id="8" name="">
             <a:extLst xmlns:a="http://schemas.openxmlformats.org/drawingml/2006/main">
               <a:ext uri="{FF2B5EF4-FFF2-40B4-BE49-F238E27FC236}">
-                <a16:creationId xmlns:a16="http://schemas.microsoft.com/office/drawing/2014/main" id="{4E3240EA-2942-4820-99C0-63272A4653B1}"/>
+                <a16:creationId xmlns:a16="http://schemas.microsoft.com/office/drawing/2014/main" id="{C3B2495C-1658-4A06-9D10-455CBE361CE1}"/>
               </a:ext>
             </a:extLst>
           </p:cNvPr>
@@ -8936,7 +8941,7 @@
           <p:cNvPr id="9" name="">
             <a:extLst xmlns:a="http://schemas.openxmlformats.org/drawingml/2006/main">
               <a:ext uri="{FF2B5EF4-FFF2-40B4-BE49-F238E27FC236}">
-                <a16:creationId xmlns:a16="http://schemas.microsoft.com/office/drawing/2014/main" id="{3CAE6F61-1612-4CC8-B95D-1959279F207D}"/>
+                <a16:creationId xmlns:a16="http://schemas.microsoft.com/office/drawing/2014/main" id="{360D085B-2023-4537-B04E-05BA05E8673E}"/>
               </a:ext>
             </a:extLst>
           </p:cNvPr>
@@ -9002,7 +9007,7 @@
           <p:cNvPr id="10" name="">
             <a:extLst xmlns:a="http://schemas.openxmlformats.org/drawingml/2006/main">
               <a:ext uri="{FF2B5EF4-FFF2-40B4-BE49-F238E27FC236}">
-                <a16:creationId xmlns:a16="http://schemas.microsoft.com/office/drawing/2014/main" id="{7204A9D2-E6AC-4798-8C59-A3B3557E5F3D}"/>
+                <a16:creationId xmlns:a16="http://schemas.microsoft.com/office/drawing/2014/main" id="{D8175B9E-1DAD-4EEC-92B7-71968E3B30D9}"/>
               </a:ext>
             </a:extLst>
           </p:cNvPr>
@@ -9068,7 +9073,7 @@
           <p:cNvPr id="11" name="">
             <a:extLst xmlns:a="http://schemas.openxmlformats.org/drawingml/2006/main">
               <a:ext uri="{FF2B5EF4-FFF2-40B4-BE49-F238E27FC236}">
-                <a16:creationId xmlns:a16="http://schemas.microsoft.com/office/drawing/2014/main" id="{91DE13C7-E3E7-40E3-9B0C-64E66B264FB6}"/>
+                <a16:creationId xmlns:a16="http://schemas.microsoft.com/office/drawing/2014/main" id="{CD771732-8B7E-40F4-8BD4-A62604FE1DDC}"/>
               </a:ext>
             </a:extLst>
           </p:cNvPr>
@@ -9098,7 +9103,7 @@
           <p:cNvPr id="12" name="">
             <a:extLst xmlns:a="http://schemas.openxmlformats.org/drawingml/2006/main">
               <a:ext uri="{FF2B5EF4-FFF2-40B4-BE49-F238E27FC236}">
-                <a16:creationId xmlns:a16="http://schemas.microsoft.com/office/drawing/2014/main" id="{4273804E-7F66-4C6A-9791-964BA33C6A60}"/>
+                <a16:creationId xmlns:a16="http://schemas.microsoft.com/office/drawing/2014/main" id="{225D3106-F49E-4395-9E80-9AC3873206E8}"/>
               </a:ext>
             </a:extLst>
           </p:cNvPr>
@@ -9164,7 +9169,7 @@
           <p:cNvPr id="13" name="">
             <a:extLst xmlns:a="http://schemas.openxmlformats.org/drawingml/2006/main">
               <a:ext uri="{FF2B5EF4-FFF2-40B4-BE49-F238E27FC236}">
-                <a16:creationId xmlns:a16="http://schemas.microsoft.com/office/drawing/2014/main" id="{F8B4FCA5-B51B-4E4B-9EC6-068A27FDAB79}"/>
+                <a16:creationId xmlns:a16="http://schemas.microsoft.com/office/drawing/2014/main" id="{A0B466CD-043F-45EA-A3E5-0F76E331C475}"/>
               </a:ext>
             </a:extLst>
           </p:cNvPr>
@@ -9230,7 +9235,7 @@
           <p:cNvPr id="14" name="">
             <a:extLst xmlns:a="http://schemas.openxmlformats.org/drawingml/2006/main">
               <a:ext uri="{FF2B5EF4-FFF2-40B4-BE49-F238E27FC236}">
-                <a16:creationId xmlns:a16="http://schemas.microsoft.com/office/drawing/2014/main" id="{3716434E-651B-4804-8EDD-0A5F4561D4DC}"/>
+                <a16:creationId xmlns:a16="http://schemas.microsoft.com/office/drawing/2014/main" id="{5A9A4DF5-0DF4-4DCA-A82F-CC2926416510}"/>
               </a:ext>
             </a:extLst>
           </p:cNvPr>
@@ -9296,7 +9301,7 @@
           <p:cNvPr id="15" name="">
             <a:extLst xmlns:a="http://schemas.openxmlformats.org/drawingml/2006/main">
               <a:ext uri="{FF2B5EF4-FFF2-40B4-BE49-F238E27FC236}">
-                <a16:creationId xmlns:a16="http://schemas.microsoft.com/office/drawing/2014/main" id="{7A88DE09-1C4C-4ACD-ABFA-0710003E4163}"/>
+                <a16:creationId xmlns:a16="http://schemas.microsoft.com/office/drawing/2014/main" id="{2C6D095E-9A5B-4E4B-98E9-38338B0277F2}"/>
               </a:ext>
             </a:extLst>
           </p:cNvPr>
@@ -9385,7 +9390,7 @@
           <p:cNvPr id="16" name="">
             <a:extLst xmlns:a="http://schemas.openxmlformats.org/drawingml/2006/main">
               <a:ext uri="{FF2B5EF4-FFF2-40B4-BE49-F238E27FC236}">
-                <a16:creationId xmlns:a16="http://schemas.microsoft.com/office/drawing/2014/main" id="{8039BF5A-A437-4B2B-B579-BCFA5691511B}"/>
+                <a16:creationId xmlns:a16="http://schemas.microsoft.com/office/drawing/2014/main" id="{F06F628D-F2A9-4018-A0DE-46197BA96F0F}"/>
               </a:ext>
             </a:extLst>
           </p:cNvPr>
@@ -9474,7 +9479,7 @@
           <p:cNvPr id="17" name="">
             <a:extLst xmlns:a="http://schemas.openxmlformats.org/drawingml/2006/main">
               <a:ext uri="{FF2B5EF4-FFF2-40B4-BE49-F238E27FC236}">
-                <a16:creationId xmlns:a16="http://schemas.microsoft.com/office/drawing/2014/main" id="{F28C6632-8072-4AC0-ACD8-99FC7BD20E09}"/>
+                <a16:creationId xmlns:a16="http://schemas.microsoft.com/office/drawing/2014/main" id="{814CDD95-03BE-4A47-A6CA-ED4764EB1C2F}"/>
               </a:ext>
             </a:extLst>
           </p:cNvPr>
@@ -9540,7 +9545,7 @@
           <p:cNvPr id="18" name="">
             <a:extLst xmlns:a="http://schemas.openxmlformats.org/drawingml/2006/main">
               <a:ext uri="{FF2B5EF4-FFF2-40B4-BE49-F238E27FC236}">
-                <a16:creationId xmlns:a16="http://schemas.microsoft.com/office/drawing/2014/main" id="{3FDC6240-961F-4D25-894C-917D53BEB57E}"/>
+                <a16:creationId xmlns:a16="http://schemas.microsoft.com/office/drawing/2014/main" id="{67309E44-1166-42DE-9603-9E2EC85D1378}"/>
               </a:ext>
             </a:extLst>
           </p:cNvPr>
@@ -9606,7 +9611,7 @@
           <p:cNvPr id="19" name="">
             <a:extLst xmlns:a="http://schemas.openxmlformats.org/drawingml/2006/main">
               <a:ext uri="{FF2B5EF4-FFF2-40B4-BE49-F238E27FC236}">
-                <a16:creationId xmlns:a16="http://schemas.microsoft.com/office/drawing/2014/main" id="{A287203B-6E84-4784-A62B-C45AC3D59A5D}"/>
+                <a16:creationId xmlns:a16="http://schemas.microsoft.com/office/drawing/2014/main" id="{BEB323F4-A7CF-43B5-8625-6A4F41BE40EF}"/>
               </a:ext>
             </a:extLst>
           </p:cNvPr>
@@ -9636,7 +9641,7 @@
           <p:cNvPr id="20" name="">
             <a:extLst xmlns:a="http://schemas.openxmlformats.org/drawingml/2006/main">
               <a:ext uri="{FF2B5EF4-FFF2-40B4-BE49-F238E27FC236}">
-                <a16:creationId xmlns:a16="http://schemas.microsoft.com/office/drawing/2014/main" id="{BA7EBDD4-6115-43D2-BA3C-0C75C0841AC3}"/>
+                <a16:creationId xmlns:a16="http://schemas.microsoft.com/office/drawing/2014/main" id="{753B452C-D30C-4454-8118-09668E374503}"/>
               </a:ext>
             </a:extLst>
           </p:cNvPr>
@@ -9702,7 +9707,7 @@
           <p:cNvPr id="21" name="">
             <a:extLst xmlns:a="http://schemas.openxmlformats.org/drawingml/2006/main">
               <a:ext uri="{FF2B5EF4-FFF2-40B4-BE49-F238E27FC236}">
-                <a16:creationId xmlns:a16="http://schemas.microsoft.com/office/drawing/2014/main" id="{F17EF61E-63FA-488C-99B0-9B147BCE3558}"/>
+                <a16:creationId xmlns:a16="http://schemas.microsoft.com/office/drawing/2014/main" id="{71BCF337-D09E-4C1C-8019-E2CAB80C4BF7}"/>
               </a:ext>
             </a:extLst>
           </p:cNvPr>
@@ -9768,7 +9773,7 @@
           <p:cNvPr id="22" name="">
             <a:extLst xmlns:a="http://schemas.openxmlformats.org/drawingml/2006/main">
               <a:ext uri="{FF2B5EF4-FFF2-40B4-BE49-F238E27FC236}">
-                <a16:creationId xmlns:a16="http://schemas.microsoft.com/office/drawing/2014/main" id="{CE94FF15-D7C5-4D1D-BD9C-E85B39DC2B41}"/>
+                <a16:creationId xmlns:a16="http://schemas.microsoft.com/office/drawing/2014/main" id="{DD869E50-5C78-4D38-B1AF-A9D8AE8A9CF2}"/>
               </a:ext>
             </a:extLst>
           </p:cNvPr>
@@ -9798,7 +9803,7 @@
           <p:cNvPr id="23" name="">
             <a:extLst xmlns:a="http://schemas.openxmlformats.org/drawingml/2006/main">
               <a:ext uri="{FF2B5EF4-FFF2-40B4-BE49-F238E27FC236}">
-                <a16:creationId xmlns:a16="http://schemas.microsoft.com/office/drawing/2014/main" id="{66142D3A-27B9-46AF-9F83-3DA362105E6D}"/>
+                <a16:creationId xmlns:a16="http://schemas.microsoft.com/office/drawing/2014/main" id="{69C9E3FB-6FCA-4BFA-8F43-811B94A1E75B}"/>
               </a:ext>
             </a:extLst>
           </p:cNvPr>
@@ -9864,7 +9869,7 @@
           <p:cNvPr id="24" name="">
             <a:extLst xmlns:a="http://schemas.openxmlformats.org/drawingml/2006/main">
               <a:ext uri="{FF2B5EF4-FFF2-40B4-BE49-F238E27FC236}">
-                <a16:creationId xmlns:a16="http://schemas.microsoft.com/office/drawing/2014/main" id="{AF79D207-A4A5-4E71-AB6F-E2928636DAD9}"/>
+                <a16:creationId xmlns:a16="http://schemas.microsoft.com/office/drawing/2014/main" id="{54CC0FAD-607C-409D-93C4-3BF36C135ACD}"/>
               </a:ext>
             </a:extLst>
           </p:cNvPr>
@@ -9930,7 +9935,7 @@
           <p:cNvPr id="25" name="">
             <a:extLst xmlns:a="http://schemas.openxmlformats.org/drawingml/2006/main">
               <a:ext uri="{FF2B5EF4-FFF2-40B4-BE49-F238E27FC236}">
-                <a16:creationId xmlns:a16="http://schemas.microsoft.com/office/drawing/2014/main" id="{0184B821-D2E1-401A-A70A-0E49B18729D6}"/>
+                <a16:creationId xmlns:a16="http://schemas.microsoft.com/office/drawing/2014/main" id="{1A47F730-137D-4944-9540-14C4E9A68A83}"/>
               </a:ext>
             </a:extLst>
           </p:cNvPr>
@@ -9960,7 +9965,7 @@
           <p:cNvPr id="26" name="">
             <a:extLst xmlns:a="http://schemas.openxmlformats.org/drawingml/2006/main">
               <a:ext uri="{FF2B5EF4-FFF2-40B4-BE49-F238E27FC236}">
-                <a16:creationId xmlns:a16="http://schemas.microsoft.com/office/drawing/2014/main" id="{AF7BF4E8-804A-408C-A28D-EB6B083BCD8C}"/>
+                <a16:creationId xmlns:a16="http://schemas.microsoft.com/office/drawing/2014/main" id="{DE0A939E-97BC-4275-A028-C25FB0F619E1}"/>
               </a:ext>
             </a:extLst>
           </p:cNvPr>
@@ -10026,7 +10031,7 @@
           <p:cNvPr id="27" name="">
             <a:extLst xmlns:a="http://schemas.openxmlformats.org/drawingml/2006/main">
               <a:ext uri="{FF2B5EF4-FFF2-40B4-BE49-F238E27FC236}">
-                <a16:creationId xmlns:a16="http://schemas.microsoft.com/office/drawing/2014/main" id="{380724F8-0216-425C-BBA9-BC9FCD9D961D}"/>
+                <a16:creationId xmlns:a16="http://schemas.microsoft.com/office/drawing/2014/main" id="{5B3E7846-F689-47C0-B9DD-C8C726D4910C}"/>
               </a:ext>
             </a:extLst>
           </p:cNvPr>
@@ -10092,7 +10097,7 @@
           <p:cNvPr id="28" name="">
             <a:extLst xmlns:a="http://schemas.openxmlformats.org/drawingml/2006/main">
               <a:ext uri="{FF2B5EF4-FFF2-40B4-BE49-F238E27FC236}">
-                <a16:creationId xmlns:a16="http://schemas.microsoft.com/office/drawing/2014/main" id="{5033DB98-E3D7-4578-B6B1-4EBBE20D75AC}"/>
+                <a16:creationId xmlns:a16="http://schemas.microsoft.com/office/drawing/2014/main" id="{BDF50E81-D17E-4E1E-9635-9AAB66DE837F}"/>
               </a:ext>
             </a:extLst>
           </p:cNvPr>
@@ -10158,7 +10163,7 @@
           <p:cNvPr id="29" name="">
             <a:extLst xmlns:a="http://schemas.openxmlformats.org/drawingml/2006/main">
               <a:ext uri="{FF2B5EF4-FFF2-40B4-BE49-F238E27FC236}">
-                <a16:creationId xmlns:a16="http://schemas.microsoft.com/office/drawing/2014/main" id="{F10FC7EC-9BDB-4E03-BA2E-6B3B2D78C1ED}"/>
+                <a16:creationId xmlns:a16="http://schemas.microsoft.com/office/drawing/2014/main" id="{ADEA972A-52BC-4373-B6C8-332B876F0E6A}"/>
               </a:ext>
             </a:extLst>
           </p:cNvPr>
@@ -10224,7 +10229,7 @@
           <p:cNvPr id="30" name="">
             <a:extLst xmlns:a="http://schemas.openxmlformats.org/drawingml/2006/main">
               <a:ext uri="{FF2B5EF4-FFF2-40B4-BE49-F238E27FC236}">
-                <a16:creationId xmlns:a16="http://schemas.microsoft.com/office/drawing/2014/main" id="{7B08E7C0-3100-44B6-AD4E-5A4E404DCE28}"/>
+                <a16:creationId xmlns:a16="http://schemas.microsoft.com/office/drawing/2014/main" id="{20C091B4-B8D9-4F0C-9BFF-CB8E395544E5}"/>
               </a:ext>
             </a:extLst>
           </p:cNvPr>
@@ -10313,7 +10318,7 @@
           <p:cNvPr id="31" name="">
             <a:extLst xmlns:a="http://schemas.openxmlformats.org/drawingml/2006/main">
               <a:ext uri="{FF2B5EF4-FFF2-40B4-BE49-F238E27FC236}">
-                <a16:creationId xmlns:a16="http://schemas.microsoft.com/office/drawing/2014/main" id="{C9048343-BB66-4600-85B9-2DB5E2299671}"/>
+                <a16:creationId xmlns:a16="http://schemas.microsoft.com/office/drawing/2014/main" id="{47ACD623-F133-40B8-8BAA-54D00A328566}"/>
               </a:ext>
             </a:extLst>
           </p:cNvPr>
@@ -10379,7 +10384,7 @@
           <p:cNvPr id="32" name="">
             <a:extLst xmlns:a="http://schemas.openxmlformats.org/drawingml/2006/main">
               <a:ext uri="{FF2B5EF4-FFF2-40B4-BE49-F238E27FC236}">
-                <a16:creationId xmlns:a16="http://schemas.microsoft.com/office/drawing/2014/main" id="{393FF21F-C609-4766-9C1D-DABD54370931}"/>
+                <a16:creationId xmlns:a16="http://schemas.microsoft.com/office/drawing/2014/main" id="{12E86B50-E83B-4228-B563-E1F542170011}"/>
               </a:ext>
             </a:extLst>
           </p:cNvPr>
@@ -10445,7 +10450,7 @@
           <p:cNvPr id="33" name="">
             <a:extLst xmlns:a="http://schemas.openxmlformats.org/drawingml/2006/main">
               <a:ext uri="{FF2B5EF4-FFF2-40B4-BE49-F238E27FC236}">
-                <a16:creationId xmlns:a16="http://schemas.microsoft.com/office/drawing/2014/main" id="{4869EFBF-FEE9-40E0-91E4-2C6D37D97589}"/>
+                <a16:creationId xmlns:a16="http://schemas.microsoft.com/office/drawing/2014/main" id="{70CAA674-A640-4B63-91B7-EB906DF52713}"/>
               </a:ext>
             </a:extLst>
           </p:cNvPr>
@@ -10475,7 +10480,7 @@
           <p:cNvPr id="34" name="">
             <a:extLst xmlns:a="http://schemas.openxmlformats.org/drawingml/2006/main">
               <a:ext uri="{FF2B5EF4-FFF2-40B4-BE49-F238E27FC236}">
-                <a16:creationId xmlns:a16="http://schemas.microsoft.com/office/drawing/2014/main" id="{A18E32D3-10A3-4325-A6AC-80D2798F215E}"/>
+                <a16:creationId xmlns:a16="http://schemas.microsoft.com/office/drawing/2014/main" id="{EE6F5C79-EB35-479C-97DD-7AE8E132B029}"/>
               </a:ext>
             </a:extLst>
           </p:cNvPr>
@@ -10541,7 +10546,7 @@
           <p:cNvPr id="35" name="">
             <a:extLst xmlns:a="http://schemas.openxmlformats.org/drawingml/2006/main">
               <a:ext uri="{FF2B5EF4-FFF2-40B4-BE49-F238E27FC236}">
-                <a16:creationId xmlns:a16="http://schemas.microsoft.com/office/drawing/2014/main" id="{DA749540-87C9-477B-84FE-545C270135A3}"/>
+                <a16:creationId xmlns:a16="http://schemas.microsoft.com/office/drawing/2014/main" id="{79164A59-DE52-41BC-9DD7-DB149C82095E}"/>
               </a:ext>
             </a:extLst>
           </p:cNvPr>
@@ -10607,7 +10612,7 @@
           <p:cNvPr id="36" name="">
             <a:extLst xmlns:a="http://schemas.openxmlformats.org/drawingml/2006/main">
               <a:ext uri="{FF2B5EF4-FFF2-40B4-BE49-F238E27FC236}">
-                <a16:creationId xmlns:a16="http://schemas.microsoft.com/office/drawing/2014/main" id="{3F056AF7-38C3-4A68-814F-34615E7BD496}"/>
+                <a16:creationId xmlns:a16="http://schemas.microsoft.com/office/drawing/2014/main" id="{257FC9AF-9AD0-4DB7-91A7-CF3816806D56}"/>
               </a:ext>
             </a:extLst>
           </p:cNvPr>
@@ -10637,7 +10642,7 @@
           <p:cNvPr id="37" name="">
             <a:extLst xmlns:a="http://schemas.openxmlformats.org/drawingml/2006/main">
               <a:ext uri="{FF2B5EF4-FFF2-40B4-BE49-F238E27FC236}">
-                <a16:creationId xmlns:a16="http://schemas.microsoft.com/office/drawing/2014/main" id="{119C8F19-8628-4902-9F3C-7B7F23F83BD6}"/>
+                <a16:creationId xmlns:a16="http://schemas.microsoft.com/office/drawing/2014/main" id="{4830F0BA-AA3F-4C68-9263-7BF71C0E30C5}"/>
               </a:ext>
             </a:extLst>
           </p:cNvPr>
@@ -10703,7 +10708,7 @@
           <p:cNvPr id="38" name="">
             <a:extLst xmlns:a="http://schemas.openxmlformats.org/drawingml/2006/main">
               <a:ext uri="{FF2B5EF4-FFF2-40B4-BE49-F238E27FC236}">
-                <a16:creationId xmlns:a16="http://schemas.microsoft.com/office/drawing/2014/main" id="{87CC5A38-A30B-42BA-8057-A5AA84F8953C}"/>
+                <a16:creationId xmlns:a16="http://schemas.microsoft.com/office/drawing/2014/main" id="{E212829D-62C0-4248-B28E-3B3ECEE89AF9}"/>
               </a:ext>
             </a:extLst>
           </p:cNvPr>
@@ -10769,7 +10774,7 @@
           <p:cNvPr id="39" name="">
             <a:extLst xmlns:a="http://schemas.openxmlformats.org/drawingml/2006/main">
               <a:ext uri="{FF2B5EF4-FFF2-40B4-BE49-F238E27FC236}">
-                <a16:creationId xmlns:a16="http://schemas.microsoft.com/office/drawing/2014/main" id="{6542C334-E1B3-40A9-A5B6-10906306028C}"/>
+                <a16:creationId xmlns:a16="http://schemas.microsoft.com/office/drawing/2014/main" id="{A840E25C-83EE-4385-999E-829EEEEF901A}"/>
               </a:ext>
             </a:extLst>
           </p:cNvPr>
@@ -10799,7 +10804,7 @@
           <p:cNvPr id="40" name="">
             <a:extLst xmlns:a="http://schemas.openxmlformats.org/drawingml/2006/main">
               <a:ext uri="{FF2B5EF4-FFF2-40B4-BE49-F238E27FC236}">
-                <a16:creationId xmlns:a16="http://schemas.microsoft.com/office/drawing/2014/main" id="{2636F55C-8E5C-45FB-A9B6-AB1371A49C89}"/>
+                <a16:creationId xmlns:a16="http://schemas.microsoft.com/office/drawing/2014/main" id="{05255DD7-3A16-4D61-937C-73EC9EB5C2C8}"/>
               </a:ext>
             </a:extLst>
           </p:cNvPr>
@@ -10865,7 +10870,7 @@
           <p:cNvPr id="41" name="">
             <a:extLst xmlns:a="http://schemas.openxmlformats.org/drawingml/2006/main">
               <a:ext uri="{FF2B5EF4-FFF2-40B4-BE49-F238E27FC236}">
-                <a16:creationId xmlns:a16="http://schemas.microsoft.com/office/drawing/2014/main" id="{FFDBBA42-370C-4DF8-A38B-2118E67AF77E}"/>
+                <a16:creationId xmlns:a16="http://schemas.microsoft.com/office/drawing/2014/main" id="{A3F3B611-7A88-4B2F-9F41-BB14522C54D0}"/>
               </a:ext>
             </a:extLst>
           </p:cNvPr>
@@ -10931,7 +10936,7 @@
           <p:cNvPr id="42" name="">
             <a:extLst xmlns:a="http://schemas.openxmlformats.org/drawingml/2006/main">
               <a:ext uri="{FF2B5EF4-FFF2-40B4-BE49-F238E27FC236}">
-                <a16:creationId xmlns:a16="http://schemas.microsoft.com/office/drawing/2014/main" id="{714745C9-EF79-4E4D-8F55-CF73486B5141}"/>
+                <a16:creationId xmlns:a16="http://schemas.microsoft.com/office/drawing/2014/main" id="{B30B6CB7-4C76-4C1D-A081-51919676D101}"/>
               </a:ext>
             </a:extLst>
           </p:cNvPr>
@@ -10997,7 +11002,7 @@
           <p:cNvPr id="43" name="">
             <a:extLst xmlns:a="http://schemas.openxmlformats.org/drawingml/2006/main">
               <a:ext uri="{FF2B5EF4-FFF2-40B4-BE49-F238E27FC236}">
-                <a16:creationId xmlns:a16="http://schemas.microsoft.com/office/drawing/2014/main" id="{E08E25EA-801C-4346-AFF0-1596A03BF300}"/>
+                <a16:creationId xmlns:a16="http://schemas.microsoft.com/office/drawing/2014/main" id="{53417210-8EA1-47C4-BB6F-C09A39A3332D}"/>
               </a:ext>
             </a:extLst>
           </p:cNvPr>
@@ -11063,7 +11068,7 @@
           <p:cNvPr id="44" name="">
             <a:extLst xmlns:a="http://schemas.openxmlformats.org/drawingml/2006/main">
               <a:ext uri="{FF2B5EF4-FFF2-40B4-BE49-F238E27FC236}">
-                <a16:creationId xmlns:a16="http://schemas.microsoft.com/office/drawing/2014/main" id="{7016282C-336B-4D33-82A5-139E07037573}"/>
+                <a16:creationId xmlns:a16="http://schemas.microsoft.com/office/drawing/2014/main" id="{B14920BD-92C9-49DA-8F3E-BDEEEE440EB3}"/>
               </a:ext>
             </a:extLst>
           </p:cNvPr>
@@ -11152,7 +11157,7 @@
           <p:cNvPr id="45" name="">
             <a:extLst xmlns:a="http://schemas.openxmlformats.org/drawingml/2006/main">
               <a:ext uri="{FF2B5EF4-FFF2-40B4-BE49-F238E27FC236}">
-                <a16:creationId xmlns:a16="http://schemas.microsoft.com/office/drawing/2014/main" id="{09AC07DF-A687-41EC-9D4A-379F22565FEE}"/>
+                <a16:creationId xmlns:a16="http://schemas.microsoft.com/office/drawing/2014/main" id="{A25144DF-1A86-40B3-B716-7006925A4CC4}"/>
               </a:ext>
             </a:extLst>
           </p:cNvPr>
@@ -11216,7 +11221,7 @@
     </p:spTree>
     <p:extLst>
       <p:ext uri="{BB962C8B-B14F-4D97-AF65-F5344CB8AC3E}">
-        <p14:creationId xmlns:p14="http://schemas.microsoft.com/office/powerpoint/2010/main" val="1476580172"/>
+        <p14:creationId xmlns:p14="http://schemas.microsoft.com/office/powerpoint/2010/main" val="870338331"/>
       </p:ext>
     </p:extLst>
   </p:cSld>
@@ -11247,7 +11252,7 @@
           <p:cNvPr id="18" name="">
             <a:extLst xmlns:a="http://schemas.openxmlformats.org/drawingml/2006/main">
               <a:ext uri="{FF2B5EF4-FFF2-40B4-BE49-F238E27FC236}">
-                <a16:creationId xmlns:a16="http://schemas.microsoft.com/office/drawing/2014/main" id="{6D024117-2A93-4F45-B72B-E05613133DC2}"/>
+                <a16:creationId xmlns:a16="http://schemas.microsoft.com/office/drawing/2014/main" id="{235BCA28-7A83-4007-96F1-A22307DCAB44}"/>
               </a:ext>
             </a:extLst>
           </p:cNvPr>
@@ -11313,7 +11318,7 @@
           <p:cNvPr id="2" name="">
             <a:extLst xmlns:a="http://schemas.openxmlformats.org/drawingml/2006/main">
               <a:ext uri="{FF2B5EF4-FFF2-40B4-BE49-F238E27FC236}">
-                <a16:creationId xmlns:a16="http://schemas.microsoft.com/office/drawing/2014/main" id="{440035F4-5C64-4A9F-B0AA-7680194CE23B}"/>
+                <a16:creationId xmlns:a16="http://schemas.microsoft.com/office/drawing/2014/main" id="{3F627999-83F7-4E7A-9D7B-F56C90D704D7}"/>
               </a:ext>
             </a:extLst>
           </p:cNvPr>
@@ -11379,7 +11384,7 @@
           <p:cNvPr id="3" name="">
             <a:extLst xmlns:a="http://schemas.openxmlformats.org/drawingml/2006/main">
               <a:ext uri="{FF2B5EF4-FFF2-40B4-BE49-F238E27FC236}">
-                <a16:creationId xmlns:a16="http://schemas.microsoft.com/office/drawing/2014/main" id="{CB50257A-A159-41E9-9894-7DB8185E514E}"/>
+                <a16:creationId xmlns:a16="http://schemas.microsoft.com/office/drawing/2014/main" id="{0996ED5F-7586-4BFD-B6A3-9DF04C024069}"/>
               </a:ext>
             </a:extLst>
           </p:cNvPr>
@@ -11445,7 +11450,7 @@
           <p:cNvPr id="4" name="">
             <a:extLst xmlns:a="http://schemas.openxmlformats.org/drawingml/2006/main">
               <a:ext uri="{FF2B5EF4-FFF2-40B4-BE49-F238E27FC236}">
-                <a16:creationId xmlns:a16="http://schemas.microsoft.com/office/drawing/2014/main" id="{35CFF698-B3B1-4E38-9DEF-9208613563A4}"/>
+                <a16:creationId xmlns:a16="http://schemas.microsoft.com/office/drawing/2014/main" id="{9E5FF312-D9D9-4757-9B1B-E004285B4BA3}"/>
               </a:ext>
             </a:extLst>
           </p:cNvPr>
@@ -11475,7 +11480,7 @@
           <p:cNvPr id="5" name="">
             <a:extLst xmlns:a="http://schemas.openxmlformats.org/drawingml/2006/main">
               <a:ext uri="{FF2B5EF4-FFF2-40B4-BE49-F238E27FC236}">
-                <a16:creationId xmlns:a16="http://schemas.microsoft.com/office/drawing/2014/main" id="{B6D427C6-E2C0-4E5A-8247-66DDF6659AC3}"/>
+                <a16:creationId xmlns:a16="http://schemas.microsoft.com/office/drawing/2014/main" id="{68BF6257-0F0F-4857-92FC-E1539C571318}"/>
               </a:ext>
             </a:extLst>
           </p:cNvPr>
@@ -11505,7 +11510,7 @@
           <p:cNvPr id="6" name="">
             <a:extLst xmlns:a="http://schemas.openxmlformats.org/drawingml/2006/main">
               <a:ext uri="{FF2B5EF4-FFF2-40B4-BE49-F238E27FC236}">
-                <a16:creationId xmlns:a16="http://schemas.microsoft.com/office/drawing/2014/main" id="{452AE3BB-6000-487D-9F57-43D0D73BB2AB}"/>
+                <a16:creationId xmlns:a16="http://schemas.microsoft.com/office/drawing/2014/main" id="{94DAA2A4-F229-4110-9293-B4AB382B74C5}"/>
               </a:ext>
             </a:extLst>
           </p:cNvPr>
@@ -11535,7 +11540,7 @@
           <p:cNvPr id="7" name="">
             <a:extLst xmlns:a="http://schemas.openxmlformats.org/drawingml/2006/main">
               <a:ext uri="{FF2B5EF4-FFF2-40B4-BE49-F238E27FC236}">
-                <a16:creationId xmlns:a16="http://schemas.microsoft.com/office/drawing/2014/main" id="{4FBDCF10-14A5-4FDD-9F7B-DCC9E28B6F06}"/>
+                <a16:creationId xmlns:a16="http://schemas.microsoft.com/office/drawing/2014/main" id="{04428BFB-3BCA-47EF-B27F-5C980B07A099}"/>
               </a:ext>
             </a:extLst>
           </p:cNvPr>
@@ -11601,7 +11606,7 @@
           <p:cNvPr id="8" name="">
             <a:extLst xmlns:a="http://schemas.openxmlformats.org/drawingml/2006/main">
               <a:ext uri="{FF2B5EF4-FFF2-40B4-BE49-F238E27FC236}">
-                <a16:creationId xmlns:a16="http://schemas.microsoft.com/office/drawing/2014/main" id="{C59163D8-DEF9-46F9-8E57-E1ED566CC93D}"/>
+                <a16:creationId xmlns:a16="http://schemas.microsoft.com/office/drawing/2014/main" id="{03880AAD-AF99-40D1-A7D0-272F3EB7A477}"/>
               </a:ext>
             </a:extLst>
           </p:cNvPr>
@@ -11690,7 +11695,7 @@
           <p:cNvPr id="9" name="">
             <a:extLst xmlns:a="http://schemas.openxmlformats.org/drawingml/2006/main">
               <a:ext uri="{FF2B5EF4-FFF2-40B4-BE49-F238E27FC236}">
-                <a16:creationId xmlns:a16="http://schemas.microsoft.com/office/drawing/2014/main" id="{4B8A53D6-A969-4B10-B16F-E18B63903988}"/>
+                <a16:creationId xmlns:a16="http://schemas.microsoft.com/office/drawing/2014/main" id="{4E342CDB-B529-4895-8AB9-C62065CCC7FE}"/>
               </a:ext>
             </a:extLst>
           </p:cNvPr>
@@ -11779,7 +11784,7 @@
           <p:cNvPr id="10" name="">
             <a:extLst xmlns:a="http://schemas.openxmlformats.org/drawingml/2006/main">
               <a:ext uri="{FF2B5EF4-FFF2-40B4-BE49-F238E27FC236}">
-                <a16:creationId xmlns:a16="http://schemas.microsoft.com/office/drawing/2014/main" id="{8318B8F3-E2D4-4667-8314-433B3FA545E3}"/>
+                <a16:creationId xmlns:a16="http://schemas.microsoft.com/office/drawing/2014/main" id="{7D0A54BB-FD40-4799-93D0-9B9C24451DC9}"/>
               </a:ext>
             </a:extLst>
           </p:cNvPr>
@@ -11845,7 +11850,7 @@
           <p:cNvPr id="11" name="">
             <a:extLst xmlns:a="http://schemas.openxmlformats.org/drawingml/2006/main">
               <a:ext uri="{FF2B5EF4-FFF2-40B4-BE49-F238E27FC236}">
-                <a16:creationId xmlns:a16="http://schemas.microsoft.com/office/drawing/2014/main" id="{386463BB-5FF3-45FD-B08B-A68D77406421}"/>
+                <a16:creationId xmlns:a16="http://schemas.microsoft.com/office/drawing/2014/main" id="{507B98A4-FDFB-4FF6-9DBB-7A5825D4EDE5}"/>
               </a:ext>
             </a:extLst>
           </p:cNvPr>
@@ -11911,7 +11916,7 @@
           <p:cNvPr id="12" name="">
             <a:extLst xmlns:a="http://schemas.openxmlformats.org/drawingml/2006/main">
               <a:ext uri="{FF2B5EF4-FFF2-40B4-BE49-F238E27FC236}">
-                <a16:creationId xmlns:a16="http://schemas.microsoft.com/office/drawing/2014/main" id="{BA202225-FE1E-4713-BAF8-7705591F2591}"/>
+                <a16:creationId xmlns:a16="http://schemas.microsoft.com/office/drawing/2014/main" id="{C0C7569A-6407-411E-9374-D7000589A7AD}"/>
               </a:ext>
             </a:extLst>
           </p:cNvPr>
@@ -12023,7 +12028,7 @@
           <p:cNvPr id="13" name="">
             <a:extLst xmlns:a="http://schemas.openxmlformats.org/drawingml/2006/main">
               <a:ext uri="{FF2B5EF4-FFF2-40B4-BE49-F238E27FC236}">
-                <a16:creationId xmlns:a16="http://schemas.microsoft.com/office/drawing/2014/main" id="{A52F0C90-4D14-4587-8E5B-16C547B1D17F}"/>
+                <a16:creationId xmlns:a16="http://schemas.microsoft.com/office/drawing/2014/main" id="{B77C296D-B94B-4C8B-B656-D3E6CE527C8F}"/>
               </a:ext>
             </a:extLst>
           </p:cNvPr>
@@ -12112,7 +12117,7 @@
           <p:cNvPr id="14" name="">
             <a:extLst xmlns:a="http://schemas.openxmlformats.org/drawingml/2006/main">
               <a:ext uri="{FF2B5EF4-FFF2-40B4-BE49-F238E27FC236}">
-                <a16:creationId xmlns:a16="http://schemas.microsoft.com/office/drawing/2014/main" id="{F8A04E1C-0102-4CEB-BD75-433ADF548AD8}"/>
+                <a16:creationId xmlns:a16="http://schemas.microsoft.com/office/drawing/2014/main" id="{B8D8E82B-35B8-4C81-9047-973506C66BE5}"/>
               </a:ext>
             </a:extLst>
           </p:cNvPr>
@@ -12178,7 +12183,7 @@
           <p:cNvPr id="15" name="">
             <a:extLst xmlns:a="http://schemas.openxmlformats.org/drawingml/2006/main">
               <a:ext uri="{FF2B5EF4-FFF2-40B4-BE49-F238E27FC236}">
-                <a16:creationId xmlns:a16="http://schemas.microsoft.com/office/drawing/2014/main" id="{AEE0BEBE-AE29-4F06-A12E-C3F93C7259D1}"/>
+                <a16:creationId xmlns:a16="http://schemas.microsoft.com/office/drawing/2014/main" id="{A2D72292-2F2E-42E6-A94C-40324DD1A933}"/>
               </a:ext>
             </a:extLst>
           </p:cNvPr>
@@ -12267,7 +12272,7 @@
           <p:cNvPr id="16" name="">
             <a:extLst xmlns:a="http://schemas.openxmlformats.org/drawingml/2006/main">
               <a:ext uri="{FF2B5EF4-FFF2-40B4-BE49-F238E27FC236}">
-                <a16:creationId xmlns:a16="http://schemas.microsoft.com/office/drawing/2014/main" id="{C143B7D1-91C8-41F3-BE88-CE3BC512B3A0}"/>
+                <a16:creationId xmlns:a16="http://schemas.microsoft.com/office/drawing/2014/main" id="{010B4377-C3E0-42C5-B5D6-FB408CFA1098}"/>
               </a:ext>
             </a:extLst>
           </p:cNvPr>
@@ -12333,7 +12338,7 @@
           <p:cNvPr id="17" name="">
             <a:extLst xmlns:a="http://schemas.openxmlformats.org/drawingml/2006/main">
               <a:ext uri="{FF2B5EF4-FFF2-40B4-BE49-F238E27FC236}">
-                <a16:creationId xmlns:a16="http://schemas.microsoft.com/office/drawing/2014/main" id="{25582069-6D70-43F9-9312-A0A547AFCC15}"/>
+                <a16:creationId xmlns:a16="http://schemas.microsoft.com/office/drawing/2014/main" id="{46DC2621-D8EC-4685-B7FE-891A918237F3}"/>
               </a:ext>
             </a:extLst>
           </p:cNvPr>
@@ -12443,7 +12448,7 @@
     </p:spTree>
     <p:extLst>
       <p:ext uri="{BB962C8B-B14F-4D97-AF65-F5344CB8AC3E}">
-        <p14:creationId xmlns:p14="http://schemas.microsoft.com/office/powerpoint/2010/main" val="503650653"/>
+        <p14:creationId xmlns:p14="http://schemas.microsoft.com/office/powerpoint/2010/main" val="2134745050"/>
       </p:ext>
     </p:extLst>
   </p:cSld>
@@ -12471,10 +12476,10 @@
       </p:grpSpPr>
       <p:sp>
         <p:nvSpPr>
-          <p:cNvPr id="23" name="">
+          <p:cNvPr id="20" name="">
             <a:extLst xmlns:a="http://schemas.openxmlformats.org/drawingml/2006/main">
               <a:ext uri="{FF2B5EF4-FFF2-40B4-BE49-F238E27FC236}">
-                <a16:creationId xmlns:a16="http://schemas.microsoft.com/office/drawing/2014/main" id="{35669CD6-8EC0-4263-B783-20F3800E66F5}"/>
+                <a16:creationId xmlns:a16="http://schemas.microsoft.com/office/drawing/2014/main" id="{942AE150-8E70-454C-9ACB-308A1E8BF8D0}"/>
               </a:ext>
             </a:extLst>
           </p:cNvPr>
@@ -12530,7 +12535,7 @@
                 <a:ea typeface="Ubuntu Condensed"/>
                 <a:cs typeface="Ubuntu Condensed"/>
               </a:rPr>
-              <a:t>A country click keeps the whole history</a:t>
+              <a:t>Filtering with the sheet’s funnel icon</a:t>
             </a:r>
           </a:p>
         </p:txBody>
@@ -12540,7 +12545,7 @@
           <p:cNvPr id="2" name="">
             <a:extLst xmlns:a="http://schemas.openxmlformats.org/drawingml/2006/main">
               <a:ext uri="{FF2B5EF4-FFF2-40B4-BE49-F238E27FC236}">
-                <a16:creationId xmlns:a16="http://schemas.microsoft.com/office/drawing/2014/main" id="{86BF6DD4-55A4-4046-875D-6AAE071429CF}"/>
+                <a16:creationId xmlns:a16="http://schemas.microsoft.com/office/drawing/2014/main" id="{F83E1D15-92A1-421E-AB51-468FE13F9EAB}"/>
               </a:ext>
             </a:extLst>
           </p:cNvPr>
@@ -12596,7 +12601,7 @@
                 <a:ea typeface="Ubuntu Condensed"/>
                 <a:cs typeface="Ubuntu Condensed"/>
               </a:rPr>
-              <a:t>Dashboard &gt; Actions &gt; Add Action &gt; Filter</a:t>
+              <a:t>World sheet &gt; Use as Filter</a:t>
             </a:r>
           </a:p>
         </p:txBody>
@@ -12606,7 +12611,7 @@
           <p:cNvPr id="3" name="">
             <a:extLst xmlns:a="http://schemas.openxmlformats.org/drawingml/2006/main">
               <a:ext uri="{FF2B5EF4-FFF2-40B4-BE49-F238E27FC236}">
-                <a16:creationId xmlns:a16="http://schemas.microsoft.com/office/drawing/2014/main" id="{09D5F89B-7401-403E-AE94-17F4F756867E}"/>
+                <a16:creationId xmlns:a16="http://schemas.microsoft.com/office/drawing/2014/main" id="{4EE4613E-7361-432A-A69A-188A13F632C6}"/>
               </a:ext>
             </a:extLst>
           </p:cNvPr>
@@ -12618,73 +12623,7 @@
         <p:spPr>
           <a:xfrm xmlns:a="http://schemas.openxmlformats.org/drawingml/2006/main">
             <a:off x="457200" y="1752600"/>
-            <a:ext cx="5048250" cy="266700"/>
-          </a:xfrm>
-          <a:prstGeom xmlns:a="http://schemas.openxmlformats.org/drawingml/2006/main" prst="rect">
-            <a:avLst/>
-          </a:prstGeom>
-          <a:noFill xmlns:a="http://schemas.openxmlformats.org/drawingml/2006/main"/>
-          <a:ln xmlns:a="http://schemas.openxmlformats.org/drawingml/2006/main" w="0">
-            <a:noFill/>
-          </a:ln>
-        </p:spPr>
-        <p:txBody>
-          <a:bodyPr xmlns:a="http://schemas.openxmlformats.org/drawingml/2006/main" lIns="0" tIns="0" rIns="0" bIns="0"/>
-          <a:lstStyle xmlns:a="http://schemas.openxmlformats.org/drawingml/2006/main">
-            <a:defPPr>
-              <a:defRPr sz="1650">
-                <a:solidFill>
-                  <a:srgbClr val="81796F"/>
-                </a:solidFill>
-                <a:latin typeface="Ubuntu Condensed"/>
-                <a:ea typeface="Ubuntu Condensed"/>
-                <a:cs typeface="Ubuntu Condensed"/>
-              </a:defRPr>
-            </a:defPPr>
-          </a:lstStyle>
-          <a:p xmlns:a="http://schemas.openxmlformats.org/drawingml/2006/main">
-            <a:pPr>
-              <a:defRPr sz="1650">
-                <a:solidFill>
-                  <a:srgbClr val="81796F"/>
-                </a:solidFill>
-                <a:latin typeface="Ubuntu Condensed"/>
-                <a:ea typeface="Ubuntu Condensed"/>
-                <a:cs typeface="Ubuntu Condensed"/>
-              </a:defRPr>
-            </a:pPr>
-            <a:r>
-              <a:rPr sz="1650">
-                <a:solidFill>
-                  <a:srgbClr val="81796F"/>
-                </a:solidFill>
-                <a:latin typeface="Ubuntu Condensed"/>
-                <a:ea typeface="Ubuntu Condensed"/>
-                <a:cs typeface="Ubuntu Condensed"/>
-              </a:rPr>
-              <a:t>Source</a:t>
-            </a:r>
-          </a:p>
-        </p:txBody>
-      </p:sp>
-      <p:sp>
-        <p:nvSpPr>
-          <p:cNvPr id="4" name="">
-            <a:extLst xmlns:a="http://schemas.openxmlformats.org/drawingml/2006/main">
-              <a:ext uri="{FF2B5EF4-FFF2-40B4-BE49-F238E27FC236}">
-                <a16:creationId xmlns:a16="http://schemas.microsoft.com/office/drawing/2014/main" id="{455BD023-1AD4-4F7C-AC1D-C5B4D796C8E0}"/>
-              </a:ext>
-            </a:extLst>
-          </p:cNvPr>
-          <p:cNvSpPr>
-            <a:spLocks xmlns:a="http://schemas.openxmlformats.org/drawingml/2006/main" noGrp="1"/>
-          </p:cNvSpPr>
-          <p:nvPr/>
-        </p:nvSpPr>
-        <p:spPr>
-          <a:xfrm xmlns:a="http://schemas.openxmlformats.org/drawingml/2006/main">
-            <a:off x="457200" y="2047875"/>
-            <a:ext cx="5238750" cy="381000"/>
+            <a:ext cx="5238750" cy="333375"/>
           </a:xfrm>
           <a:prstGeom xmlns:a="http://schemas.openxmlformats.org/drawingml/2006/main" prst="rect">
             <a:avLst/>
@@ -12700,7 +12639,7 @@
             <a:defPPr>
               <a:defRPr sz="2175">
                 <a:solidFill>
-                  <a:srgbClr val="38332E"/>
+                  <a:srgbClr val="B23C50"/>
                 </a:solidFill>
                 <a:latin typeface="Ubuntu Condensed"/>
                 <a:ea typeface="Ubuntu Condensed"/>
@@ -12712,7 +12651,7 @@
             <a:pPr>
               <a:defRPr sz="2175">
                 <a:solidFill>
-                  <a:srgbClr val="38332E"/>
+                  <a:srgbClr val="B23C50"/>
                 </a:solidFill>
                 <a:latin typeface="Ubuntu Condensed"/>
                 <a:ea typeface="Ubuntu Condensed"/>
@@ -12722,23 +12661,23 @@
             <a:r>
               <a:rPr sz="2175">
                 <a:solidFill>
-                  <a:srgbClr val="38332E"/>
+                  <a:srgbClr val="B23C50"/>
                 </a:solidFill>
                 <a:latin typeface="Ubuntu Condensed"/>
                 <a:ea typeface="Ubuntu Condensed"/>
                 <a:cs typeface="Ubuntu Condensed"/>
               </a:rPr>
-              <a:t>World</a:t>
+              <a:t>1  Select the sheet</a:t>
             </a:r>
           </a:p>
         </p:txBody>
       </p:sp>
       <p:sp>
         <p:nvSpPr>
-          <p:cNvPr id="5" name="">
+          <p:cNvPr id="4" name="">
             <a:extLst xmlns:a="http://schemas.openxmlformats.org/drawingml/2006/main">
               <a:ext uri="{FF2B5EF4-FFF2-40B4-BE49-F238E27FC236}">
-                <a16:creationId xmlns:a16="http://schemas.microsoft.com/office/drawing/2014/main" id="{8B2E7CD3-8095-4A5B-8A22-9ED9B346E27F}"/>
+                <a16:creationId xmlns:a16="http://schemas.microsoft.com/office/drawing/2014/main" id="{304AE1B1-68D8-4296-A0EA-EB5DD315CE0A}"/>
               </a:ext>
             </a:extLst>
           </p:cNvPr>
@@ -12749,8 +12688,8 @@
         </p:nvSpPr>
         <p:spPr>
           <a:xfrm xmlns:a="http://schemas.openxmlformats.org/drawingml/2006/main">
-            <a:off x="457200" y="2466975"/>
-            <a:ext cx="5048250" cy="266700"/>
+            <a:off x="457200" y="2143125"/>
+            <a:ext cx="5238750" cy="428625"/>
           </a:xfrm>
           <a:prstGeom xmlns:a="http://schemas.openxmlformats.org/drawingml/2006/main" prst="rect">
             <a:avLst/>
@@ -12764,9 +12703,9 @@
           <a:bodyPr xmlns:a="http://schemas.openxmlformats.org/drawingml/2006/main" lIns="0" tIns="0" rIns="0" bIns="0"/>
           <a:lstStyle xmlns:a="http://schemas.openxmlformats.org/drawingml/2006/main">
             <a:defPPr>
-              <a:defRPr sz="1650">
-                <a:solidFill>
-                  <a:srgbClr val="81796F"/>
+              <a:defRPr sz="2025">
+                <a:solidFill>
+                  <a:srgbClr val="38332E"/>
                 </a:solidFill>
                 <a:latin typeface="Ubuntu Condensed"/>
                 <a:ea typeface="Ubuntu Condensed"/>
@@ -12776,9 +12715,9 @@
           </a:lstStyle>
           <a:p xmlns:a="http://schemas.openxmlformats.org/drawingml/2006/main">
             <a:pPr>
-              <a:defRPr sz="1650">
-                <a:solidFill>
-                  <a:srgbClr val="81796F"/>
+              <a:defRPr sz="2025">
+                <a:solidFill>
+                  <a:srgbClr val="38332E"/>
                 </a:solidFill>
                 <a:latin typeface="Ubuntu Condensed"/>
                 <a:ea typeface="Ubuntu Condensed"/>
@@ -12786,25 +12725,25 @@
               </a:defRPr>
             </a:pPr>
             <a:r>
-              <a:rPr sz="1650">
-                <a:solidFill>
-                  <a:srgbClr val="81796F"/>
+              <a:rPr sz="2025">
+                <a:solidFill>
+                  <a:srgbClr val="38332E"/>
                 </a:solidFill>
                 <a:latin typeface="Ubuntu Condensed"/>
                 <a:ea typeface="Ubuntu Condensed"/>
                 <a:cs typeface="Ubuntu Condensed"/>
               </a:rPr>
-              <a:t>Run on</a:t>
+              <a:t>Click World in the dashboard.</a:t>
             </a:r>
           </a:p>
         </p:txBody>
       </p:sp>
       <p:sp>
         <p:nvSpPr>
-          <p:cNvPr id="6" name="">
+          <p:cNvPr id="5" name="">
             <a:extLst xmlns:a="http://schemas.openxmlformats.org/drawingml/2006/main">
               <a:ext uri="{FF2B5EF4-FFF2-40B4-BE49-F238E27FC236}">
-                <a16:creationId xmlns:a16="http://schemas.microsoft.com/office/drawing/2014/main" id="{E1A99B34-FA22-402B-9A45-10A5AA8DA60F}"/>
+                <a16:creationId xmlns:a16="http://schemas.microsoft.com/office/drawing/2014/main" id="{EEB7094D-1213-4122-9527-5F0C83A86705}"/>
               </a:ext>
             </a:extLst>
           </p:cNvPr>
@@ -12815,8 +12754,8 @@
         </p:nvSpPr>
         <p:spPr>
           <a:xfrm xmlns:a="http://schemas.openxmlformats.org/drawingml/2006/main">
-            <a:off x="457200" y="2762250"/>
-            <a:ext cx="5238750" cy="381000"/>
+            <a:off x="457200" y="2705100"/>
+            <a:ext cx="5238750" cy="333375"/>
           </a:xfrm>
           <a:prstGeom xmlns:a="http://schemas.openxmlformats.org/drawingml/2006/main" prst="rect">
             <a:avLst/>
@@ -12832,7 +12771,7 @@
             <a:defPPr>
               <a:defRPr sz="2175">
                 <a:solidFill>
-                  <a:srgbClr val="38332E"/>
+                  <a:srgbClr val="B23C50"/>
                 </a:solidFill>
                 <a:latin typeface="Ubuntu Condensed"/>
                 <a:ea typeface="Ubuntu Condensed"/>
@@ -12844,7 +12783,7 @@
             <a:pPr>
               <a:defRPr sz="2175">
                 <a:solidFill>
-                  <a:srgbClr val="38332E"/>
+                  <a:srgbClr val="B23C50"/>
                 </a:solidFill>
                 <a:latin typeface="Ubuntu Condensed"/>
                 <a:ea typeface="Ubuntu Condensed"/>
@@ -12854,23 +12793,23 @@
             <a:r>
               <a:rPr sz="2175">
                 <a:solidFill>
-                  <a:srgbClr val="38332E"/>
+                  <a:srgbClr val="B23C50"/>
                 </a:solidFill>
                 <a:latin typeface="Ubuntu Condensed"/>
                 <a:ea typeface="Ubuntu Condensed"/>
                 <a:cs typeface="Ubuntu Condensed"/>
               </a:rPr>
-              <a:t>Select</a:t>
+              <a:t>2  Use as Filter</a:t>
             </a:r>
           </a:p>
         </p:txBody>
       </p:sp>
       <p:sp>
         <p:nvSpPr>
-          <p:cNvPr id="7" name="">
+          <p:cNvPr id="6" name="">
             <a:extLst xmlns:a="http://schemas.openxmlformats.org/drawingml/2006/main">
               <a:ext uri="{FF2B5EF4-FFF2-40B4-BE49-F238E27FC236}">
-                <a16:creationId xmlns:a16="http://schemas.microsoft.com/office/drawing/2014/main" id="{B48B875B-FAA5-41EB-ABB3-B9315A9EA07D}"/>
+                <a16:creationId xmlns:a16="http://schemas.microsoft.com/office/drawing/2014/main" id="{9674B9D4-6686-4CCB-A1DD-E8F80EDA7E29}"/>
               </a:ext>
             </a:extLst>
           </p:cNvPr>
@@ -12881,8 +12820,8 @@
         </p:nvSpPr>
         <p:spPr>
           <a:xfrm xmlns:a="http://schemas.openxmlformats.org/drawingml/2006/main">
-            <a:off x="457200" y="3181350"/>
-            <a:ext cx="5048250" cy="266700"/>
+            <a:off x="457200" y="3095625"/>
+            <a:ext cx="5238750" cy="428625"/>
           </a:xfrm>
           <a:prstGeom xmlns:a="http://schemas.openxmlformats.org/drawingml/2006/main" prst="rect">
             <a:avLst/>
@@ -12896,9 +12835,9 @@
           <a:bodyPr xmlns:a="http://schemas.openxmlformats.org/drawingml/2006/main" lIns="0" tIns="0" rIns="0" bIns="0"/>
           <a:lstStyle xmlns:a="http://schemas.openxmlformats.org/drawingml/2006/main">
             <a:defPPr>
-              <a:defRPr sz="1650">
-                <a:solidFill>
-                  <a:srgbClr val="81796F"/>
+              <a:defRPr sz="2025">
+                <a:solidFill>
+                  <a:srgbClr val="38332E"/>
                 </a:solidFill>
                 <a:latin typeface="Ubuntu Condensed"/>
                 <a:ea typeface="Ubuntu Condensed"/>
@@ -12908,9 +12847,9 @@
           </a:lstStyle>
           <a:p xmlns:a="http://schemas.openxmlformats.org/drawingml/2006/main">
             <a:pPr>
-              <a:defRPr sz="1650">
-                <a:solidFill>
-                  <a:srgbClr val="81796F"/>
+              <a:defRPr sz="2025">
+                <a:solidFill>
+                  <a:srgbClr val="38332E"/>
                 </a:solidFill>
                 <a:latin typeface="Ubuntu Condensed"/>
                 <a:ea typeface="Ubuntu Condensed"/>
@@ -12918,25 +12857,25 @@
               </a:defRPr>
             </a:pPr>
             <a:r>
-              <a:rPr sz="1650">
-                <a:solidFill>
-                  <a:srgbClr val="81796F"/>
+              <a:rPr sz="2025">
+                <a:solidFill>
+                  <a:srgbClr val="38332E"/>
                 </a:solidFill>
                 <a:latin typeface="Ubuntu Condensed"/>
                 <a:ea typeface="Ubuntu Condensed"/>
                 <a:cs typeface="Ubuntu Condensed"/>
               </a:rPr>
-              <a:t>Targets</a:t>
+              <a:t>Click the funnel icon on its toolbar.</a:t>
             </a:r>
           </a:p>
         </p:txBody>
       </p:sp>
       <p:sp>
         <p:nvSpPr>
-          <p:cNvPr id="8" name="">
+          <p:cNvPr id="7" name="">
             <a:extLst xmlns:a="http://schemas.openxmlformats.org/drawingml/2006/main">
               <a:ext uri="{FF2B5EF4-FFF2-40B4-BE49-F238E27FC236}">
-                <a16:creationId xmlns:a16="http://schemas.microsoft.com/office/drawing/2014/main" id="{ECD96BC6-4070-4518-9C64-242EE4AE1F52}"/>
+                <a16:creationId xmlns:a16="http://schemas.microsoft.com/office/drawing/2014/main" id="{B6EC9EB3-4593-466B-89C3-6466A93D2D07}"/>
               </a:ext>
             </a:extLst>
           </p:cNvPr>
@@ -12947,8 +12886,8 @@
         </p:nvSpPr>
         <p:spPr>
           <a:xfrm xmlns:a="http://schemas.openxmlformats.org/drawingml/2006/main">
-            <a:off x="457200" y="3476625"/>
-            <a:ext cx="5238750" cy="381000"/>
+            <a:off x="457200" y="3657600"/>
+            <a:ext cx="5238750" cy="333375"/>
           </a:xfrm>
           <a:prstGeom xmlns:a="http://schemas.openxmlformats.org/drawingml/2006/main" prst="rect">
             <a:avLst/>
@@ -12964,7 +12903,7 @@
             <a:defPPr>
               <a:defRPr sz="2175">
                 <a:solidFill>
-                  <a:srgbClr val="38332E"/>
+                  <a:srgbClr val="B23C50"/>
                 </a:solidFill>
                 <a:latin typeface="Ubuntu Condensed"/>
                 <a:ea typeface="Ubuntu Condensed"/>
@@ -12976,7 +12915,7 @@
             <a:pPr>
               <a:defRPr sz="2175">
                 <a:solidFill>
-                  <a:srgbClr val="38332E"/>
+                  <a:srgbClr val="B23C50"/>
                 </a:solidFill>
                 <a:latin typeface="Ubuntu Condensed"/>
                 <a:ea typeface="Ubuntu Condensed"/>
@@ -12986,23 +12925,23 @@
             <a:r>
               <a:rPr sz="2175">
                 <a:solidFill>
-                  <a:srgbClr val="38332E"/>
+                  <a:srgbClr val="B23C50"/>
                 </a:solidFill>
                 <a:latin typeface="Ubuntu Condensed"/>
                 <a:ea typeface="Ubuntu Condensed"/>
                 <a:cs typeface="Ubuntu Condensed"/>
               </a:rPr>
-              <a:t>Life History + GDP History</a:t>
+              <a:t>3  Select a country</a:t>
             </a:r>
           </a:p>
         </p:txBody>
       </p:sp>
       <p:sp>
         <p:nvSpPr>
-          <p:cNvPr id="9" name="">
+          <p:cNvPr id="8" name="">
             <a:extLst xmlns:a="http://schemas.openxmlformats.org/drawingml/2006/main">
               <a:ext uri="{FF2B5EF4-FFF2-40B4-BE49-F238E27FC236}">
-                <a16:creationId xmlns:a16="http://schemas.microsoft.com/office/drawing/2014/main" id="{6AC856F3-260F-4EB6-AF6A-4A96D29D4DC7}"/>
+                <a16:creationId xmlns:a16="http://schemas.microsoft.com/office/drawing/2014/main" id="{4DE56EAB-8472-4E61-AF8E-1737B3C649D8}"/>
               </a:ext>
             </a:extLst>
           </p:cNvPr>
@@ -13013,272 +12952,8 @@
         </p:nvSpPr>
         <p:spPr>
           <a:xfrm xmlns:a="http://schemas.openxmlformats.org/drawingml/2006/main">
-            <a:off x="457200" y="3895725"/>
-            <a:ext cx="5048250" cy="266700"/>
-          </a:xfrm>
-          <a:prstGeom xmlns:a="http://schemas.openxmlformats.org/drawingml/2006/main" prst="rect">
-            <a:avLst/>
-          </a:prstGeom>
-          <a:noFill xmlns:a="http://schemas.openxmlformats.org/drawingml/2006/main"/>
-          <a:ln xmlns:a="http://schemas.openxmlformats.org/drawingml/2006/main" w="0">
-            <a:noFill/>
-          </a:ln>
-        </p:spPr>
-        <p:txBody>
-          <a:bodyPr xmlns:a="http://schemas.openxmlformats.org/drawingml/2006/main" lIns="0" tIns="0" rIns="0" bIns="0"/>
-          <a:lstStyle xmlns:a="http://schemas.openxmlformats.org/drawingml/2006/main">
-            <a:defPPr>
-              <a:defRPr sz="1650">
-                <a:solidFill>
-                  <a:srgbClr val="81796F"/>
-                </a:solidFill>
-                <a:latin typeface="Ubuntu Condensed"/>
-                <a:ea typeface="Ubuntu Condensed"/>
-                <a:cs typeface="Ubuntu Condensed"/>
-              </a:defRPr>
-            </a:defPPr>
-          </a:lstStyle>
-          <a:p xmlns:a="http://schemas.openxmlformats.org/drawingml/2006/main">
-            <a:pPr>
-              <a:defRPr sz="1650">
-                <a:solidFill>
-                  <a:srgbClr val="81796F"/>
-                </a:solidFill>
-                <a:latin typeface="Ubuntu Condensed"/>
-                <a:ea typeface="Ubuntu Condensed"/>
-                <a:cs typeface="Ubuntu Condensed"/>
-              </a:defRPr>
-            </a:pPr>
-            <a:r>
-              <a:rPr sz="1650">
-                <a:solidFill>
-                  <a:srgbClr val="81796F"/>
-                </a:solidFill>
-                <a:latin typeface="Ubuntu Condensed"/>
-                <a:ea typeface="Ubuntu Condensed"/>
-                <a:cs typeface="Ubuntu Condensed"/>
-              </a:rPr>
-              <a:t>Selected Fields</a:t>
-            </a:r>
-          </a:p>
-        </p:txBody>
-      </p:sp>
-      <p:sp>
-        <p:nvSpPr>
-          <p:cNvPr id="10" name="">
-            <a:extLst xmlns:a="http://schemas.openxmlformats.org/drawingml/2006/main">
-              <a:ext uri="{FF2B5EF4-FFF2-40B4-BE49-F238E27FC236}">
-                <a16:creationId xmlns:a16="http://schemas.microsoft.com/office/drawing/2014/main" id="{236E3D55-D70B-4293-98DC-683573F0B7AE}"/>
-              </a:ext>
-            </a:extLst>
-          </p:cNvPr>
-          <p:cNvSpPr>
-            <a:spLocks xmlns:a="http://schemas.openxmlformats.org/drawingml/2006/main" noGrp="1"/>
-          </p:cNvSpPr>
-          <p:nvPr/>
-        </p:nvSpPr>
-        <p:spPr>
-          <a:xfrm xmlns:a="http://schemas.openxmlformats.org/drawingml/2006/main">
-            <a:off x="457200" y="4191000"/>
-            <a:ext cx="5238750" cy="381000"/>
-          </a:xfrm>
-          <a:prstGeom xmlns:a="http://schemas.openxmlformats.org/drawingml/2006/main" prst="rect">
-            <a:avLst/>
-          </a:prstGeom>
-          <a:noFill xmlns:a="http://schemas.openxmlformats.org/drawingml/2006/main"/>
-          <a:ln xmlns:a="http://schemas.openxmlformats.org/drawingml/2006/main" w="0">
-            <a:noFill/>
-          </a:ln>
-        </p:spPr>
-        <p:txBody>
-          <a:bodyPr xmlns:a="http://schemas.openxmlformats.org/drawingml/2006/main" lIns="0" tIns="0" rIns="0" bIns="0"/>
-          <a:lstStyle xmlns:a="http://schemas.openxmlformats.org/drawingml/2006/main">
-            <a:defPPr>
-              <a:defRPr sz="2175">
-                <a:solidFill>
-                  <a:srgbClr val="B23C50"/>
-                </a:solidFill>
-                <a:latin typeface="Ubuntu Condensed"/>
-                <a:ea typeface="Ubuntu Condensed"/>
-                <a:cs typeface="Ubuntu Condensed"/>
-              </a:defRPr>
-            </a:defPPr>
-          </a:lstStyle>
-          <a:p xmlns:a="http://schemas.openxmlformats.org/drawingml/2006/main">
-            <a:pPr>
-              <a:defRPr sz="2175">
-                <a:solidFill>
-                  <a:srgbClr val="B23C50"/>
-                </a:solidFill>
-                <a:latin typeface="Ubuntu Condensed"/>
-                <a:ea typeface="Ubuntu Condensed"/>
-                <a:cs typeface="Ubuntu Condensed"/>
-              </a:defRPr>
-            </a:pPr>
-            <a:r>
-              <a:rPr sz="2175">
-                <a:solidFill>
-                  <a:srgbClr val="B23C50"/>
-                </a:solidFill>
-                <a:latin typeface="Ubuntu Condensed"/>
-                <a:ea typeface="Ubuntu Condensed"/>
-                <a:cs typeface="Ubuntu Condensed"/>
-              </a:rPr>
-              <a:t>Country → Country</a:t>
-            </a:r>
-          </a:p>
-        </p:txBody>
-      </p:sp>
-      <p:sp>
-        <p:nvSpPr>
-          <p:cNvPr id="11" name="">
-            <a:extLst xmlns:a="http://schemas.openxmlformats.org/drawingml/2006/main">
-              <a:ext uri="{FF2B5EF4-FFF2-40B4-BE49-F238E27FC236}">
-                <a16:creationId xmlns:a16="http://schemas.microsoft.com/office/drawing/2014/main" id="{64C6ED73-2A4E-47D0-9957-75B112B6BDEC}"/>
-              </a:ext>
-            </a:extLst>
-          </p:cNvPr>
-          <p:cNvSpPr>
-            <a:spLocks xmlns:a="http://schemas.openxmlformats.org/drawingml/2006/main" noGrp="1"/>
-          </p:cNvSpPr>
-          <p:nvPr/>
-        </p:nvSpPr>
-        <p:spPr>
-          <a:xfrm xmlns:a="http://schemas.openxmlformats.org/drawingml/2006/main">
-            <a:off x="457200" y="4610100"/>
-            <a:ext cx="5048250" cy="266700"/>
-          </a:xfrm>
-          <a:prstGeom xmlns:a="http://schemas.openxmlformats.org/drawingml/2006/main" prst="rect">
-            <a:avLst/>
-          </a:prstGeom>
-          <a:noFill xmlns:a="http://schemas.openxmlformats.org/drawingml/2006/main"/>
-          <a:ln xmlns:a="http://schemas.openxmlformats.org/drawingml/2006/main" w="0">
-            <a:noFill/>
-          </a:ln>
-        </p:spPr>
-        <p:txBody>
-          <a:bodyPr xmlns:a="http://schemas.openxmlformats.org/drawingml/2006/main" lIns="0" tIns="0" rIns="0" bIns="0"/>
-          <a:lstStyle xmlns:a="http://schemas.openxmlformats.org/drawingml/2006/main">
-            <a:defPPr>
-              <a:defRPr sz="1650">
-                <a:solidFill>
-                  <a:srgbClr val="81796F"/>
-                </a:solidFill>
-                <a:latin typeface="Ubuntu Condensed"/>
-                <a:ea typeface="Ubuntu Condensed"/>
-                <a:cs typeface="Ubuntu Condensed"/>
-              </a:defRPr>
-            </a:defPPr>
-          </a:lstStyle>
-          <a:p xmlns:a="http://schemas.openxmlformats.org/drawingml/2006/main">
-            <a:pPr>
-              <a:defRPr sz="1650">
-                <a:solidFill>
-                  <a:srgbClr val="81796F"/>
-                </a:solidFill>
-                <a:latin typeface="Ubuntu Condensed"/>
-                <a:ea typeface="Ubuntu Condensed"/>
-                <a:cs typeface="Ubuntu Condensed"/>
-              </a:defRPr>
-            </a:pPr>
-            <a:r>
-              <a:rPr sz="1650">
-                <a:solidFill>
-                  <a:srgbClr val="81796F"/>
-                </a:solidFill>
-                <a:latin typeface="Ubuntu Condensed"/>
-                <a:ea typeface="Ubuntu Condensed"/>
-                <a:cs typeface="Ubuntu Condensed"/>
-              </a:rPr>
-              <a:t>Clear selection</a:t>
-            </a:r>
-          </a:p>
-        </p:txBody>
-      </p:sp>
-      <p:sp>
-        <p:nvSpPr>
-          <p:cNvPr id="12" name="">
-            <a:extLst xmlns:a="http://schemas.openxmlformats.org/drawingml/2006/main">
-              <a:ext uri="{FF2B5EF4-FFF2-40B4-BE49-F238E27FC236}">
-                <a16:creationId xmlns:a16="http://schemas.microsoft.com/office/drawing/2014/main" id="{3E59FF9E-A28C-48C4-94F4-D187E7B6A9AF}"/>
-              </a:ext>
-            </a:extLst>
-          </p:cNvPr>
-          <p:cNvSpPr>
-            <a:spLocks xmlns:a="http://schemas.openxmlformats.org/drawingml/2006/main" noGrp="1"/>
-          </p:cNvSpPr>
-          <p:nvPr/>
-        </p:nvSpPr>
-        <p:spPr>
-          <a:xfrm xmlns:a="http://schemas.openxmlformats.org/drawingml/2006/main">
-            <a:off x="457200" y="4905375"/>
-            <a:ext cx="5238750" cy="381000"/>
-          </a:xfrm>
-          <a:prstGeom xmlns:a="http://schemas.openxmlformats.org/drawingml/2006/main" prst="rect">
-            <a:avLst/>
-          </a:prstGeom>
-          <a:noFill xmlns:a="http://schemas.openxmlformats.org/drawingml/2006/main"/>
-          <a:ln xmlns:a="http://schemas.openxmlformats.org/drawingml/2006/main" w="0">
-            <a:noFill/>
-          </a:ln>
-        </p:spPr>
-        <p:txBody>
-          <a:bodyPr xmlns:a="http://schemas.openxmlformats.org/drawingml/2006/main" lIns="0" tIns="0" rIns="0" bIns="0"/>
-          <a:lstStyle xmlns:a="http://schemas.openxmlformats.org/drawingml/2006/main">
-            <a:defPPr>
-              <a:defRPr sz="2175">
-                <a:solidFill>
-                  <a:srgbClr val="38332E"/>
-                </a:solidFill>
-                <a:latin typeface="Ubuntu Condensed"/>
-                <a:ea typeface="Ubuntu Condensed"/>
-                <a:cs typeface="Ubuntu Condensed"/>
-              </a:defRPr>
-            </a:defPPr>
-          </a:lstStyle>
-          <a:p xmlns:a="http://schemas.openxmlformats.org/drawingml/2006/main">
-            <a:pPr>
-              <a:defRPr sz="2175">
-                <a:solidFill>
-                  <a:srgbClr val="38332E"/>
-                </a:solidFill>
-                <a:latin typeface="Ubuntu Condensed"/>
-                <a:ea typeface="Ubuntu Condensed"/>
-                <a:cs typeface="Ubuntu Condensed"/>
-              </a:defRPr>
-            </a:pPr>
-            <a:r>
-              <a:rPr sz="2175">
-                <a:solidFill>
-                  <a:srgbClr val="38332E"/>
-                </a:solidFill>
-                <a:latin typeface="Ubuntu Condensed"/>
-                <a:ea typeface="Ubuntu Condensed"/>
-                <a:cs typeface="Ubuntu Condensed"/>
-              </a:rPr>
-              <a:t>Show all values</a:t>
-            </a:r>
-          </a:p>
-        </p:txBody>
-      </p:sp>
-      <p:sp>
-        <p:nvSpPr>
-          <p:cNvPr id="13" name="">
-            <a:extLst xmlns:a="http://schemas.openxmlformats.org/drawingml/2006/main">
-              <a:ext uri="{FF2B5EF4-FFF2-40B4-BE49-F238E27FC236}">
-                <a16:creationId xmlns:a16="http://schemas.microsoft.com/office/drawing/2014/main" id="{A91CE2D0-6593-43CE-9835-5E6A36F214FC}"/>
-              </a:ext>
-            </a:extLst>
-          </p:cNvPr>
-          <p:cNvSpPr>
-            <a:spLocks xmlns:a="http://schemas.openxmlformats.org/drawingml/2006/main" noGrp="1"/>
-          </p:cNvSpPr>
-          <p:nvPr/>
-        </p:nvSpPr>
-        <p:spPr>
-          <a:xfrm xmlns:a="http://schemas.openxmlformats.org/drawingml/2006/main">
-            <a:off x="457200" y="5838825"/>
-            <a:ext cx="5238750" cy="571500"/>
+            <a:off x="457200" y="4048125"/>
+            <a:ext cx="5238750" cy="428625"/>
           </a:xfrm>
           <a:prstGeom xmlns:a="http://schemas.openxmlformats.org/drawingml/2006/main" prst="rect">
             <a:avLst/>
@@ -13294,7 +12969,7 @@
             <a:defPPr>
               <a:defRPr sz="2025">
                 <a:solidFill>
-                  <a:srgbClr val="B23C50"/>
+                  <a:srgbClr val="38332E"/>
                 </a:solidFill>
                 <a:latin typeface="Ubuntu Condensed"/>
                 <a:ea typeface="Ubuntu Condensed"/>
@@ -13306,7 +12981,7 @@
             <a:pPr>
               <a:defRPr sz="2025">
                 <a:solidFill>
-                  <a:srgbClr val="B23C50"/>
+                  <a:srgbClr val="38332E"/>
                 </a:solidFill>
                 <a:latin typeface="Ubuntu Condensed"/>
                 <a:ea typeface="Ubuntu Condensed"/>
@@ -13316,23 +12991,201 @@
             <a:r>
               <a:rPr sz="2025">
                 <a:solidFill>
-                  <a:srgbClr val="B23C50"/>
+                  <a:srgbClr val="38332E"/>
                 </a:solidFill>
                 <a:latin typeface="Ubuntu Condensed"/>
                 <a:ea typeface="Ubuntu Condensed"/>
                 <a:cs typeface="Ubuntu Condensed"/>
               </a:rPr>
-              <a:t>Do not pass Year to the history sheets.</a:t>
+              <a:t>Click Japan, then try India.</a:t>
             </a:r>
           </a:p>
         </p:txBody>
       </p:sp>
       <p:sp>
         <p:nvSpPr>
-          <p:cNvPr id="14" name="">
+          <p:cNvPr id="9" name="">
             <a:extLst xmlns:a="http://schemas.openxmlformats.org/drawingml/2006/main">
               <a:ext uri="{FF2B5EF4-FFF2-40B4-BE49-F238E27FC236}">
-                <a16:creationId xmlns:a16="http://schemas.microsoft.com/office/drawing/2014/main" id="{0DBC5C7A-5E25-401D-8A91-2E3C67142370}"/>
+                <a16:creationId xmlns:a16="http://schemas.microsoft.com/office/drawing/2014/main" id="{01F0BC9E-756B-487D-BFD8-450371A801B9}"/>
+              </a:ext>
+            </a:extLst>
+          </p:cNvPr>
+          <p:cNvSpPr>
+            <a:spLocks xmlns:a="http://schemas.openxmlformats.org/drawingml/2006/main" noGrp="1"/>
+          </p:cNvSpPr>
+          <p:nvPr/>
+        </p:nvSpPr>
+        <p:spPr>
+          <a:xfrm xmlns:a="http://schemas.openxmlformats.org/drawingml/2006/main">
+            <a:off x="457200" y="4857750"/>
+            <a:ext cx="5238750" cy="333375"/>
+          </a:xfrm>
+          <a:prstGeom xmlns:a="http://schemas.openxmlformats.org/drawingml/2006/main" prst="rect">
+            <a:avLst/>
+          </a:prstGeom>
+          <a:noFill xmlns:a="http://schemas.openxmlformats.org/drawingml/2006/main"/>
+          <a:ln xmlns:a="http://schemas.openxmlformats.org/drawingml/2006/main" w="0">
+            <a:noFill/>
+          </a:ln>
+        </p:spPr>
+        <p:txBody>
+          <a:bodyPr xmlns:a="http://schemas.openxmlformats.org/drawingml/2006/main" lIns="0" tIns="0" rIns="0" bIns="0"/>
+          <a:lstStyle xmlns:a="http://schemas.openxmlformats.org/drawingml/2006/main">
+            <a:defPPr>
+              <a:defRPr sz="1875">
+                <a:solidFill>
+                  <a:srgbClr val="B23C50"/>
+                </a:solidFill>
+                <a:latin typeface="Ubuntu Condensed"/>
+                <a:ea typeface="Ubuntu Condensed"/>
+                <a:cs typeface="Ubuntu Condensed"/>
+              </a:defRPr>
+            </a:defPPr>
+          </a:lstStyle>
+          <a:p xmlns:a="http://schemas.openxmlformats.org/drawingml/2006/main">
+            <a:pPr>
+              <a:defRPr sz="1875">
+                <a:solidFill>
+                  <a:srgbClr val="B23C50"/>
+                </a:solidFill>
+                <a:latin typeface="Ubuntu Condensed"/>
+                <a:ea typeface="Ubuntu Condensed"/>
+                <a:cs typeface="Ubuntu Condensed"/>
+              </a:defRPr>
+            </a:pPr>
+            <a:r>
+              <a:rPr sz="1875">
+                <a:solidFill>
+                  <a:srgbClr val="B23C50"/>
+                </a:solidFill>
+                <a:latin typeface="Ubuntu Condensed"/>
+                <a:ea typeface="Ubuntu Condensed"/>
+                <a:cs typeface="Ubuntu Condensed"/>
+              </a:rPr>
+              <a:t>If a history collapses to 2020:</a:t>
+            </a:r>
+          </a:p>
+        </p:txBody>
+      </p:sp>
+      <p:sp>
+        <p:nvSpPr>
+          <p:cNvPr id="10" name="">
+            <a:extLst xmlns:a="http://schemas.openxmlformats.org/drawingml/2006/main">
+              <a:ext uri="{FF2B5EF4-FFF2-40B4-BE49-F238E27FC236}">
+                <a16:creationId xmlns:a16="http://schemas.microsoft.com/office/drawing/2014/main" id="{A96EFA78-ED6B-40BE-91FB-0CBF67C9C6D9}"/>
+              </a:ext>
+            </a:extLst>
+          </p:cNvPr>
+          <p:cNvSpPr>
+            <a:spLocks xmlns:a="http://schemas.openxmlformats.org/drawingml/2006/main" noGrp="1"/>
+          </p:cNvSpPr>
+          <p:nvPr/>
+        </p:nvSpPr>
+        <p:spPr>
+          <a:xfrm xmlns:a="http://schemas.openxmlformats.org/drawingml/2006/main">
+            <a:off x="457200" y="5267325"/>
+            <a:ext cx="5238750" cy="1047750"/>
+          </a:xfrm>
+          <a:prstGeom xmlns:a="http://schemas.openxmlformats.org/drawingml/2006/main" prst="rect">
+            <a:avLst/>
+          </a:prstGeom>
+          <a:noFill xmlns:a="http://schemas.openxmlformats.org/drawingml/2006/main"/>
+          <a:ln xmlns:a="http://schemas.openxmlformats.org/drawingml/2006/main" w="0">
+            <a:noFill/>
+          </a:ln>
+        </p:spPr>
+        <p:txBody>
+          <a:bodyPr xmlns:a="http://schemas.openxmlformats.org/drawingml/2006/main" lIns="0" tIns="0" rIns="0" bIns="0"/>
+          <a:lstStyle xmlns:a="http://schemas.openxmlformats.org/drawingml/2006/main">
+            <a:defPPr>
+              <a:defRPr sz="1725">
+                <a:solidFill>
+                  <a:srgbClr val="81796F"/>
+                </a:solidFill>
+                <a:latin typeface="Ubuntu Condensed"/>
+                <a:ea typeface="Ubuntu Condensed"/>
+                <a:cs typeface="Ubuntu Condensed"/>
+              </a:defRPr>
+            </a:defPPr>
+          </a:lstStyle>
+          <a:p xmlns:a="http://schemas.openxmlformats.org/drawingml/2006/main">
+            <a:pPr>
+              <a:defRPr sz="1725">
+                <a:solidFill>
+                  <a:srgbClr val="81796F"/>
+                </a:solidFill>
+                <a:latin typeface="Ubuntu Condensed"/>
+                <a:ea typeface="Ubuntu Condensed"/>
+                <a:cs typeface="Ubuntu Condensed"/>
+              </a:defRPr>
+            </a:pPr>
+            <a:r>
+              <a:rPr sz="1725">
+                <a:solidFill>
+                  <a:srgbClr val="81796F"/>
+                </a:solidFill>
+                <a:latin typeface="Ubuntu Condensed"/>
+                <a:ea typeface="Ubuntu Condensed"/>
+                <a:cs typeface="Ubuntu Condensed"/>
+              </a:rPr>
+              <a:t>Dashboard &gt; Actions: edit the generated filter.</a:t>
+            </a:r>
+          </a:p>
+          <a:p xmlns:a="http://schemas.openxmlformats.org/drawingml/2006/main">
+            <a:pPr>
+              <a:defRPr sz="1725">
+                <a:solidFill>
+                  <a:srgbClr val="81796F"/>
+                </a:solidFill>
+                <a:latin typeface="Ubuntu Condensed"/>
+                <a:ea typeface="Ubuntu Condensed"/>
+                <a:cs typeface="Ubuntu Condensed"/>
+              </a:defRPr>
+            </a:pPr>
+            <a:r>
+              <a:rPr sz="1725">
+                <a:solidFill>
+                  <a:srgbClr val="81796F"/>
+                </a:solidFill>
+                <a:latin typeface="Ubuntu Condensed"/>
+                <a:ea typeface="Ubuntu Condensed"/>
+                <a:cs typeface="Ubuntu Condensed"/>
+              </a:rPr>
+              <a:t>Selected Fields: Country → Country only</a:t>
+            </a:r>
+          </a:p>
+          <a:p xmlns:a="http://schemas.openxmlformats.org/drawingml/2006/main">
+            <a:pPr>
+              <a:defRPr sz="1725">
+                <a:solidFill>
+                  <a:srgbClr val="81796F"/>
+                </a:solidFill>
+                <a:latin typeface="Ubuntu Condensed"/>
+                <a:ea typeface="Ubuntu Condensed"/>
+                <a:cs typeface="Ubuntu Condensed"/>
+              </a:defRPr>
+            </a:pPr>
+            <a:r>
+              <a:rPr sz="1725">
+                <a:solidFill>
+                  <a:srgbClr val="81796F"/>
+                </a:solidFill>
+                <a:latin typeface="Ubuntu Condensed"/>
+                <a:ea typeface="Ubuntu Condensed"/>
+                <a:cs typeface="Ubuntu Condensed"/>
+              </a:rPr>
+              <a:t>Clear selection: Show all values</a:t>
+            </a:r>
+          </a:p>
+        </p:txBody>
+      </p:sp>
+      <p:sp>
+        <p:nvSpPr>
+          <p:cNvPr id="11" name="">
+            <a:extLst xmlns:a="http://schemas.openxmlformats.org/drawingml/2006/main">
+              <a:ext uri="{FF2B5EF4-FFF2-40B4-BE49-F238E27FC236}">
+                <a16:creationId xmlns:a16="http://schemas.microsoft.com/office/drawing/2014/main" id="{0DA9877E-BE88-4623-884E-178C49F5F18D}"/>
               </a:ext>
             </a:extLst>
           </p:cNvPr>
@@ -13395,10 +13248,10 @@
       </p:sp>
       <p:graphicFrame>
         <p:nvGraphicFramePr>
-          <p:cNvPr id="15" name="Chart">
+          <p:cNvPr id="12" name="Chart">
             <a:extLst xmlns:a="http://schemas.openxmlformats.org/drawingml/2006/main">
               <a:ext uri="{FF2B5EF4-FFF2-40B4-BE49-F238E27FC236}">
-                <a16:creationId xmlns:a16="http://schemas.microsoft.com/office/drawing/2014/main" id="{FA3D24A1-DACE-40F1-92D9-88BE783EDC9A}"/>
+                <a16:creationId xmlns:a16="http://schemas.microsoft.com/office/drawing/2014/main" id="{96A4A486-5C4D-4875-A518-9F7E600661F2}"/>
               </a:ext>
             </a:extLst>
           </p:cNvPr>
@@ -13411,16 +13264,16 @@
         </p:xfrm>
         <a:graphic xmlns:a="http://schemas.openxmlformats.org/drawingml/2006/main">
           <a:graphicData uri="http://schemas.openxmlformats.org/drawingml/2006/chart">
-            <c:chart xmlns:r="http://schemas.openxmlformats.org/officeDocument/2006/relationships" xmlns:c="http://schemas.openxmlformats.org/drawingml/2006/chart" r:id="R2df22954b45440e0"/>
+            <c:chart xmlns:r="http://schemas.openxmlformats.org/officeDocument/2006/relationships" xmlns:c="http://schemas.openxmlformats.org/drawingml/2006/chart" r:id="Rfd0917d170854f8e"/>
           </a:graphicData>
         </a:graphic>
       </p:graphicFrame>
       <p:sp>
         <p:nvSpPr>
-          <p:cNvPr id="16" name="">
+          <p:cNvPr id="13" name="">
             <a:extLst xmlns:a="http://schemas.openxmlformats.org/drawingml/2006/main">
               <a:ext uri="{FF2B5EF4-FFF2-40B4-BE49-F238E27FC236}">
-                <a16:creationId xmlns:a16="http://schemas.microsoft.com/office/drawing/2014/main" id="{F38BAE88-10A1-4B0D-B052-C674379DE9A8}"/>
+                <a16:creationId xmlns:a16="http://schemas.microsoft.com/office/drawing/2014/main" id="{3826C42E-0E16-4A41-98E0-FD65FC25E1A2}"/>
               </a:ext>
             </a:extLst>
           </p:cNvPr>
@@ -13483,10 +13336,10 @@
       </p:sp>
       <p:sp>
         <p:nvSpPr>
-          <p:cNvPr id="17" name="">
+          <p:cNvPr id="14" name="">
             <a:extLst xmlns:a="http://schemas.openxmlformats.org/drawingml/2006/main">
               <a:ext uri="{FF2B5EF4-FFF2-40B4-BE49-F238E27FC236}">
-                <a16:creationId xmlns:a16="http://schemas.microsoft.com/office/drawing/2014/main" id="{ACBEA023-3979-419A-B9F7-06CFA99257AF}"/>
+                <a16:creationId xmlns:a16="http://schemas.microsoft.com/office/drawing/2014/main" id="{DE89A056-A4BF-4E0B-96E8-CA2C43ED11F2}"/>
               </a:ext>
             </a:extLst>
           </p:cNvPr>
@@ -13549,10 +13402,10 @@
       </p:sp>
       <p:sp>
         <p:nvSpPr>
-          <p:cNvPr id="18" name="">
+          <p:cNvPr id="15" name="">
             <a:extLst xmlns:a="http://schemas.openxmlformats.org/drawingml/2006/main">
               <a:ext uri="{FF2B5EF4-FFF2-40B4-BE49-F238E27FC236}">
-                <a16:creationId xmlns:a16="http://schemas.microsoft.com/office/drawing/2014/main" id="{4F37BF22-00AF-4D1A-ADF0-3DFFFDF9CE78}"/>
+                <a16:creationId xmlns:a16="http://schemas.microsoft.com/office/drawing/2014/main" id="{A8F38249-80E1-4BF8-BE4C-92361160C39A}"/>
               </a:ext>
             </a:extLst>
           </p:cNvPr>
@@ -13615,10 +13468,10 @@
       </p:sp>
       <p:graphicFrame>
         <p:nvGraphicFramePr>
-          <p:cNvPr id="19" name="Chart">
+          <p:cNvPr id="16" name="Chart">
             <a:extLst xmlns:a="http://schemas.openxmlformats.org/drawingml/2006/main">
               <a:ext uri="{FF2B5EF4-FFF2-40B4-BE49-F238E27FC236}">
-                <a16:creationId xmlns:a16="http://schemas.microsoft.com/office/drawing/2014/main" id="{8D0668DF-A343-4AAB-9810-32673D0B3F2C}"/>
+                <a16:creationId xmlns:a16="http://schemas.microsoft.com/office/drawing/2014/main" id="{DC9CF416-1236-423B-827D-C9FC17A01A76}"/>
               </a:ext>
             </a:extLst>
           </p:cNvPr>
@@ -13631,16 +13484,16 @@
         </p:xfrm>
         <a:graphic xmlns:a="http://schemas.openxmlformats.org/drawingml/2006/main">
           <a:graphicData uri="http://schemas.openxmlformats.org/drawingml/2006/chart">
-            <c:chart xmlns:r="http://schemas.openxmlformats.org/officeDocument/2006/relationships" xmlns:c="http://schemas.openxmlformats.org/drawingml/2006/chart" r:id="R1f8206adc9104131"/>
+            <c:chart xmlns:r="http://schemas.openxmlformats.org/officeDocument/2006/relationships" xmlns:c="http://schemas.openxmlformats.org/drawingml/2006/chart" r:id="R5f07b49da28840f4"/>
           </a:graphicData>
         </a:graphic>
       </p:graphicFrame>
       <p:sp>
         <p:nvSpPr>
-          <p:cNvPr id="20" name="">
+          <p:cNvPr id="17" name="">
             <a:extLst xmlns:a="http://schemas.openxmlformats.org/drawingml/2006/main">
               <a:ext uri="{FF2B5EF4-FFF2-40B4-BE49-F238E27FC236}">
-                <a16:creationId xmlns:a16="http://schemas.microsoft.com/office/drawing/2014/main" id="{6633D29A-B85A-46A9-BA7B-F89D018994F8}"/>
+                <a16:creationId xmlns:a16="http://schemas.microsoft.com/office/drawing/2014/main" id="{B79909F4-9941-49BB-9862-EBA9DF759195}"/>
               </a:ext>
             </a:extLst>
           </p:cNvPr>
@@ -13703,10 +13556,10 @@
       </p:sp>
       <p:sp>
         <p:nvSpPr>
-          <p:cNvPr id="21" name="">
+          <p:cNvPr id="18" name="">
             <a:extLst xmlns:a="http://schemas.openxmlformats.org/drawingml/2006/main">
               <a:ext uri="{FF2B5EF4-FFF2-40B4-BE49-F238E27FC236}">
-                <a16:creationId xmlns:a16="http://schemas.microsoft.com/office/drawing/2014/main" id="{79F3DD77-004E-4375-93E8-627E424208C1}"/>
+                <a16:creationId xmlns:a16="http://schemas.microsoft.com/office/drawing/2014/main" id="{24603D99-56AE-45C6-B500-37C0206C6324}"/>
               </a:ext>
             </a:extLst>
           </p:cNvPr>
@@ -13769,10 +13622,10 @@
       </p:sp>
       <p:sp>
         <p:nvSpPr>
-          <p:cNvPr id="22" name="">
+          <p:cNvPr id="19" name="">
             <a:extLst xmlns:a="http://schemas.openxmlformats.org/drawingml/2006/main">
               <a:ext uri="{FF2B5EF4-FFF2-40B4-BE49-F238E27FC236}">
-                <a16:creationId xmlns:a16="http://schemas.microsoft.com/office/drawing/2014/main" id="{A2507981-BFCA-4722-8E10-75D328F15AD8}"/>
+                <a16:creationId xmlns:a16="http://schemas.microsoft.com/office/drawing/2014/main" id="{656DCA50-2205-4355-A4FE-D02EB9A0CE2C}"/>
               </a:ext>
             </a:extLst>
           </p:cNvPr>
@@ -13836,7 +13689,7 @@
     </p:spTree>
     <p:extLst>
       <p:ext uri="{BB962C8B-B14F-4D97-AF65-F5344CB8AC3E}">
-        <p14:creationId xmlns:p14="http://schemas.microsoft.com/office/powerpoint/2010/main" val="18119054"/>
+        <p14:creationId xmlns:p14="http://schemas.microsoft.com/office/powerpoint/2010/main" val="742562496"/>
       </p:ext>
     </p:extLst>
   </p:cSld>
@@ -13867,7 +13720,7 @@
           <p:cNvPr id="14" name="">
             <a:extLst xmlns:a="http://schemas.openxmlformats.org/drawingml/2006/main">
               <a:ext uri="{FF2B5EF4-FFF2-40B4-BE49-F238E27FC236}">
-                <a16:creationId xmlns:a16="http://schemas.microsoft.com/office/drawing/2014/main" id="{8427FA3D-D72F-4C9D-845B-A8E0D9045D25}"/>
+                <a16:creationId xmlns:a16="http://schemas.microsoft.com/office/drawing/2014/main" id="{892C9D5F-73CC-4524-8FF3-E2C80ABCC86A}"/>
               </a:ext>
             </a:extLst>
           </p:cNvPr>
@@ -13933,7 +13786,7 @@
           <p:cNvPr id="2" name="">
             <a:extLst xmlns:a="http://schemas.openxmlformats.org/drawingml/2006/main">
               <a:ext uri="{FF2B5EF4-FFF2-40B4-BE49-F238E27FC236}">
-                <a16:creationId xmlns:a16="http://schemas.microsoft.com/office/drawing/2014/main" id="{05A88776-CEE5-4B1A-B915-17CFA517708D}"/>
+                <a16:creationId xmlns:a16="http://schemas.microsoft.com/office/drawing/2014/main" id="{3FBD6F58-61C6-400B-A6F2-1EB3A1C21F5F}"/>
               </a:ext>
             </a:extLst>
           </p:cNvPr>
@@ -13999,7 +13852,7 @@
           <p:cNvPr id="3" name="">
             <a:extLst xmlns:a="http://schemas.openxmlformats.org/drawingml/2006/main">
               <a:ext uri="{FF2B5EF4-FFF2-40B4-BE49-F238E27FC236}">
-                <a16:creationId xmlns:a16="http://schemas.microsoft.com/office/drawing/2014/main" id="{A4BA0FC3-16F3-4CC5-8618-771A4B1E26DD}"/>
+                <a16:creationId xmlns:a16="http://schemas.microsoft.com/office/drawing/2014/main" id="{B9E240B3-5610-435E-9549-F664E869C7B3}"/>
               </a:ext>
             </a:extLst>
           </p:cNvPr>
@@ -14065,7 +13918,7 @@
           <p:cNvPr id="4" name="">
             <a:extLst xmlns:a="http://schemas.openxmlformats.org/drawingml/2006/main">
               <a:ext uri="{FF2B5EF4-FFF2-40B4-BE49-F238E27FC236}">
-                <a16:creationId xmlns:a16="http://schemas.microsoft.com/office/drawing/2014/main" id="{EAC5D4C1-1BF9-40BF-B293-87DF9B3BA965}"/>
+                <a16:creationId xmlns:a16="http://schemas.microsoft.com/office/drawing/2014/main" id="{74AFFE53-02F2-4C59-A867-0EAFC1E68447}"/>
               </a:ext>
             </a:extLst>
           </p:cNvPr>
@@ -14131,7 +13984,7 @@
           <p:cNvPr id="5" name="">
             <a:extLst xmlns:a="http://schemas.openxmlformats.org/drawingml/2006/main">
               <a:ext uri="{FF2B5EF4-FFF2-40B4-BE49-F238E27FC236}">
-                <a16:creationId xmlns:a16="http://schemas.microsoft.com/office/drawing/2014/main" id="{B7CF8607-45A4-420A-BFB8-2A16E160AB12}"/>
+                <a16:creationId xmlns:a16="http://schemas.microsoft.com/office/drawing/2014/main" id="{0B9A1D11-19D2-425B-A671-ED35EBD74AB3}"/>
               </a:ext>
             </a:extLst>
           </p:cNvPr>
@@ -14197,7 +14050,7 @@
           <p:cNvPr id="6" name="">
             <a:extLst xmlns:a="http://schemas.openxmlformats.org/drawingml/2006/main">
               <a:ext uri="{FF2B5EF4-FFF2-40B4-BE49-F238E27FC236}">
-                <a16:creationId xmlns:a16="http://schemas.microsoft.com/office/drawing/2014/main" id="{E13BCFFE-FFC2-4E73-BE53-87943556BC8C}"/>
+                <a16:creationId xmlns:a16="http://schemas.microsoft.com/office/drawing/2014/main" id="{7FA5549D-5124-4A89-BB45-4162D49A5356}"/>
               </a:ext>
             </a:extLst>
           </p:cNvPr>
@@ -14263,7 +14116,7 @@
           <p:cNvPr id="7" name="">
             <a:extLst xmlns:a="http://schemas.openxmlformats.org/drawingml/2006/main">
               <a:ext uri="{FF2B5EF4-FFF2-40B4-BE49-F238E27FC236}">
-                <a16:creationId xmlns:a16="http://schemas.microsoft.com/office/drawing/2014/main" id="{2E9BFEA4-B196-4D59-8328-DC5B189CE25C}"/>
+                <a16:creationId xmlns:a16="http://schemas.microsoft.com/office/drawing/2014/main" id="{750CE3EE-F2CF-449D-B3C9-87B9162D85DB}"/>
               </a:ext>
             </a:extLst>
           </p:cNvPr>
@@ -14329,7 +14182,7 @@
           <p:cNvPr id="8" name="">
             <a:extLst xmlns:a="http://schemas.openxmlformats.org/drawingml/2006/main">
               <a:ext uri="{FF2B5EF4-FFF2-40B4-BE49-F238E27FC236}">
-                <a16:creationId xmlns:a16="http://schemas.microsoft.com/office/drawing/2014/main" id="{74B30C78-DE17-45D7-94B1-2E3C78213B29}"/>
+                <a16:creationId xmlns:a16="http://schemas.microsoft.com/office/drawing/2014/main" id="{CA40AA29-528F-4F5B-92DE-AA398A4DCD06}"/>
               </a:ext>
             </a:extLst>
           </p:cNvPr>
@@ -14395,7 +14248,7 @@
           <p:cNvPr id="9" name="">
             <a:extLst xmlns:a="http://schemas.openxmlformats.org/drawingml/2006/main">
               <a:ext uri="{FF2B5EF4-FFF2-40B4-BE49-F238E27FC236}">
-                <a16:creationId xmlns:a16="http://schemas.microsoft.com/office/drawing/2014/main" id="{BB9C6088-EFDA-4D79-A0A6-41406E2117C3}"/>
+                <a16:creationId xmlns:a16="http://schemas.microsoft.com/office/drawing/2014/main" id="{051632A3-4936-4771-8218-0EB1949FAEEC}"/>
               </a:ext>
             </a:extLst>
           </p:cNvPr>
@@ -14461,7 +14314,7 @@
           <p:cNvPr id="10" name="">
             <a:extLst xmlns:a="http://schemas.openxmlformats.org/drawingml/2006/main">
               <a:ext uri="{FF2B5EF4-FFF2-40B4-BE49-F238E27FC236}">
-                <a16:creationId xmlns:a16="http://schemas.microsoft.com/office/drawing/2014/main" id="{1BAF0093-92F9-460D-89B3-B0D0557B717C}"/>
+                <a16:creationId xmlns:a16="http://schemas.microsoft.com/office/drawing/2014/main" id="{C33F9C78-234B-4086-AF1A-1D30CB8F11D2}"/>
               </a:ext>
             </a:extLst>
           </p:cNvPr>
@@ -14527,7 +14380,7 @@
           <p:cNvPr id="11" name="Chart">
             <a:extLst xmlns:a="http://schemas.openxmlformats.org/drawingml/2006/main">
               <a:ext uri="{FF2B5EF4-FFF2-40B4-BE49-F238E27FC236}">
-                <a16:creationId xmlns:a16="http://schemas.microsoft.com/office/drawing/2014/main" id="{D35E1179-49D8-491E-ACA6-0DA27B22A3D5}"/>
+                <a16:creationId xmlns:a16="http://schemas.microsoft.com/office/drawing/2014/main" id="{BC1B6458-AC22-490E-951B-E0F192710BA6}"/>
               </a:ext>
             </a:extLst>
           </p:cNvPr>
@@ -14540,7 +14393,7 @@
         </p:xfrm>
         <a:graphic xmlns:a="http://schemas.openxmlformats.org/drawingml/2006/main">
           <a:graphicData uri="http://schemas.openxmlformats.org/drawingml/2006/chart">
-            <c:chart xmlns:r="http://schemas.openxmlformats.org/officeDocument/2006/relationships" xmlns:c="http://schemas.openxmlformats.org/drawingml/2006/chart" r:id="Ra8b222ccd32549a0"/>
+            <c:chart xmlns:r="http://schemas.openxmlformats.org/officeDocument/2006/relationships" xmlns:c="http://schemas.openxmlformats.org/drawingml/2006/chart" r:id="R6a5fb35618644d0d"/>
           </a:graphicData>
         </a:graphic>
       </p:graphicFrame>
@@ -14549,7 +14402,7 @@
           <p:cNvPr id="12" name="">
             <a:extLst xmlns:a="http://schemas.openxmlformats.org/drawingml/2006/main">
               <a:ext uri="{FF2B5EF4-FFF2-40B4-BE49-F238E27FC236}">
-                <a16:creationId xmlns:a16="http://schemas.microsoft.com/office/drawing/2014/main" id="{820850A5-391F-436B-BE3E-7FF4F9DF32FF}"/>
+                <a16:creationId xmlns:a16="http://schemas.microsoft.com/office/drawing/2014/main" id="{6DCF0A7C-443D-4FB9-9719-E99244199103}"/>
               </a:ext>
             </a:extLst>
           </p:cNvPr>
@@ -14638,7 +14491,7 @@
           <p:cNvPr id="13" name="">
             <a:extLst xmlns:a="http://schemas.openxmlformats.org/drawingml/2006/main">
               <a:ext uri="{FF2B5EF4-FFF2-40B4-BE49-F238E27FC236}">
-                <a16:creationId xmlns:a16="http://schemas.microsoft.com/office/drawing/2014/main" id="{4ACBC68C-E85C-4E28-A4AA-9A2256034F5C}"/>
+                <a16:creationId xmlns:a16="http://schemas.microsoft.com/office/drawing/2014/main" id="{914AEC29-7B2A-4A2B-9F38-DAFCB008C9AD}"/>
               </a:ext>
             </a:extLst>
           </p:cNvPr>
@@ -14702,7 +14555,7 @@
     </p:spTree>
     <p:extLst>
       <p:ext uri="{BB962C8B-B14F-4D97-AF65-F5344CB8AC3E}">
-        <p14:creationId xmlns:p14="http://schemas.microsoft.com/office/powerpoint/2010/main" val="408857870"/>
+        <p14:creationId xmlns:p14="http://schemas.microsoft.com/office/powerpoint/2010/main" val="943345366"/>
       </p:ext>
     </p:extLst>
   </p:cSld>
